--- a/Review-Presentation-Rubric.pptx
+++ b/Review-Presentation-Rubric.pptx
@@ -22,9 +22,10 @@
     <p:sldId id="270" r:id="rId16"/>
     <p:sldId id="271" r:id="rId17"/>
     <p:sldId id="272" r:id="rId18"/>
+    <p:sldId id="273" r:id="rId19"/>
   </p:sldIdLst>
   <p:notesMasterIdLst>
-    <p:notesMasterId r:id="rId19"/>
+    <p:notesMasterId r:id="rId20"/>
   </p:notesMasterIdLst>
   <p:sldSz cx="12188952" cy="6858000"/>
   <p:notesSz cx="6858000" cy="12188952"/>
@@ -1246,6 +1247,94 @@
             <a:fld id="{F7021451-1387-4CA6-816F-3879F97B5CBC}" type="slidenum">
               <a:rPr lang="en-US"/>
               <a:t>17</a:t>
+            </a:fld>
+            <a:endParaRPr lang="en-US"/>
+          </a:p>
+        </p:txBody>
+      </p:sp>
+    </p:spTree>
+    <p:extLst>
+      <p:ext uri="{BB962C8B-B14F-4D97-AF65-F5344CB8AC3E}">
+        <p14:creationId xmlns:p14="http://schemas.microsoft.com/office/powerpoint/2010/main" val="1024086991"/>
+      </p:ext>
+    </p:extLst>
+  </p:cSld>
+  <p:clrMapOvr>
+    <a:masterClrMapping/>
+  </p:clrMapOvr>
+</p:notes>
+</file>
+
+<file path=ppt/notesSlides/notesSlide18.xml><?xml version="1.0" encoding="utf-8"?>
+<p:notes xmlns:a="http://schemas.openxmlformats.org/drawingml/2006/main" xmlns:r="http://schemas.openxmlformats.org/officeDocument/2006/relationships" xmlns:p="http://schemas.openxmlformats.org/presentationml/2006/main">
+  <p:cSld>
+    <p:spTree>
+      <p:nvGrpSpPr>
+        <p:cNvPr id="1" name=""/>
+        <p:cNvGrpSpPr/>
+        <p:nvPr/>
+      </p:nvGrpSpPr>
+      <p:grpSpPr>
+        <a:xfrm>
+          <a:off x="0" y="0"/>
+          <a:ext cx="0" cy="0"/>
+          <a:chOff x="0" y="0"/>
+          <a:chExt cx="0" cy="0"/>
+        </a:xfrm>
+      </p:grpSpPr>
+      <p:sp>
+        <p:nvSpPr>
+          <p:cNvPr id="2" name="Slide Image Placeholder 1"/>
+          <p:cNvSpPr>
+            <a:spLocks noGrp="1" noRot="1" noChangeAspect="1"/>
+          </p:cNvSpPr>
+          <p:nvPr>
+            <p:ph type="sldImg"/>
+          </p:nvPr>
+        </p:nvSpPr>
+        <p:spPr/>
+      </p:sp>
+      <p:sp>
+        <p:nvSpPr>
+          <p:cNvPr id="3" name="Notes Placeholder 2"/>
+          <p:cNvSpPr>
+            <a:spLocks noGrp="1"/>
+          </p:cNvSpPr>
+          <p:nvPr>
+            <p:ph type="body" idx="1"/>
+          </p:nvPr>
+        </p:nvSpPr>
+        <p:spPr/>
+        <p:txBody>
+          <a:bodyPr/>
+          <a:lstStyle/>
+          <a:p>
+            <a:r>
+              <a:rPr lang="en-US" dirty="0"/>
+              <a:t/>
+            </a:r>
+            <a:endParaRPr lang="en-US" dirty="0"/>
+          </a:p>
+        </p:txBody>
+      </p:sp>
+      <p:sp>
+        <p:nvSpPr>
+          <p:cNvPr id="4" name="Slide Number Placeholder 3"/>
+          <p:cNvSpPr>
+            <a:spLocks noGrp="1"/>
+          </p:cNvSpPr>
+          <p:nvPr>
+            <p:ph type="sldNum" sz="quarter" idx="10"/>
+          </p:nvPr>
+        </p:nvSpPr>
+        <p:spPr/>
+        <p:txBody>
+          <a:bodyPr/>
+          <a:lstStyle/>
+          <a:p>
+            <a:fld id="{F7021451-1387-4CA6-816F-3879F97B5CBC}" type="slidenum">
+              <a:rPr lang="en-US"/>
+              <a:t>18</a:t>
             </a:fld>
             <a:endParaRPr lang="en-US"/>
           </a:p>
@@ -7472,7 +7561,7 @@
         </p:nvSpPr>
         <p:spPr>
           <a:xfrm>
-            <a:off x="548640" y="502920"/>
+            <a:off x="548640" y="457200"/>
             <a:ext cx="10972800" cy="640080"/>
           </a:xfrm>
           <a:prstGeom prst="rect">
@@ -7497,7 +7586,7 @@
                 <a:ea typeface="Cambria" pitchFamily="34" charset="-122"/>
                 <a:cs typeface="Cambria" pitchFamily="34" charset="-120"/>
               </a:rPr>
-              <a:t>Total: 30 Marks</a:t>
+              <a:t>References</a:t>
             </a:r>
             <a:endParaRPr lang="en-US" sz="3000" dirty="0"/>
           </a:p>
@@ -7505,52 +7594,13 @@
       </p:sp>
       <p:sp>
         <p:nvSpPr>
-          <p:cNvPr id="3" name="Text 1"/>
-          <p:cNvSpPr txBox="1"/>
-          <p:nvPr/>
-        </p:nvSpPr>
-        <p:spPr>
-          <a:xfrm>
-            <a:off x="548640" y="1097280"/>
-            <a:ext cx="10972800" cy="365760"/>
-          </a:xfrm>
-          <a:prstGeom prst="rect">
-            <a:avLst/>
-          </a:prstGeom>
-          <a:noFill/>
-          <a:ln/>
-        </p:spPr>
-        <p:txBody>
-          <a:bodyPr wrap="square" lIns="0" tIns="0" rIns="0" bIns="0" rtlCol="0" anchor="ctr"/>
-          <a:lstStyle/>
-          <a:p>
-            <a:pPr indent="0" marL="0">
-              <a:buNone/>
-            </a:pPr>
-            <a:r>
-              <a:rPr lang="en-US" sz="1400" i="1" dirty="0">
-                <a:solidFill>
-                  <a:srgbClr val="CADCFC"/>
-                </a:solidFill>
-                <a:latin typeface="Calibri" pitchFamily="34" charset="0"/>
-                <a:ea typeface="Calibri" pitchFamily="34" charset="-122"/>
-                <a:cs typeface="Calibri" pitchFamily="34" charset="-120"/>
-              </a:rPr>
-              <a:t>First Review rubric – this deck, section by section</a:t>
-            </a:r>
-            <a:endParaRPr lang="en-US" sz="1400" dirty="0"/>
-          </a:p>
-        </p:txBody>
-      </p:sp>
-      <p:sp>
-        <p:nvSpPr>
-          <p:cNvPr id="4" name="Shape 2"/>
+          <p:cNvPr id="3" name="Shape 1"/>
           <p:cNvSpPr/>
           <p:nvPr/>
         </p:nvSpPr>
         <p:spPr>
           <a:xfrm>
-            <a:off x="10424160" y="411480"/>
+            <a:off x="10424160" y="320040"/>
             <a:ext cx="822960" cy="822960"/>
           </a:xfrm>
           <a:prstGeom prst="ellipse">
@@ -7564,7 +7614,7 @@
       </p:sp>
       <p:pic>
         <p:nvPicPr>
-          <p:cNvPr id="5" name="Image 0" descr="preencoded.png">    </p:cNvPr>
+          <p:cNvPr id="4" name="Image 0" descr="preencoded.png">    </p:cNvPr>
           <p:cNvPicPr>
             <a:picLocks noChangeAspect="1"/>
           </p:cNvPicPr>
@@ -7578,7 +7628,7 @@
         </p:blipFill>
         <p:spPr>
           <a:xfrm>
-            <a:off x="10522915" y="510235"/>
+            <a:off x="10522915" y="418795"/>
             <a:ext cx="625450" cy="625450"/>
           </a:xfrm>
           <a:prstGeom prst="rect">
@@ -7586,1471 +7636,211 @@
           </a:prstGeom>
         </p:spPr>
       </p:pic>
-      <p:graphicFrame>
-        <p:nvGraphicFramePr>
-          <p:cNvPr id="18" name="Table 0"/>
-          <p:cNvGraphicFramePr>
-            <a:graphicFrameLocks noGrp="1"/>
-          </p:cNvGraphicFramePr>
-          <p:nvPr>
-            <p:extLst>
-              <p:ext uri="{D42A27DB-BD31-4B8C-83A1-F6EECF244321}">
-                <p14:modId xmlns:p14="http://schemas.microsoft.com/office/powerpoint/2010/main" val="1579011935"/>
-              </p:ext>
-            </p:extLst>
-          </p:nvPr>
-        </p:nvGraphicFramePr>
-        <p:xfrm>
-          <a:off x="914400" y="1783080"/>
-          <a:ext cx="10360152" cy="4023360"/>
-        </p:xfrm>
-        <a:graphic>
-          <a:graphicData uri="http://schemas.openxmlformats.org/drawingml/2006/table">
-            <a:tbl>
-              <a:tblPr/>
-              <a:tblGrid>
-                <a:gridCol w="822960"/>
-                <a:gridCol w="8074152"/>
-                <a:gridCol w="1463040"/>
-              </a:tblGrid>
-              <a:tr h="502920">
-                <a:tc>
-                  <a:txBody>
-                    <a:bodyPr/>
-                    <a:lstStyle/>
-                    <a:p>
-                      <a:pPr indent="0" marL="0">
-                        <a:buNone/>
-                      </a:pPr>
-                      <a:r>
-                        <a:rPr lang="en-US" sz="1500" b="1" dirty="0">
-                          <a:solidFill>
-                            <a:srgbClr val="141B45"/>
-                          </a:solidFill>
-                          <a:latin typeface="Calibri" pitchFamily="34" charset="0"/>
-                          <a:ea typeface="Calibri" pitchFamily="34" charset="-122"/>
-                          <a:cs typeface="Calibri" pitchFamily="34" charset="-120"/>
-                        </a:rPr>
-                        <a:t>#</a:t>
-                      </a:r>
-                      <a:endParaRPr lang="en-US" sz="1500" dirty="0">
-                        <a:latin typeface="Calibri" charset="0"/>
-                        <a:ea typeface="Calibri" charset="0"/>
-                        <a:cs typeface="Calibri" charset="0"/>
-                      </a:endParaRPr>
-                    </a:p>
-                  </a:txBody>
-                  <a:tcPr marL="91440" marR="91440" marT="45720" marB="45720" anchor="ctr">
-                    <a:lnL w="12700" cap="flat" cmpd="sng" algn="ctr">
-                      <a:solidFill>
-                        <a:srgbClr val="3A4694"/>
-                      </a:solidFill>
-                      <a:prstDash val="solid"/>
-                      <a:round/>
-                      <a:headEnd type="none" w="med" len="med"/>
-                      <a:tailEnd type="none" w="med" len="med"/>
-                    </a:lnL>
-                    <a:lnR w="12700" cap="flat" cmpd="sng" algn="ctr">
-                      <a:solidFill>
-                        <a:srgbClr val="3A4694"/>
-                      </a:solidFill>
-                      <a:prstDash val="solid"/>
-                      <a:round/>
-                      <a:headEnd type="none" w="med" len="med"/>
-                      <a:tailEnd type="none" w="med" len="med"/>
-                    </a:lnR>
-                    <a:lnT w="12700" cap="flat" cmpd="sng" algn="ctr">
-                      <a:solidFill>
-                        <a:srgbClr val="3A4694"/>
-                      </a:solidFill>
-                      <a:prstDash val="solid"/>
-                      <a:round/>
-                      <a:headEnd type="none" w="med" len="med"/>
-                      <a:tailEnd type="none" w="med" len="med"/>
-                    </a:lnT>
-                    <a:lnB w="12700" cap="flat" cmpd="sng" algn="ctr">
-                      <a:solidFill>
-                        <a:srgbClr val="3A4694"/>
-                      </a:solidFill>
-                      <a:prstDash val="solid"/>
-                      <a:round/>
-                      <a:headEnd type="none" w="med" len="med"/>
-                      <a:tailEnd type="none" w="med" len="med"/>
-                    </a:lnB>
-                    <a:solidFill>
-                      <a:srgbClr val="CADCFC"/>
-                    </a:solidFill>
-                  </a:tcPr>
-                </a:tc>
-                <a:tc>
-                  <a:txBody>
-                    <a:bodyPr/>
-                    <a:lstStyle/>
-                    <a:p>
-                      <a:pPr indent="0" marL="0">
-                        <a:buNone/>
-                      </a:pPr>
-                      <a:r>
-                        <a:rPr lang="en-US" sz="1500" b="1" dirty="0">
-                          <a:solidFill>
-                            <a:srgbClr val="141B45"/>
-                          </a:solidFill>
-                          <a:latin typeface="Calibri" pitchFamily="34" charset="0"/>
-                          <a:ea typeface="Calibri" pitchFamily="34" charset="-122"/>
-                          <a:cs typeface="Calibri" pitchFamily="34" charset="-120"/>
-                        </a:rPr>
-                        <a:t>Rubric Section</a:t>
-                      </a:r>
-                      <a:endParaRPr lang="en-US" sz="1500" dirty="0">
-                        <a:latin typeface="Calibri" charset="0"/>
-                        <a:ea typeface="Calibri" charset="0"/>
-                        <a:cs typeface="Calibri" charset="0"/>
-                      </a:endParaRPr>
-                    </a:p>
-                  </a:txBody>
-                  <a:tcPr marL="91440" marR="91440" marT="45720" marB="45720" anchor="ctr">
-                    <a:lnL w="12700" cap="flat" cmpd="sng" algn="ctr">
-                      <a:solidFill>
-                        <a:srgbClr val="3A4694"/>
-                      </a:solidFill>
-                      <a:prstDash val="solid"/>
-                      <a:round/>
-                      <a:headEnd type="none" w="med" len="med"/>
-                      <a:tailEnd type="none" w="med" len="med"/>
-                    </a:lnL>
-                    <a:lnR w="12700" cap="flat" cmpd="sng" algn="ctr">
-                      <a:solidFill>
-                        <a:srgbClr val="3A4694"/>
-                      </a:solidFill>
-                      <a:prstDash val="solid"/>
-                      <a:round/>
-                      <a:headEnd type="none" w="med" len="med"/>
-                      <a:tailEnd type="none" w="med" len="med"/>
-                    </a:lnR>
-                    <a:lnT w="12700" cap="flat" cmpd="sng" algn="ctr">
-                      <a:solidFill>
-                        <a:srgbClr val="3A4694"/>
-                      </a:solidFill>
-                      <a:prstDash val="solid"/>
-                      <a:round/>
-                      <a:headEnd type="none" w="med" len="med"/>
-                      <a:tailEnd type="none" w="med" len="med"/>
-                    </a:lnT>
-                    <a:lnB w="12700" cap="flat" cmpd="sng" algn="ctr">
-                      <a:solidFill>
-                        <a:srgbClr val="3A4694"/>
-                      </a:solidFill>
-                      <a:prstDash val="solid"/>
-                      <a:round/>
-                      <a:headEnd type="none" w="med" len="med"/>
-                      <a:tailEnd type="none" w="med" len="med"/>
-                    </a:lnB>
-                    <a:solidFill>
-                      <a:srgbClr val="CADCFC"/>
-                    </a:solidFill>
-                  </a:tcPr>
-                </a:tc>
-                <a:tc>
-                  <a:txBody>
-                    <a:bodyPr/>
-                    <a:lstStyle/>
-                    <a:p>
-                      <a:pPr algn="ctr" indent="0" marL="0">
-                        <a:buNone/>
-                      </a:pPr>
-                      <a:r>
-                        <a:rPr lang="en-US" sz="1500" b="1" dirty="0">
-                          <a:solidFill>
-                            <a:srgbClr val="141B45"/>
-                          </a:solidFill>
-                          <a:latin typeface="Calibri" pitchFamily="34" charset="0"/>
-                          <a:ea typeface="Calibri" pitchFamily="34" charset="-122"/>
-                          <a:cs typeface="Calibri" pitchFamily="34" charset="-120"/>
-                        </a:rPr>
-                        <a:t>Marks</a:t>
-                      </a:r>
-                      <a:endParaRPr lang="en-US" sz="1500" dirty="0">
-                        <a:latin typeface="Calibri" charset="0"/>
-                        <a:ea typeface="Calibri" charset="0"/>
-                        <a:cs typeface="Calibri" charset="0"/>
-                      </a:endParaRPr>
-                    </a:p>
-                  </a:txBody>
-                  <a:tcPr marL="91440" marR="91440" marT="45720" marB="45720" anchor="ctr">
-                    <a:lnL w="12700" cap="flat" cmpd="sng" algn="ctr">
-                      <a:solidFill>
-                        <a:srgbClr val="3A4694"/>
-                      </a:solidFill>
-                      <a:prstDash val="solid"/>
-                      <a:round/>
-                      <a:headEnd type="none" w="med" len="med"/>
-                      <a:tailEnd type="none" w="med" len="med"/>
-                    </a:lnL>
-                    <a:lnR w="12700" cap="flat" cmpd="sng" algn="ctr">
-                      <a:solidFill>
-                        <a:srgbClr val="3A4694"/>
-                      </a:solidFill>
-                      <a:prstDash val="solid"/>
-                      <a:round/>
-                      <a:headEnd type="none" w="med" len="med"/>
-                      <a:tailEnd type="none" w="med" len="med"/>
-                    </a:lnR>
-                    <a:lnT w="12700" cap="flat" cmpd="sng" algn="ctr">
-                      <a:solidFill>
-                        <a:srgbClr val="3A4694"/>
-                      </a:solidFill>
-                      <a:prstDash val="solid"/>
-                      <a:round/>
-                      <a:headEnd type="none" w="med" len="med"/>
-                      <a:tailEnd type="none" w="med" len="med"/>
-                    </a:lnT>
-                    <a:lnB w="12700" cap="flat" cmpd="sng" algn="ctr">
-                      <a:solidFill>
-                        <a:srgbClr val="3A4694"/>
-                      </a:solidFill>
-                      <a:prstDash val="solid"/>
-                      <a:round/>
-                      <a:headEnd type="none" w="med" len="med"/>
-                      <a:tailEnd type="none" w="med" len="med"/>
-                    </a:lnB>
-                    <a:solidFill>
-                      <a:srgbClr val="CADCFC"/>
-                    </a:solidFill>
-                  </a:tcPr>
-                </a:tc>
-              </a:tr>
-              <a:tr h="566928">
-                <a:tc>
-                  <a:txBody>
-                    <a:bodyPr/>
-                    <a:lstStyle/>
-                    <a:p>
-                      <a:pPr indent="0" marL="0">
-                        <a:buNone/>
-                      </a:pPr>
-                      <a:r>
-                        <a:rPr lang="en-US" sz="1500" dirty="0">
-                          <a:solidFill>
-                            <a:srgbClr val="FFFFFF"/>
-                          </a:solidFill>
-                          <a:latin typeface="Calibri" pitchFamily="34" charset="0"/>
-                          <a:ea typeface="Calibri" pitchFamily="34" charset="-122"/>
-                          <a:cs typeface="Calibri" pitchFamily="34" charset="-120"/>
-                        </a:rPr>
-                        <a:t>1</a:t>
-                      </a:r>
-                      <a:endParaRPr lang="en-US" sz="1500" dirty="0">
-                        <a:latin typeface="Calibri" charset="0"/>
-                        <a:ea typeface="Calibri" charset="0"/>
-                        <a:cs typeface="Calibri" charset="0"/>
-                      </a:endParaRPr>
-                    </a:p>
-                  </a:txBody>
-                  <a:tcPr marL="91440" marR="91440" marT="45720" marB="45720" anchor="ctr">
-                    <a:lnL w="12700" cap="flat" cmpd="sng" algn="ctr">
-                      <a:solidFill>
-                        <a:srgbClr val="3A4694"/>
-                      </a:solidFill>
-                      <a:prstDash val="solid"/>
-                      <a:round/>
-                      <a:headEnd type="none" w="med" len="med"/>
-                      <a:tailEnd type="none" w="med" len="med"/>
-                    </a:lnL>
-                    <a:lnR w="12700" cap="flat" cmpd="sng" algn="ctr">
-                      <a:solidFill>
-                        <a:srgbClr val="3A4694"/>
-                      </a:solidFill>
-                      <a:prstDash val="solid"/>
-                      <a:round/>
-                      <a:headEnd type="none" w="med" len="med"/>
-                      <a:tailEnd type="none" w="med" len="med"/>
-                    </a:lnR>
-                    <a:lnT w="12700" cap="flat" cmpd="sng" algn="ctr">
-                      <a:solidFill>
-                        <a:srgbClr val="3A4694"/>
-                      </a:solidFill>
-                      <a:prstDash val="solid"/>
-                      <a:round/>
-                      <a:headEnd type="none" w="med" len="med"/>
-                      <a:tailEnd type="none" w="med" len="med"/>
-                    </a:lnT>
-                    <a:lnB w="12700" cap="flat" cmpd="sng" algn="ctr">
-                      <a:solidFill>
-                        <a:srgbClr val="3A4694"/>
-                      </a:solidFill>
-                      <a:prstDash val="solid"/>
-                      <a:round/>
-                      <a:headEnd type="none" w="med" len="med"/>
-                      <a:tailEnd type="none" w="med" len="med"/>
-                    </a:lnB>
-                    <a:solidFill>
-                      <a:srgbClr val="141B45"/>
-                    </a:solidFill>
-                  </a:tcPr>
-                </a:tc>
-                <a:tc>
-                  <a:txBody>
-                    <a:bodyPr/>
-                    <a:lstStyle/>
-                    <a:p>
-                      <a:pPr indent="0" marL="0">
-                        <a:buNone/>
-                      </a:pPr>
-                      <a:r>
-                        <a:rPr lang="en-US" sz="1500" dirty="0">
-                          <a:solidFill>
-                            <a:srgbClr val="FFFFFF"/>
-                          </a:solidFill>
-                          <a:latin typeface="Calibri" pitchFamily="34" charset="0"/>
-                          <a:ea typeface="Calibri" pitchFamily="34" charset="-122"/>
-                          <a:cs typeface="Calibri" pitchFamily="34" charset="-120"/>
-                        </a:rPr>
-                        <a:t>Problem Definition</a:t>
-                      </a:r>
-                      <a:endParaRPr lang="en-US" sz="1500" dirty="0">
-                        <a:latin typeface="Calibri" charset="0"/>
-                        <a:ea typeface="Calibri" charset="0"/>
-                        <a:cs typeface="Calibri" charset="0"/>
-                      </a:endParaRPr>
-                    </a:p>
-                  </a:txBody>
-                  <a:tcPr marL="91440" marR="91440" marT="45720" marB="45720" anchor="ctr">
-                    <a:lnL w="12700" cap="flat" cmpd="sng" algn="ctr">
-                      <a:solidFill>
-                        <a:srgbClr val="3A4694"/>
-                      </a:solidFill>
-                      <a:prstDash val="solid"/>
-                      <a:round/>
-                      <a:headEnd type="none" w="med" len="med"/>
-                      <a:tailEnd type="none" w="med" len="med"/>
-                    </a:lnL>
-                    <a:lnR w="12700" cap="flat" cmpd="sng" algn="ctr">
-                      <a:solidFill>
-                        <a:srgbClr val="3A4694"/>
-                      </a:solidFill>
-                      <a:prstDash val="solid"/>
-                      <a:round/>
-                      <a:headEnd type="none" w="med" len="med"/>
-                      <a:tailEnd type="none" w="med" len="med"/>
-                    </a:lnR>
-                    <a:lnT w="12700" cap="flat" cmpd="sng" algn="ctr">
-                      <a:solidFill>
-                        <a:srgbClr val="3A4694"/>
-                      </a:solidFill>
-                      <a:prstDash val="solid"/>
-                      <a:round/>
-                      <a:headEnd type="none" w="med" len="med"/>
-                      <a:tailEnd type="none" w="med" len="med"/>
-                    </a:lnT>
-                    <a:lnB w="12700" cap="flat" cmpd="sng" algn="ctr">
-                      <a:solidFill>
-                        <a:srgbClr val="3A4694"/>
-                      </a:solidFill>
-                      <a:prstDash val="solid"/>
-                      <a:round/>
-                      <a:headEnd type="none" w="med" len="med"/>
-                      <a:tailEnd type="none" w="med" len="med"/>
-                    </a:lnB>
-                    <a:solidFill>
-                      <a:srgbClr val="141B45"/>
-                    </a:solidFill>
-                  </a:tcPr>
-                </a:tc>
-                <a:tc>
-                  <a:txBody>
-                    <a:bodyPr/>
-                    <a:lstStyle/>
-                    <a:p>
-                      <a:pPr algn="ctr" indent="0" marL="0">
-                        <a:buNone/>
-                      </a:pPr>
-                      <a:r>
-                        <a:rPr lang="en-US" sz="1500" b="1" dirty="0">
-                          <a:solidFill>
-                            <a:srgbClr val="FFFFFF"/>
-                          </a:solidFill>
-                          <a:latin typeface="Calibri" pitchFamily="34" charset="0"/>
-                          <a:ea typeface="Calibri" pitchFamily="34" charset="-122"/>
-                          <a:cs typeface="Calibri" pitchFamily="34" charset="-120"/>
-                        </a:rPr>
-                        <a:t>4</a:t>
-                      </a:r>
-                      <a:endParaRPr lang="en-US" sz="1500" dirty="0">
-                        <a:latin typeface="Calibri" charset="0"/>
-                        <a:ea typeface="Calibri" charset="0"/>
-                        <a:cs typeface="Calibri" charset="0"/>
-                      </a:endParaRPr>
-                    </a:p>
-                  </a:txBody>
-                  <a:tcPr marL="91440" marR="91440" marT="45720" marB="45720" anchor="ctr">
-                    <a:lnL w="12700" cap="flat" cmpd="sng" algn="ctr">
-                      <a:solidFill>
-                        <a:srgbClr val="3A4694"/>
-                      </a:solidFill>
-                      <a:prstDash val="solid"/>
-                      <a:round/>
-                      <a:headEnd type="none" w="med" len="med"/>
-                      <a:tailEnd type="none" w="med" len="med"/>
-                    </a:lnL>
-                    <a:lnR w="12700" cap="flat" cmpd="sng" algn="ctr">
-                      <a:solidFill>
-                        <a:srgbClr val="3A4694"/>
-                      </a:solidFill>
-                      <a:prstDash val="solid"/>
-                      <a:round/>
-                      <a:headEnd type="none" w="med" len="med"/>
-                      <a:tailEnd type="none" w="med" len="med"/>
-                    </a:lnR>
-                    <a:lnT w="12700" cap="flat" cmpd="sng" algn="ctr">
-                      <a:solidFill>
-                        <a:srgbClr val="3A4694"/>
-                      </a:solidFill>
-                      <a:prstDash val="solid"/>
-                      <a:round/>
-                      <a:headEnd type="none" w="med" len="med"/>
-                      <a:tailEnd type="none" w="med" len="med"/>
-                    </a:lnT>
-                    <a:lnB w="12700" cap="flat" cmpd="sng" algn="ctr">
-                      <a:solidFill>
-                        <a:srgbClr val="3A4694"/>
-                      </a:solidFill>
-                      <a:prstDash val="solid"/>
-                      <a:round/>
-                      <a:headEnd type="none" w="med" len="med"/>
-                      <a:tailEnd type="none" w="med" len="med"/>
-                    </a:lnB>
-                    <a:solidFill>
-                      <a:srgbClr val="141B45"/>
-                    </a:solidFill>
-                  </a:tcPr>
-                </a:tc>
-              </a:tr>
-              <a:tr h="566928">
-                <a:tc>
-                  <a:txBody>
-                    <a:bodyPr/>
-                    <a:lstStyle/>
-                    <a:p>
-                      <a:pPr indent="0" marL="0">
-                        <a:buNone/>
-                      </a:pPr>
-                      <a:r>
-                        <a:rPr lang="en-US" sz="1500" dirty="0">
-                          <a:solidFill>
-                            <a:srgbClr val="FFFFFF"/>
-                          </a:solidFill>
-                          <a:latin typeface="Calibri" pitchFamily="34" charset="0"/>
-                          <a:ea typeface="Calibri" pitchFamily="34" charset="-122"/>
-                          <a:cs typeface="Calibri" pitchFamily="34" charset="-120"/>
-                        </a:rPr>
-                        <a:t>2</a:t>
-                      </a:r>
-                      <a:endParaRPr lang="en-US" sz="1500" dirty="0">
-                        <a:latin typeface="Calibri" charset="0"/>
-                        <a:ea typeface="Calibri" charset="0"/>
-                        <a:cs typeface="Calibri" charset="0"/>
-                      </a:endParaRPr>
-                    </a:p>
-                  </a:txBody>
-                  <a:tcPr marL="91440" marR="91440" marT="45720" marB="45720" anchor="ctr">
-                    <a:lnL w="12700" cap="flat" cmpd="sng" algn="ctr">
-                      <a:solidFill>
-                        <a:srgbClr val="3A4694"/>
-                      </a:solidFill>
-                      <a:prstDash val="solid"/>
-                      <a:round/>
-                      <a:headEnd type="none" w="med" len="med"/>
-                      <a:tailEnd type="none" w="med" len="med"/>
-                    </a:lnL>
-                    <a:lnR w="12700" cap="flat" cmpd="sng" algn="ctr">
-                      <a:solidFill>
-                        <a:srgbClr val="3A4694"/>
-                      </a:solidFill>
-                      <a:prstDash val="solid"/>
-                      <a:round/>
-                      <a:headEnd type="none" w="med" len="med"/>
-                      <a:tailEnd type="none" w="med" len="med"/>
-                    </a:lnR>
-                    <a:lnT w="12700" cap="flat" cmpd="sng" algn="ctr">
-                      <a:solidFill>
-                        <a:srgbClr val="3A4694"/>
-                      </a:solidFill>
-                      <a:prstDash val="solid"/>
-                      <a:round/>
-                      <a:headEnd type="none" w="med" len="med"/>
-                      <a:tailEnd type="none" w="med" len="med"/>
-                    </a:lnT>
-                    <a:lnB w="12700" cap="flat" cmpd="sng" algn="ctr">
-                      <a:solidFill>
-                        <a:srgbClr val="3A4694"/>
-                      </a:solidFill>
-                      <a:prstDash val="solid"/>
-                      <a:round/>
-                      <a:headEnd type="none" w="med" len="med"/>
-                      <a:tailEnd type="none" w="med" len="med"/>
-                    </a:lnB>
-                    <a:solidFill>
-                      <a:srgbClr val="141B45"/>
-                    </a:solidFill>
-                  </a:tcPr>
-                </a:tc>
-                <a:tc>
-                  <a:txBody>
-                    <a:bodyPr/>
-                    <a:lstStyle/>
-                    <a:p>
-                      <a:pPr indent="0" marL="0">
-                        <a:buNone/>
-                      </a:pPr>
-                      <a:r>
-                        <a:rPr lang="en-US" sz="1500" dirty="0">
-                          <a:solidFill>
-                            <a:srgbClr val="FFFFFF"/>
-                          </a:solidFill>
-                          <a:latin typeface="Calibri" pitchFamily="34" charset="0"/>
-                          <a:ea typeface="Calibri" pitchFamily="34" charset="-122"/>
-                          <a:cs typeface="Calibri" pitchFamily="34" charset="-120"/>
-                        </a:rPr>
-                        <a:t>Objectives and Scope of the Proposed Work</a:t>
-                      </a:r>
-                      <a:endParaRPr lang="en-US" sz="1500" dirty="0">
-                        <a:latin typeface="Calibri" charset="0"/>
-                        <a:ea typeface="Calibri" charset="0"/>
-                        <a:cs typeface="Calibri" charset="0"/>
-                      </a:endParaRPr>
-                    </a:p>
-                  </a:txBody>
-                  <a:tcPr marL="91440" marR="91440" marT="45720" marB="45720" anchor="ctr">
-                    <a:lnL w="12700" cap="flat" cmpd="sng" algn="ctr">
-                      <a:solidFill>
-                        <a:srgbClr val="3A4694"/>
-                      </a:solidFill>
-                      <a:prstDash val="solid"/>
-                      <a:round/>
-                      <a:headEnd type="none" w="med" len="med"/>
-                      <a:tailEnd type="none" w="med" len="med"/>
-                    </a:lnL>
-                    <a:lnR w="12700" cap="flat" cmpd="sng" algn="ctr">
-                      <a:solidFill>
-                        <a:srgbClr val="3A4694"/>
-                      </a:solidFill>
-                      <a:prstDash val="solid"/>
-                      <a:round/>
-                      <a:headEnd type="none" w="med" len="med"/>
-                      <a:tailEnd type="none" w="med" len="med"/>
-                    </a:lnR>
-                    <a:lnT w="12700" cap="flat" cmpd="sng" algn="ctr">
-                      <a:solidFill>
-                        <a:srgbClr val="3A4694"/>
-                      </a:solidFill>
-                      <a:prstDash val="solid"/>
-                      <a:round/>
-                      <a:headEnd type="none" w="med" len="med"/>
-                      <a:tailEnd type="none" w="med" len="med"/>
-                    </a:lnT>
-                    <a:lnB w="12700" cap="flat" cmpd="sng" algn="ctr">
-                      <a:solidFill>
-                        <a:srgbClr val="3A4694"/>
-                      </a:solidFill>
-                      <a:prstDash val="solid"/>
-                      <a:round/>
-                      <a:headEnd type="none" w="med" len="med"/>
-                      <a:tailEnd type="none" w="med" len="med"/>
-                    </a:lnB>
-                    <a:solidFill>
-                      <a:srgbClr val="141B45"/>
-                    </a:solidFill>
-                  </a:tcPr>
-                </a:tc>
-                <a:tc>
-                  <a:txBody>
-                    <a:bodyPr/>
-                    <a:lstStyle/>
-                    <a:p>
-                      <a:pPr algn="ctr" indent="0" marL="0">
-                        <a:buNone/>
-                      </a:pPr>
-                      <a:r>
-                        <a:rPr lang="en-US" sz="1500" b="1" dirty="0">
-                          <a:solidFill>
-                            <a:srgbClr val="FFFFFF"/>
-                          </a:solidFill>
-                          <a:latin typeface="Calibri" pitchFamily="34" charset="0"/>
-                          <a:ea typeface="Calibri" pitchFamily="34" charset="-122"/>
-                          <a:cs typeface="Calibri" pitchFamily="34" charset="-120"/>
-                        </a:rPr>
-                        <a:t>6</a:t>
-                      </a:r>
-                      <a:endParaRPr lang="en-US" sz="1500" dirty="0">
-                        <a:latin typeface="Calibri" charset="0"/>
-                        <a:ea typeface="Calibri" charset="0"/>
-                        <a:cs typeface="Calibri" charset="0"/>
-                      </a:endParaRPr>
-                    </a:p>
-                  </a:txBody>
-                  <a:tcPr marL="91440" marR="91440" marT="45720" marB="45720" anchor="ctr">
-                    <a:lnL w="12700" cap="flat" cmpd="sng" algn="ctr">
-                      <a:solidFill>
-                        <a:srgbClr val="3A4694"/>
-                      </a:solidFill>
-                      <a:prstDash val="solid"/>
-                      <a:round/>
-                      <a:headEnd type="none" w="med" len="med"/>
-                      <a:tailEnd type="none" w="med" len="med"/>
-                    </a:lnL>
-                    <a:lnR w="12700" cap="flat" cmpd="sng" algn="ctr">
-                      <a:solidFill>
-                        <a:srgbClr val="3A4694"/>
-                      </a:solidFill>
-                      <a:prstDash val="solid"/>
-                      <a:round/>
-                      <a:headEnd type="none" w="med" len="med"/>
-                      <a:tailEnd type="none" w="med" len="med"/>
-                    </a:lnR>
-                    <a:lnT w="12700" cap="flat" cmpd="sng" algn="ctr">
-                      <a:solidFill>
-                        <a:srgbClr val="3A4694"/>
-                      </a:solidFill>
-                      <a:prstDash val="solid"/>
-                      <a:round/>
-                      <a:headEnd type="none" w="med" len="med"/>
-                      <a:tailEnd type="none" w="med" len="med"/>
-                    </a:lnT>
-                    <a:lnB w="12700" cap="flat" cmpd="sng" algn="ctr">
-                      <a:solidFill>
-                        <a:srgbClr val="3A4694"/>
-                      </a:solidFill>
-                      <a:prstDash val="solid"/>
-                      <a:round/>
-                      <a:headEnd type="none" w="med" len="med"/>
-                      <a:tailEnd type="none" w="med" len="med"/>
-                    </a:lnB>
-                    <a:solidFill>
-                      <a:srgbClr val="141B45"/>
-                    </a:solidFill>
-                  </a:tcPr>
-                </a:tc>
-              </a:tr>
-              <a:tr h="566928">
-                <a:tc>
-                  <a:txBody>
-                    <a:bodyPr/>
-                    <a:lstStyle/>
-                    <a:p>
-                      <a:pPr indent="0" marL="0">
-                        <a:buNone/>
-                      </a:pPr>
-                      <a:r>
-                        <a:rPr lang="en-US" sz="1500" dirty="0">
-                          <a:solidFill>
-                            <a:srgbClr val="FFFFFF"/>
-                          </a:solidFill>
-                          <a:latin typeface="Calibri" pitchFamily="34" charset="0"/>
-                          <a:ea typeface="Calibri" pitchFamily="34" charset="-122"/>
-                          <a:cs typeface="Calibri" pitchFamily="34" charset="-120"/>
-                        </a:rPr>
-                        <a:t>3</a:t>
-                      </a:r>
-                      <a:endParaRPr lang="en-US" sz="1500" dirty="0">
-                        <a:latin typeface="Calibri" charset="0"/>
-                        <a:ea typeface="Calibri" charset="0"/>
-                        <a:cs typeface="Calibri" charset="0"/>
-                      </a:endParaRPr>
-                    </a:p>
-                  </a:txBody>
-                  <a:tcPr marL="91440" marR="91440" marT="45720" marB="45720" anchor="ctr">
-                    <a:lnL w="12700" cap="flat" cmpd="sng" algn="ctr">
-                      <a:solidFill>
-                        <a:srgbClr val="3A4694"/>
-                      </a:solidFill>
-                      <a:prstDash val="solid"/>
-                      <a:round/>
-                      <a:headEnd type="none" w="med" len="med"/>
-                      <a:tailEnd type="none" w="med" len="med"/>
-                    </a:lnL>
-                    <a:lnR w="12700" cap="flat" cmpd="sng" algn="ctr">
-                      <a:solidFill>
-                        <a:srgbClr val="3A4694"/>
-                      </a:solidFill>
-                      <a:prstDash val="solid"/>
-                      <a:round/>
-                      <a:headEnd type="none" w="med" len="med"/>
-                      <a:tailEnd type="none" w="med" len="med"/>
-                    </a:lnR>
-                    <a:lnT w="12700" cap="flat" cmpd="sng" algn="ctr">
-                      <a:solidFill>
-                        <a:srgbClr val="3A4694"/>
-                      </a:solidFill>
-                      <a:prstDash val="solid"/>
-                      <a:round/>
-                      <a:headEnd type="none" w="med" len="med"/>
-                      <a:tailEnd type="none" w="med" len="med"/>
-                    </a:lnT>
-                    <a:lnB w="12700" cap="flat" cmpd="sng" algn="ctr">
-                      <a:solidFill>
-                        <a:srgbClr val="3A4694"/>
-                      </a:solidFill>
-                      <a:prstDash val="solid"/>
-                      <a:round/>
-                      <a:headEnd type="none" w="med" len="med"/>
-                      <a:tailEnd type="none" w="med" len="med"/>
-                    </a:lnB>
-                    <a:solidFill>
-                      <a:srgbClr val="141B45"/>
-                    </a:solidFill>
-                  </a:tcPr>
-                </a:tc>
-                <a:tc>
-                  <a:txBody>
-                    <a:bodyPr/>
-                    <a:lstStyle/>
-                    <a:p>
-                      <a:pPr indent="0" marL="0">
-                        <a:buNone/>
-                      </a:pPr>
-                      <a:r>
-                        <a:rPr lang="en-US" sz="1500" dirty="0">
-                          <a:solidFill>
-                            <a:srgbClr val="FFFFFF"/>
-                          </a:solidFill>
-                          <a:latin typeface="Calibri" pitchFamily="34" charset="0"/>
-                          <a:ea typeface="Calibri" pitchFamily="34" charset="-122"/>
-                          <a:cs typeface="Calibri" pitchFamily="34" charset="-120"/>
-                        </a:rPr>
-                        <a:t>Novel Idea</a:t>
-                      </a:r>
-                      <a:endParaRPr lang="en-US" sz="1500" dirty="0">
-                        <a:latin typeface="Calibri" charset="0"/>
-                        <a:ea typeface="Calibri" charset="0"/>
-                        <a:cs typeface="Calibri" charset="0"/>
-                      </a:endParaRPr>
-                    </a:p>
-                  </a:txBody>
-                  <a:tcPr marL="91440" marR="91440" marT="45720" marB="45720" anchor="ctr">
-                    <a:lnL w="12700" cap="flat" cmpd="sng" algn="ctr">
-                      <a:solidFill>
-                        <a:srgbClr val="3A4694"/>
-                      </a:solidFill>
-                      <a:prstDash val="solid"/>
-                      <a:round/>
-                      <a:headEnd type="none" w="med" len="med"/>
-                      <a:tailEnd type="none" w="med" len="med"/>
-                    </a:lnL>
-                    <a:lnR w="12700" cap="flat" cmpd="sng" algn="ctr">
-                      <a:solidFill>
-                        <a:srgbClr val="3A4694"/>
-                      </a:solidFill>
-                      <a:prstDash val="solid"/>
-                      <a:round/>
-                      <a:headEnd type="none" w="med" len="med"/>
-                      <a:tailEnd type="none" w="med" len="med"/>
-                    </a:lnR>
-                    <a:lnT w="12700" cap="flat" cmpd="sng" algn="ctr">
-                      <a:solidFill>
-                        <a:srgbClr val="3A4694"/>
-                      </a:solidFill>
-                      <a:prstDash val="solid"/>
-                      <a:round/>
-                      <a:headEnd type="none" w="med" len="med"/>
-                      <a:tailEnd type="none" w="med" len="med"/>
-                    </a:lnT>
-                    <a:lnB w="12700" cap="flat" cmpd="sng" algn="ctr">
-                      <a:solidFill>
-                        <a:srgbClr val="3A4694"/>
-                      </a:solidFill>
-                      <a:prstDash val="solid"/>
-                      <a:round/>
-                      <a:headEnd type="none" w="med" len="med"/>
-                      <a:tailEnd type="none" w="med" len="med"/>
-                    </a:lnB>
-                    <a:solidFill>
-                      <a:srgbClr val="141B45"/>
-                    </a:solidFill>
-                  </a:tcPr>
-                </a:tc>
-                <a:tc>
-                  <a:txBody>
-                    <a:bodyPr/>
-                    <a:lstStyle/>
-                    <a:p>
-                      <a:pPr algn="ctr" indent="0" marL="0">
-                        <a:buNone/>
-                      </a:pPr>
-                      <a:r>
-                        <a:rPr lang="en-US" sz="1500" b="1" dirty="0">
-                          <a:solidFill>
-                            <a:srgbClr val="FFFFFF"/>
-                          </a:solidFill>
-                          <a:latin typeface="Calibri" pitchFamily="34" charset="0"/>
-                          <a:ea typeface="Calibri" pitchFamily="34" charset="-122"/>
-                          <a:cs typeface="Calibri" pitchFamily="34" charset="-120"/>
-                        </a:rPr>
-                        <a:t>2</a:t>
-                      </a:r>
-                      <a:endParaRPr lang="en-US" sz="1500" dirty="0">
-                        <a:latin typeface="Calibri" charset="0"/>
-                        <a:ea typeface="Calibri" charset="0"/>
-                        <a:cs typeface="Calibri" charset="0"/>
-                      </a:endParaRPr>
-                    </a:p>
-                  </a:txBody>
-                  <a:tcPr marL="91440" marR="91440" marT="45720" marB="45720" anchor="ctr">
-                    <a:lnL w="12700" cap="flat" cmpd="sng" algn="ctr">
-                      <a:solidFill>
-                        <a:srgbClr val="3A4694"/>
-                      </a:solidFill>
-                      <a:prstDash val="solid"/>
-                      <a:round/>
-                      <a:headEnd type="none" w="med" len="med"/>
-                      <a:tailEnd type="none" w="med" len="med"/>
-                    </a:lnL>
-                    <a:lnR w="12700" cap="flat" cmpd="sng" algn="ctr">
-                      <a:solidFill>
-                        <a:srgbClr val="3A4694"/>
-                      </a:solidFill>
-                      <a:prstDash val="solid"/>
-                      <a:round/>
-                      <a:headEnd type="none" w="med" len="med"/>
-                      <a:tailEnd type="none" w="med" len="med"/>
-                    </a:lnR>
-                    <a:lnT w="12700" cap="flat" cmpd="sng" algn="ctr">
-                      <a:solidFill>
-                        <a:srgbClr val="3A4694"/>
-                      </a:solidFill>
-                      <a:prstDash val="solid"/>
-                      <a:round/>
-                      <a:headEnd type="none" w="med" len="med"/>
-                      <a:tailEnd type="none" w="med" len="med"/>
-                    </a:lnT>
-                    <a:lnB w="12700" cap="flat" cmpd="sng" algn="ctr">
-                      <a:solidFill>
-                        <a:srgbClr val="3A4694"/>
-                      </a:solidFill>
-                      <a:prstDash val="solid"/>
-                      <a:round/>
-                      <a:headEnd type="none" w="med" len="med"/>
-                      <a:tailEnd type="none" w="med" len="med"/>
-                    </a:lnB>
-                    <a:solidFill>
-                      <a:srgbClr val="141B45"/>
-                    </a:solidFill>
-                  </a:tcPr>
-                </a:tc>
-              </a:tr>
-              <a:tr h="566928">
-                <a:tc>
-                  <a:txBody>
-                    <a:bodyPr/>
-                    <a:lstStyle/>
-                    <a:p>
-                      <a:pPr indent="0" marL="0">
-                        <a:buNone/>
-                      </a:pPr>
-                      <a:r>
-                        <a:rPr lang="en-US" sz="1500" dirty="0">
-                          <a:solidFill>
-                            <a:srgbClr val="FFFFFF"/>
-                          </a:solidFill>
-                          <a:latin typeface="Calibri" pitchFamily="34" charset="0"/>
-                          <a:ea typeface="Calibri" pitchFamily="34" charset="-122"/>
-                          <a:cs typeface="Calibri" pitchFamily="34" charset="-120"/>
-                        </a:rPr>
-                        <a:t>4</a:t>
-                      </a:r>
-                      <a:endParaRPr lang="en-US" sz="1500" dirty="0">
-                        <a:latin typeface="Calibri" charset="0"/>
-                        <a:ea typeface="Calibri" charset="0"/>
-                        <a:cs typeface="Calibri" charset="0"/>
-                      </a:endParaRPr>
-                    </a:p>
-                  </a:txBody>
-                  <a:tcPr marL="91440" marR="91440" marT="45720" marB="45720" anchor="ctr">
-                    <a:lnL w="12700" cap="flat" cmpd="sng" algn="ctr">
-                      <a:solidFill>
-                        <a:srgbClr val="3A4694"/>
-                      </a:solidFill>
-                      <a:prstDash val="solid"/>
-                      <a:round/>
-                      <a:headEnd type="none" w="med" len="med"/>
-                      <a:tailEnd type="none" w="med" len="med"/>
-                    </a:lnL>
-                    <a:lnR w="12700" cap="flat" cmpd="sng" algn="ctr">
-                      <a:solidFill>
-                        <a:srgbClr val="3A4694"/>
-                      </a:solidFill>
-                      <a:prstDash val="solid"/>
-                      <a:round/>
-                      <a:headEnd type="none" w="med" len="med"/>
-                      <a:tailEnd type="none" w="med" len="med"/>
-                    </a:lnR>
-                    <a:lnT w="12700" cap="flat" cmpd="sng" algn="ctr">
-                      <a:solidFill>
-                        <a:srgbClr val="3A4694"/>
-                      </a:solidFill>
-                      <a:prstDash val="solid"/>
-                      <a:round/>
-                      <a:headEnd type="none" w="med" len="med"/>
-                      <a:tailEnd type="none" w="med" len="med"/>
-                    </a:lnT>
-                    <a:lnB w="12700" cap="flat" cmpd="sng" algn="ctr">
-                      <a:solidFill>
-                        <a:srgbClr val="3A4694"/>
-                      </a:solidFill>
-                      <a:prstDash val="solid"/>
-                      <a:round/>
-                      <a:headEnd type="none" w="med" len="med"/>
-                      <a:tailEnd type="none" w="med" len="med"/>
-                    </a:lnB>
-                    <a:solidFill>
-                      <a:srgbClr val="141B45"/>
-                    </a:solidFill>
-                  </a:tcPr>
-                </a:tc>
-                <a:tc>
-                  <a:txBody>
-                    <a:bodyPr/>
-                    <a:lstStyle/>
-                    <a:p>
-                      <a:pPr indent="0" marL="0">
-                        <a:buNone/>
-                      </a:pPr>
-                      <a:r>
-                        <a:rPr lang="en-US" sz="1500" dirty="0">
-                          <a:solidFill>
-                            <a:srgbClr val="FFFFFF"/>
-                          </a:solidFill>
-                          <a:latin typeface="Calibri" pitchFamily="34" charset="0"/>
-                          <a:ea typeface="Calibri" pitchFamily="34" charset="-122"/>
-                          <a:cs typeface="Calibri" pitchFamily="34" charset="-120"/>
-                        </a:rPr>
-                        <a:t>Detailed Design</a:t>
-                      </a:r>
-                      <a:endParaRPr lang="en-US" sz="1500" dirty="0">
-                        <a:latin typeface="Calibri" charset="0"/>
-                        <a:ea typeface="Calibri" charset="0"/>
-                        <a:cs typeface="Calibri" charset="0"/>
-                      </a:endParaRPr>
-                    </a:p>
-                  </a:txBody>
-                  <a:tcPr marL="91440" marR="91440" marT="45720" marB="45720" anchor="ctr">
-                    <a:lnL w="12700" cap="flat" cmpd="sng" algn="ctr">
-                      <a:solidFill>
-                        <a:srgbClr val="3A4694"/>
-                      </a:solidFill>
-                      <a:prstDash val="solid"/>
-                      <a:round/>
-                      <a:headEnd type="none" w="med" len="med"/>
-                      <a:tailEnd type="none" w="med" len="med"/>
-                    </a:lnL>
-                    <a:lnR w="12700" cap="flat" cmpd="sng" algn="ctr">
-                      <a:solidFill>
-                        <a:srgbClr val="3A4694"/>
-                      </a:solidFill>
-                      <a:prstDash val="solid"/>
-                      <a:round/>
-                      <a:headEnd type="none" w="med" len="med"/>
-                      <a:tailEnd type="none" w="med" len="med"/>
-                    </a:lnR>
-                    <a:lnT w="12700" cap="flat" cmpd="sng" algn="ctr">
-                      <a:solidFill>
-                        <a:srgbClr val="3A4694"/>
-                      </a:solidFill>
-                      <a:prstDash val="solid"/>
-                      <a:round/>
-                      <a:headEnd type="none" w="med" len="med"/>
-                      <a:tailEnd type="none" w="med" len="med"/>
-                    </a:lnT>
-                    <a:lnB w="12700" cap="flat" cmpd="sng" algn="ctr">
-                      <a:solidFill>
-                        <a:srgbClr val="3A4694"/>
-                      </a:solidFill>
-                      <a:prstDash val="solid"/>
-                      <a:round/>
-                      <a:headEnd type="none" w="med" len="med"/>
-                      <a:tailEnd type="none" w="med" len="med"/>
-                    </a:lnB>
-                    <a:solidFill>
-                      <a:srgbClr val="141B45"/>
-                    </a:solidFill>
-                  </a:tcPr>
-                </a:tc>
-                <a:tc>
-                  <a:txBody>
-                    <a:bodyPr/>
-                    <a:lstStyle/>
-                    <a:p>
-                      <a:pPr algn="ctr" indent="0" marL="0">
-                        <a:buNone/>
-                      </a:pPr>
-                      <a:r>
-                        <a:rPr lang="en-US" sz="1500" b="1" dirty="0">
-                          <a:solidFill>
-                            <a:srgbClr val="FFFFFF"/>
-                          </a:solidFill>
-                          <a:latin typeface="Calibri" pitchFamily="34" charset="0"/>
-                          <a:ea typeface="Calibri" pitchFamily="34" charset="-122"/>
-                          <a:cs typeface="Calibri" pitchFamily="34" charset="-120"/>
-                        </a:rPr>
-                        <a:t>5</a:t>
-                      </a:r>
-                      <a:endParaRPr lang="en-US" sz="1500" dirty="0">
-                        <a:latin typeface="Calibri" charset="0"/>
-                        <a:ea typeface="Calibri" charset="0"/>
-                        <a:cs typeface="Calibri" charset="0"/>
-                      </a:endParaRPr>
-                    </a:p>
-                  </a:txBody>
-                  <a:tcPr marL="91440" marR="91440" marT="45720" marB="45720" anchor="ctr">
-                    <a:lnL w="12700" cap="flat" cmpd="sng" algn="ctr">
-                      <a:solidFill>
-                        <a:srgbClr val="3A4694"/>
-                      </a:solidFill>
-                      <a:prstDash val="solid"/>
-                      <a:round/>
-                      <a:headEnd type="none" w="med" len="med"/>
-                      <a:tailEnd type="none" w="med" len="med"/>
-                    </a:lnL>
-                    <a:lnR w="12700" cap="flat" cmpd="sng" algn="ctr">
-                      <a:solidFill>
-                        <a:srgbClr val="3A4694"/>
-                      </a:solidFill>
-                      <a:prstDash val="solid"/>
-                      <a:round/>
-                      <a:headEnd type="none" w="med" len="med"/>
-                      <a:tailEnd type="none" w="med" len="med"/>
-                    </a:lnR>
-                    <a:lnT w="12700" cap="flat" cmpd="sng" algn="ctr">
-                      <a:solidFill>
-                        <a:srgbClr val="3A4694"/>
-                      </a:solidFill>
-                      <a:prstDash val="solid"/>
-                      <a:round/>
-                      <a:headEnd type="none" w="med" len="med"/>
-                      <a:tailEnd type="none" w="med" len="med"/>
-                    </a:lnT>
-                    <a:lnB w="12700" cap="flat" cmpd="sng" algn="ctr">
-                      <a:solidFill>
-                        <a:srgbClr val="3A4694"/>
-                      </a:solidFill>
-                      <a:prstDash val="solid"/>
-                      <a:round/>
-                      <a:headEnd type="none" w="med" len="med"/>
-                      <a:tailEnd type="none" w="med" len="med"/>
-                    </a:lnB>
-                    <a:solidFill>
-                      <a:srgbClr val="141B45"/>
-                    </a:solidFill>
-                  </a:tcPr>
-                </a:tc>
-              </a:tr>
-              <a:tr h="566928">
-                <a:tc>
-                  <a:txBody>
-                    <a:bodyPr/>
-                    <a:lstStyle/>
-                    <a:p>
-                      <a:pPr indent="0" marL="0">
-                        <a:buNone/>
-                      </a:pPr>
-                      <a:r>
-                        <a:rPr lang="en-US" sz="1500" dirty="0">
-                          <a:solidFill>
-                            <a:srgbClr val="FFFFFF"/>
-                          </a:solidFill>
-                          <a:latin typeface="Calibri" pitchFamily="34" charset="0"/>
-                          <a:ea typeface="Calibri" pitchFamily="34" charset="-122"/>
-                          <a:cs typeface="Calibri" pitchFamily="34" charset="-120"/>
-                        </a:rPr>
-                        <a:t>5</a:t>
-                      </a:r>
-                      <a:endParaRPr lang="en-US" sz="1500" dirty="0">
-                        <a:latin typeface="Calibri" charset="0"/>
-                        <a:ea typeface="Calibri" charset="0"/>
-                        <a:cs typeface="Calibri" charset="0"/>
-                      </a:endParaRPr>
-                    </a:p>
-                  </a:txBody>
-                  <a:tcPr marL="91440" marR="91440" marT="45720" marB="45720" anchor="ctr">
-                    <a:lnL w="12700" cap="flat" cmpd="sng" algn="ctr">
-                      <a:solidFill>
-                        <a:srgbClr val="3A4694"/>
-                      </a:solidFill>
-                      <a:prstDash val="solid"/>
-                      <a:round/>
-                      <a:headEnd type="none" w="med" len="med"/>
-                      <a:tailEnd type="none" w="med" len="med"/>
-                    </a:lnL>
-                    <a:lnR w="12700" cap="flat" cmpd="sng" algn="ctr">
-                      <a:solidFill>
-                        <a:srgbClr val="3A4694"/>
-                      </a:solidFill>
-                      <a:prstDash val="solid"/>
-                      <a:round/>
-                      <a:headEnd type="none" w="med" len="med"/>
-                      <a:tailEnd type="none" w="med" len="med"/>
-                    </a:lnR>
-                    <a:lnT w="12700" cap="flat" cmpd="sng" algn="ctr">
-                      <a:solidFill>
-                        <a:srgbClr val="3A4694"/>
-                      </a:solidFill>
-                      <a:prstDash val="solid"/>
-                      <a:round/>
-                      <a:headEnd type="none" w="med" len="med"/>
-                      <a:tailEnd type="none" w="med" len="med"/>
-                    </a:lnT>
-                    <a:lnB w="12700" cap="flat" cmpd="sng" algn="ctr">
-                      <a:solidFill>
-                        <a:srgbClr val="3A4694"/>
-                      </a:solidFill>
-                      <a:prstDash val="solid"/>
-                      <a:round/>
-                      <a:headEnd type="none" w="med" len="med"/>
-                      <a:tailEnd type="none" w="med" len="med"/>
-                    </a:lnB>
-                    <a:solidFill>
-                      <a:srgbClr val="141B45"/>
-                    </a:solidFill>
-                  </a:tcPr>
-                </a:tc>
-                <a:tc>
-                  <a:txBody>
-                    <a:bodyPr/>
-                    <a:lstStyle/>
-                    <a:p>
-                      <a:pPr indent="0" marL="0">
-                        <a:buNone/>
-                      </a:pPr>
-                      <a:r>
-                        <a:rPr lang="en-US" sz="1500" dirty="0">
-                          <a:solidFill>
-                            <a:srgbClr val="FFFFFF"/>
-                          </a:solidFill>
-                          <a:latin typeface="Calibri" pitchFamily="34" charset="0"/>
-                          <a:ea typeface="Calibri" pitchFamily="34" charset="-122"/>
-                          <a:cs typeface="Calibri" pitchFamily="34" charset="-120"/>
-                        </a:rPr>
-                        <a:t>Solution Methodology &amp; Modules Description</a:t>
-                      </a:r>
-                      <a:endParaRPr lang="en-US" sz="1500" dirty="0">
-                        <a:latin typeface="Calibri" charset="0"/>
-                        <a:ea typeface="Calibri" charset="0"/>
-                        <a:cs typeface="Calibri" charset="0"/>
-                      </a:endParaRPr>
-                    </a:p>
-                  </a:txBody>
-                  <a:tcPr marL="91440" marR="91440" marT="45720" marB="45720" anchor="ctr">
-                    <a:lnL w="12700" cap="flat" cmpd="sng" algn="ctr">
-                      <a:solidFill>
-                        <a:srgbClr val="3A4694"/>
-                      </a:solidFill>
-                      <a:prstDash val="solid"/>
-                      <a:round/>
-                      <a:headEnd type="none" w="med" len="med"/>
-                      <a:tailEnd type="none" w="med" len="med"/>
-                    </a:lnL>
-                    <a:lnR w="12700" cap="flat" cmpd="sng" algn="ctr">
-                      <a:solidFill>
-                        <a:srgbClr val="3A4694"/>
-                      </a:solidFill>
-                      <a:prstDash val="solid"/>
-                      <a:round/>
-                      <a:headEnd type="none" w="med" len="med"/>
-                      <a:tailEnd type="none" w="med" len="med"/>
-                    </a:lnR>
-                    <a:lnT w="12700" cap="flat" cmpd="sng" algn="ctr">
-                      <a:solidFill>
-                        <a:srgbClr val="3A4694"/>
-                      </a:solidFill>
-                      <a:prstDash val="solid"/>
-                      <a:round/>
-                      <a:headEnd type="none" w="med" len="med"/>
-                      <a:tailEnd type="none" w="med" len="med"/>
-                    </a:lnT>
-                    <a:lnB w="12700" cap="flat" cmpd="sng" algn="ctr">
-                      <a:solidFill>
-                        <a:srgbClr val="3A4694"/>
-                      </a:solidFill>
-                      <a:prstDash val="solid"/>
-                      <a:round/>
-                      <a:headEnd type="none" w="med" len="med"/>
-                      <a:tailEnd type="none" w="med" len="med"/>
-                    </a:lnB>
-                    <a:solidFill>
-                      <a:srgbClr val="141B45"/>
-                    </a:solidFill>
-                  </a:tcPr>
-                </a:tc>
-                <a:tc>
-                  <a:txBody>
-                    <a:bodyPr/>
-                    <a:lstStyle/>
-                    <a:p>
-                      <a:pPr algn="ctr" indent="0" marL="0">
-                        <a:buNone/>
-                      </a:pPr>
-                      <a:r>
-                        <a:rPr lang="en-US" sz="1500" b="1" dirty="0">
-                          <a:solidFill>
-                            <a:srgbClr val="FFFFFF"/>
-                          </a:solidFill>
-                          <a:latin typeface="Calibri" pitchFamily="34" charset="0"/>
-                          <a:ea typeface="Calibri" pitchFamily="34" charset="-122"/>
-                          <a:cs typeface="Calibri" pitchFamily="34" charset="-120"/>
-                        </a:rPr>
-                        <a:t>13</a:t>
-                      </a:r>
-                      <a:endParaRPr lang="en-US" sz="1500" dirty="0">
-                        <a:latin typeface="Calibri" charset="0"/>
-                        <a:ea typeface="Calibri" charset="0"/>
-                        <a:cs typeface="Calibri" charset="0"/>
-                      </a:endParaRPr>
-                    </a:p>
-                  </a:txBody>
-                  <a:tcPr marL="91440" marR="91440" marT="45720" marB="45720" anchor="ctr">
-                    <a:lnL w="12700" cap="flat" cmpd="sng" algn="ctr">
-                      <a:solidFill>
-                        <a:srgbClr val="3A4694"/>
-                      </a:solidFill>
-                      <a:prstDash val="solid"/>
-                      <a:round/>
-                      <a:headEnd type="none" w="med" len="med"/>
-                      <a:tailEnd type="none" w="med" len="med"/>
-                    </a:lnL>
-                    <a:lnR w="12700" cap="flat" cmpd="sng" algn="ctr">
-                      <a:solidFill>
-                        <a:srgbClr val="3A4694"/>
-                      </a:solidFill>
-                      <a:prstDash val="solid"/>
-                      <a:round/>
-                      <a:headEnd type="none" w="med" len="med"/>
-                      <a:tailEnd type="none" w="med" len="med"/>
-                    </a:lnR>
-                    <a:lnT w="12700" cap="flat" cmpd="sng" algn="ctr">
-                      <a:solidFill>
-                        <a:srgbClr val="3A4694"/>
-                      </a:solidFill>
-                      <a:prstDash val="solid"/>
-                      <a:round/>
-                      <a:headEnd type="none" w="med" len="med"/>
-                      <a:tailEnd type="none" w="med" len="med"/>
-                    </a:lnT>
-                    <a:lnB w="12700" cap="flat" cmpd="sng" algn="ctr">
-                      <a:solidFill>
-                        <a:srgbClr val="3A4694"/>
-                      </a:solidFill>
-                      <a:prstDash val="solid"/>
-                      <a:round/>
-                      <a:headEnd type="none" w="med" len="med"/>
-                      <a:tailEnd type="none" w="med" len="med"/>
-                    </a:lnB>
-                    <a:solidFill>
-                      <a:srgbClr val="141B45"/>
-                    </a:solidFill>
-                  </a:tcPr>
-                </a:tc>
-              </a:tr>
-              <a:tr h="566928">
-                <a:tc>
-                  <a:txBody>
-                    <a:bodyPr/>
-                    <a:lstStyle/>
-                    <a:p>
-                      <a:pPr indent="0" marL="0">
-                        <a:buNone/>
-                      </a:pPr>
-                      <a:endParaRPr lang="en-US" sz="1500" dirty="0">
-                        <a:latin typeface="Calibri" charset="0"/>
-                        <a:ea typeface="Calibri" charset="0"/>
-                        <a:cs typeface="Calibri" charset="0"/>
-                      </a:endParaRPr>
-                    </a:p>
-                  </a:txBody>
-                  <a:tcPr marL="91440" marR="91440" marT="45720" marB="45720" anchor="ctr">
-                    <a:lnL w="12700" cap="flat" cmpd="sng" algn="ctr">
-                      <a:solidFill>
-                        <a:srgbClr val="3A4694"/>
-                      </a:solidFill>
-                      <a:prstDash val="solid"/>
-                      <a:round/>
-                      <a:headEnd type="none" w="med" len="med"/>
-                      <a:tailEnd type="none" w="med" len="med"/>
-                    </a:lnL>
-                    <a:lnR w="12700" cap="flat" cmpd="sng" algn="ctr">
-                      <a:solidFill>
-                        <a:srgbClr val="3A4694"/>
-                      </a:solidFill>
-                      <a:prstDash val="solid"/>
-                      <a:round/>
-                      <a:headEnd type="none" w="med" len="med"/>
-                      <a:tailEnd type="none" w="med" len="med"/>
-                    </a:lnR>
-                    <a:lnT w="12700" cap="flat" cmpd="sng" algn="ctr">
-                      <a:solidFill>
-                        <a:srgbClr val="3A4694"/>
-                      </a:solidFill>
-                      <a:prstDash val="solid"/>
-                      <a:round/>
-                      <a:headEnd type="none" w="med" len="med"/>
-                      <a:tailEnd type="none" w="med" len="med"/>
-                    </a:lnT>
-                    <a:lnB w="12700" cap="flat" cmpd="sng" algn="ctr">
-                      <a:solidFill>
-                        <a:srgbClr val="3A4694"/>
-                      </a:solidFill>
-                      <a:prstDash val="solid"/>
-                      <a:round/>
-                      <a:headEnd type="none" w="med" len="med"/>
-                      <a:tailEnd type="none" w="med" len="med"/>
-                    </a:lnB>
-                    <a:solidFill>
-                      <a:srgbClr val="141B45"/>
-                    </a:solidFill>
-                  </a:tcPr>
-                </a:tc>
-                <a:tc>
-                  <a:txBody>
-                    <a:bodyPr/>
-                    <a:lstStyle/>
-                    <a:p>
-                      <a:pPr indent="0" marL="0">
-                        <a:buNone/>
-                      </a:pPr>
-                      <a:r>
-                        <a:rPr lang="en-US" sz="1500" b="1" dirty="0">
-                          <a:solidFill>
-                            <a:srgbClr val="C9A227"/>
-                          </a:solidFill>
-                          <a:latin typeface="Calibri" pitchFamily="34" charset="0"/>
-                          <a:ea typeface="Calibri" pitchFamily="34" charset="-122"/>
-                          <a:cs typeface="Calibri" pitchFamily="34" charset="-120"/>
-                        </a:rPr>
-                        <a:t>TOTAL</a:t>
-                      </a:r>
-                      <a:endParaRPr lang="en-US" sz="1500" dirty="0">
-                        <a:latin typeface="Calibri" charset="0"/>
-                        <a:ea typeface="Calibri" charset="0"/>
-                        <a:cs typeface="Calibri" charset="0"/>
-                      </a:endParaRPr>
-                    </a:p>
-                  </a:txBody>
-                  <a:tcPr marL="91440" marR="91440" marT="45720" marB="45720" anchor="ctr">
-                    <a:lnL w="12700" cap="flat" cmpd="sng" algn="ctr">
-                      <a:solidFill>
-                        <a:srgbClr val="3A4694"/>
-                      </a:solidFill>
-                      <a:prstDash val="solid"/>
-                      <a:round/>
-                      <a:headEnd type="none" w="med" len="med"/>
-                      <a:tailEnd type="none" w="med" len="med"/>
-                    </a:lnL>
-                    <a:lnR w="12700" cap="flat" cmpd="sng" algn="ctr">
-                      <a:solidFill>
-                        <a:srgbClr val="3A4694"/>
-                      </a:solidFill>
-                      <a:prstDash val="solid"/>
-                      <a:round/>
-                      <a:headEnd type="none" w="med" len="med"/>
-                      <a:tailEnd type="none" w="med" len="med"/>
-                    </a:lnR>
-                    <a:lnT w="12700" cap="flat" cmpd="sng" algn="ctr">
-                      <a:solidFill>
-                        <a:srgbClr val="3A4694"/>
-                      </a:solidFill>
-                      <a:prstDash val="solid"/>
-                      <a:round/>
-                      <a:headEnd type="none" w="med" len="med"/>
-                      <a:tailEnd type="none" w="med" len="med"/>
-                    </a:lnT>
-                    <a:lnB w="12700" cap="flat" cmpd="sng" algn="ctr">
-                      <a:solidFill>
-                        <a:srgbClr val="3A4694"/>
-                      </a:solidFill>
-                      <a:prstDash val="solid"/>
-                      <a:round/>
-                      <a:headEnd type="none" w="med" len="med"/>
-                      <a:tailEnd type="none" w="med" len="med"/>
-                    </a:lnB>
-                    <a:solidFill>
-                      <a:srgbClr val="141B45"/>
-                    </a:solidFill>
-                  </a:tcPr>
-                </a:tc>
-                <a:tc>
-                  <a:txBody>
-                    <a:bodyPr/>
-                    <a:lstStyle/>
-                    <a:p>
-                      <a:pPr algn="ctr" indent="0" marL="0">
-                        <a:buNone/>
-                      </a:pPr>
-                      <a:r>
-                        <a:rPr lang="en-US" sz="1500" b="1" dirty="0">
-                          <a:solidFill>
-                            <a:srgbClr val="C9A227"/>
-                          </a:solidFill>
-                          <a:latin typeface="Calibri" pitchFamily="34" charset="0"/>
-                          <a:ea typeface="Calibri" pitchFamily="34" charset="-122"/>
-                          <a:cs typeface="Calibri" pitchFamily="34" charset="-120"/>
-                        </a:rPr>
-                        <a:t>30</a:t>
-                      </a:r>
-                      <a:endParaRPr lang="en-US" sz="1500" dirty="0">
-                        <a:latin typeface="Calibri" charset="0"/>
-                        <a:ea typeface="Calibri" charset="0"/>
-                        <a:cs typeface="Calibri" charset="0"/>
-                      </a:endParaRPr>
-                    </a:p>
-                  </a:txBody>
-                  <a:tcPr marL="91440" marR="91440" marT="45720" marB="45720" anchor="ctr">
-                    <a:lnL w="12700" cap="flat" cmpd="sng" algn="ctr">
-                      <a:solidFill>
-                        <a:srgbClr val="3A4694"/>
-                      </a:solidFill>
-                      <a:prstDash val="solid"/>
-                      <a:round/>
-                      <a:headEnd type="none" w="med" len="med"/>
-                      <a:tailEnd type="none" w="med" len="med"/>
-                    </a:lnL>
-                    <a:lnR w="12700" cap="flat" cmpd="sng" algn="ctr">
-                      <a:solidFill>
-                        <a:srgbClr val="3A4694"/>
-                      </a:solidFill>
-                      <a:prstDash val="solid"/>
-                      <a:round/>
-                      <a:headEnd type="none" w="med" len="med"/>
-                      <a:tailEnd type="none" w="med" len="med"/>
-                    </a:lnR>
-                    <a:lnT w="12700" cap="flat" cmpd="sng" algn="ctr">
-                      <a:solidFill>
-                        <a:srgbClr val="3A4694"/>
-                      </a:solidFill>
-                      <a:prstDash val="solid"/>
-                      <a:round/>
-                      <a:headEnd type="none" w="med" len="med"/>
-                      <a:tailEnd type="none" w="med" len="med"/>
-                    </a:lnT>
-                    <a:lnB w="12700" cap="flat" cmpd="sng" algn="ctr">
-                      <a:solidFill>
-                        <a:srgbClr val="3A4694"/>
-                      </a:solidFill>
-                      <a:prstDash val="solid"/>
-                      <a:round/>
-                      <a:headEnd type="none" w="med" len="med"/>
-                      <a:tailEnd type="none" w="med" len="med"/>
-                    </a:lnB>
-                    <a:solidFill>
-                      <a:srgbClr val="141B45"/>
-                    </a:solidFill>
-                  </a:tcPr>
-                </a:tc>
-              </a:tr>
-            </a:tbl>
-          </a:graphicData>
-        </a:graphic>
-      </p:graphicFrame>
-      <p:sp>
-        <p:nvSpPr>
-          <p:cNvPr id="7" name="Text 3"/>
+      <p:sp>
+        <p:nvSpPr>
+          <p:cNvPr id="5" name="Text 2"/>
+          <p:cNvSpPr txBox="1"/>
+          <p:nvPr/>
+        </p:nvSpPr>
+        <p:spPr>
+          <a:xfrm>
+            <a:off x="640080" y="1554480"/>
+            <a:ext cx="10881360" cy="4572000"/>
+          </a:xfrm>
+          <a:prstGeom prst="rect">
+            <a:avLst/>
+          </a:prstGeom>
+          <a:noFill/>
+          <a:ln/>
+        </p:spPr>
+        <p:txBody>
+          <a:bodyPr wrap="square" lIns="0" tIns="0" rIns="0" bIns="0" rtlCol="0" anchor="t"/>
+          <a:lstStyle/>
+          <a:p>
+            <a:pPr indent="0" marL="0">
+              <a:spcAft>
+                <a:spcPts val="1400"/>
+              </a:spcAft>
+              <a:buNone/>
+            </a:pPr>
+            <a:r>
+              <a:rPr lang="en-US" sz="1400" dirty="0">
+                <a:solidFill>
+                  <a:srgbClr val="CADCFC"/>
+                </a:solidFill>
+                <a:latin typeface="Calibri" pitchFamily="34" charset="0"/>
+                <a:ea typeface="Calibri" pitchFamily="34" charset="-122"/>
+                <a:cs typeface="Calibri" pitchFamily="34" charset="-120"/>
+              </a:rPr>
+              <a:t>1. Krawetz, “A Picture's Worth… Digital Image Analysis and Forensics,” Hacker Factor Solutions, 2007</a:t>
+            </a:r>
+            <a:endParaRPr lang="en-US" sz="1400" dirty="0"/>
+          </a:p>
+          <a:p>
+            <a:pPr indent="0" marL="0">
+              <a:spcAft>
+                <a:spcPts val="1400"/>
+              </a:spcAft>
+              <a:buNone/>
+            </a:pPr>
+            <a:r>
+              <a:rPr lang="en-US" sz="1400" dirty="0">
+                <a:solidFill>
+                  <a:srgbClr val="CADCFC"/>
+                </a:solidFill>
+                <a:latin typeface="Calibri" pitchFamily="34" charset="0"/>
+                <a:ea typeface="Calibri" pitchFamily="34" charset="-122"/>
+                <a:cs typeface="Calibri" pitchFamily="34" charset="-120"/>
+              </a:rPr>
+              <a:t>2. Chen &amp; Guestrin, “XGBoost: A Scalable Tree Boosting System,” ACM SIGKDD, 2016</a:t>
+            </a:r>
+            <a:endParaRPr lang="en-US" sz="1400" dirty="0"/>
+          </a:p>
+          <a:p>
+            <a:pPr indent="0" marL="0">
+              <a:spcAft>
+                <a:spcPts val="1400"/>
+              </a:spcAft>
+              <a:buNone/>
+            </a:pPr>
+            <a:r>
+              <a:rPr lang="en-US" sz="1400" dirty="0">
+                <a:solidFill>
+                  <a:srgbClr val="CADCFC"/>
+                </a:solidFill>
+                <a:latin typeface="Calibri" pitchFamily="34" charset="0"/>
+                <a:ea typeface="Calibri" pitchFamily="34" charset="-122"/>
+                <a:cs typeface="Calibri" pitchFamily="34" charset="-120"/>
+              </a:rPr>
+              <a:t>3. Reserve Bank of India, “Master Direction - NBFC Account Aggregator Directions,” RBI/DNBR/2016-17/45</a:t>
+            </a:r>
+            <a:endParaRPr lang="en-US" sz="1400" dirty="0"/>
+          </a:p>
+          <a:p>
+            <a:pPr indent="0" marL="0">
+              <a:spcAft>
+                <a:spcPts val="1400"/>
+              </a:spcAft>
+              <a:buNone/>
+            </a:pPr>
+            <a:r>
+              <a:rPr lang="en-US" sz="1400" dirty="0">
+                <a:solidFill>
+                  <a:srgbClr val="CADCFC"/>
+                </a:solidFill>
+                <a:latin typeface="Calibri" pitchFamily="34" charset="0"/>
+                <a:ea typeface="Calibri" pitchFamily="34" charset="-122"/>
+                <a:cs typeface="Calibri" pitchFamily="34" charset="-120"/>
+              </a:rPr>
+              <a:t>4. PyMuPDF Contributors, PyMuPDF Documentation, 2024 - pymupdf.readthedocs.io</a:t>
+            </a:r>
+            <a:endParaRPr lang="en-US" sz="1400" dirty="0"/>
+          </a:p>
+          <a:p>
+            <a:pPr indent="0" marL="0">
+              <a:spcAft>
+                <a:spcPts val="1400"/>
+              </a:spcAft>
+              <a:buNone/>
+            </a:pPr>
+            <a:r>
+              <a:rPr lang="en-US" sz="1400" dirty="0">
+                <a:solidFill>
+                  <a:srgbClr val="CADCFC"/>
+                </a:solidFill>
+                <a:latin typeface="Calibri" pitchFamily="34" charset="0"/>
+                <a:ea typeface="Calibri" pitchFamily="34" charset="-122"/>
+                <a:cs typeface="Calibri" pitchFamily="34" charset="-120"/>
+              </a:rPr>
+              <a:t>5. Smith, “An Overview of the Tesseract OCR Engine,” ICDAR, 2007</a:t>
+            </a:r>
+            <a:endParaRPr lang="en-US" sz="1400" dirty="0"/>
+          </a:p>
+          <a:p>
+            <a:pPr indent="0" marL="0">
+              <a:spcAft>
+                <a:spcPts val="1400"/>
+              </a:spcAft>
+              <a:buNone/>
+            </a:pPr>
+            <a:r>
+              <a:rPr lang="en-US" sz="1400" dirty="0">
+                <a:solidFill>
+                  <a:srgbClr val="CADCFC"/>
+                </a:solidFill>
+                <a:latin typeface="Calibri" pitchFamily="34" charset="0"/>
+                <a:ea typeface="Calibri" pitchFamily="34" charset="-122"/>
+                <a:cs typeface="Calibri" pitchFamily="34" charset="-120"/>
+              </a:rPr>
+              <a:t>6. Oracle Corp., “MySQL 8.0 Reference Manual,” 2024 - dev.mysql.com/doc/refman/8.0/en</a:t>
+            </a:r>
+            <a:endParaRPr lang="en-US" sz="1400" dirty="0"/>
+          </a:p>
+          <a:p>
+            <a:pPr indent="0" marL="0">
+              <a:spcAft>
+                <a:spcPts val="1400"/>
+              </a:spcAft>
+              <a:buNone/>
+            </a:pPr>
+            <a:r>
+              <a:rPr lang="en-US" sz="1400" dirty="0">
+                <a:solidFill>
+                  <a:srgbClr val="CADCFC"/>
+                </a:solidFill>
+                <a:latin typeface="Calibri" pitchFamily="34" charset="0"/>
+                <a:ea typeface="Calibri" pitchFamily="34" charset="-122"/>
+                <a:cs typeface="Calibri" pitchFamily="34" charset="-120"/>
+              </a:rPr>
+              <a:t>7. “Give Me Some Credit” dataset, Kaggle - kaggle.com/c/GiveMeSomeCredit</a:t>
+            </a:r>
+            <a:endParaRPr lang="en-US" sz="1400" dirty="0"/>
+          </a:p>
+          <a:p>
+            <a:pPr indent="0" marL="0">
+              <a:spcAft>
+                <a:spcPts val="1400"/>
+              </a:spcAft>
+              <a:buNone/>
+            </a:pPr>
+            <a:r>
+              <a:rPr lang="en-US" sz="1400" dirty="0">
+                <a:solidFill>
+                  <a:srgbClr val="CADCFC"/>
+                </a:solidFill>
+                <a:latin typeface="Calibri" pitchFamily="34" charset="0"/>
+                <a:ea typeface="Calibri" pitchFamily="34" charset="-122"/>
+                <a:cs typeface="Calibri" pitchFamily="34" charset="-120"/>
+              </a:rPr>
+              <a:t>8. FastAPI Documentation - fastapi.tiangolo.com</a:t>
+            </a:r>
+            <a:endParaRPr lang="en-US" sz="1400" dirty="0"/>
+          </a:p>
+          <a:p>
+            <a:pPr indent="0" marL="0">
+              <a:spcAft>
+                <a:spcPts val="1400"/>
+              </a:spcAft>
+              <a:buNone/>
+            </a:pPr>
+            <a:r>
+              <a:rPr lang="en-US" sz="1400" dirty="0">
+                <a:solidFill>
+                  <a:srgbClr val="CADCFC"/>
+                </a:solidFill>
+                <a:latin typeface="Calibri" pitchFamily="34" charset="0"/>
+                <a:ea typeface="Calibri" pitchFamily="34" charset="-122"/>
+                <a:cs typeface="Calibri" pitchFamily="34" charset="-120"/>
+              </a:rPr>
+              <a:t>9. Next.js Documentation - nextjs.org/docs</a:t>
+            </a:r>
+            <a:endParaRPr lang="en-US" sz="1400" dirty="0"/>
+          </a:p>
+        </p:txBody>
+      </p:sp>
+      <p:sp>
+        <p:nvSpPr>
+          <p:cNvPr id="6" name="Text 3"/>
           <p:cNvSpPr txBox="1"/>
           <p:nvPr/>
         </p:nvSpPr>
@@ -9089,7 +7879,7 @@
       </p:sp>
       <p:sp>
         <p:nvSpPr>
-          <p:cNvPr id="8" name="Text 4"/>
+          <p:cNvPr id="7" name="Text 4"/>
           <p:cNvSpPr txBox="1"/>
           <p:nvPr/>
         </p:nvSpPr>
@@ -9121,6 +7911,340 @@
                 <a:cs typeface="Calibri" pitchFamily="34" charset="-120"/>
               </a:rPr>
               <a:t>17</a:t>
+            </a:r>
+            <a:endParaRPr lang="en-US" sz="900" dirty="0"/>
+          </a:p>
+        </p:txBody>
+      </p:sp>
+    </p:spTree>
+  </p:cSld>
+  <p:clrMapOvr>
+    <a:masterClrMapping/>
+  </p:clrMapOvr>
+</p:sld>
+</file>
+
+<file path=ppt/slides/slide18.xml><?xml version="1.0" encoding="utf-8"?>
+<p:sld xmlns:a="http://schemas.openxmlformats.org/drawingml/2006/main" xmlns:r="http://schemas.openxmlformats.org/officeDocument/2006/relationships" xmlns:p="http://schemas.openxmlformats.org/presentationml/2006/main">
+  <p:cSld name="Slide 18">
+    <p:bg>
+      <p:bgPr>
+        <a:solidFill>
+          <a:srgbClr val="1E2761"/>
+        </a:solidFill>
+      </p:bgPr>
+    </p:bg>
+    <p:spTree>
+      <p:nvGrpSpPr>
+        <p:cNvPr id="1" name=""/>
+        <p:cNvGrpSpPr/>
+        <p:nvPr/>
+      </p:nvGrpSpPr>
+      <p:grpSpPr>
+        <a:xfrm>
+          <a:off x="0" y="0"/>
+          <a:ext cx="0" cy="0"/>
+          <a:chOff x="0" y="0"/>
+          <a:chExt cx="0" cy="0"/>
+        </a:xfrm>
+      </p:grpSpPr>
+      <p:sp>
+        <p:nvSpPr>
+          <p:cNvPr id="2" name="Shape 0"/>
+          <p:cNvSpPr/>
+          <p:nvPr/>
+        </p:nvSpPr>
+        <p:spPr>
+          <a:xfrm>
+            <a:off x="9692640" y="-1280160"/>
+            <a:ext cx="4114800" cy="4114800"/>
+          </a:xfrm>
+          <a:prstGeom prst="ellipse">
+            <a:avLst/>
+          </a:prstGeom>
+          <a:solidFill>
+            <a:srgbClr val="141B45"/>
+          </a:solidFill>
+          <a:ln/>
+        </p:spPr>
+      </p:sp>
+      <p:sp>
+        <p:nvSpPr>
+          <p:cNvPr id="3" name="Shape 1"/>
+          <p:cNvSpPr/>
+          <p:nvPr/>
+        </p:nvSpPr>
+        <p:spPr>
+          <a:xfrm>
+            <a:off x="-1463040" y="5120640"/>
+            <a:ext cx="3291840" cy="3291840"/>
+          </a:xfrm>
+          <a:prstGeom prst="ellipse">
+            <a:avLst/>
+          </a:prstGeom>
+          <a:solidFill>
+            <a:srgbClr val="141B45"/>
+          </a:solidFill>
+          <a:ln/>
+        </p:spPr>
+      </p:sp>
+      <p:sp>
+        <p:nvSpPr>
+          <p:cNvPr id="4" name="Shape 2"/>
+          <p:cNvSpPr/>
+          <p:nvPr/>
+        </p:nvSpPr>
+        <p:spPr>
+          <a:xfrm>
+            <a:off x="5632704" y="1371600"/>
+            <a:ext cx="914400" cy="914400"/>
+          </a:xfrm>
+          <a:prstGeom prst="ellipse">
+            <a:avLst/>
+          </a:prstGeom>
+          <a:solidFill>
+            <a:srgbClr val="C9A227"/>
+          </a:solidFill>
+          <a:ln/>
+        </p:spPr>
+      </p:sp>
+      <p:pic>
+        <p:nvPicPr>
+          <p:cNvPr id="5" name="Image 0" descr="preencoded.png">    </p:cNvPr>
+          <p:cNvPicPr>
+            <a:picLocks noChangeAspect="1"/>
+          </p:cNvPicPr>
+          <p:nvPr/>
+        </p:nvPicPr>
+        <p:blipFill>
+          <a:blip r:embed="rId1"/>
+          <a:stretch>
+            <a:fillRect/>
+          </a:stretch>
+        </p:blipFill>
+        <p:spPr>
+          <a:xfrm>
+            <a:off x="5742432" y="1481328"/>
+            <a:ext cx="694944" cy="694944"/>
+          </a:xfrm>
+          <a:prstGeom prst="rect">
+            <a:avLst/>
+          </a:prstGeom>
+        </p:spPr>
+      </p:pic>
+      <p:sp>
+        <p:nvSpPr>
+          <p:cNvPr id="6" name="Text 3"/>
+          <p:cNvSpPr txBox="1"/>
+          <p:nvPr/>
+        </p:nvSpPr>
+        <p:spPr>
+          <a:xfrm>
+            <a:off x="914400" y="2514600"/>
+            <a:ext cx="10360152" cy="1005840"/>
+          </a:xfrm>
+          <a:prstGeom prst="rect">
+            <a:avLst/>
+          </a:prstGeom>
+          <a:noFill/>
+          <a:ln/>
+        </p:spPr>
+        <p:txBody>
+          <a:bodyPr wrap="square" lIns="0" tIns="0" rIns="0" bIns="0" rtlCol="0" anchor="ctr"/>
+          <a:lstStyle/>
+          <a:p>
+            <a:pPr algn="ctr" indent="0" marL="0">
+              <a:buNone/>
+            </a:pPr>
+            <a:r>
+              <a:rPr lang="en-US" sz="4400" b="1" dirty="0">
+                <a:solidFill>
+                  <a:srgbClr val="FFFFFF"/>
+                </a:solidFill>
+                <a:latin typeface="Cambria" pitchFamily="34" charset="0"/>
+                <a:ea typeface="Cambria" pitchFamily="34" charset="-122"/>
+                <a:cs typeface="Cambria" pitchFamily="34" charset="-120"/>
+              </a:rPr>
+              <a:t>Thank You</a:t>
+            </a:r>
+            <a:endParaRPr lang="en-US" sz="4400" dirty="0"/>
+          </a:p>
+        </p:txBody>
+      </p:sp>
+      <p:sp>
+        <p:nvSpPr>
+          <p:cNvPr id="7" name="Text 4"/>
+          <p:cNvSpPr txBox="1"/>
+          <p:nvPr/>
+        </p:nvSpPr>
+        <p:spPr>
+          <a:xfrm>
+            <a:off x="914400" y="3520440"/>
+            <a:ext cx="10360152" cy="502920"/>
+          </a:xfrm>
+          <a:prstGeom prst="rect">
+            <a:avLst/>
+          </a:prstGeom>
+          <a:noFill/>
+          <a:ln/>
+        </p:spPr>
+        <p:txBody>
+          <a:bodyPr wrap="square" lIns="0" tIns="0" rIns="0" bIns="0" rtlCol="0" anchor="ctr"/>
+          <a:lstStyle/>
+          <a:p>
+            <a:pPr algn="ctr" indent="0" marL="0">
+              <a:buNone/>
+            </a:pPr>
+            <a:r>
+              <a:rPr lang="en-US" sz="1800" i="1" dirty="0">
+                <a:solidFill>
+                  <a:srgbClr val="CADCFC"/>
+                </a:solidFill>
+                <a:latin typeface="Calibri" pitchFamily="34" charset="0"/>
+                <a:ea typeface="Calibri" pitchFamily="34" charset="-122"/>
+                <a:cs typeface="Calibri" pitchFamily="34" charset="-120"/>
+              </a:rPr>
+              <a:t>Questions &amp; Discussion</a:t>
+            </a:r>
+            <a:endParaRPr lang="en-US" sz="1800" dirty="0"/>
+          </a:p>
+        </p:txBody>
+      </p:sp>
+      <p:sp>
+        <p:nvSpPr>
+          <p:cNvPr id="8" name="Shape 5"/>
+          <p:cNvSpPr/>
+          <p:nvPr/>
+        </p:nvSpPr>
+        <p:spPr>
+          <a:xfrm>
+            <a:off x="4718304" y="4343400"/>
+            <a:ext cx="2743200" cy="0"/>
+          </a:xfrm>
+          <a:prstGeom prst="line">
+            <a:avLst/>
+          </a:prstGeom>
+          <a:noFill/>
+          <a:ln w="12700">
+            <a:solidFill>
+              <a:srgbClr val="3A4694"/>
+            </a:solidFill>
+            <a:prstDash val="solid"/>
+          </a:ln>
+        </p:spPr>
+      </p:sp>
+      <p:sp>
+        <p:nvSpPr>
+          <p:cNvPr id="9" name="Text 6"/>
+          <p:cNvSpPr txBox="1"/>
+          <p:nvPr/>
+        </p:nvSpPr>
+        <p:spPr>
+          <a:xfrm>
+            <a:off x="914400" y="4526280"/>
+            <a:ext cx="10360152" cy="365760"/>
+          </a:xfrm>
+          <a:prstGeom prst="rect">
+            <a:avLst/>
+          </a:prstGeom>
+          <a:noFill/>
+          <a:ln/>
+        </p:spPr>
+        <p:txBody>
+          <a:bodyPr wrap="square" lIns="0" tIns="0" rIns="0" bIns="0" rtlCol="0" anchor="ctr"/>
+          <a:lstStyle/>
+          <a:p>
+            <a:pPr algn="ctr" indent="0" marL="0">
+              <a:buNone/>
+            </a:pPr>
+            <a:r>
+              <a:rPr lang="en-US" sz="1400" dirty="0">
+                <a:solidFill>
+                  <a:srgbClr val="CADCFC"/>
+                </a:solidFill>
+                <a:latin typeface="Calibri" pitchFamily="34" charset="0"/>
+                <a:ea typeface="Calibri" pitchFamily="34" charset="-122"/>
+                <a:cs typeface="Calibri" pitchFamily="34" charset="-120"/>
+              </a:rPr>
+              <a:t>Naresh S  |  Roll No: 2436MCA0047</a:t>
+            </a:r>
+            <a:endParaRPr lang="en-US" sz="1400" dirty="0"/>
+          </a:p>
+        </p:txBody>
+      </p:sp>
+      <p:sp>
+        <p:nvSpPr>
+          <p:cNvPr id="10" name="Text 7"/>
+          <p:cNvSpPr txBox="1"/>
+          <p:nvPr/>
+        </p:nvSpPr>
+        <p:spPr>
+          <a:xfrm>
+            <a:off x="457200" y="6510528"/>
+            <a:ext cx="9601200" cy="274320"/>
+          </a:xfrm>
+          <a:prstGeom prst="rect">
+            <a:avLst/>
+          </a:prstGeom>
+          <a:noFill/>
+          <a:ln/>
+        </p:spPr>
+        <p:txBody>
+          <a:bodyPr wrap="square" lIns="0" tIns="0" rIns="0" bIns="0" rtlCol="0" anchor="ctr"/>
+          <a:lstStyle/>
+          <a:p>
+            <a:pPr indent="0" marL="0">
+              <a:buNone/>
+            </a:pPr>
+            <a:r>
+              <a:rPr lang="en-US" sz="900" dirty="0">
+                <a:solidFill>
+                  <a:srgbClr val="8A95C4"/>
+                </a:solidFill>
+                <a:latin typeface="Calibri" pitchFamily="34" charset="0"/>
+                <a:ea typeface="Calibri" pitchFamily="34" charset="-122"/>
+                <a:cs typeface="Calibri" pitchFamily="34" charset="-120"/>
+              </a:rPr>
+              <a:t>First Review – Automated AI-Driven Loan Underwriting &amp; Document Fraud Detection</a:t>
+            </a:r>
+            <a:endParaRPr lang="en-US" sz="900" dirty="0"/>
+          </a:p>
+        </p:txBody>
+      </p:sp>
+      <p:sp>
+        <p:nvSpPr>
+          <p:cNvPr id="11" name="Text 8"/>
+          <p:cNvSpPr txBox="1"/>
+          <p:nvPr/>
+        </p:nvSpPr>
+        <p:spPr>
+          <a:xfrm>
+            <a:off x="11430000" y="6510528"/>
+            <a:ext cx="365760" cy="274320"/>
+          </a:xfrm>
+          <a:prstGeom prst="rect">
+            <a:avLst/>
+          </a:prstGeom>
+          <a:noFill/>
+          <a:ln/>
+        </p:spPr>
+        <p:txBody>
+          <a:bodyPr wrap="square" lIns="0" tIns="0" rIns="0" bIns="0" rtlCol="0" anchor="ctr"/>
+          <a:lstStyle/>
+          <a:p>
+            <a:pPr algn="r" indent="0" marL="0">
+              <a:buNone/>
+            </a:pPr>
+            <a:r>
+              <a:rPr lang="en-US" sz="900" dirty="0">
+                <a:solidFill>
+                  <a:srgbClr val="8A95C4"/>
+                </a:solidFill>
+                <a:latin typeface="Calibri" pitchFamily="34" charset="0"/>
+                <a:ea typeface="Calibri" pitchFamily="34" charset="-122"/>
+                <a:cs typeface="Calibri" pitchFamily="34" charset="-120"/>
+              </a:rPr>
+              <a:t>18</a:t>
             </a:r>
             <a:endParaRPr lang="en-US" sz="900" dirty="0"/>
           </a:p>
@@ -9283,67 +8407,6 @@
         </p:nvSpPr>
         <p:spPr>
           <a:xfrm>
-            <a:off x="9537192" y="384048"/>
-            <a:ext cx="1737360" cy="411480"/>
-          </a:xfrm>
-          <a:prstGeom prst="roundRect">
-            <a:avLst>
-              <a:gd name="adj" fmla="val 17778"/>
-            </a:avLst>
-          </a:prstGeom>
-          <a:solidFill>
-            <a:srgbClr val="C9A227"/>
-          </a:solidFill>
-          <a:ln/>
-        </p:spPr>
-      </p:sp>
-      <p:sp>
-        <p:nvSpPr>
-          <p:cNvPr id="6" name="Text 4"/>
-          <p:cNvSpPr txBox="1"/>
-          <p:nvPr/>
-        </p:nvSpPr>
-        <p:spPr>
-          <a:xfrm>
-            <a:off x="9537192" y="384048"/>
-            <a:ext cx="1737360" cy="411480"/>
-          </a:xfrm>
-          <a:prstGeom prst="rect">
-            <a:avLst/>
-          </a:prstGeom>
-          <a:noFill/>
-          <a:ln/>
-        </p:spPr>
-        <p:txBody>
-          <a:bodyPr wrap="square" lIns="0" tIns="0" rIns="0" bIns="0" rtlCol="0" anchor="ctr"/>
-          <a:lstStyle/>
-          <a:p>
-            <a:pPr algn="ctr" indent="0" marL="0">
-              <a:buNone/>
-            </a:pPr>
-            <a:r>
-              <a:rPr lang="en-US" sz="1300" b="1" spc="50" kern="0" dirty="0">
-                <a:solidFill>
-                  <a:srgbClr val="141B45"/>
-                </a:solidFill>
-                <a:latin typeface="Calibri" pitchFamily="34" charset="0"/>
-                <a:ea typeface="Calibri" pitchFamily="34" charset="-122"/>
-                <a:cs typeface="Calibri" pitchFamily="34" charset="-120"/>
-              </a:rPr>
-              <a:t>4 MARKS</a:t>
-            </a:r>
-            <a:endParaRPr lang="en-US" sz="1300" dirty="0"/>
-          </a:p>
-        </p:txBody>
-      </p:sp>
-      <p:sp>
-        <p:nvSpPr>
-          <p:cNvPr id="7" name="Shape 5"/>
-          <p:cNvSpPr/>
-          <p:nvPr/>
-        </p:nvSpPr>
-        <p:spPr>
-          <a:xfrm>
             <a:off x="548640" y="1737360"/>
             <a:ext cx="3566160" cy="2331720"/>
           </a:xfrm>
@@ -9367,7 +8430,7 @@
       </p:sp>
       <p:sp>
         <p:nvSpPr>
-          <p:cNvPr id="8" name="Shape 6"/>
+          <p:cNvPr id="6" name="Shape 4"/>
           <p:cNvSpPr/>
           <p:nvPr/>
         </p:nvSpPr>
@@ -9387,7 +8450,7 @@
       </p:sp>
       <p:pic>
         <p:nvPicPr>
-          <p:cNvPr id="9" name="Image 0" descr="preencoded.png">    </p:cNvPr>
+          <p:cNvPr id="7" name="Image 0" descr="preencoded.png">    </p:cNvPr>
           <p:cNvPicPr>
             <a:picLocks noChangeAspect="1"/>
           </p:cNvPicPr>
@@ -9411,7 +8474,7 @@
       </p:pic>
       <p:sp>
         <p:nvSpPr>
-          <p:cNvPr id="10" name="Text 7"/>
+          <p:cNvPr id="8" name="Text 5"/>
           <p:cNvSpPr txBox="1"/>
           <p:nvPr/>
         </p:nvSpPr>
@@ -9450,7 +8513,7 @@
       </p:sp>
       <p:sp>
         <p:nvSpPr>
-          <p:cNvPr id="11" name="Text 8"/>
+          <p:cNvPr id="9" name="Text 6"/>
           <p:cNvSpPr txBox="1"/>
           <p:nvPr/>
         </p:nvSpPr>
@@ -9489,7 +8552,7 @@
       </p:sp>
       <p:sp>
         <p:nvSpPr>
-          <p:cNvPr id="12" name="Shape 9"/>
+          <p:cNvPr id="10" name="Shape 7"/>
           <p:cNvSpPr/>
           <p:nvPr/>
         </p:nvSpPr>
@@ -9518,7 +8581,7 @@
       </p:sp>
       <p:sp>
         <p:nvSpPr>
-          <p:cNvPr id="13" name="Shape 10"/>
+          <p:cNvPr id="11" name="Shape 8"/>
           <p:cNvSpPr/>
           <p:nvPr/>
         </p:nvSpPr>
@@ -9538,7 +8601,7 @@
       </p:sp>
       <p:pic>
         <p:nvPicPr>
-          <p:cNvPr id="14" name="Image 1" descr="preencoded.png">    </p:cNvPr>
+          <p:cNvPr id="12" name="Image 1" descr="preencoded.png">    </p:cNvPr>
           <p:cNvPicPr>
             <a:picLocks noChangeAspect="1"/>
           </p:cNvPicPr>
@@ -9562,7 +8625,7 @@
       </p:pic>
       <p:sp>
         <p:nvSpPr>
-          <p:cNvPr id="15" name="Text 11"/>
+          <p:cNvPr id="13" name="Text 9"/>
           <p:cNvSpPr txBox="1"/>
           <p:nvPr/>
         </p:nvSpPr>
@@ -9601,7 +8664,7 @@
       </p:sp>
       <p:sp>
         <p:nvSpPr>
-          <p:cNvPr id="16" name="Text 12"/>
+          <p:cNvPr id="14" name="Text 10"/>
           <p:cNvSpPr txBox="1"/>
           <p:nvPr/>
         </p:nvSpPr>
@@ -9640,7 +8703,7 @@
       </p:sp>
       <p:sp>
         <p:nvSpPr>
-          <p:cNvPr id="17" name="Shape 13"/>
+          <p:cNvPr id="15" name="Shape 11"/>
           <p:cNvSpPr/>
           <p:nvPr/>
         </p:nvSpPr>
@@ -9669,7 +8732,7 @@
       </p:sp>
       <p:sp>
         <p:nvSpPr>
-          <p:cNvPr id="18" name="Shape 14"/>
+          <p:cNvPr id="16" name="Shape 12"/>
           <p:cNvSpPr/>
           <p:nvPr/>
         </p:nvSpPr>
@@ -9689,7 +8752,7 @@
       </p:sp>
       <p:pic>
         <p:nvPicPr>
-          <p:cNvPr id="19" name="Image 2" descr="preencoded.png">    </p:cNvPr>
+          <p:cNvPr id="17" name="Image 2" descr="preencoded.png">    </p:cNvPr>
           <p:cNvPicPr>
             <a:picLocks noChangeAspect="1"/>
           </p:cNvPicPr>
@@ -9713,7 +8776,7 @@
       </p:pic>
       <p:sp>
         <p:nvSpPr>
-          <p:cNvPr id="20" name="Text 15"/>
+          <p:cNvPr id="18" name="Text 13"/>
           <p:cNvSpPr txBox="1"/>
           <p:nvPr/>
         </p:nvSpPr>
@@ -9752,7 +8815,7 @@
       </p:sp>
       <p:sp>
         <p:nvSpPr>
-          <p:cNvPr id="21" name="Text 16"/>
+          <p:cNvPr id="19" name="Text 14"/>
           <p:cNvSpPr txBox="1"/>
           <p:nvPr/>
         </p:nvSpPr>
@@ -9791,7 +8854,7 @@
       </p:sp>
       <p:sp>
         <p:nvSpPr>
-          <p:cNvPr id="22" name="Shape 17"/>
+          <p:cNvPr id="20" name="Shape 15"/>
           <p:cNvSpPr/>
           <p:nvPr/>
         </p:nvSpPr>
@@ -9813,7 +8876,7 @@
       </p:sp>
       <p:sp>
         <p:nvSpPr>
-          <p:cNvPr id="23" name="Text 18"/>
+          <p:cNvPr id="21" name="Text 16"/>
           <p:cNvSpPr txBox="1"/>
           <p:nvPr/>
         </p:nvSpPr>
@@ -9852,7 +8915,7 @@
       </p:sp>
       <p:sp>
         <p:nvSpPr>
-          <p:cNvPr id="24" name="Text 19"/>
+          <p:cNvPr id="22" name="Text 17"/>
           <p:cNvSpPr txBox="1"/>
           <p:nvPr/>
         </p:nvSpPr>
@@ -9894,7 +8957,7 @@
       </p:sp>
       <p:sp>
         <p:nvSpPr>
-          <p:cNvPr id="25" name="Text 20"/>
+          <p:cNvPr id="23" name="Text 18"/>
           <p:cNvSpPr txBox="1"/>
           <p:nvPr/>
         </p:nvSpPr>
@@ -9933,7 +8996,7 @@
       </p:sp>
       <p:sp>
         <p:nvSpPr>
-          <p:cNvPr id="26" name="Text 21"/>
+          <p:cNvPr id="24" name="Text 19"/>
           <p:cNvSpPr txBox="1"/>
           <p:nvPr/>
         </p:nvSpPr>
@@ -10127,13 +9190,11 @@
         </p:nvSpPr>
         <p:spPr>
           <a:xfrm>
-            <a:off x="9537192" y="384048"/>
-            <a:ext cx="1737360" cy="411480"/>
-          </a:xfrm>
-          <a:prstGeom prst="roundRect">
-            <a:avLst>
-              <a:gd name="adj" fmla="val 17778"/>
-            </a:avLst>
+            <a:off x="548640" y="1737360"/>
+            <a:ext cx="502920" cy="502920"/>
+          </a:xfrm>
+          <a:prstGeom prst="ellipse">
+            <a:avLst/>
           </a:prstGeom>
           <a:solidFill>
             <a:srgbClr val="C9A227"/>
@@ -10149,65 +9210,6 @@
         </p:nvSpPr>
         <p:spPr>
           <a:xfrm>
-            <a:off x="9537192" y="384048"/>
-            <a:ext cx="1737360" cy="411480"/>
-          </a:xfrm>
-          <a:prstGeom prst="rect">
-            <a:avLst/>
-          </a:prstGeom>
-          <a:noFill/>
-          <a:ln/>
-        </p:spPr>
-        <p:txBody>
-          <a:bodyPr wrap="square" lIns="0" tIns="0" rIns="0" bIns="0" rtlCol="0" anchor="ctr"/>
-          <a:lstStyle/>
-          <a:p>
-            <a:pPr algn="ctr" indent="0" marL="0">
-              <a:buNone/>
-            </a:pPr>
-            <a:r>
-              <a:rPr lang="en-US" sz="1300" b="1" spc="50" kern="0" dirty="0">
-                <a:solidFill>
-                  <a:srgbClr val="141B45"/>
-                </a:solidFill>
-                <a:latin typeface="Calibri" pitchFamily="34" charset="0"/>
-                <a:ea typeface="Calibri" pitchFamily="34" charset="-122"/>
-                <a:cs typeface="Calibri" pitchFamily="34" charset="-120"/>
-              </a:rPr>
-              <a:t>6 MARKS</a:t>
-            </a:r>
-            <a:endParaRPr lang="en-US" sz="1300" dirty="0"/>
-          </a:p>
-        </p:txBody>
-      </p:sp>
-      <p:sp>
-        <p:nvSpPr>
-          <p:cNvPr id="7" name="Shape 5"/>
-          <p:cNvSpPr/>
-          <p:nvPr/>
-        </p:nvSpPr>
-        <p:spPr>
-          <a:xfrm>
-            <a:off x="548640" y="1737360"/>
-            <a:ext cx="502920" cy="502920"/>
-          </a:xfrm>
-          <a:prstGeom prst="ellipse">
-            <a:avLst/>
-          </a:prstGeom>
-          <a:solidFill>
-            <a:srgbClr val="C9A227"/>
-          </a:solidFill>
-          <a:ln/>
-        </p:spPr>
-      </p:sp>
-      <p:sp>
-        <p:nvSpPr>
-          <p:cNvPr id="8" name="Text 6"/>
-          <p:cNvSpPr txBox="1"/>
-          <p:nvPr/>
-        </p:nvSpPr>
-        <p:spPr>
-          <a:xfrm>
             <a:off x="548640" y="1737360"/>
             <a:ext cx="502920" cy="502920"/>
           </a:xfrm>
@@ -10241,7 +9243,7 @@
       </p:sp>
       <p:sp>
         <p:nvSpPr>
-          <p:cNvPr id="9" name="Text 7"/>
+          <p:cNvPr id="7" name="Text 5"/>
           <p:cNvSpPr txBox="1"/>
           <p:nvPr/>
         </p:nvSpPr>
@@ -10280,7 +9282,7 @@
       </p:sp>
       <p:sp>
         <p:nvSpPr>
-          <p:cNvPr id="10" name="Text 8"/>
+          <p:cNvPr id="8" name="Text 6"/>
           <p:cNvSpPr txBox="1"/>
           <p:nvPr/>
         </p:nvSpPr>
@@ -10319,7 +9321,7 @@
       </p:sp>
       <p:sp>
         <p:nvSpPr>
-          <p:cNvPr id="11" name="Shape 9"/>
+          <p:cNvPr id="9" name="Shape 7"/>
           <p:cNvSpPr/>
           <p:nvPr/>
         </p:nvSpPr>
@@ -10342,7 +9344,7 @@
       </p:sp>
       <p:sp>
         <p:nvSpPr>
-          <p:cNvPr id="12" name="Shape 10"/>
+          <p:cNvPr id="10" name="Shape 8"/>
           <p:cNvSpPr/>
           <p:nvPr/>
         </p:nvSpPr>
@@ -10362,7 +9364,7 @@
       </p:sp>
       <p:sp>
         <p:nvSpPr>
-          <p:cNvPr id="13" name="Text 11"/>
+          <p:cNvPr id="11" name="Text 9"/>
           <p:cNvSpPr txBox="1"/>
           <p:nvPr/>
         </p:nvSpPr>
@@ -10401,7 +9403,7 @@
       </p:sp>
       <p:sp>
         <p:nvSpPr>
-          <p:cNvPr id="14" name="Text 12"/>
+          <p:cNvPr id="12" name="Text 10"/>
           <p:cNvSpPr txBox="1"/>
           <p:nvPr/>
         </p:nvSpPr>
@@ -10440,7 +9442,7 @@
       </p:sp>
       <p:sp>
         <p:nvSpPr>
-          <p:cNvPr id="15" name="Text 13"/>
+          <p:cNvPr id="13" name="Text 11"/>
           <p:cNvSpPr txBox="1"/>
           <p:nvPr/>
         </p:nvSpPr>
@@ -10479,7 +9481,7 @@
       </p:sp>
       <p:sp>
         <p:nvSpPr>
-          <p:cNvPr id="16" name="Shape 14"/>
+          <p:cNvPr id="14" name="Shape 12"/>
           <p:cNvSpPr/>
           <p:nvPr/>
         </p:nvSpPr>
@@ -10502,7 +9504,7 @@
       </p:sp>
       <p:sp>
         <p:nvSpPr>
-          <p:cNvPr id="17" name="Shape 15"/>
+          <p:cNvPr id="15" name="Shape 13"/>
           <p:cNvSpPr/>
           <p:nvPr/>
         </p:nvSpPr>
@@ -10522,7 +9524,7 @@
       </p:sp>
       <p:sp>
         <p:nvSpPr>
-          <p:cNvPr id="18" name="Text 16"/>
+          <p:cNvPr id="16" name="Text 14"/>
           <p:cNvSpPr txBox="1"/>
           <p:nvPr/>
         </p:nvSpPr>
@@ -10561,7 +9563,7 @@
       </p:sp>
       <p:sp>
         <p:nvSpPr>
-          <p:cNvPr id="19" name="Text 17"/>
+          <p:cNvPr id="17" name="Text 15"/>
           <p:cNvSpPr txBox="1"/>
           <p:nvPr/>
         </p:nvSpPr>
@@ -10600,7 +9602,7 @@
       </p:sp>
       <p:sp>
         <p:nvSpPr>
-          <p:cNvPr id="20" name="Text 18"/>
+          <p:cNvPr id="18" name="Text 16"/>
           <p:cNvSpPr txBox="1"/>
           <p:nvPr/>
         </p:nvSpPr>
@@ -10639,7 +9641,7 @@
       </p:sp>
       <p:sp>
         <p:nvSpPr>
-          <p:cNvPr id="21" name="Shape 19"/>
+          <p:cNvPr id="19" name="Shape 17"/>
           <p:cNvSpPr/>
           <p:nvPr/>
         </p:nvSpPr>
@@ -10662,7 +9664,7 @@
       </p:sp>
       <p:sp>
         <p:nvSpPr>
-          <p:cNvPr id="22" name="Shape 20"/>
+          <p:cNvPr id="20" name="Shape 18"/>
           <p:cNvSpPr/>
           <p:nvPr/>
         </p:nvSpPr>
@@ -10682,7 +9684,7 @@
       </p:sp>
       <p:sp>
         <p:nvSpPr>
-          <p:cNvPr id="23" name="Text 21"/>
+          <p:cNvPr id="21" name="Text 19"/>
           <p:cNvSpPr txBox="1"/>
           <p:nvPr/>
         </p:nvSpPr>
@@ -10721,7 +9723,7 @@
       </p:sp>
       <p:sp>
         <p:nvSpPr>
-          <p:cNvPr id="24" name="Text 22"/>
+          <p:cNvPr id="22" name="Text 20"/>
           <p:cNvSpPr txBox="1"/>
           <p:nvPr/>
         </p:nvSpPr>
@@ -10760,7 +9762,7 @@
       </p:sp>
       <p:sp>
         <p:nvSpPr>
-          <p:cNvPr id="25" name="Text 23"/>
+          <p:cNvPr id="23" name="Text 21"/>
           <p:cNvSpPr txBox="1"/>
           <p:nvPr/>
         </p:nvSpPr>
@@ -10799,7 +9801,7 @@
       </p:sp>
       <p:sp>
         <p:nvSpPr>
-          <p:cNvPr id="26" name="Shape 24"/>
+          <p:cNvPr id="24" name="Shape 22"/>
           <p:cNvSpPr/>
           <p:nvPr/>
         </p:nvSpPr>
@@ -10822,7 +9824,7 @@
       </p:sp>
       <p:sp>
         <p:nvSpPr>
-          <p:cNvPr id="27" name="Shape 25"/>
+          <p:cNvPr id="25" name="Shape 23"/>
           <p:cNvSpPr/>
           <p:nvPr/>
         </p:nvSpPr>
@@ -10842,7 +9844,7 @@
       </p:sp>
       <p:sp>
         <p:nvSpPr>
-          <p:cNvPr id="28" name="Text 26"/>
+          <p:cNvPr id="26" name="Text 24"/>
           <p:cNvSpPr txBox="1"/>
           <p:nvPr/>
         </p:nvSpPr>
@@ -10881,7 +9883,7 @@
       </p:sp>
       <p:sp>
         <p:nvSpPr>
-          <p:cNvPr id="29" name="Text 27"/>
+          <p:cNvPr id="27" name="Text 25"/>
           <p:cNvSpPr txBox="1"/>
           <p:nvPr/>
         </p:nvSpPr>
@@ -10920,7 +9922,7 @@
       </p:sp>
       <p:sp>
         <p:nvSpPr>
-          <p:cNvPr id="30" name="Text 28"/>
+          <p:cNvPr id="28" name="Text 26"/>
           <p:cNvSpPr txBox="1"/>
           <p:nvPr/>
         </p:nvSpPr>
@@ -10959,7 +9961,7 @@
       </p:sp>
       <p:sp>
         <p:nvSpPr>
-          <p:cNvPr id="31" name="Text 29"/>
+          <p:cNvPr id="29" name="Text 27"/>
           <p:cNvSpPr txBox="1"/>
           <p:nvPr/>
         </p:nvSpPr>
@@ -10998,7 +10000,7 @@
       </p:sp>
       <p:sp>
         <p:nvSpPr>
-          <p:cNvPr id="32" name="Text 30"/>
+          <p:cNvPr id="30" name="Text 28"/>
           <p:cNvSpPr txBox="1"/>
           <p:nvPr/>
         </p:nvSpPr>
@@ -11192,67 +10194,6 @@
         </p:nvSpPr>
         <p:spPr>
           <a:xfrm>
-            <a:off x="9537192" y="384048"/>
-            <a:ext cx="1737360" cy="411480"/>
-          </a:xfrm>
-          <a:prstGeom prst="roundRect">
-            <a:avLst>
-              <a:gd name="adj" fmla="val 17778"/>
-            </a:avLst>
-          </a:prstGeom>
-          <a:solidFill>
-            <a:srgbClr val="C9A227"/>
-          </a:solidFill>
-          <a:ln/>
-        </p:spPr>
-      </p:sp>
-      <p:sp>
-        <p:nvSpPr>
-          <p:cNvPr id="6" name="Text 4"/>
-          <p:cNvSpPr txBox="1"/>
-          <p:nvPr/>
-        </p:nvSpPr>
-        <p:spPr>
-          <a:xfrm>
-            <a:off x="9537192" y="384048"/>
-            <a:ext cx="1737360" cy="411480"/>
-          </a:xfrm>
-          <a:prstGeom prst="rect">
-            <a:avLst/>
-          </a:prstGeom>
-          <a:noFill/>
-          <a:ln/>
-        </p:spPr>
-        <p:txBody>
-          <a:bodyPr wrap="square" lIns="0" tIns="0" rIns="0" bIns="0" rtlCol="0" anchor="ctr"/>
-          <a:lstStyle/>
-          <a:p>
-            <a:pPr algn="ctr" indent="0" marL="0">
-              <a:buNone/>
-            </a:pPr>
-            <a:r>
-              <a:rPr lang="en-US" sz="1300" b="1" spc="50" kern="0" dirty="0">
-                <a:solidFill>
-                  <a:srgbClr val="141B45"/>
-                </a:solidFill>
-                <a:latin typeface="Calibri" pitchFamily="34" charset="0"/>
-                <a:ea typeface="Calibri" pitchFamily="34" charset="-122"/>
-                <a:cs typeface="Calibri" pitchFamily="34" charset="-120"/>
-              </a:rPr>
-              <a:t>6 MARKS</a:t>
-            </a:r>
-            <a:endParaRPr lang="en-US" sz="1300" dirty="0"/>
-          </a:p>
-        </p:txBody>
-      </p:sp>
-      <p:sp>
-        <p:nvSpPr>
-          <p:cNvPr id="7" name="Shape 5"/>
-          <p:cNvSpPr/>
-          <p:nvPr/>
-        </p:nvSpPr>
-        <p:spPr>
-          <a:xfrm>
             <a:off x="548640" y="1691640"/>
             <a:ext cx="5349240" cy="3611880"/>
           </a:xfrm>
@@ -11269,7 +10210,7 @@
       </p:sp>
       <p:sp>
         <p:nvSpPr>
-          <p:cNvPr id="8" name="Shape 6"/>
+          <p:cNvPr id="6" name="Shape 4"/>
           <p:cNvSpPr/>
           <p:nvPr/>
         </p:nvSpPr>
@@ -11289,7 +10230,7 @@
       </p:sp>
       <p:pic>
         <p:nvPicPr>
-          <p:cNvPr id="9" name="Image 0" descr="preencoded.png">    </p:cNvPr>
+          <p:cNvPr id="7" name="Image 0" descr="preencoded.png">    </p:cNvPr>
           <p:cNvPicPr>
             <a:picLocks noChangeAspect="1"/>
           </p:cNvPicPr>
@@ -11313,7 +10254,7 @@
       </p:pic>
       <p:sp>
         <p:nvSpPr>
-          <p:cNvPr id="10" name="Text 7"/>
+          <p:cNvPr id="8" name="Text 5"/>
           <p:cNvSpPr txBox="1"/>
           <p:nvPr/>
         </p:nvSpPr>
@@ -11352,7 +10293,7 @@
       </p:sp>
       <p:sp>
         <p:nvSpPr>
-          <p:cNvPr id="11" name="Text 8"/>
+          <p:cNvPr id="9" name="Text 6"/>
           <p:cNvSpPr txBox="1"/>
           <p:nvPr/>
         </p:nvSpPr>
@@ -11458,7 +10399,7 @@
       </p:sp>
       <p:sp>
         <p:nvSpPr>
-          <p:cNvPr id="12" name="Shape 9"/>
+          <p:cNvPr id="10" name="Shape 7"/>
           <p:cNvSpPr/>
           <p:nvPr/>
         </p:nvSpPr>
@@ -11480,7 +10421,7 @@
       </p:sp>
       <p:sp>
         <p:nvSpPr>
-          <p:cNvPr id="13" name="Shape 10"/>
+          <p:cNvPr id="11" name="Shape 8"/>
           <p:cNvSpPr/>
           <p:nvPr/>
         </p:nvSpPr>
@@ -11500,7 +10441,7 @@
       </p:sp>
       <p:pic>
         <p:nvPicPr>
-          <p:cNvPr id="14" name="Image 1" descr="preencoded.png">    </p:cNvPr>
+          <p:cNvPr id="12" name="Image 1" descr="preencoded.png">    </p:cNvPr>
           <p:cNvPicPr>
             <a:picLocks noChangeAspect="1"/>
           </p:cNvPicPr>
@@ -11524,7 +10465,7 @@
       </p:pic>
       <p:sp>
         <p:nvSpPr>
-          <p:cNvPr id="15" name="Text 11"/>
+          <p:cNvPr id="13" name="Text 9"/>
           <p:cNvSpPr txBox="1"/>
           <p:nvPr/>
         </p:nvSpPr>
@@ -11563,7 +10504,7 @@
       </p:sp>
       <p:sp>
         <p:nvSpPr>
-          <p:cNvPr id="16" name="Text 12"/>
+          <p:cNvPr id="14" name="Text 10"/>
           <p:cNvSpPr txBox="1"/>
           <p:nvPr/>
         </p:nvSpPr>
@@ -11690,7 +10631,7 @@
       </p:sp>
       <p:sp>
         <p:nvSpPr>
-          <p:cNvPr id="17" name="Text 13"/>
+          <p:cNvPr id="15" name="Text 11"/>
           <p:cNvSpPr txBox="1"/>
           <p:nvPr/>
         </p:nvSpPr>
@@ -11729,7 +10670,7 @@
       </p:sp>
       <p:sp>
         <p:nvSpPr>
-          <p:cNvPr id="18" name="Text 14"/>
+          <p:cNvPr id="16" name="Text 12"/>
           <p:cNvSpPr txBox="1"/>
           <p:nvPr/>
         </p:nvSpPr>
@@ -11768,7 +10709,7 @@
       </p:sp>
       <p:sp>
         <p:nvSpPr>
-          <p:cNvPr id="19" name="Text 15"/>
+          <p:cNvPr id="17" name="Text 13"/>
           <p:cNvSpPr txBox="1"/>
           <p:nvPr/>
         </p:nvSpPr>
@@ -11917,68 +10858,7 @@
       </p:sp>
       <p:sp>
         <p:nvSpPr>
-          <p:cNvPr id="4" name="Shape 2"/>
-          <p:cNvSpPr/>
-          <p:nvPr/>
-        </p:nvSpPr>
-        <p:spPr>
-          <a:xfrm>
-            <a:off x="9537192" y="384048"/>
-            <a:ext cx="1737360" cy="411480"/>
-          </a:xfrm>
-          <a:prstGeom prst="roundRect">
-            <a:avLst>
-              <a:gd name="adj" fmla="val 17778"/>
-            </a:avLst>
-          </a:prstGeom>
-          <a:solidFill>
-            <a:srgbClr val="C9A227"/>
-          </a:solidFill>
-          <a:ln/>
-        </p:spPr>
-      </p:sp>
-      <p:sp>
-        <p:nvSpPr>
-          <p:cNvPr id="5" name="Text 3"/>
-          <p:cNvSpPr txBox="1"/>
-          <p:nvPr/>
-        </p:nvSpPr>
-        <p:spPr>
-          <a:xfrm>
-            <a:off x="9537192" y="384048"/>
-            <a:ext cx="1737360" cy="411480"/>
-          </a:xfrm>
-          <a:prstGeom prst="rect">
-            <a:avLst/>
-          </a:prstGeom>
-          <a:noFill/>
-          <a:ln/>
-        </p:spPr>
-        <p:txBody>
-          <a:bodyPr wrap="square" lIns="0" tIns="0" rIns="0" bIns="0" rtlCol="0" anchor="ctr"/>
-          <a:lstStyle/>
-          <a:p>
-            <a:pPr algn="ctr" indent="0" marL="0">
-              <a:buNone/>
-            </a:pPr>
-            <a:r>
-              <a:rPr lang="en-US" sz="1300" b="1" spc="50" kern="0" dirty="0">
-                <a:solidFill>
-                  <a:srgbClr val="141B45"/>
-                </a:solidFill>
-                <a:latin typeface="Calibri" pitchFamily="34" charset="0"/>
-                <a:ea typeface="Calibri" pitchFamily="34" charset="-122"/>
-                <a:cs typeface="Calibri" pitchFamily="34" charset="-120"/>
-              </a:rPr>
-              <a:t>2 MARKS</a:t>
-            </a:r>
-            <a:endParaRPr lang="en-US" sz="1300" dirty="0"/>
-          </a:p>
-        </p:txBody>
-      </p:sp>
-      <p:sp>
-        <p:nvSpPr>
-          <p:cNvPr id="6" name="Text 4"/>
+          <p:cNvPr id="4" name="Text 2"/>
           <p:cNvSpPr txBox="1"/>
           <p:nvPr/>
         </p:nvSpPr>
@@ -12017,7 +10897,7 @@
       </p:sp>
       <p:sp>
         <p:nvSpPr>
-          <p:cNvPr id="7" name="Text 5"/>
+          <p:cNvPr id="5" name="Text 3"/>
           <p:cNvSpPr txBox="1"/>
           <p:nvPr/>
         </p:nvSpPr>
@@ -12059,7 +10939,7 @@
       </p:sp>
       <p:sp>
         <p:nvSpPr>
-          <p:cNvPr id="8" name="Shape 6"/>
+          <p:cNvPr id="6" name="Shape 4"/>
           <p:cNvSpPr/>
           <p:nvPr/>
         </p:nvSpPr>
@@ -12081,7 +10961,7 @@
       </p:sp>
       <p:sp>
         <p:nvSpPr>
-          <p:cNvPr id="9" name="Shape 7"/>
+          <p:cNvPr id="7" name="Shape 5"/>
           <p:cNvSpPr/>
           <p:nvPr/>
         </p:nvSpPr>
@@ -12101,7 +10981,7 @@
       </p:sp>
       <p:pic>
         <p:nvPicPr>
-          <p:cNvPr id="10" name="Image 0" descr="preencoded.png">    </p:cNvPr>
+          <p:cNvPr id="8" name="Image 0" descr="preencoded.png">    </p:cNvPr>
           <p:cNvPicPr>
             <a:picLocks noChangeAspect="1"/>
           </p:cNvPicPr>
@@ -12125,7 +11005,7 @@
       </p:pic>
       <p:sp>
         <p:nvSpPr>
-          <p:cNvPr id="11" name="Text 8"/>
+          <p:cNvPr id="9" name="Text 6"/>
           <p:cNvSpPr txBox="1"/>
           <p:nvPr/>
         </p:nvSpPr>
@@ -12164,7 +11044,7 @@
       </p:sp>
       <p:sp>
         <p:nvSpPr>
-          <p:cNvPr id="12" name="Text 9"/>
+          <p:cNvPr id="10" name="Text 7"/>
           <p:cNvSpPr txBox="1"/>
           <p:nvPr/>
         </p:nvSpPr>
@@ -12249,7 +11129,7 @@
       </p:sp>
       <p:sp>
         <p:nvSpPr>
-          <p:cNvPr id="13" name="Shape 10"/>
+          <p:cNvPr id="11" name="Shape 8"/>
           <p:cNvSpPr/>
           <p:nvPr/>
         </p:nvSpPr>
@@ -12272,7 +11152,7 @@
       </p:sp>
       <p:sp>
         <p:nvSpPr>
-          <p:cNvPr id="14" name="Text 11"/>
+          <p:cNvPr id="12" name="Text 9"/>
           <p:cNvSpPr txBox="1"/>
           <p:nvPr/>
         </p:nvSpPr>
@@ -12311,7 +11191,7 @@
       </p:sp>
       <p:sp>
         <p:nvSpPr>
-          <p:cNvPr id="15" name="Shape 12"/>
+          <p:cNvPr id="13" name="Shape 10"/>
           <p:cNvSpPr/>
           <p:nvPr/>
         </p:nvSpPr>
@@ -12333,7 +11213,7 @@
       </p:sp>
       <p:sp>
         <p:nvSpPr>
-          <p:cNvPr id="16" name="Shape 13"/>
+          <p:cNvPr id="14" name="Shape 11"/>
           <p:cNvSpPr/>
           <p:nvPr/>
         </p:nvSpPr>
@@ -12353,7 +11233,7 @@
       </p:sp>
       <p:pic>
         <p:nvPicPr>
-          <p:cNvPr id="17" name="Image 1" descr="preencoded.png">    </p:cNvPr>
+          <p:cNvPr id="15" name="Image 1" descr="preencoded.png">    </p:cNvPr>
           <p:cNvPicPr>
             <a:picLocks noChangeAspect="1"/>
           </p:cNvPicPr>
@@ -12377,7 +11257,7 @@
       </p:pic>
       <p:sp>
         <p:nvSpPr>
-          <p:cNvPr id="18" name="Text 14"/>
+          <p:cNvPr id="16" name="Text 12"/>
           <p:cNvSpPr txBox="1"/>
           <p:nvPr/>
         </p:nvSpPr>
@@ -12416,7 +11296,7 @@
       </p:sp>
       <p:sp>
         <p:nvSpPr>
-          <p:cNvPr id="19" name="Text 15"/>
+          <p:cNvPr id="17" name="Text 13"/>
           <p:cNvSpPr txBox="1"/>
           <p:nvPr/>
         </p:nvSpPr>
@@ -12501,7 +11381,7 @@
       </p:sp>
       <p:sp>
         <p:nvSpPr>
-          <p:cNvPr id="20" name="Shape 16"/>
+          <p:cNvPr id="18" name="Shape 14"/>
           <p:cNvSpPr/>
           <p:nvPr/>
         </p:nvSpPr>
@@ -12524,7 +11404,7 @@
       </p:sp>
       <p:sp>
         <p:nvSpPr>
-          <p:cNvPr id="21" name="Text 17"/>
+          <p:cNvPr id="19" name="Text 15"/>
           <p:cNvSpPr txBox="1"/>
           <p:nvPr/>
         </p:nvSpPr>
@@ -12563,7 +11443,7 @@
       </p:sp>
       <p:sp>
         <p:nvSpPr>
-          <p:cNvPr id="22" name="Text 18"/>
+          <p:cNvPr id="20" name="Text 16"/>
           <p:cNvSpPr txBox="1"/>
           <p:nvPr/>
         </p:nvSpPr>
@@ -12602,7 +11482,7 @@
       </p:sp>
       <p:sp>
         <p:nvSpPr>
-          <p:cNvPr id="23" name="Text 19"/>
+          <p:cNvPr id="21" name="Text 17"/>
           <p:cNvSpPr txBox="1"/>
           <p:nvPr/>
         </p:nvSpPr>
@@ -12796,67 +11676,6 @@
         </p:nvSpPr>
         <p:spPr>
           <a:xfrm>
-            <a:off x="9537192" y="384048"/>
-            <a:ext cx="1737360" cy="411480"/>
-          </a:xfrm>
-          <a:prstGeom prst="roundRect">
-            <a:avLst>
-              <a:gd name="adj" fmla="val 17778"/>
-            </a:avLst>
-          </a:prstGeom>
-          <a:solidFill>
-            <a:srgbClr val="C9A227"/>
-          </a:solidFill>
-          <a:ln/>
-        </p:spPr>
-      </p:sp>
-      <p:sp>
-        <p:nvSpPr>
-          <p:cNvPr id="6" name="Text 4"/>
-          <p:cNvSpPr txBox="1"/>
-          <p:nvPr/>
-        </p:nvSpPr>
-        <p:spPr>
-          <a:xfrm>
-            <a:off x="9537192" y="384048"/>
-            <a:ext cx="1737360" cy="411480"/>
-          </a:xfrm>
-          <a:prstGeom prst="rect">
-            <a:avLst/>
-          </a:prstGeom>
-          <a:noFill/>
-          <a:ln/>
-        </p:spPr>
-        <p:txBody>
-          <a:bodyPr wrap="square" lIns="0" tIns="0" rIns="0" bIns="0" rtlCol="0" anchor="ctr"/>
-          <a:lstStyle/>
-          <a:p>
-            <a:pPr algn="ctr" indent="0" marL="0">
-              <a:buNone/>
-            </a:pPr>
-            <a:r>
-              <a:rPr lang="en-US" sz="1300" b="1" spc="50" kern="0" dirty="0">
-                <a:solidFill>
-                  <a:srgbClr val="141B45"/>
-                </a:solidFill>
-                <a:latin typeface="Calibri" pitchFamily="34" charset="0"/>
-                <a:ea typeface="Calibri" pitchFamily="34" charset="-122"/>
-                <a:cs typeface="Calibri" pitchFamily="34" charset="-120"/>
-              </a:rPr>
-              <a:t>5 MARKS</a:t>
-            </a:r>
-            <a:endParaRPr lang="en-US" sz="1300" dirty="0"/>
-          </a:p>
-        </p:txBody>
-      </p:sp>
-      <p:sp>
-        <p:nvSpPr>
-          <p:cNvPr id="7" name="Shape 5"/>
-          <p:cNvSpPr/>
-          <p:nvPr/>
-        </p:nvSpPr>
-        <p:spPr>
-          <a:xfrm>
             <a:off x="1371600" y="1600200"/>
             <a:ext cx="9418320" cy="960120"/>
           </a:xfrm>
@@ -12873,7 +11692,7 @@
       </p:sp>
       <p:sp>
         <p:nvSpPr>
-          <p:cNvPr id="8" name="Text 6"/>
+          <p:cNvPr id="6" name="Text 4"/>
           <p:cNvSpPr txBox="1"/>
           <p:nvPr/>
         </p:nvSpPr>
@@ -12912,7 +11731,7 @@
       </p:sp>
       <p:sp>
         <p:nvSpPr>
-          <p:cNvPr id="9" name="Text 7"/>
+          <p:cNvPr id="7" name="Text 5"/>
           <p:cNvSpPr txBox="1"/>
           <p:nvPr/>
         </p:nvSpPr>
@@ -12951,7 +11770,7 @@
       </p:sp>
       <p:sp>
         <p:nvSpPr>
-          <p:cNvPr id="10" name="Text 8"/>
+          <p:cNvPr id="8" name="Text 6"/>
           <p:cNvSpPr txBox="1"/>
           <p:nvPr/>
         </p:nvSpPr>
@@ -12990,7 +11809,7 @@
       </p:sp>
       <p:sp>
         <p:nvSpPr>
-          <p:cNvPr id="11" name="Shape 9"/>
+          <p:cNvPr id="9" name="Shape 7"/>
           <p:cNvSpPr/>
           <p:nvPr/>
         </p:nvSpPr>
@@ -13010,7 +11829,7 @@
       </p:sp>
       <p:sp>
         <p:nvSpPr>
-          <p:cNvPr id="12" name="Shape 10"/>
+          <p:cNvPr id="10" name="Shape 8"/>
           <p:cNvSpPr/>
           <p:nvPr/>
         </p:nvSpPr>
@@ -13032,7 +11851,7 @@
       </p:sp>
       <p:sp>
         <p:nvSpPr>
-          <p:cNvPr id="13" name="Text 11"/>
+          <p:cNvPr id="11" name="Text 9"/>
           <p:cNvSpPr txBox="1"/>
           <p:nvPr/>
         </p:nvSpPr>
@@ -13071,7 +11890,7 @@
       </p:sp>
       <p:sp>
         <p:nvSpPr>
-          <p:cNvPr id="14" name="Text 12"/>
+          <p:cNvPr id="12" name="Text 10"/>
           <p:cNvSpPr txBox="1"/>
           <p:nvPr/>
         </p:nvSpPr>
@@ -13110,7 +11929,7 @@
       </p:sp>
       <p:sp>
         <p:nvSpPr>
-          <p:cNvPr id="15" name="Text 13"/>
+          <p:cNvPr id="13" name="Text 11"/>
           <p:cNvSpPr txBox="1"/>
           <p:nvPr/>
         </p:nvSpPr>
@@ -13149,7 +11968,7 @@
       </p:sp>
       <p:sp>
         <p:nvSpPr>
-          <p:cNvPr id="16" name="Shape 14"/>
+          <p:cNvPr id="14" name="Shape 12"/>
           <p:cNvSpPr/>
           <p:nvPr/>
         </p:nvSpPr>
@@ -13169,7 +11988,7 @@
       </p:sp>
       <p:sp>
         <p:nvSpPr>
-          <p:cNvPr id="17" name="Shape 15"/>
+          <p:cNvPr id="15" name="Shape 13"/>
           <p:cNvSpPr/>
           <p:nvPr/>
         </p:nvSpPr>
@@ -13191,7 +12010,7 @@
       </p:sp>
       <p:sp>
         <p:nvSpPr>
-          <p:cNvPr id="18" name="Text 16"/>
+          <p:cNvPr id="16" name="Text 14"/>
           <p:cNvSpPr txBox="1"/>
           <p:nvPr/>
         </p:nvSpPr>
@@ -13230,7 +12049,7 @@
       </p:sp>
       <p:sp>
         <p:nvSpPr>
-          <p:cNvPr id="19" name="Text 17"/>
+          <p:cNvPr id="17" name="Text 15"/>
           <p:cNvSpPr txBox="1"/>
           <p:nvPr/>
         </p:nvSpPr>
@@ -13315,7 +12134,7 @@
       </p:sp>
       <p:sp>
         <p:nvSpPr>
-          <p:cNvPr id="20" name="Shape 18"/>
+          <p:cNvPr id="18" name="Shape 16"/>
           <p:cNvSpPr/>
           <p:nvPr/>
         </p:nvSpPr>
@@ -13337,7 +12156,7 @@
       </p:sp>
       <p:sp>
         <p:nvSpPr>
-          <p:cNvPr id="21" name="Text 19"/>
+          <p:cNvPr id="19" name="Text 17"/>
           <p:cNvSpPr txBox="1"/>
           <p:nvPr/>
         </p:nvSpPr>
@@ -13376,7 +12195,7 @@
       </p:sp>
       <p:sp>
         <p:nvSpPr>
-          <p:cNvPr id="22" name="Text 20"/>
+          <p:cNvPr id="20" name="Text 18"/>
           <p:cNvSpPr txBox="1"/>
           <p:nvPr/>
         </p:nvSpPr>
@@ -13440,7 +12259,7 @@
       </p:sp>
       <p:sp>
         <p:nvSpPr>
-          <p:cNvPr id="23" name="Text 21"/>
+          <p:cNvPr id="21" name="Text 19"/>
           <p:cNvSpPr txBox="1"/>
           <p:nvPr/>
         </p:nvSpPr>
@@ -13479,7 +12298,7 @@
       </p:sp>
       <p:sp>
         <p:nvSpPr>
-          <p:cNvPr id="24" name="Text 22"/>
+          <p:cNvPr id="22" name="Text 20"/>
           <p:cNvSpPr txBox="1"/>
           <p:nvPr/>
         </p:nvSpPr>
@@ -13518,7 +12337,7 @@
       </p:sp>
       <p:sp>
         <p:nvSpPr>
-          <p:cNvPr id="25" name="Text 23"/>
+          <p:cNvPr id="23" name="Text 21"/>
           <p:cNvSpPr txBox="1"/>
           <p:nvPr/>
         </p:nvSpPr>
@@ -14801,68 +13620,7 @@
       </p:pic>
       <p:sp>
         <p:nvSpPr>
-          <p:cNvPr id="7" name="Shape 4"/>
-          <p:cNvSpPr/>
-          <p:nvPr/>
-        </p:nvSpPr>
-        <p:spPr>
-          <a:xfrm>
-            <a:off x="9537192" y="384048"/>
-            <a:ext cx="1737360" cy="411480"/>
-          </a:xfrm>
-          <a:prstGeom prst="roundRect">
-            <a:avLst>
-              <a:gd name="adj" fmla="val 17778"/>
-            </a:avLst>
-          </a:prstGeom>
-          <a:solidFill>
-            <a:srgbClr val="C9A227"/>
-          </a:solidFill>
-          <a:ln/>
-        </p:spPr>
-      </p:sp>
-      <p:sp>
-        <p:nvSpPr>
-          <p:cNvPr id="8" name="Text 5"/>
-          <p:cNvSpPr txBox="1"/>
-          <p:nvPr/>
-        </p:nvSpPr>
-        <p:spPr>
-          <a:xfrm>
-            <a:off x="9537192" y="384048"/>
-            <a:ext cx="1737360" cy="411480"/>
-          </a:xfrm>
-          <a:prstGeom prst="rect">
-            <a:avLst/>
-          </a:prstGeom>
-          <a:noFill/>
-          <a:ln/>
-        </p:spPr>
-        <p:txBody>
-          <a:bodyPr wrap="square" lIns="0" tIns="0" rIns="0" bIns="0" rtlCol="0" anchor="ctr"/>
-          <a:lstStyle/>
-          <a:p>
-            <a:pPr algn="ctr" indent="0" marL="0">
-              <a:buNone/>
-            </a:pPr>
-            <a:r>
-              <a:rPr lang="en-US" sz="1300" b="1" spc="50" kern="0" dirty="0">
-                <a:solidFill>
-                  <a:srgbClr val="141B45"/>
-                </a:solidFill>
-                <a:latin typeface="Calibri" pitchFamily="34" charset="0"/>
-                <a:ea typeface="Calibri" pitchFamily="34" charset="-122"/>
-                <a:cs typeface="Calibri" pitchFamily="34" charset="-120"/>
-              </a:rPr>
-              <a:t>13 MARKS</a:t>
-            </a:r>
-            <a:endParaRPr lang="en-US" sz="1300" dirty="0"/>
-          </a:p>
-        </p:txBody>
-      </p:sp>
-      <p:sp>
-        <p:nvSpPr>
-          <p:cNvPr id="9" name="Text 6"/>
+          <p:cNvPr id="7" name="Text 4"/>
           <p:cNvSpPr txBox="1"/>
           <p:nvPr/>
         </p:nvSpPr>
@@ -14968,7 +13726,7 @@
       </p:sp>
       <p:sp>
         <p:nvSpPr>
-          <p:cNvPr id="10" name="Shape 7"/>
+          <p:cNvPr id="8" name="Shape 5"/>
           <p:cNvSpPr/>
           <p:nvPr/>
         </p:nvSpPr>
@@ -14990,7 +13748,7 @@
       </p:sp>
       <p:sp>
         <p:nvSpPr>
-          <p:cNvPr id="11" name="Text 8"/>
+          <p:cNvPr id="9" name="Text 6"/>
           <p:cNvSpPr txBox="1"/>
           <p:nvPr/>
         </p:nvSpPr>
@@ -15029,7 +13787,7 @@
       </p:sp>
       <p:sp>
         <p:nvSpPr>
-          <p:cNvPr id="12" name="Text 9"/>
+          <p:cNvPr id="10" name="Text 7"/>
           <p:cNvSpPr txBox="1"/>
           <p:nvPr/>
         </p:nvSpPr>
@@ -15068,7 +13826,7 @@
       </p:sp>
       <p:sp>
         <p:nvSpPr>
-          <p:cNvPr id="13" name="Text 10"/>
+          <p:cNvPr id="11" name="Text 8"/>
           <p:cNvSpPr txBox="1"/>
           <p:nvPr/>
         </p:nvSpPr>
@@ -15107,7 +13865,7 @@
       </p:sp>
       <p:sp>
         <p:nvSpPr>
-          <p:cNvPr id="14" name="Text 11"/>
+          <p:cNvPr id="12" name="Text 9"/>
           <p:cNvSpPr txBox="1"/>
           <p:nvPr/>
         </p:nvSpPr>

--- a/Review-Presentation-Rubric.pptx
+++ b/Review-Presentation-Rubric.pptx
@@ -23,6 +23,14 @@
     <p:sldId id="271" r:id="rId17"/>
     <p:sldId id="272" r:id="rId18"/>
     <p:sldId id="273" r:id="rId19"/>
+    <p:sldId id="274" r:id="rId25"/>
+    <p:sldId id="275" r:id="rId26"/>
+    <p:sldId id="276" r:id="rId27"/>
+    <p:sldId id="277" r:id="rId28"/>
+    <p:sldId id="278" r:id="rId29"/>
+    <p:sldId id="279" r:id="rId30"/>
+    <p:sldId id="280" r:id="rId31"/>
+    <p:sldId id="281" r:id="rId32"/>
   </p:sldIdLst>
   <p:notesMasterIdLst>
     <p:notesMasterId r:id="rId20"/>
@@ -8258,6 +8266,408 @@
 </p:sld>
 </file>
 
+<file path=ppt/slides/slide19.xml><?xml version="1.0" encoding="utf-8"?>
+<p:sld xmlns:a="http://schemas.openxmlformats.org/drawingml/2006/main" xmlns:r="http://schemas.openxmlformats.org/officeDocument/2006/relationships" xmlns:p="http://schemas.openxmlformats.org/presentationml/2006/main">
+  <p:cSld name="Slide 1">
+    <p:bg>
+      <p:bgPr>
+        <a:solidFill>
+          <a:srgbClr val="1E2761"/>
+        </a:solidFill>
+      </p:bgPr>
+    </p:bg>
+    <p:spTree>
+      <p:nvGrpSpPr>
+        <p:cNvPr id="1" name=""/>
+        <p:cNvGrpSpPr/>
+        <p:nvPr/>
+      </p:nvGrpSpPr>
+      <p:grpSpPr>
+        <a:xfrm>
+          <a:off x="0" y="0"/>
+          <a:ext cx="0" cy="0"/>
+          <a:chOff x="0" y="0"/>
+          <a:chExt cx="0" cy="0"/>
+        </a:xfrm>
+      </p:grpSpPr>
+      <p:sp>
+        <p:nvSpPr>
+          <p:cNvPr id="2" name="Shape 0"/>
+          <p:cNvSpPr/>
+          <p:nvPr/>
+        </p:nvSpPr>
+        <p:spPr>
+          <a:xfrm>
+            <a:off x="9692640" y="-1280160"/>
+            <a:ext cx="4114800" cy="4114800"/>
+          </a:xfrm>
+          <a:prstGeom prst="ellipse">
+            <a:avLst/>
+          </a:prstGeom>
+          <a:solidFill>
+            <a:srgbClr val="141B45"/>
+          </a:solidFill>
+          <a:ln/>
+        </p:spPr>
+      </p:sp>
+      <p:sp>
+        <p:nvSpPr>
+          <p:cNvPr id="3" name="Shape 1"/>
+          <p:cNvSpPr/>
+          <p:nvPr/>
+        </p:nvSpPr>
+        <p:spPr>
+          <a:xfrm>
+            <a:off x="-1463040" y="5120640"/>
+            <a:ext cx="3291840" cy="3291840"/>
+          </a:xfrm>
+          <a:prstGeom prst="ellipse">
+            <a:avLst/>
+          </a:prstGeom>
+          <a:solidFill>
+            <a:srgbClr val="141B45"/>
+          </a:solidFill>
+          <a:ln/>
+        </p:spPr>
+      </p:sp>
+      <p:sp>
+        <p:nvSpPr>
+          <p:cNvPr id="4" name="Shape 2"/>
+          <p:cNvSpPr/>
+          <p:nvPr/>
+        </p:nvSpPr>
+        <p:spPr>
+          <a:xfrm>
+            <a:off x="4178808" y="502920"/>
+            <a:ext cx="3840480" cy="384048"/>
+          </a:xfrm>
+          <a:prstGeom prst="roundRect">
+            <a:avLst>
+              <a:gd name="adj" fmla="val 19048"/>
+            </a:avLst>
+          </a:prstGeom>
+          <a:solidFill>
+            <a:srgbClr val="C9A227"/>
+          </a:solidFill>
+          <a:ln/>
+        </p:spPr>
+      </p:sp>
+      <p:sp>
+        <p:nvSpPr>
+          <p:cNvPr id="5" name="Text 3"/>
+          <p:cNvSpPr txBox="1"/>
+          <p:nvPr/>
+        </p:nvSpPr>
+        <p:spPr>
+          <a:xfrm>
+            <a:off x="4178808" y="502920"/>
+            <a:ext cx="3840480" cy="384048"/>
+          </a:xfrm>
+          <a:prstGeom prst="rect">
+            <a:avLst/>
+          </a:prstGeom>
+          <a:noFill/>
+          <a:ln/>
+        </p:spPr>
+        <p:txBody>
+          <a:bodyPr wrap="square" lIns="0" tIns="0" rIns="0" bIns="0" rtlCol="0" anchor="ctr"/>
+          <a:lstStyle/>
+          <a:p>
+            <a:pPr algn="ctr" indent="0" marL="0">
+              <a:buNone/>
+            </a:pPr>
+            <a:r>
+              <a:rPr lang="en-US" sz="1200" b="1" spc="100" kern="0" dirty="0">
+                <a:solidFill>
+                  <a:srgbClr val="141B45"/>
+                </a:solidFill>
+                <a:latin typeface="Calibri" pitchFamily="34" charset="0"/>
+                <a:ea typeface="Calibri" pitchFamily="34" charset="-122"/>
+                <a:cs typeface="Calibri" pitchFamily="34" charset="-120"/>
+              </a:rPr>
+              <a:t>PROJECT PHASE II  –  SECOND REVIEW</a:t>
+            </a:r>
+            <a:endParaRPr lang="en-US" sz="1200" dirty="0"/>
+          </a:p>
+        </p:txBody>
+      </p:sp>
+      <p:sp>
+        <p:nvSpPr>
+          <p:cNvPr id="6" name="Shape 4"/>
+          <p:cNvSpPr/>
+          <p:nvPr/>
+        </p:nvSpPr>
+        <p:spPr>
+          <a:xfrm>
+            <a:off x="5632704" y="1097280"/>
+            <a:ext cx="914400" cy="914400"/>
+          </a:xfrm>
+          <a:prstGeom prst="ellipse">
+            <a:avLst/>
+          </a:prstGeom>
+          <a:solidFill>
+            <a:srgbClr val="C9A227"/>
+          </a:solidFill>
+          <a:ln/>
+        </p:spPr>
+      </p:sp>
+      <p:pic>
+        <p:nvPicPr>
+          <p:cNvPr id="7" name="Image 0" descr="preencoded.png">    </p:cNvPr>
+          <p:cNvPicPr>
+            <a:picLocks noChangeAspect="1"/>
+          </p:cNvPicPr>
+          <p:nvPr/>
+        </p:nvPicPr>
+        <p:blipFill>
+          <a:blip r:embed="rId1"/>
+          <a:stretch>
+            <a:fillRect/>
+          </a:stretch>
+        </p:blipFill>
+        <p:spPr>
+          <a:xfrm>
+            <a:off x="5742432" y="1207008"/>
+            <a:ext cx="694944" cy="694944"/>
+          </a:xfrm>
+          <a:prstGeom prst="rect">
+            <a:avLst/>
+          </a:prstGeom>
+        </p:spPr>
+      </p:pic>
+      <p:sp>
+        <p:nvSpPr>
+          <p:cNvPr id="8" name="Text 5"/>
+          <p:cNvSpPr txBox="1"/>
+          <p:nvPr/>
+        </p:nvSpPr>
+        <p:spPr>
+          <a:xfrm>
+            <a:off x="914400" y="2240280"/>
+            <a:ext cx="10360152" cy="1920240"/>
+          </a:xfrm>
+          <a:prstGeom prst="rect">
+            <a:avLst/>
+          </a:prstGeom>
+          <a:noFill/>
+          <a:ln/>
+        </p:spPr>
+        <p:txBody>
+          <a:bodyPr wrap="square" lIns="0" tIns="0" rIns="0" bIns="0" rtlCol="0" anchor="ctr"/>
+          <a:lstStyle/>
+          <a:p>
+            <a:pPr algn="ctr" indent="0" marL="0">
+              <a:lnSpc>
+                <a:spcPct val="120000"/>
+              </a:lnSpc>
+              <a:buNone/>
+            </a:pPr>
+            <a:r>
+              <a:rPr lang="en-US" sz="2700" b="1" dirty="0">
+                <a:solidFill>
+                  <a:srgbClr val="FFFFFF"/>
+                </a:solidFill>
+                <a:latin typeface="Cambria" pitchFamily="34" charset="0"/>
+                <a:ea typeface="Cambria" pitchFamily="34" charset="-122"/>
+                <a:cs typeface="Cambria" pitchFamily="34" charset="-120"/>
+              </a:rPr>
+              <a:t>AUTOMATED AI-DRIVEN LOAN UNDERWRITING</a:t>
+            </a:r>
+            <a:endParaRPr lang="en-US" sz="2700" dirty="0"/>
+          </a:p>
+          <a:p>
+            <a:pPr algn="ctr" indent="0" marL="0">
+              <a:lnSpc>
+                <a:spcPct val="120000"/>
+              </a:lnSpc>
+              <a:buNone/>
+            </a:pPr>
+            <a:r>
+              <a:rPr lang="en-US" sz="2700" b="1" dirty="0">
+                <a:solidFill>
+                  <a:srgbClr val="FFFFFF"/>
+                </a:solidFill>
+                <a:latin typeface="Cambria" pitchFamily="34" charset="0"/>
+                <a:ea typeface="Cambria" pitchFamily="34" charset="-122"/>
+                <a:cs typeface="Cambria" pitchFamily="34" charset="-120"/>
+              </a:rPr>
+              <a:t>&amp; DOCUMENT FRAUD DETECTION SYSTEM</a:t>
+            </a:r>
+            <a:endParaRPr lang="en-US" sz="2700" dirty="0"/>
+          </a:p>
+        </p:txBody>
+      </p:sp>
+      <p:sp>
+        <p:nvSpPr>
+          <p:cNvPr id="9" name="Text 6"/>
+          <p:cNvSpPr txBox="1"/>
+          <p:nvPr/>
+        </p:nvSpPr>
+        <p:spPr>
+          <a:xfrm>
+            <a:off x="914400" y="4297680"/>
+            <a:ext cx="10360152" cy="457200"/>
+          </a:xfrm>
+          <a:prstGeom prst="rect">
+            <a:avLst/>
+          </a:prstGeom>
+          <a:noFill/>
+          <a:ln/>
+        </p:spPr>
+        <p:txBody>
+          <a:bodyPr wrap="square" lIns="0" tIns="0" rIns="0" bIns="0" rtlCol="0" anchor="ctr"/>
+          <a:lstStyle/>
+          <a:p>
+            <a:pPr algn="ctr" indent="0" marL="0">
+              <a:buNone/>
+            </a:pPr>
+            <a:r>
+              <a:rPr lang="en-US" sz="1600" dirty="0">
+                <a:solidFill>
+                  <a:srgbClr val="CADCFC"/>
+                </a:solidFill>
+                <a:latin typeface="Calibri" pitchFamily="34" charset="0"/>
+                <a:ea typeface="Calibri" pitchFamily="34" charset="-122"/>
+                <a:cs typeface="Calibri" pitchFamily="34" charset="-120"/>
+              </a:rPr>
+              <a:t>Naresh S  |  Roll No: 2436MCA0047</a:t>
+            </a:r>
+            <a:endParaRPr lang="en-US" sz="1600" dirty="0"/>
+          </a:p>
+        </p:txBody>
+      </p:sp>
+      <p:sp>
+        <p:nvSpPr>
+          <p:cNvPr id="10" name="Shape 7"/>
+          <p:cNvSpPr/>
+          <p:nvPr/>
+        </p:nvSpPr>
+        <p:spPr>
+          <a:xfrm>
+            <a:off x="914400" y="5806440"/>
+            <a:ext cx="10360152" cy="0"/>
+          </a:xfrm>
+          <a:prstGeom prst="line">
+            <a:avLst/>
+          </a:prstGeom>
+          <a:noFill/>
+          <a:ln w="12700">
+            <a:solidFill>
+              <a:srgbClr val="3A4694"/>
+            </a:solidFill>
+            <a:prstDash val="solid"/>
+          </a:ln>
+        </p:spPr>
+      </p:sp>
+      <p:sp>
+        <p:nvSpPr>
+          <p:cNvPr id="11" name="Text 8"/>
+          <p:cNvSpPr txBox="1"/>
+          <p:nvPr/>
+        </p:nvSpPr>
+        <p:spPr>
+          <a:xfrm>
+            <a:off x="640080" y="5989320"/>
+            <a:ext cx="4572000" cy="548640"/>
+          </a:xfrm>
+          <a:prstGeom prst="rect">
+            <a:avLst/>
+          </a:prstGeom>
+          <a:noFill/>
+          <a:ln/>
+        </p:spPr>
+        <p:txBody>
+          <a:bodyPr wrap="square" lIns="0" tIns="0" rIns="0" bIns="0" rtlCol="0" anchor="ctr"/>
+          <a:lstStyle/>
+          <a:p>
+            <a:pPr algn="l" indent="0" marL="0">
+              <a:buNone/>
+            </a:pPr>
+            <a:r>
+              <a:rPr lang="en-US" sz="1200" dirty="0">
+                <a:solidFill>
+                  <a:srgbClr val="CADCFC"/>
+                </a:solidFill>
+                <a:latin typeface="Calibri" pitchFamily="34" charset="0"/>
+                <a:ea typeface="Calibri" pitchFamily="34" charset="-122"/>
+                <a:cs typeface="Calibri" pitchFamily="34" charset="-120"/>
+              </a:rPr>
+              <a:t>Reg. No: 67224200080</a:t>
+            </a:r>
+            <a:endParaRPr lang="en-US" sz="1200" dirty="0"/>
+          </a:p>
+        </p:txBody>
+      </p:sp>
+      <p:sp>
+        <p:nvSpPr>
+          <p:cNvPr id="12" name="Text 9"/>
+          <p:cNvSpPr txBox="1"/>
+          <p:nvPr/>
+        </p:nvSpPr>
+        <p:spPr>
+          <a:xfrm>
+            <a:off x="6062472" y="5897880"/>
+            <a:ext cx="5486400" cy="640080"/>
+          </a:xfrm>
+          <a:prstGeom prst="rect">
+            <a:avLst/>
+          </a:prstGeom>
+          <a:noFill/>
+          <a:ln/>
+        </p:spPr>
+        <p:txBody>
+          <a:bodyPr wrap="square" lIns="0" tIns="0" rIns="0" bIns="0" rtlCol="0" anchor="ctr"/>
+          <a:lstStyle/>
+          <a:p>
+            <a:pPr algn="r" indent="0" marL="0">
+              <a:lnSpc>
+                <a:spcPct val="110000"/>
+              </a:lnSpc>
+              <a:buNone/>
+            </a:pPr>
+            <a:r>
+              <a:rPr lang="en-US" sz="1200" dirty="0">
+                <a:solidFill>
+                  <a:srgbClr val="CADCFC"/>
+                </a:solidFill>
+                <a:latin typeface="Calibri" pitchFamily="34" charset="0"/>
+                <a:ea typeface="Calibri" pitchFamily="34" charset="-122"/>
+                <a:cs typeface="Calibri" pitchFamily="34" charset="-120"/>
+              </a:rPr>
+              <a:t>Guide: Dr. R. Baskaran, Professor</a:t>
+            </a:r>
+            <a:endParaRPr lang="en-US" sz="1200" dirty="0"/>
+          </a:p>
+          <a:p>
+            <a:pPr algn="r" indent="0" marL="0">
+              <a:lnSpc>
+                <a:spcPct val="110000"/>
+              </a:lnSpc>
+              <a:buNone/>
+            </a:pPr>
+            <a:r>
+              <a:rPr lang="en-US" sz="1200" dirty="0">
+                <a:solidFill>
+                  <a:srgbClr val="CADCFC"/>
+                </a:solidFill>
+                <a:latin typeface="Calibri" pitchFamily="34" charset="0"/>
+                <a:ea typeface="Calibri" pitchFamily="34" charset="-122"/>
+                <a:cs typeface="Calibri" pitchFamily="34" charset="-120"/>
+              </a:rPr>
+              <a:t>Dept. of CSE, CEG Campus, Anna University, Chennai - 25</a:t>
+            </a:r>
+            <a:endParaRPr lang="en-US" sz="1200" dirty="0"/>
+          </a:p>
+        </p:txBody>
+      </p:sp>
+    </p:spTree>
+  </p:cSld>
+  <p:clrMapOvr>
+    <a:masterClrMapping/>
+  </p:clrMapOvr>
+</p:sld>
+</file>
+
 <file path=ppt/slides/slide2.xml><?xml version="1.0" encoding="utf-8"?>
 <p:sld xmlns:a="http://schemas.openxmlformats.org/drawingml/2006/main" xmlns:r="http://schemas.openxmlformats.org/officeDocument/2006/relationships" xmlns:p="http://schemas.openxmlformats.org/presentationml/2006/main">
   <p:cSld name="Slide 2">
@@ -9028,6 +9438,6404 @@
                 <a:cs typeface="Calibri" pitchFamily="34" charset="-120"/>
               </a:rPr>
               <a:t>2</a:t>
+            </a:r>
+            <a:endParaRPr lang="en-US" sz="900" dirty="0"/>
+          </a:p>
+        </p:txBody>
+      </p:sp>
+    </p:spTree>
+  </p:cSld>
+  <p:clrMapOvr>
+    <a:masterClrMapping/>
+  </p:clrMapOvr>
+</p:sld>
+</file>
+
+<file path=ppt/slides/slide20.xml><?xml version="1.0" encoding="utf-8"?>
+<p:sld xmlns:a="http://schemas.openxmlformats.org/drawingml/2006/main" xmlns:r="http://schemas.openxmlformats.org/officeDocument/2006/relationships" xmlns:p="http://schemas.openxmlformats.org/presentationml/2006/main">
+  <p:cSld name="Slide 2">
+    <p:bg>
+      <p:bgPr>
+        <a:solidFill>
+          <a:srgbClr val="FFFFFF"/>
+        </a:solidFill>
+      </p:bgPr>
+    </p:bg>
+    <p:spTree>
+      <p:nvGrpSpPr>
+        <p:cNvPr id="1" name=""/>
+        <p:cNvGrpSpPr/>
+        <p:nvPr/>
+      </p:nvGrpSpPr>
+      <p:grpSpPr>
+        <a:xfrm>
+          <a:off x="0" y="0"/>
+          <a:ext cx="0" cy="0"/>
+          <a:chOff x="0" y="0"/>
+          <a:chExt cx="0" cy="0"/>
+        </a:xfrm>
+      </p:grpSpPr>
+      <p:sp>
+        <p:nvSpPr>
+          <p:cNvPr id="2" name="Text 0"/>
+          <p:cNvSpPr txBox="1"/>
+          <p:nvPr/>
+        </p:nvSpPr>
+        <p:spPr>
+          <a:xfrm>
+            <a:off x="548640" y="384048"/>
+            <a:ext cx="5486400" cy="274320"/>
+          </a:xfrm>
+          <a:prstGeom prst="rect">
+            <a:avLst/>
+          </a:prstGeom>
+          <a:noFill/>
+          <a:ln/>
+        </p:spPr>
+        <p:txBody>
+          <a:bodyPr wrap="square" lIns="0" tIns="0" rIns="0" bIns="0" rtlCol="0" anchor="ctr"/>
+          <a:lstStyle/>
+          <a:p>
+            <a:pPr indent="0" marL="0">
+              <a:buNone/>
+            </a:pPr>
+            <a:r>
+              <a:rPr lang="en-US" sz="1150" b="1" spc="200" kern="0" dirty="0">
+                <a:solidFill>
+                  <a:srgbClr val="C9A227"/>
+                </a:solidFill>
+                <a:latin typeface="Calibri" pitchFamily="34" charset="0"/>
+                <a:ea typeface="Calibri" pitchFamily="34" charset="-122"/>
+                <a:cs typeface="Calibri" pitchFamily="34" charset="-120"/>
+              </a:rPr>
+              <a:t>WORK COMPLETED</a:t>
+            </a:r>
+            <a:endParaRPr lang="en-US" sz="1150" dirty="0"/>
+          </a:p>
+        </p:txBody>
+      </p:sp>
+      <p:sp>
+        <p:nvSpPr>
+          <p:cNvPr id="3" name="Text 1"/>
+          <p:cNvSpPr txBox="1"/>
+          <p:nvPr/>
+        </p:nvSpPr>
+        <p:spPr>
+          <a:xfrm>
+            <a:off x="548640" y="658368"/>
+            <a:ext cx="9784080" cy="640080"/>
+          </a:xfrm>
+          <a:prstGeom prst="rect">
+            <a:avLst/>
+          </a:prstGeom>
+          <a:noFill/>
+          <a:ln/>
+        </p:spPr>
+        <p:txBody>
+          <a:bodyPr wrap="square" lIns="0" tIns="0" rIns="0" bIns="0" rtlCol="0" anchor="ctr"/>
+          <a:lstStyle/>
+          <a:p>
+            <a:pPr indent="0" marL="0">
+              <a:buNone/>
+            </a:pPr>
+            <a:r>
+              <a:rPr lang="en-US" sz="2800" b="1" dirty="0">
+                <a:solidFill>
+                  <a:srgbClr val="1E2761"/>
+                </a:solidFill>
+                <a:latin typeface="Cambria" pitchFamily="34" charset="0"/>
+                <a:ea typeface="Cambria" pitchFamily="34" charset="-122"/>
+                <a:cs typeface="Cambria" pitchFamily="34" charset="-120"/>
+              </a:rPr>
+              <a:t>Overall System Design</a:t>
+            </a:r>
+            <a:endParaRPr lang="en-US" sz="2800" dirty="0"/>
+          </a:p>
+        </p:txBody>
+      </p:sp>
+      <p:sp>
+        <p:nvSpPr>
+          <p:cNvPr id="4" name="Shape 2"/>
+          <p:cNvSpPr/>
+          <p:nvPr/>
+        </p:nvSpPr>
+        <p:spPr>
+          <a:xfrm>
+            <a:off x="10424160" y="365760"/>
+            <a:ext cx="1005840" cy="1005840"/>
+          </a:xfrm>
+          <a:prstGeom prst="ellipse">
+            <a:avLst/>
+          </a:prstGeom>
+          <a:solidFill>
+            <a:srgbClr val="1E2761"/>
+          </a:solidFill>
+          <a:ln/>
+        </p:spPr>
+      </p:sp>
+      <p:pic>
+        <p:nvPicPr>
+          <p:cNvPr id="5" name="Image 0" descr="preencoded.png">    </p:cNvPr>
+          <p:cNvPicPr>
+            <a:picLocks noChangeAspect="1"/>
+          </p:cNvPicPr>
+          <p:nvPr/>
+        </p:nvPicPr>
+        <p:blipFill>
+          <a:blip r:embed="rId1"/>
+          <a:stretch>
+            <a:fillRect/>
+          </a:stretch>
+        </p:blipFill>
+        <p:spPr>
+          <a:xfrm>
+            <a:off x="10544861" y="486461"/>
+            <a:ext cx="764438" cy="764438"/>
+          </a:xfrm>
+          <a:prstGeom prst="rect">
+            <a:avLst/>
+          </a:prstGeom>
+        </p:spPr>
+      </p:pic>
+      <p:sp>
+        <p:nvSpPr>
+          <p:cNvPr id="6" name="Text 3"/>
+          <p:cNvSpPr txBox="1"/>
+          <p:nvPr/>
+        </p:nvSpPr>
+        <p:spPr>
+          <a:xfrm>
+            <a:off x="640080" y="1783080"/>
+            <a:ext cx="10881360" cy="3200400"/>
+          </a:xfrm>
+          <a:prstGeom prst="rect">
+            <a:avLst/>
+          </a:prstGeom>
+          <a:noFill/>
+          <a:ln/>
+        </p:spPr>
+        <p:txBody>
+          <a:bodyPr wrap="square" lIns="0" tIns="0" rIns="0" bIns="0" rtlCol="0" anchor="t"/>
+          <a:lstStyle/>
+          <a:p>
+            <a:pPr marL="228600" indent="-228600">
+              <a:spcAft>
+                <a:spcPts val="1400"/>
+              </a:spcAft>
+              <a:buSzPct val="100000"/>
+              <a:buChar char="▪"/>
+            </a:pPr>
+            <a:r>
+              <a:rPr lang="en-US" sz="1400" dirty="0">
+                <a:solidFill>
+                  <a:srgbClr val="1B1B2F"/>
+                </a:solidFill>
+                <a:latin typeface="Calibri" pitchFamily="34" charset="0"/>
+                <a:ea typeface="Calibri" pitchFamily="34" charset="-122"/>
+                <a:cs typeface="Calibri" pitchFamily="34" charset="-120"/>
+              </a:rPr>
+              <a:t>Three-tier architecture as proposed in the First Review: Next.js 14 presentation tier, a Node.js / Express API gateway, and a Python FastAPI AI &amp; Forensics microservice</a:t>
+            </a:r>
+            <a:endParaRPr lang="en-US" sz="1400" dirty="0"/>
+          </a:p>
+          <a:p>
+            <a:pPr marL="228600" indent="-228600">
+              <a:spcAft>
+                <a:spcPts val="1400"/>
+              </a:spcAft>
+              <a:buSzPct val="100000"/>
+              <a:buChar char="▪"/>
+            </a:pPr>
+            <a:r>
+              <a:rPr lang="en-US" sz="1400" dirty="0">
+                <a:solidFill>
+                  <a:srgbClr val="1B1B2F"/>
+                </a:solidFill>
+                <a:latin typeface="Calibri" pitchFamily="34" charset="0"/>
+                <a:ea typeface="Calibri" pitchFamily="34" charset="-122"/>
+                <a:cs typeface="Calibri" pitchFamily="34" charset="-120"/>
+              </a:rPr>
+              <a:t>Gateway: JWT authentication, role-based access control, magic-byte file validation, asynchronous job dispatch</a:t>
+            </a:r>
+            <a:endParaRPr lang="en-US" sz="1400" dirty="0"/>
+          </a:p>
+          <a:p>
+            <a:pPr marL="228600" indent="-228600">
+              <a:spcAft>
+                <a:spcPts val="1400"/>
+              </a:spcAft>
+              <a:buSzPct val="100000"/>
+              <a:buChar char="▪"/>
+            </a:pPr>
+            <a:r>
+              <a:rPr lang="en-US" sz="1400" dirty="0">
+                <a:solidFill>
+                  <a:srgbClr val="1B1B2F"/>
+                </a:solidFill>
+                <a:latin typeface="Calibri" pitchFamily="34" charset="0"/>
+                <a:ea typeface="Calibri" pitchFamily="34" charset="-122"/>
+                <a:cs typeface="Calibri" pitchFamily="34" charset="-120"/>
+              </a:rPr>
+              <a:t>Forensics service: PDF metadata/font inspection, Error Level Analysis, ledger extraction and reconciliation, XGBoost credit scoring</a:t>
+            </a:r>
+            <a:endParaRPr lang="en-US" sz="1400" dirty="0"/>
+          </a:p>
+          <a:p>
+            <a:pPr marL="228600" indent="-228600">
+              <a:spcAft>
+                <a:spcPts val="1400"/>
+              </a:spcAft>
+              <a:buSzPct val="100000"/>
+              <a:buChar char="▪"/>
+            </a:pPr>
+            <a:r>
+              <a:rPr lang="en-US" sz="1400" dirty="0">
+                <a:solidFill>
+                  <a:srgbClr val="1B1B2F"/>
+                </a:solidFill>
+                <a:latin typeface="Calibri" pitchFamily="34" charset="0"/>
+                <a:ea typeface="Calibri" pitchFamily="34" charset="-122"/>
+                <a:cs typeface="Calibri" pitchFamily="34" charset="-120"/>
+              </a:rPr>
+              <a:t>Document analysis now runs fully asynchronously - an upload is acknowledged immediately and the pipeline result is written back and reflected in the UI once ready</a:t>
+            </a:r>
+            <a:endParaRPr lang="en-US" sz="1400" dirty="0"/>
+          </a:p>
+          <a:p>
+            <a:pPr marL="228600" indent="-228600">
+              <a:spcAft>
+                <a:spcPts val="1400"/>
+              </a:spcAft>
+              <a:buSzPct val="100000"/>
+              <a:buChar char="▪"/>
+            </a:pPr>
+            <a:r>
+              <a:rPr lang="en-US" sz="1400" dirty="0">
+                <a:solidFill>
+                  <a:srgbClr val="1B1B2F"/>
+                </a:solidFill>
+                <a:latin typeface="Calibri" pitchFamily="34" charset="0"/>
+                <a:ea typeface="Calibri" pitchFamily="34" charset="-122"/>
+                <a:cs typeface="Calibri" pitchFamily="34" charset="-120"/>
+              </a:rPr>
+              <a:t>Master-detail sidebar layout so both applicant and officer move through applications without returning to a separate list page</a:t>
+            </a:r>
+            <a:endParaRPr lang="en-US" sz="1400" dirty="0"/>
+          </a:p>
+        </p:txBody>
+      </p:sp>
+      <p:sp>
+        <p:nvSpPr>
+          <p:cNvPr id="7" name="Shape 4"/>
+          <p:cNvSpPr/>
+          <p:nvPr/>
+        </p:nvSpPr>
+        <p:spPr>
+          <a:xfrm>
+            <a:off x="548640" y="5166360"/>
+            <a:ext cx="11091672" cy="1234440"/>
+          </a:xfrm>
+          <a:prstGeom prst="roundRect">
+            <a:avLst>
+              <a:gd name="adj" fmla="val 5926"/>
+            </a:avLst>
+          </a:prstGeom>
+          <a:solidFill>
+            <a:srgbClr val="F5F8FF"/>
+          </a:solidFill>
+          <a:ln/>
+        </p:spPr>
+      </p:sp>
+      <p:sp>
+        <p:nvSpPr>
+          <p:cNvPr id="8" name="Text 5"/>
+          <p:cNvSpPr txBox="1"/>
+          <p:nvPr/>
+        </p:nvSpPr>
+        <p:spPr>
+          <a:xfrm>
+            <a:off x="868680" y="5330952"/>
+            <a:ext cx="10424160" cy="274320"/>
+          </a:xfrm>
+          <a:prstGeom prst="rect">
+            <a:avLst/>
+          </a:prstGeom>
+          <a:noFill/>
+          <a:ln/>
+        </p:spPr>
+        <p:txBody>
+          <a:bodyPr wrap="square" lIns="0" tIns="0" rIns="0" bIns="0" rtlCol="0" anchor="ctr"/>
+          <a:lstStyle/>
+          <a:p>
+            <a:pPr indent="0" marL="0">
+              <a:buNone/>
+            </a:pPr>
+            <a:r>
+              <a:rPr lang="en-US" sz="1150" b="1" spc="150" kern="0" dirty="0">
+                <a:solidFill>
+                  <a:srgbClr val="C9A227"/>
+                </a:solidFill>
+                <a:latin typeface="Calibri" pitchFamily="34" charset="0"/>
+                <a:ea typeface="Calibri" pitchFamily="34" charset="-122"/>
+                <a:cs typeface="Calibri" pitchFamily="34" charset="-120"/>
+              </a:rPr>
+              <a:t>WHY IT MATTERS</a:t>
+            </a:r>
+            <a:endParaRPr lang="en-US" sz="1150" dirty="0"/>
+          </a:p>
+        </p:txBody>
+      </p:sp>
+      <p:sp>
+        <p:nvSpPr>
+          <p:cNvPr id="9" name="Text 6"/>
+          <p:cNvSpPr txBox="1"/>
+          <p:nvPr/>
+        </p:nvSpPr>
+        <p:spPr>
+          <a:xfrm>
+            <a:off x="868680" y="5623560"/>
+            <a:ext cx="10424160" cy="685800"/>
+          </a:xfrm>
+          <a:prstGeom prst="rect">
+            <a:avLst/>
+          </a:prstGeom>
+          <a:noFill/>
+          <a:ln/>
+        </p:spPr>
+        <p:txBody>
+          <a:bodyPr wrap="square" lIns="0" tIns="0" rIns="0" bIns="0" rtlCol="0" anchor="t"/>
+          <a:lstStyle/>
+          <a:p>
+            <a:pPr indent="0" marL="0">
+              <a:lnSpc>
+                <a:spcPct val="115000"/>
+              </a:lnSpc>
+              <a:buNone/>
+            </a:pPr>
+            <a:r>
+              <a:rPr lang="en-US" sz="1300" i="1" dirty="0">
+                <a:solidFill>
+                  <a:srgbClr val="1E2761"/>
+                </a:solidFill>
+                <a:latin typeface="Calibri" pitchFamily="34" charset="0"/>
+                <a:ea typeface="Calibri" pitchFamily="34" charset="-122"/>
+                <a:cs typeface="Calibri" pitchFamily="34" charset="-120"/>
+              </a:rPr>
+              <a:t>The system matches the three-tier design proposed in the First Review end-to-end - this slide reports what was actually built, not what was planned.</a:t>
+            </a:r>
+            <a:endParaRPr lang="en-US" sz="1300" dirty="0"/>
+          </a:p>
+        </p:txBody>
+      </p:sp>
+      <p:sp>
+        <p:nvSpPr>
+          <p:cNvPr id="10" name="Text 7"/>
+          <p:cNvSpPr txBox="1"/>
+          <p:nvPr/>
+        </p:nvSpPr>
+        <p:spPr>
+          <a:xfrm>
+            <a:off x="457200" y="6510528"/>
+            <a:ext cx="9601200" cy="274320"/>
+          </a:xfrm>
+          <a:prstGeom prst="rect">
+            <a:avLst/>
+          </a:prstGeom>
+          <a:noFill/>
+          <a:ln/>
+        </p:spPr>
+        <p:txBody>
+          <a:bodyPr wrap="square" lIns="0" tIns="0" rIns="0" bIns="0" rtlCol="0" anchor="ctr"/>
+          <a:lstStyle/>
+          <a:p>
+            <a:pPr indent="0" marL="0">
+              <a:buNone/>
+            </a:pPr>
+            <a:r>
+              <a:rPr lang="en-US" sz="900" dirty="0">
+                <a:solidFill>
+                  <a:srgbClr val="5B6B8C"/>
+                </a:solidFill>
+                <a:latin typeface="Calibri" pitchFamily="34" charset="0"/>
+                <a:ea typeface="Calibri" pitchFamily="34" charset="-122"/>
+                <a:cs typeface="Calibri" pitchFamily="34" charset="-120"/>
+              </a:rPr>
+              <a:t>Second Review – Automated AI-Driven Loan Underwriting &amp; Document Fraud Detection</a:t>
+            </a:r>
+            <a:endParaRPr lang="en-US" sz="900" dirty="0"/>
+          </a:p>
+        </p:txBody>
+      </p:sp>
+      <p:sp>
+        <p:nvSpPr>
+          <p:cNvPr id="11" name="Text 8"/>
+          <p:cNvSpPr txBox="1"/>
+          <p:nvPr/>
+        </p:nvSpPr>
+        <p:spPr>
+          <a:xfrm>
+            <a:off x="11430000" y="6510528"/>
+            <a:ext cx="365760" cy="274320"/>
+          </a:xfrm>
+          <a:prstGeom prst="rect">
+            <a:avLst/>
+          </a:prstGeom>
+          <a:noFill/>
+          <a:ln/>
+        </p:spPr>
+        <p:txBody>
+          <a:bodyPr wrap="square" lIns="0" tIns="0" rIns="0" bIns="0" rtlCol="0" anchor="ctr"/>
+          <a:lstStyle/>
+          <a:p>
+            <a:pPr algn="r" indent="0" marL="0">
+              <a:buNone/>
+            </a:pPr>
+            <a:r>
+              <a:rPr lang="en-US" sz="900" dirty="0">
+                <a:solidFill>
+                  <a:srgbClr val="5B6B8C"/>
+                </a:solidFill>
+                <a:latin typeface="Calibri" pitchFamily="34" charset="0"/>
+                <a:ea typeface="Calibri" pitchFamily="34" charset="-122"/>
+                <a:cs typeface="Calibri" pitchFamily="34" charset="-120"/>
+              </a:rPr>
+              <a:t>20</a:t>
+            </a:r>
+            <a:endParaRPr lang="en-US" sz="900" dirty="0"/>
+          </a:p>
+        </p:txBody>
+      </p:sp>
+    </p:spTree>
+  </p:cSld>
+  <p:clrMapOvr>
+    <a:masterClrMapping/>
+  </p:clrMapOvr>
+</p:sld>
+</file>
+
+<file path=ppt/slides/slide21.xml><?xml version="1.0" encoding="utf-8"?>
+<p:sld xmlns:a="http://schemas.openxmlformats.org/drawingml/2006/main" xmlns:r="http://schemas.openxmlformats.org/officeDocument/2006/relationships" xmlns:p="http://schemas.openxmlformats.org/presentationml/2006/main">
+  <p:cSld name="Slide 3">
+    <p:bg>
+      <p:bgPr>
+        <a:solidFill>
+          <a:srgbClr val="FFFFFF"/>
+        </a:solidFill>
+      </p:bgPr>
+    </p:bg>
+    <p:spTree>
+      <p:nvGrpSpPr>
+        <p:cNvPr id="1" name=""/>
+        <p:cNvGrpSpPr/>
+        <p:nvPr/>
+      </p:nvGrpSpPr>
+      <p:grpSpPr>
+        <a:xfrm>
+          <a:off x="0" y="0"/>
+          <a:ext cx="0" cy="0"/>
+          <a:chOff x="0" y="0"/>
+          <a:chExt cx="0" cy="0"/>
+        </a:xfrm>
+      </p:grpSpPr>
+      <p:sp>
+        <p:nvSpPr>
+          <p:cNvPr id="2" name="Text 0"/>
+          <p:cNvSpPr txBox="1"/>
+          <p:nvPr/>
+        </p:nvSpPr>
+        <p:spPr>
+          <a:xfrm>
+            <a:off x="548640" y="384048"/>
+            <a:ext cx="5486400" cy="274320"/>
+          </a:xfrm>
+          <a:prstGeom prst="rect">
+            <a:avLst/>
+          </a:prstGeom>
+          <a:noFill/>
+          <a:ln/>
+        </p:spPr>
+        <p:txBody>
+          <a:bodyPr wrap="square" lIns="0" tIns="0" rIns="0" bIns="0" rtlCol="0" anchor="ctr"/>
+          <a:lstStyle/>
+          <a:p>
+            <a:pPr indent="0" marL="0">
+              <a:buNone/>
+            </a:pPr>
+            <a:r>
+              <a:rPr lang="en-US" sz="1150" b="1" spc="200" kern="0" dirty="0">
+                <a:solidFill>
+                  <a:srgbClr val="C9A227"/>
+                </a:solidFill>
+                <a:latin typeface="Calibri" pitchFamily="34" charset="0"/>
+                <a:ea typeface="Calibri" pitchFamily="34" charset="-122"/>
+                <a:cs typeface="Calibri" pitchFamily="34" charset="-120"/>
+              </a:rPr>
+              <a:t>WORK COMPLETED</a:t>
+            </a:r>
+            <a:endParaRPr lang="en-US" sz="1150" dirty="0"/>
+          </a:p>
+        </p:txBody>
+      </p:sp>
+      <p:sp>
+        <p:nvSpPr>
+          <p:cNvPr id="3" name="Text 1"/>
+          <p:cNvSpPr txBox="1"/>
+          <p:nvPr/>
+        </p:nvSpPr>
+        <p:spPr>
+          <a:xfrm>
+            <a:off x="548640" y="658368"/>
+            <a:ext cx="9784080" cy="640080"/>
+          </a:xfrm>
+          <a:prstGeom prst="rect">
+            <a:avLst/>
+          </a:prstGeom>
+          <a:noFill/>
+          <a:ln/>
+        </p:spPr>
+        <p:txBody>
+          <a:bodyPr wrap="square" lIns="0" tIns="0" rIns="0" bIns="0" rtlCol="0" anchor="ctr"/>
+          <a:lstStyle/>
+          <a:p>
+            <a:pPr indent="0" marL="0">
+              <a:buNone/>
+            </a:pPr>
+            <a:r>
+              <a:rPr lang="en-US" sz="2800" b="1" dirty="0">
+                <a:solidFill>
+                  <a:srgbClr val="1E2761"/>
+                </a:solidFill>
+                <a:latin typeface="Cambria" pitchFamily="34" charset="0"/>
+                <a:ea typeface="Cambria" pitchFamily="34" charset="-122"/>
+                <a:cs typeface="Cambria" pitchFamily="34" charset="-120"/>
+              </a:rPr>
+              <a:t>Data Set</a:t>
+            </a:r>
+            <a:endParaRPr lang="en-US" sz="2800" dirty="0"/>
+          </a:p>
+        </p:txBody>
+      </p:sp>
+      <p:sp>
+        <p:nvSpPr>
+          <p:cNvPr id="4" name="Shape 2"/>
+          <p:cNvSpPr/>
+          <p:nvPr/>
+        </p:nvSpPr>
+        <p:spPr>
+          <a:xfrm>
+            <a:off x="10424160" y="365760"/>
+            <a:ext cx="1005840" cy="1005840"/>
+          </a:xfrm>
+          <a:prstGeom prst="ellipse">
+            <a:avLst/>
+          </a:prstGeom>
+          <a:solidFill>
+            <a:srgbClr val="1E2761"/>
+          </a:solidFill>
+          <a:ln/>
+        </p:spPr>
+      </p:sp>
+      <p:pic>
+        <p:nvPicPr>
+          <p:cNvPr id="5" name="Image 0" descr="preencoded.png">    </p:cNvPr>
+          <p:cNvPicPr>
+            <a:picLocks noChangeAspect="1"/>
+          </p:cNvPicPr>
+          <p:nvPr/>
+        </p:nvPicPr>
+        <p:blipFill>
+          <a:blip r:embed="rId1"/>
+          <a:stretch>
+            <a:fillRect/>
+          </a:stretch>
+        </p:blipFill>
+        <p:spPr>
+          <a:xfrm>
+            <a:off x="10544861" y="486461"/>
+            <a:ext cx="764438" cy="764438"/>
+          </a:xfrm>
+          <a:prstGeom prst="rect">
+            <a:avLst/>
+          </a:prstGeom>
+        </p:spPr>
+      </p:pic>
+      <p:sp>
+        <p:nvSpPr>
+          <p:cNvPr id="6" name="Text 3"/>
+          <p:cNvSpPr txBox="1"/>
+          <p:nvPr/>
+        </p:nvSpPr>
+        <p:spPr>
+          <a:xfrm>
+            <a:off x="640080" y="1783080"/>
+            <a:ext cx="10881360" cy="3200400"/>
+          </a:xfrm>
+          <a:prstGeom prst="rect">
+            <a:avLst/>
+          </a:prstGeom>
+          <a:noFill/>
+          <a:ln/>
+        </p:spPr>
+        <p:txBody>
+          <a:bodyPr wrap="square" lIns="0" tIns="0" rIns="0" bIns="0" rtlCol="0" anchor="t"/>
+          <a:lstStyle/>
+          <a:p>
+            <a:pPr marL="228600" indent="-228600">
+              <a:spcAft>
+                <a:spcPts val="1400"/>
+              </a:spcAft>
+              <a:buSzPct val="100000"/>
+              <a:buChar char="▪"/>
+            </a:pPr>
+            <a:r>
+              <a:rPr lang="en-US" sz="1400" dirty="0">
+                <a:solidFill>
+                  <a:srgbClr val="1B1B2F"/>
+                </a:solidFill>
+                <a:latin typeface="Calibri" pitchFamily="34" charset="0"/>
+                <a:ea typeface="Calibri" pitchFamily="34" charset="-122"/>
+                <a:cs typeface="Calibri" pitchFamily="34" charset="-120"/>
+              </a:rPr>
+              <a:t>Credit-risk model trained on the public “Give Me Some Credit” dataset (~150,000 borrower records)</a:t>
+            </a:r>
+            <a:endParaRPr lang="en-US" sz="1400" dirty="0"/>
+          </a:p>
+          <a:p>
+            <a:pPr marL="228600" indent="-228600">
+              <a:spcAft>
+                <a:spcPts val="1400"/>
+              </a:spcAft>
+              <a:buSzPct val="100000"/>
+              <a:buChar char="▪"/>
+            </a:pPr>
+            <a:r>
+              <a:rPr lang="en-US" sz="1400" dirty="0">
+                <a:solidFill>
+                  <a:srgbClr val="1B1B2F"/>
+                </a:solidFill>
+                <a:latin typeface="Calibri" pitchFamily="34" charset="0"/>
+                <a:ea typeface="Calibri" pitchFamily="34" charset="-122"/>
+                <a:cs typeface="Calibri" pitchFamily="34" charset="-120"/>
+              </a:rPr>
+              <a:t>Features used: age, MonthlyIncome, DebtRatio, RevolvingUtilization, NumberOfDependents and delinquency counts</a:t>
+            </a:r>
+            <a:endParaRPr lang="en-US" sz="1400" dirty="0"/>
+          </a:p>
+          <a:p>
+            <a:pPr marL="228600" indent="-228600">
+              <a:spcAft>
+                <a:spcPts val="1400"/>
+              </a:spcAft>
+              <a:buSzPct val="100000"/>
+              <a:buChar char="▪"/>
+            </a:pPr>
+            <a:r>
+              <a:rPr lang="en-US" sz="1400" dirty="0">
+                <a:solidFill>
+                  <a:srgbClr val="1B1B2F"/>
+                </a:solidFill>
+                <a:latin typeface="Calibri" pitchFamily="34" charset="0"/>
+                <a:ea typeface="Calibri" pitchFamily="34" charset="-122"/>
+                <a:cs typeface="Calibri" pitchFamily="34" charset="-120"/>
+              </a:rPr>
+              <a:t>XGBoost classifier achieves AUC-ROC ≈ 0.87 on the held-out test split</a:t>
+            </a:r>
+            <a:endParaRPr lang="en-US" sz="1400" dirty="0"/>
+          </a:p>
+          <a:p>
+            <a:pPr marL="228600" indent="-228600">
+              <a:spcAft>
+                <a:spcPts val="1400"/>
+              </a:spcAft>
+              <a:buSzPct val="100000"/>
+              <a:buChar char="▪"/>
+            </a:pPr>
+            <a:r>
+              <a:rPr lang="en-US" sz="1400" dirty="0">
+                <a:solidFill>
+                  <a:srgbClr val="1B1B2F"/>
+                </a:solidFill>
+                <a:latin typeface="Calibri" pitchFamily="34" charset="0"/>
+                <a:ea typeface="Calibri" pitchFamily="34" charset="-122"/>
+                <a:cs typeface="Calibri" pitchFamily="34" charset="-120"/>
+              </a:rPr>
+              <a:t>Three synthetic sample bank-statement PDFs generated (clean / tampered / photoshopped) to exercise the forensics pipeline</a:t>
+            </a:r>
+            <a:endParaRPr lang="en-US" sz="1400" dirty="0"/>
+          </a:p>
+          <a:p>
+            <a:pPr marL="228600" indent="-228600">
+              <a:spcAft>
+                <a:spcPts val="1400"/>
+              </a:spcAft>
+              <a:buSzPct val="100000"/>
+              <a:buChar char="▪"/>
+            </a:pPr>
+            <a:r>
+              <a:rPr lang="en-US" sz="1400" dirty="0">
+                <a:solidFill>
+                  <a:srgbClr val="1B1B2F"/>
+                </a:solidFill>
+                <a:latin typeface="Calibri" pitchFamily="34" charset="0"/>
+                <a:ea typeface="Calibri" pitchFamily="34" charset="-122"/>
+                <a:cs typeface="Calibri" pitchFamily="34" charset="-120"/>
+              </a:rPr>
+              <a:t>Plus a password-encrypted variant to test the password-protected-PDF upload path</a:t>
+            </a:r>
+            <a:endParaRPr lang="en-US" sz="1400" dirty="0"/>
+          </a:p>
+        </p:txBody>
+      </p:sp>
+      <p:sp>
+        <p:nvSpPr>
+          <p:cNvPr id="7" name="Shape 4"/>
+          <p:cNvSpPr/>
+          <p:nvPr/>
+        </p:nvSpPr>
+        <p:spPr>
+          <a:xfrm>
+            <a:off x="548640" y="5166360"/>
+            <a:ext cx="11091672" cy="1234440"/>
+          </a:xfrm>
+          <a:prstGeom prst="roundRect">
+            <a:avLst>
+              <a:gd name="adj" fmla="val 5926"/>
+            </a:avLst>
+          </a:prstGeom>
+          <a:solidFill>
+            <a:srgbClr val="F5F8FF"/>
+          </a:solidFill>
+          <a:ln/>
+        </p:spPr>
+      </p:sp>
+      <p:sp>
+        <p:nvSpPr>
+          <p:cNvPr id="8" name="Text 5"/>
+          <p:cNvSpPr txBox="1"/>
+          <p:nvPr/>
+        </p:nvSpPr>
+        <p:spPr>
+          <a:xfrm>
+            <a:off x="868680" y="5330952"/>
+            <a:ext cx="10424160" cy="274320"/>
+          </a:xfrm>
+          <a:prstGeom prst="rect">
+            <a:avLst/>
+          </a:prstGeom>
+          <a:noFill/>
+          <a:ln/>
+        </p:spPr>
+        <p:txBody>
+          <a:bodyPr wrap="square" lIns="0" tIns="0" rIns="0" bIns="0" rtlCol="0" anchor="ctr"/>
+          <a:lstStyle/>
+          <a:p>
+            <a:pPr indent="0" marL="0">
+              <a:buNone/>
+            </a:pPr>
+            <a:r>
+              <a:rPr lang="en-US" sz="1150" b="1" spc="150" kern="0" dirty="0">
+                <a:solidFill>
+                  <a:srgbClr val="C9A227"/>
+                </a:solidFill>
+                <a:latin typeface="Calibri" pitchFamily="34" charset="0"/>
+                <a:ea typeface="Calibri" pitchFamily="34" charset="-122"/>
+                <a:cs typeface="Calibri" pitchFamily="34" charset="-120"/>
+              </a:rPr>
+              <a:t>WHY IT MATTERS</a:t>
+            </a:r>
+            <a:endParaRPr lang="en-US" sz="1150" dirty="0"/>
+          </a:p>
+        </p:txBody>
+      </p:sp>
+      <p:sp>
+        <p:nvSpPr>
+          <p:cNvPr id="9" name="Text 6"/>
+          <p:cNvSpPr txBox="1"/>
+          <p:nvPr/>
+        </p:nvSpPr>
+        <p:spPr>
+          <a:xfrm>
+            <a:off x="868680" y="5623560"/>
+            <a:ext cx="10424160" cy="685800"/>
+          </a:xfrm>
+          <a:prstGeom prst="rect">
+            <a:avLst/>
+          </a:prstGeom>
+          <a:noFill/>
+          <a:ln/>
+        </p:spPr>
+        <p:txBody>
+          <a:bodyPr wrap="square" lIns="0" tIns="0" rIns="0" bIns="0" rtlCol="0" anchor="t"/>
+          <a:lstStyle/>
+          <a:p>
+            <a:pPr indent="0" marL="0">
+              <a:lnSpc>
+                <a:spcPct val="115000"/>
+              </a:lnSpc>
+              <a:buNone/>
+            </a:pPr>
+            <a:r>
+              <a:rPr lang="en-US" sz="1300" i="1" dirty="0">
+                <a:solidFill>
+                  <a:srgbClr val="1E2761"/>
+                </a:solidFill>
+                <a:latin typeface="Calibri" pitchFamily="34" charset="0"/>
+                <a:ea typeface="Calibri" pitchFamily="34" charset="-122"/>
+                <a:cs typeface="Calibri" pitchFamily="34" charset="-120"/>
+              </a:rPr>
+              <a:t>Three documents, three outcomes: clean, tampered and fraud-fingerprinted statements each drive the pipeline to a different, verifiable decision.</a:t>
+            </a:r>
+            <a:endParaRPr lang="en-US" sz="1300" dirty="0"/>
+          </a:p>
+        </p:txBody>
+      </p:sp>
+      <p:sp>
+        <p:nvSpPr>
+          <p:cNvPr id="10" name="Text 7"/>
+          <p:cNvSpPr txBox="1"/>
+          <p:nvPr/>
+        </p:nvSpPr>
+        <p:spPr>
+          <a:xfrm>
+            <a:off x="457200" y="6510528"/>
+            <a:ext cx="9601200" cy="274320"/>
+          </a:xfrm>
+          <a:prstGeom prst="rect">
+            <a:avLst/>
+          </a:prstGeom>
+          <a:noFill/>
+          <a:ln/>
+        </p:spPr>
+        <p:txBody>
+          <a:bodyPr wrap="square" lIns="0" tIns="0" rIns="0" bIns="0" rtlCol="0" anchor="ctr"/>
+          <a:lstStyle/>
+          <a:p>
+            <a:pPr indent="0" marL="0">
+              <a:buNone/>
+            </a:pPr>
+            <a:r>
+              <a:rPr lang="en-US" sz="900" dirty="0">
+                <a:solidFill>
+                  <a:srgbClr val="5B6B8C"/>
+                </a:solidFill>
+                <a:latin typeface="Calibri" pitchFamily="34" charset="0"/>
+                <a:ea typeface="Calibri" pitchFamily="34" charset="-122"/>
+                <a:cs typeface="Calibri" pitchFamily="34" charset="-120"/>
+              </a:rPr>
+              <a:t>Second Review – Automated AI-Driven Loan Underwriting &amp; Document Fraud Detection</a:t>
+            </a:r>
+            <a:endParaRPr lang="en-US" sz="900" dirty="0"/>
+          </a:p>
+        </p:txBody>
+      </p:sp>
+      <p:sp>
+        <p:nvSpPr>
+          <p:cNvPr id="11" name="Text 8"/>
+          <p:cNvSpPr txBox="1"/>
+          <p:nvPr/>
+        </p:nvSpPr>
+        <p:spPr>
+          <a:xfrm>
+            <a:off x="11430000" y="6510528"/>
+            <a:ext cx="365760" cy="274320"/>
+          </a:xfrm>
+          <a:prstGeom prst="rect">
+            <a:avLst/>
+          </a:prstGeom>
+          <a:noFill/>
+          <a:ln/>
+        </p:spPr>
+        <p:txBody>
+          <a:bodyPr wrap="square" lIns="0" tIns="0" rIns="0" bIns="0" rtlCol="0" anchor="ctr"/>
+          <a:lstStyle/>
+          <a:p>
+            <a:pPr algn="r" indent="0" marL="0">
+              <a:buNone/>
+            </a:pPr>
+            <a:r>
+              <a:rPr lang="en-US" sz="900" dirty="0">
+                <a:solidFill>
+                  <a:srgbClr val="5B6B8C"/>
+                </a:solidFill>
+                <a:latin typeface="Calibri" pitchFamily="34" charset="0"/>
+                <a:ea typeface="Calibri" pitchFamily="34" charset="-122"/>
+                <a:cs typeface="Calibri" pitchFamily="34" charset="-120"/>
+              </a:rPr>
+              <a:t>21</a:t>
+            </a:r>
+            <a:endParaRPr lang="en-US" sz="900" dirty="0"/>
+          </a:p>
+        </p:txBody>
+      </p:sp>
+    </p:spTree>
+  </p:cSld>
+  <p:clrMapOvr>
+    <a:masterClrMapping/>
+  </p:clrMapOvr>
+</p:sld>
+</file>
+
+<file path=ppt/slides/slide22.xml><?xml version="1.0" encoding="utf-8"?>
+<p:sld xmlns:a="http://schemas.openxmlformats.org/drawingml/2006/main" xmlns:r="http://schemas.openxmlformats.org/officeDocument/2006/relationships" xmlns:p="http://schemas.openxmlformats.org/presentationml/2006/main">
+  <p:cSld name="Slide 4">
+    <p:bg>
+      <p:bgPr>
+        <a:solidFill>
+          <a:srgbClr val="FFFFFF"/>
+        </a:solidFill>
+      </p:bgPr>
+    </p:bg>
+    <p:spTree>
+      <p:nvGrpSpPr>
+        <p:cNvPr id="1" name=""/>
+        <p:cNvGrpSpPr/>
+        <p:nvPr/>
+      </p:nvGrpSpPr>
+      <p:grpSpPr>
+        <a:xfrm>
+          <a:off x="0" y="0"/>
+          <a:ext cx="0" cy="0"/>
+          <a:chOff x="0" y="0"/>
+          <a:chExt cx="0" cy="0"/>
+        </a:xfrm>
+      </p:grpSpPr>
+      <p:sp>
+        <p:nvSpPr>
+          <p:cNvPr id="2" name="Text 0"/>
+          <p:cNvSpPr txBox="1"/>
+          <p:nvPr/>
+        </p:nvSpPr>
+        <p:spPr>
+          <a:xfrm>
+            <a:off x="548640" y="384048"/>
+            <a:ext cx="5486400" cy="274320"/>
+          </a:xfrm>
+          <a:prstGeom prst="rect">
+            <a:avLst/>
+          </a:prstGeom>
+          <a:noFill/>
+          <a:ln/>
+        </p:spPr>
+        <p:txBody>
+          <a:bodyPr wrap="square" lIns="0" tIns="0" rIns="0" bIns="0" rtlCol="0" anchor="ctr"/>
+          <a:lstStyle/>
+          <a:p>
+            <a:pPr indent="0" marL="0">
+              <a:buNone/>
+            </a:pPr>
+            <a:r>
+              <a:rPr lang="en-US" sz="1150" b="1" spc="200" kern="0" dirty="0">
+                <a:solidFill>
+                  <a:srgbClr val="C9A227"/>
+                </a:solidFill>
+                <a:latin typeface="Calibri" pitchFamily="34" charset="0"/>
+                <a:ea typeface="Calibri" pitchFamily="34" charset="-122"/>
+                <a:cs typeface="Calibri" pitchFamily="34" charset="-120"/>
+              </a:rPr>
+              <a:t>WORK COMPLETED</a:t>
+            </a:r>
+            <a:endParaRPr lang="en-US" sz="1150" dirty="0"/>
+          </a:p>
+        </p:txBody>
+      </p:sp>
+      <p:sp>
+        <p:nvSpPr>
+          <p:cNvPr id="3" name="Text 1"/>
+          <p:cNvSpPr txBox="1"/>
+          <p:nvPr/>
+        </p:nvSpPr>
+        <p:spPr>
+          <a:xfrm>
+            <a:off x="548640" y="658368"/>
+            <a:ext cx="9784080" cy="640080"/>
+          </a:xfrm>
+          <a:prstGeom prst="rect">
+            <a:avLst/>
+          </a:prstGeom>
+          <a:noFill/>
+          <a:ln/>
+        </p:spPr>
+        <p:txBody>
+          <a:bodyPr wrap="square" lIns="0" tIns="0" rIns="0" bIns="0" rtlCol="0" anchor="ctr"/>
+          <a:lstStyle/>
+          <a:p>
+            <a:pPr indent="0" marL="0">
+              <a:buNone/>
+            </a:pPr>
+            <a:r>
+              <a:rPr lang="en-US" sz="2800" b="1" dirty="0">
+                <a:solidFill>
+                  <a:srgbClr val="1E2761"/>
+                </a:solidFill>
+                <a:latin typeface="Cambria" pitchFamily="34" charset="0"/>
+                <a:ea typeface="Cambria" pitchFamily="34" charset="-122"/>
+                <a:cs typeface="Cambria" pitchFamily="34" charset="-120"/>
+              </a:rPr>
+              <a:t>Modules Completed</a:t>
+            </a:r>
+            <a:endParaRPr lang="en-US" sz="2800" dirty="0"/>
+          </a:p>
+        </p:txBody>
+      </p:sp>
+      <p:sp>
+        <p:nvSpPr>
+          <p:cNvPr id="4" name="Shape 2"/>
+          <p:cNvSpPr/>
+          <p:nvPr/>
+        </p:nvSpPr>
+        <p:spPr>
+          <a:xfrm>
+            <a:off x="10424160" y="365760"/>
+            <a:ext cx="1005840" cy="1005840"/>
+          </a:xfrm>
+          <a:prstGeom prst="ellipse">
+            <a:avLst/>
+          </a:prstGeom>
+          <a:solidFill>
+            <a:srgbClr val="1E2761"/>
+          </a:solidFill>
+          <a:ln/>
+        </p:spPr>
+      </p:sp>
+      <p:pic>
+        <p:nvPicPr>
+          <p:cNvPr id="5" name="Image 0" descr="preencoded.png">    </p:cNvPr>
+          <p:cNvPicPr>
+            <a:picLocks noChangeAspect="1"/>
+          </p:cNvPicPr>
+          <p:nvPr/>
+        </p:nvPicPr>
+        <p:blipFill>
+          <a:blip r:embed="rId1"/>
+          <a:stretch>
+            <a:fillRect/>
+          </a:stretch>
+        </p:blipFill>
+        <p:spPr>
+          <a:xfrm>
+            <a:off x="10544861" y="486461"/>
+            <a:ext cx="764438" cy="764438"/>
+          </a:xfrm>
+          <a:prstGeom prst="rect">
+            <a:avLst/>
+          </a:prstGeom>
+        </p:spPr>
+      </p:pic>
+      <p:graphicFrame>
+        <p:nvGraphicFramePr>
+          <p:cNvPr id="5" name="Table 0"/>
+          <p:cNvGraphicFramePr>
+            <a:graphicFrameLocks noGrp="1"/>
+          </p:cNvGraphicFramePr>
+          <p:nvPr>
+            <p:extLst>
+              <p:ext uri="{D42A27DB-BD31-4B8C-83A1-F6EECF244321}">
+                <p14:modId xmlns:p14="http://schemas.microsoft.com/office/powerpoint/2010/main" val="1579011935"/>
+              </p:ext>
+            </p:extLst>
+          </p:nvPr>
+        </p:nvGraphicFramePr>
+        <p:xfrm>
+          <a:off x="548640" y="1737360"/>
+          <a:ext cx="11091672" cy="914400"/>
+        </p:xfrm>
+        <a:graphic>
+          <a:graphicData uri="http://schemas.openxmlformats.org/drawingml/2006/table">
+            <a:tbl>
+              <a:tblPr/>
+              <a:tblGrid>
+                <a:gridCol w="548640"/>
+                <a:gridCol w="3017520"/>
+                <a:gridCol w="7525512"/>
+              </a:tblGrid>
+              <a:tr h="420624">
+                <a:tc>
+                  <a:txBody>
+                    <a:bodyPr/>
+                    <a:lstStyle/>
+                    <a:p>
+                      <a:pPr indent="0" marL="0">
+                        <a:buNone/>
+                      </a:pPr>
+                      <a:r>
+                        <a:rPr lang="en-US" sz="1300" b="1" dirty="0">
+                          <a:solidFill>
+                            <a:srgbClr val="141B45"/>
+                          </a:solidFill>
+                          <a:latin typeface="Calibri" pitchFamily="34" charset="0"/>
+                          <a:ea typeface="Calibri" pitchFamily="34" charset="-122"/>
+                          <a:cs typeface="Calibri" pitchFamily="34" charset="-120"/>
+                        </a:rPr>
+                        <a:t>#</a:t>
+                      </a:r>
+                      <a:endParaRPr lang="en-US" sz="1300" dirty="0">
+                        <a:latin typeface="Calibri" charset="0"/>
+                        <a:ea typeface="Calibri" charset="0"/>
+                        <a:cs typeface="Calibri" charset="0"/>
+                      </a:endParaRPr>
+                    </a:p>
+                  </a:txBody>
+                  <a:tcPr marL="91440" marR="91440" marT="45720" marB="45720" anchor="ctr">
+                    <a:lnL w="9525" cap="flat" cmpd="sng" algn="ctr">
+                      <a:solidFill>
+                        <a:srgbClr val="DADFF0"/>
+                      </a:solidFill>
+                      <a:prstDash val="solid"/>
+                      <a:round/>
+                      <a:headEnd type="none" w="med" len="med"/>
+                      <a:tailEnd type="none" w="med" len="med"/>
+                    </a:lnL>
+                    <a:lnR w="9525" cap="flat" cmpd="sng" algn="ctr">
+                      <a:solidFill>
+                        <a:srgbClr val="DADFF0"/>
+                      </a:solidFill>
+                      <a:prstDash val="solid"/>
+                      <a:round/>
+                      <a:headEnd type="none" w="med" len="med"/>
+                      <a:tailEnd type="none" w="med" len="med"/>
+                    </a:lnR>
+                    <a:lnT w="9525" cap="flat" cmpd="sng" algn="ctr">
+                      <a:solidFill>
+                        <a:srgbClr val="DADFF0"/>
+                      </a:solidFill>
+                      <a:prstDash val="solid"/>
+                      <a:round/>
+                      <a:headEnd type="none" w="med" len="med"/>
+                      <a:tailEnd type="none" w="med" len="med"/>
+                    </a:lnT>
+                    <a:lnB w="9525" cap="flat" cmpd="sng" algn="ctr">
+                      <a:solidFill>
+                        <a:srgbClr val="DADFF0"/>
+                      </a:solidFill>
+                      <a:prstDash val="solid"/>
+                      <a:round/>
+                      <a:headEnd type="none" w="med" len="med"/>
+                      <a:tailEnd type="none" w="med" len="med"/>
+                    </a:lnB>
+                    <a:solidFill>
+                      <a:srgbClr val="CADCFC"/>
+                    </a:solidFill>
+                  </a:tcPr>
+                </a:tc>
+                <a:tc>
+                  <a:txBody>
+                    <a:bodyPr/>
+                    <a:lstStyle/>
+                    <a:p>
+                      <a:pPr indent="0" marL="0">
+                        <a:buNone/>
+                      </a:pPr>
+                      <a:r>
+                        <a:rPr lang="en-US" sz="1300" b="1" dirty="0">
+                          <a:solidFill>
+                            <a:srgbClr val="141B45"/>
+                          </a:solidFill>
+                          <a:latin typeface="Calibri" pitchFamily="34" charset="0"/>
+                          <a:ea typeface="Calibri" pitchFamily="34" charset="-122"/>
+                          <a:cs typeface="Calibri" pitchFamily="34" charset="-120"/>
+                        </a:rPr>
+                        <a:t>Module</a:t>
+                      </a:r>
+                      <a:endParaRPr lang="en-US" sz="1300" dirty="0">
+                        <a:latin typeface="Calibri" charset="0"/>
+                        <a:ea typeface="Calibri" charset="0"/>
+                        <a:cs typeface="Calibri" charset="0"/>
+                      </a:endParaRPr>
+                    </a:p>
+                  </a:txBody>
+                  <a:tcPr marL="91440" marR="91440" marT="45720" marB="45720" anchor="ctr">
+                    <a:lnL w="9525" cap="flat" cmpd="sng" algn="ctr">
+                      <a:solidFill>
+                        <a:srgbClr val="DADFF0"/>
+                      </a:solidFill>
+                      <a:prstDash val="solid"/>
+                      <a:round/>
+                      <a:headEnd type="none" w="med" len="med"/>
+                      <a:tailEnd type="none" w="med" len="med"/>
+                    </a:lnL>
+                    <a:lnR w="9525" cap="flat" cmpd="sng" algn="ctr">
+                      <a:solidFill>
+                        <a:srgbClr val="DADFF0"/>
+                      </a:solidFill>
+                      <a:prstDash val="solid"/>
+                      <a:round/>
+                      <a:headEnd type="none" w="med" len="med"/>
+                      <a:tailEnd type="none" w="med" len="med"/>
+                    </a:lnR>
+                    <a:lnT w="9525" cap="flat" cmpd="sng" algn="ctr">
+                      <a:solidFill>
+                        <a:srgbClr val="DADFF0"/>
+                      </a:solidFill>
+                      <a:prstDash val="solid"/>
+                      <a:round/>
+                      <a:headEnd type="none" w="med" len="med"/>
+                      <a:tailEnd type="none" w="med" len="med"/>
+                    </a:lnT>
+                    <a:lnB w="9525" cap="flat" cmpd="sng" algn="ctr">
+                      <a:solidFill>
+                        <a:srgbClr val="DADFF0"/>
+                      </a:solidFill>
+                      <a:prstDash val="solid"/>
+                      <a:round/>
+                      <a:headEnd type="none" w="med" len="med"/>
+                      <a:tailEnd type="none" w="med" len="med"/>
+                    </a:lnB>
+                    <a:solidFill>
+                      <a:srgbClr val="CADCFC"/>
+                    </a:solidFill>
+                  </a:tcPr>
+                </a:tc>
+                <a:tc>
+                  <a:txBody>
+                    <a:bodyPr/>
+                    <a:lstStyle/>
+                    <a:p>
+                      <a:pPr indent="0" marL="0">
+                        <a:buNone/>
+                      </a:pPr>
+                      <a:r>
+                        <a:rPr lang="en-US" sz="1300" b="1" dirty="0">
+                          <a:solidFill>
+                            <a:srgbClr val="141B45"/>
+                          </a:solidFill>
+                          <a:latin typeface="Calibri" pitchFamily="34" charset="0"/>
+                          <a:ea typeface="Calibri" pitchFamily="34" charset="-122"/>
+                          <a:cs typeface="Calibri" pitchFamily="34" charset="-120"/>
+                        </a:rPr>
+                        <a:t>Summary</a:t>
+                      </a:r>
+                      <a:endParaRPr lang="en-US" sz="1300" dirty="0">
+                        <a:latin typeface="Calibri" charset="0"/>
+                        <a:ea typeface="Calibri" charset="0"/>
+                        <a:cs typeface="Calibri" charset="0"/>
+                      </a:endParaRPr>
+                    </a:p>
+                  </a:txBody>
+                  <a:tcPr marL="91440" marR="91440" marT="45720" marB="45720" anchor="ctr">
+                    <a:lnL w="9525" cap="flat" cmpd="sng" algn="ctr">
+                      <a:solidFill>
+                        <a:srgbClr val="DADFF0"/>
+                      </a:solidFill>
+                      <a:prstDash val="solid"/>
+                      <a:round/>
+                      <a:headEnd type="none" w="med" len="med"/>
+                      <a:tailEnd type="none" w="med" len="med"/>
+                    </a:lnL>
+                    <a:lnR w="9525" cap="flat" cmpd="sng" algn="ctr">
+                      <a:solidFill>
+                        <a:srgbClr val="DADFF0"/>
+                      </a:solidFill>
+                      <a:prstDash val="solid"/>
+                      <a:round/>
+                      <a:headEnd type="none" w="med" len="med"/>
+                      <a:tailEnd type="none" w="med" len="med"/>
+                    </a:lnR>
+                    <a:lnT w="9525" cap="flat" cmpd="sng" algn="ctr">
+                      <a:solidFill>
+                        <a:srgbClr val="DADFF0"/>
+                      </a:solidFill>
+                      <a:prstDash val="solid"/>
+                      <a:round/>
+                      <a:headEnd type="none" w="med" len="med"/>
+                      <a:tailEnd type="none" w="med" len="med"/>
+                    </a:lnT>
+                    <a:lnB w="9525" cap="flat" cmpd="sng" algn="ctr">
+                      <a:solidFill>
+                        <a:srgbClr val="DADFF0"/>
+                      </a:solidFill>
+                      <a:prstDash val="solid"/>
+                      <a:round/>
+                      <a:headEnd type="none" w="med" len="med"/>
+                      <a:tailEnd type="none" w="med" len="med"/>
+                    </a:lnB>
+                    <a:solidFill>
+                      <a:srgbClr val="CADCFC"/>
+                    </a:solidFill>
+                  </a:tcPr>
+                </a:tc>
+              </a:tr>
+              <a:tr h="420624">
+                <a:tc>
+                  <a:txBody>
+                    <a:bodyPr/>
+                    <a:lstStyle/>
+                    <a:p>
+                      <a:pPr algn="ctr" indent="0" marL="0">
+                        <a:buNone/>
+                      </a:pPr>
+                      <a:r>
+                        <a:rPr lang="en-US" sz="1200" b="1" dirty="0">
+                          <a:solidFill>
+                            <a:srgbClr val="1E2761"/>
+                          </a:solidFill>
+                          <a:latin typeface="Calibri" pitchFamily="34" charset="0"/>
+                          <a:ea typeface="Calibri" pitchFamily="34" charset="-122"/>
+                          <a:cs typeface="Calibri" pitchFamily="34" charset="-120"/>
+                        </a:rPr>
+                        <a:t>1</a:t>
+                      </a:r>
+                      <a:endParaRPr lang="en-US" sz="1200" dirty="0">
+                        <a:latin typeface="Calibri" charset="0"/>
+                        <a:ea typeface="Calibri" charset="0"/>
+                        <a:cs typeface="Calibri" charset="0"/>
+                      </a:endParaRPr>
+                    </a:p>
+                  </a:txBody>
+                  <a:tcPr marL="91440" marR="91440" marT="45720" marB="45720" anchor="ctr">
+                    <a:lnL w="9525" cap="flat" cmpd="sng" algn="ctr">
+                      <a:solidFill>
+                        <a:srgbClr val="DADFF0"/>
+                      </a:solidFill>
+                      <a:prstDash val="solid"/>
+                      <a:round/>
+                      <a:headEnd type="none" w="med" len="med"/>
+                      <a:tailEnd type="none" w="med" len="med"/>
+                    </a:lnL>
+                    <a:lnR w="9525" cap="flat" cmpd="sng" algn="ctr">
+                      <a:solidFill>
+                        <a:srgbClr val="DADFF0"/>
+                      </a:solidFill>
+                      <a:prstDash val="solid"/>
+                      <a:round/>
+                      <a:headEnd type="none" w="med" len="med"/>
+                      <a:tailEnd type="none" w="med" len="med"/>
+                    </a:lnR>
+                    <a:lnT w="9525" cap="flat" cmpd="sng" algn="ctr">
+                      <a:solidFill>
+                        <a:srgbClr val="DADFF0"/>
+                      </a:solidFill>
+                      <a:prstDash val="solid"/>
+                      <a:round/>
+                      <a:headEnd type="none" w="med" len="med"/>
+                      <a:tailEnd type="none" w="med" len="med"/>
+                    </a:lnT>
+                    <a:lnB w="9525" cap="flat" cmpd="sng" algn="ctr">
+                      <a:solidFill>
+                        <a:srgbClr val="DADFF0"/>
+                      </a:solidFill>
+                      <a:prstDash val="solid"/>
+                      <a:round/>
+                      <a:headEnd type="none" w="med" len="med"/>
+                      <a:tailEnd type="none" w="med" len="med"/>
+                    </a:lnB>
+                  </a:tcPr>
+                </a:tc>
+                <a:tc>
+                  <a:txBody>
+                    <a:bodyPr/>
+                    <a:lstStyle/>
+                    <a:p>
+                      <a:pPr indent="0" marL="0">
+                        <a:buNone/>
+                      </a:pPr>
+                      <a:r>
+                        <a:rPr lang="en-US" sz="1200" b="1" dirty="0">
+                          <a:solidFill>
+                            <a:srgbClr val="1B1B2F"/>
+                          </a:solidFill>
+                          <a:latin typeface="Calibri" pitchFamily="34" charset="0"/>
+                          <a:ea typeface="Calibri" pitchFamily="34" charset="-122"/>
+                          <a:cs typeface="Calibri" pitchFamily="34" charset="-120"/>
+                        </a:rPr>
+                        <a:t>Secure Ingestion Gateway</a:t>
+                      </a:r>
+                      <a:endParaRPr lang="en-US" sz="1200" dirty="0">
+                        <a:latin typeface="Calibri" charset="0"/>
+                        <a:ea typeface="Calibri" charset="0"/>
+                        <a:cs typeface="Calibri" charset="0"/>
+                      </a:endParaRPr>
+                    </a:p>
+                  </a:txBody>
+                  <a:tcPr marL="91440" marR="91440" marT="45720" marB="45720" anchor="ctr">
+                    <a:lnL w="9525" cap="flat" cmpd="sng" algn="ctr">
+                      <a:solidFill>
+                        <a:srgbClr val="DADFF0"/>
+                      </a:solidFill>
+                      <a:prstDash val="solid"/>
+                      <a:round/>
+                      <a:headEnd type="none" w="med" len="med"/>
+                      <a:tailEnd type="none" w="med" len="med"/>
+                    </a:lnL>
+                    <a:lnR w="9525" cap="flat" cmpd="sng" algn="ctr">
+                      <a:solidFill>
+                        <a:srgbClr val="DADFF0"/>
+                      </a:solidFill>
+                      <a:prstDash val="solid"/>
+                      <a:round/>
+                      <a:headEnd type="none" w="med" len="med"/>
+                      <a:tailEnd type="none" w="med" len="med"/>
+                    </a:lnR>
+                    <a:lnT w="9525" cap="flat" cmpd="sng" algn="ctr">
+                      <a:solidFill>
+                        <a:srgbClr val="DADFF0"/>
+                      </a:solidFill>
+                      <a:prstDash val="solid"/>
+                      <a:round/>
+                      <a:headEnd type="none" w="med" len="med"/>
+                      <a:tailEnd type="none" w="med" len="med"/>
+                    </a:lnT>
+                    <a:lnB w="9525" cap="flat" cmpd="sng" algn="ctr">
+                      <a:solidFill>
+                        <a:srgbClr val="DADFF0"/>
+                      </a:solidFill>
+                      <a:prstDash val="solid"/>
+                      <a:round/>
+                      <a:headEnd type="none" w="med" len="med"/>
+                      <a:tailEnd type="none" w="med" len="med"/>
+                    </a:lnB>
+                  </a:tcPr>
+                </a:tc>
+                <a:tc>
+                  <a:txBody>
+                    <a:bodyPr/>
+                    <a:lstStyle/>
+                    <a:p>
+                      <a:pPr indent="0" marL="0">
+                        <a:buNone/>
+                      </a:pPr>
+                      <a:r>
+                        <a:rPr lang="en-US" sz="1200" dirty="0">
+                          <a:solidFill>
+                            <a:srgbClr val="1B1B2F"/>
+                          </a:solidFill>
+                          <a:latin typeface="Calibri" pitchFamily="34" charset="0"/>
+                          <a:ea typeface="Calibri" pitchFamily="34" charset="-122"/>
+                          <a:cs typeface="Calibri" pitchFamily="34" charset="-120"/>
+                        </a:rPr>
+                        <a:t>JWT authentication, role-based access control, magic-byte / MIME validation</a:t>
+                      </a:r>
+                      <a:endParaRPr lang="en-US" sz="1200" dirty="0">
+                        <a:latin typeface="Calibri" charset="0"/>
+                        <a:ea typeface="Calibri" charset="0"/>
+                        <a:cs typeface="Calibri" charset="0"/>
+                      </a:endParaRPr>
+                    </a:p>
+                  </a:txBody>
+                  <a:tcPr marL="91440" marR="91440" marT="45720" marB="45720" anchor="ctr">
+                    <a:lnL w="9525" cap="flat" cmpd="sng" algn="ctr">
+                      <a:solidFill>
+                        <a:srgbClr val="DADFF0"/>
+                      </a:solidFill>
+                      <a:prstDash val="solid"/>
+                      <a:round/>
+                      <a:headEnd type="none" w="med" len="med"/>
+                      <a:tailEnd type="none" w="med" len="med"/>
+                    </a:lnL>
+                    <a:lnR w="9525" cap="flat" cmpd="sng" algn="ctr">
+                      <a:solidFill>
+                        <a:srgbClr val="DADFF0"/>
+                      </a:solidFill>
+                      <a:prstDash val="solid"/>
+                      <a:round/>
+                      <a:headEnd type="none" w="med" len="med"/>
+                      <a:tailEnd type="none" w="med" len="med"/>
+                    </a:lnR>
+                    <a:lnT w="9525" cap="flat" cmpd="sng" algn="ctr">
+                      <a:solidFill>
+                        <a:srgbClr val="DADFF0"/>
+                      </a:solidFill>
+                      <a:prstDash val="solid"/>
+                      <a:round/>
+                      <a:headEnd type="none" w="med" len="med"/>
+                      <a:tailEnd type="none" w="med" len="med"/>
+                    </a:lnT>
+                    <a:lnB w="9525" cap="flat" cmpd="sng" algn="ctr">
+                      <a:solidFill>
+                        <a:srgbClr val="DADFF0"/>
+                      </a:solidFill>
+                      <a:prstDash val="solid"/>
+                      <a:round/>
+                      <a:headEnd type="none" w="med" len="med"/>
+                      <a:tailEnd type="none" w="med" len="med"/>
+                    </a:lnB>
+                  </a:tcPr>
+                </a:tc>
+              </a:tr>
+              <a:tr h="420624">
+                <a:tc>
+                  <a:txBody>
+                    <a:bodyPr/>
+                    <a:lstStyle/>
+                    <a:p>
+                      <a:pPr algn="ctr" indent="0" marL="0">
+                        <a:buNone/>
+                      </a:pPr>
+                      <a:r>
+                        <a:rPr lang="en-US" sz="1200" b="1" dirty="0">
+                          <a:solidFill>
+                            <a:srgbClr val="1E2761"/>
+                          </a:solidFill>
+                          <a:latin typeface="Calibri" pitchFamily="34" charset="0"/>
+                          <a:ea typeface="Calibri" pitchFamily="34" charset="-122"/>
+                          <a:cs typeface="Calibri" pitchFamily="34" charset="-120"/>
+                        </a:rPr>
+                        <a:t>2</a:t>
+                      </a:r>
+                      <a:endParaRPr lang="en-US" sz="1200" dirty="0">
+                        <a:latin typeface="Calibri" charset="0"/>
+                        <a:ea typeface="Calibri" charset="0"/>
+                        <a:cs typeface="Calibri" charset="0"/>
+                      </a:endParaRPr>
+                    </a:p>
+                  </a:txBody>
+                  <a:tcPr marL="91440" marR="91440" marT="45720" marB="45720" anchor="ctr">
+                    <a:lnL w="9525" cap="flat" cmpd="sng" algn="ctr">
+                      <a:solidFill>
+                        <a:srgbClr val="DADFF0"/>
+                      </a:solidFill>
+                      <a:prstDash val="solid"/>
+                      <a:round/>
+                      <a:headEnd type="none" w="med" len="med"/>
+                      <a:tailEnd type="none" w="med" len="med"/>
+                    </a:lnL>
+                    <a:lnR w="9525" cap="flat" cmpd="sng" algn="ctr">
+                      <a:solidFill>
+                        <a:srgbClr val="DADFF0"/>
+                      </a:solidFill>
+                      <a:prstDash val="solid"/>
+                      <a:round/>
+                      <a:headEnd type="none" w="med" len="med"/>
+                      <a:tailEnd type="none" w="med" len="med"/>
+                    </a:lnR>
+                    <a:lnT w="9525" cap="flat" cmpd="sng" algn="ctr">
+                      <a:solidFill>
+                        <a:srgbClr val="DADFF0"/>
+                      </a:solidFill>
+                      <a:prstDash val="solid"/>
+                      <a:round/>
+                      <a:headEnd type="none" w="med" len="med"/>
+                      <a:tailEnd type="none" w="med" len="med"/>
+                    </a:lnT>
+                    <a:lnB w="9525" cap="flat" cmpd="sng" algn="ctr">
+                      <a:solidFill>
+                        <a:srgbClr val="DADFF0"/>
+                      </a:solidFill>
+                      <a:prstDash val="solid"/>
+                      <a:round/>
+                      <a:headEnd type="none" w="med" len="med"/>
+                      <a:tailEnd type="none" w="med" len="med"/>
+                    </a:lnB>
+                  </a:tcPr>
+                </a:tc>
+                <a:tc>
+                  <a:txBody>
+                    <a:bodyPr/>
+                    <a:lstStyle/>
+                    <a:p>
+                      <a:pPr indent="0" marL="0">
+                        <a:buNone/>
+                      </a:pPr>
+                      <a:r>
+                        <a:rPr lang="en-US" sz="1200" b="1" dirty="0">
+                          <a:solidFill>
+                            <a:srgbClr val="1B1B2F"/>
+                          </a:solidFill>
+                          <a:latin typeface="Calibri" pitchFamily="34" charset="0"/>
+                          <a:ea typeface="Calibri" pitchFamily="34" charset="-122"/>
+                          <a:cs typeface="Calibri" pitchFamily="34" charset="-120"/>
+                        </a:rPr>
+                        <a:t>Application &amp; Document Intake</a:t>
+                      </a:r>
+                      <a:endParaRPr lang="en-US" sz="1200" dirty="0">
+                        <a:latin typeface="Calibri" charset="0"/>
+                        <a:ea typeface="Calibri" charset="0"/>
+                        <a:cs typeface="Calibri" charset="0"/>
+                      </a:endParaRPr>
+                    </a:p>
+                  </a:txBody>
+                  <a:tcPr marL="91440" marR="91440" marT="45720" marB="45720" anchor="ctr">
+                    <a:lnL w="9525" cap="flat" cmpd="sng" algn="ctr">
+                      <a:solidFill>
+                        <a:srgbClr val="DADFF0"/>
+                      </a:solidFill>
+                      <a:prstDash val="solid"/>
+                      <a:round/>
+                      <a:headEnd type="none" w="med" len="med"/>
+                      <a:tailEnd type="none" w="med" len="med"/>
+                    </a:lnL>
+                    <a:lnR w="9525" cap="flat" cmpd="sng" algn="ctr">
+                      <a:solidFill>
+                        <a:srgbClr val="DADFF0"/>
+                      </a:solidFill>
+                      <a:prstDash val="solid"/>
+                      <a:round/>
+                      <a:headEnd type="none" w="med" len="med"/>
+                      <a:tailEnd type="none" w="med" len="med"/>
+                    </a:lnR>
+                    <a:lnT w="9525" cap="flat" cmpd="sng" algn="ctr">
+                      <a:solidFill>
+                        <a:srgbClr val="DADFF0"/>
+                      </a:solidFill>
+                      <a:prstDash val="solid"/>
+                      <a:round/>
+                      <a:headEnd type="none" w="med" len="med"/>
+                      <a:tailEnd type="none" w="med" len="med"/>
+                    </a:lnT>
+                    <a:lnB w="9525" cap="flat" cmpd="sng" algn="ctr">
+                      <a:solidFill>
+                        <a:srgbClr val="DADFF0"/>
+                      </a:solidFill>
+                      <a:prstDash val="solid"/>
+                      <a:round/>
+                      <a:headEnd type="none" w="med" len="med"/>
+                      <a:tailEnd type="none" w="med" len="med"/>
+                    </a:lnB>
+                  </a:tcPr>
+                </a:tc>
+                <a:tc>
+                  <a:txBody>
+                    <a:bodyPr/>
+                    <a:lstStyle/>
+                    <a:p>
+                      <a:pPr indent="0" marL="0">
+                        <a:buNone/>
+                      </a:pPr>
+                      <a:r>
+                        <a:rPr lang="en-US" sz="1200" dirty="0">
+                          <a:solidFill>
+                            <a:srgbClr val="1B1B2F"/>
+                          </a:solidFill>
+                          <a:latin typeface="Calibri" pitchFamily="34" charset="0"/>
+                          <a:ea typeface="Calibri" pitchFamily="34" charset="-122"/>
+                          <a:cs typeface="Calibri" pitchFamily="34" charset="-120"/>
+                        </a:rPr>
+                        <a:t>Combined apply + upload form, password-protected PDF retry flow</a:t>
+                      </a:r>
+                      <a:endParaRPr lang="en-US" sz="1200" dirty="0">
+                        <a:latin typeface="Calibri" charset="0"/>
+                        <a:ea typeface="Calibri" charset="0"/>
+                        <a:cs typeface="Calibri" charset="0"/>
+                      </a:endParaRPr>
+                    </a:p>
+                  </a:txBody>
+                  <a:tcPr marL="91440" marR="91440" marT="45720" marB="45720" anchor="ctr">
+                    <a:lnL w="9525" cap="flat" cmpd="sng" algn="ctr">
+                      <a:solidFill>
+                        <a:srgbClr val="DADFF0"/>
+                      </a:solidFill>
+                      <a:prstDash val="solid"/>
+                      <a:round/>
+                      <a:headEnd type="none" w="med" len="med"/>
+                      <a:tailEnd type="none" w="med" len="med"/>
+                    </a:lnL>
+                    <a:lnR w="9525" cap="flat" cmpd="sng" algn="ctr">
+                      <a:solidFill>
+                        <a:srgbClr val="DADFF0"/>
+                      </a:solidFill>
+                      <a:prstDash val="solid"/>
+                      <a:round/>
+                      <a:headEnd type="none" w="med" len="med"/>
+                      <a:tailEnd type="none" w="med" len="med"/>
+                    </a:lnR>
+                    <a:lnT w="9525" cap="flat" cmpd="sng" algn="ctr">
+                      <a:solidFill>
+                        <a:srgbClr val="DADFF0"/>
+                      </a:solidFill>
+                      <a:prstDash val="solid"/>
+                      <a:round/>
+                      <a:headEnd type="none" w="med" len="med"/>
+                      <a:tailEnd type="none" w="med" len="med"/>
+                    </a:lnT>
+                    <a:lnB w="9525" cap="flat" cmpd="sng" algn="ctr">
+                      <a:solidFill>
+                        <a:srgbClr val="DADFF0"/>
+                      </a:solidFill>
+                      <a:prstDash val="solid"/>
+                      <a:round/>
+                      <a:headEnd type="none" w="med" len="med"/>
+                      <a:tailEnd type="none" w="med" len="med"/>
+                    </a:lnB>
+                  </a:tcPr>
+                </a:tc>
+              </a:tr>
+              <a:tr h="420624">
+                <a:tc>
+                  <a:txBody>
+                    <a:bodyPr/>
+                    <a:lstStyle/>
+                    <a:p>
+                      <a:pPr algn="ctr" indent="0" marL="0">
+                        <a:buNone/>
+                      </a:pPr>
+                      <a:r>
+                        <a:rPr lang="en-US" sz="1200" b="1" dirty="0">
+                          <a:solidFill>
+                            <a:srgbClr val="1E2761"/>
+                          </a:solidFill>
+                          <a:latin typeface="Calibri" pitchFamily="34" charset="0"/>
+                          <a:ea typeface="Calibri" pitchFamily="34" charset="-122"/>
+                          <a:cs typeface="Calibri" pitchFamily="34" charset="-120"/>
+                        </a:rPr>
+                        <a:t>3</a:t>
+                      </a:r>
+                      <a:endParaRPr lang="en-US" sz="1200" dirty="0">
+                        <a:latin typeface="Calibri" charset="0"/>
+                        <a:ea typeface="Calibri" charset="0"/>
+                        <a:cs typeface="Calibri" charset="0"/>
+                      </a:endParaRPr>
+                    </a:p>
+                  </a:txBody>
+                  <a:tcPr marL="91440" marR="91440" marT="45720" marB="45720" anchor="ctr">
+                    <a:lnL w="9525" cap="flat" cmpd="sng" algn="ctr">
+                      <a:solidFill>
+                        <a:srgbClr val="DADFF0"/>
+                      </a:solidFill>
+                      <a:prstDash val="solid"/>
+                      <a:round/>
+                      <a:headEnd type="none" w="med" len="med"/>
+                      <a:tailEnd type="none" w="med" len="med"/>
+                    </a:lnL>
+                    <a:lnR w="9525" cap="flat" cmpd="sng" algn="ctr">
+                      <a:solidFill>
+                        <a:srgbClr val="DADFF0"/>
+                      </a:solidFill>
+                      <a:prstDash val="solid"/>
+                      <a:round/>
+                      <a:headEnd type="none" w="med" len="med"/>
+                      <a:tailEnd type="none" w="med" len="med"/>
+                    </a:lnR>
+                    <a:lnT w="9525" cap="flat" cmpd="sng" algn="ctr">
+                      <a:solidFill>
+                        <a:srgbClr val="DADFF0"/>
+                      </a:solidFill>
+                      <a:prstDash val="solid"/>
+                      <a:round/>
+                      <a:headEnd type="none" w="med" len="med"/>
+                      <a:tailEnd type="none" w="med" len="med"/>
+                    </a:lnT>
+                    <a:lnB w="9525" cap="flat" cmpd="sng" algn="ctr">
+                      <a:solidFill>
+                        <a:srgbClr val="DADFF0"/>
+                      </a:solidFill>
+                      <a:prstDash val="solid"/>
+                      <a:round/>
+                      <a:headEnd type="none" w="med" len="med"/>
+                      <a:tailEnd type="none" w="med" len="med"/>
+                    </a:lnB>
+                  </a:tcPr>
+                </a:tc>
+                <a:tc>
+                  <a:txBody>
+                    <a:bodyPr/>
+                    <a:lstStyle/>
+                    <a:p>
+                      <a:pPr indent="0" marL="0">
+                        <a:buNone/>
+                      </a:pPr>
+                      <a:r>
+                        <a:rPr lang="en-US" sz="1200" b="1" dirty="0">
+                          <a:solidFill>
+                            <a:srgbClr val="1B1B2F"/>
+                          </a:solidFill>
+                          <a:latin typeface="Calibri" pitchFamily="34" charset="0"/>
+                          <a:ea typeface="Calibri" pitchFamily="34" charset="-122"/>
+                          <a:cs typeface="Calibri" pitchFamily="34" charset="-120"/>
+                        </a:rPr>
+                        <a:t>Structural / Metadata Forensics</a:t>
+                      </a:r>
+                      <a:endParaRPr lang="en-US" sz="1200" dirty="0">
+                        <a:latin typeface="Calibri" charset="0"/>
+                        <a:ea typeface="Calibri" charset="0"/>
+                        <a:cs typeface="Calibri" charset="0"/>
+                      </a:endParaRPr>
+                    </a:p>
+                  </a:txBody>
+                  <a:tcPr marL="91440" marR="91440" marT="45720" marB="45720" anchor="ctr">
+                    <a:lnL w="9525" cap="flat" cmpd="sng" algn="ctr">
+                      <a:solidFill>
+                        <a:srgbClr val="DADFF0"/>
+                      </a:solidFill>
+                      <a:prstDash val="solid"/>
+                      <a:round/>
+                      <a:headEnd type="none" w="med" len="med"/>
+                      <a:tailEnd type="none" w="med" len="med"/>
+                    </a:lnL>
+                    <a:lnR w="9525" cap="flat" cmpd="sng" algn="ctr">
+                      <a:solidFill>
+                        <a:srgbClr val="DADFF0"/>
+                      </a:solidFill>
+                      <a:prstDash val="solid"/>
+                      <a:round/>
+                      <a:headEnd type="none" w="med" len="med"/>
+                      <a:tailEnd type="none" w="med" len="med"/>
+                    </a:lnR>
+                    <a:lnT w="9525" cap="flat" cmpd="sng" algn="ctr">
+                      <a:solidFill>
+                        <a:srgbClr val="DADFF0"/>
+                      </a:solidFill>
+                      <a:prstDash val="solid"/>
+                      <a:round/>
+                      <a:headEnd type="none" w="med" len="med"/>
+                      <a:tailEnd type="none" w="med" len="med"/>
+                    </a:lnT>
+                    <a:lnB w="9525" cap="flat" cmpd="sng" algn="ctr">
+                      <a:solidFill>
+                        <a:srgbClr val="DADFF0"/>
+                      </a:solidFill>
+                      <a:prstDash val="solid"/>
+                      <a:round/>
+                      <a:headEnd type="none" w="med" len="med"/>
+                      <a:tailEnd type="none" w="med" len="med"/>
+                    </a:lnB>
+                  </a:tcPr>
+                </a:tc>
+                <a:tc>
+                  <a:txBody>
+                    <a:bodyPr/>
+                    <a:lstStyle/>
+                    <a:p>
+                      <a:pPr indent="0" marL="0">
+                        <a:buNone/>
+                      </a:pPr>
+                      <a:r>
+                        <a:rPr lang="en-US" sz="1200" dirty="0">
+                          <a:solidFill>
+                            <a:srgbClr val="1B1B2F"/>
+                          </a:solidFill>
+                          <a:latin typeface="Calibri" pitchFamily="34" charset="0"/>
+                          <a:ea typeface="Calibri" pitchFamily="34" charset="-122"/>
+                          <a:cs typeface="Calibri" pitchFamily="34" charset="-120"/>
+                        </a:rPr>
+                        <a:t>PyMuPDF traversal of /Producer, /Creator, /ModDate tags and font dictionaries</a:t>
+                      </a:r>
+                      <a:endParaRPr lang="en-US" sz="1200" dirty="0">
+                        <a:latin typeface="Calibri" charset="0"/>
+                        <a:ea typeface="Calibri" charset="0"/>
+                        <a:cs typeface="Calibri" charset="0"/>
+                      </a:endParaRPr>
+                    </a:p>
+                  </a:txBody>
+                  <a:tcPr marL="91440" marR="91440" marT="45720" marB="45720" anchor="ctr">
+                    <a:lnL w="9525" cap="flat" cmpd="sng" algn="ctr">
+                      <a:solidFill>
+                        <a:srgbClr val="DADFF0"/>
+                      </a:solidFill>
+                      <a:prstDash val="solid"/>
+                      <a:round/>
+                      <a:headEnd type="none" w="med" len="med"/>
+                      <a:tailEnd type="none" w="med" len="med"/>
+                    </a:lnL>
+                    <a:lnR w="9525" cap="flat" cmpd="sng" algn="ctr">
+                      <a:solidFill>
+                        <a:srgbClr val="DADFF0"/>
+                      </a:solidFill>
+                      <a:prstDash val="solid"/>
+                      <a:round/>
+                      <a:headEnd type="none" w="med" len="med"/>
+                      <a:tailEnd type="none" w="med" len="med"/>
+                    </a:lnR>
+                    <a:lnT w="9525" cap="flat" cmpd="sng" algn="ctr">
+                      <a:solidFill>
+                        <a:srgbClr val="DADFF0"/>
+                      </a:solidFill>
+                      <a:prstDash val="solid"/>
+                      <a:round/>
+                      <a:headEnd type="none" w="med" len="med"/>
+                      <a:tailEnd type="none" w="med" len="med"/>
+                    </a:lnT>
+                    <a:lnB w="9525" cap="flat" cmpd="sng" algn="ctr">
+                      <a:solidFill>
+                        <a:srgbClr val="DADFF0"/>
+                      </a:solidFill>
+                      <a:prstDash val="solid"/>
+                      <a:round/>
+                      <a:headEnd type="none" w="med" len="med"/>
+                      <a:tailEnd type="none" w="med" len="med"/>
+                    </a:lnB>
+                  </a:tcPr>
+                </a:tc>
+              </a:tr>
+              <a:tr h="420624">
+                <a:tc>
+                  <a:txBody>
+                    <a:bodyPr/>
+                    <a:lstStyle/>
+                    <a:p>
+                      <a:pPr algn="ctr" indent="0" marL="0">
+                        <a:buNone/>
+                      </a:pPr>
+                      <a:r>
+                        <a:rPr lang="en-US" sz="1200" b="1" dirty="0">
+                          <a:solidFill>
+                            <a:srgbClr val="1E2761"/>
+                          </a:solidFill>
+                          <a:latin typeface="Calibri" pitchFamily="34" charset="0"/>
+                          <a:ea typeface="Calibri" pitchFamily="34" charset="-122"/>
+                          <a:cs typeface="Calibri" pitchFamily="34" charset="-120"/>
+                        </a:rPr>
+                        <a:t>4</a:t>
+                      </a:r>
+                      <a:endParaRPr lang="en-US" sz="1200" dirty="0">
+                        <a:latin typeface="Calibri" charset="0"/>
+                        <a:ea typeface="Calibri" charset="0"/>
+                        <a:cs typeface="Calibri" charset="0"/>
+                      </a:endParaRPr>
+                    </a:p>
+                  </a:txBody>
+                  <a:tcPr marL="91440" marR="91440" marT="45720" marB="45720" anchor="ctr">
+                    <a:lnL w="9525" cap="flat" cmpd="sng" algn="ctr">
+                      <a:solidFill>
+                        <a:srgbClr val="DADFF0"/>
+                      </a:solidFill>
+                      <a:prstDash val="solid"/>
+                      <a:round/>
+                      <a:headEnd type="none" w="med" len="med"/>
+                      <a:tailEnd type="none" w="med" len="med"/>
+                    </a:lnL>
+                    <a:lnR w="9525" cap="flat" cmpd="sng" algn="ctr">
+                      <a:solidFill>
+                        <a:srgbClr val="DADFF0"/>
+                      </a:solidFill>
+                      <a:prstDash val="solid"/>
+                      <a:round/>
+                      <a:headEnd type="none" w="med" len="med"/>
+                      <a:tailEnd type="none" w="med" len="med"/>
+                    </a:lnR>
+                    <a:lnT w="9525" cap="flat" cmpd="sng" algn="ctr">
+                      <a:solidFill>
+                        <a:srgbClr val="DADFF0"/>
+                      </a:solidFill>
+                      <a:prstDash val="solid"/>
+                      <a:round/>
+                      <a:headEnd type="none" w="med" len="med"/>
+                      <a:tailEnd type="none" w="med" len="med"/>
+                    </a:lnT>
+                    <a:lnB w="9525" cap="flat" cmpd="sng" algn="ctr">
+                      <a:solidFill>
+                        <a:srgbClr val="DADFF0"/>
+                      </a:solidFill>
+                      <a:prstDash val="solid"/>
+                      <a:round/>
+                      <a:headEnd type="none" w="med" len="med"/>
+                      <a:tailEnd type="none" w="med" len="med"/>
+                    </a:lnB>
+                  </a:tcPr>
+                </a:tc>
+                <a:tc>
+                  <a:txBody>
+                    <a:bodyPr/>
+                    <a:lstStyle/>
+                    <a:p>
+                      <a:pPr indent="0" marL="0">
+                        <a:buNone/>
+                      </a:pPr>
+                      <a:r>
+                        <a:rPr lang="en-US" sz="1200" b="1" dirty="0">
+                          <a:solidFill>
+                            <a:srgbClr val="1B1B2F"/>
+                          </a:solidFill>
+                          <a:latin typeface="Calibri" pitchFamily="34" charset="0"/>
+                          <a:ea typeface="Calibri" pitchFamily="34" charset="-122"/>
+                          <a:cs typeface="Calibri" pitchFamily="34" charset="-120"/>
+                        </a:rPr>
+                        <a:t>Error Level Analysis</a:t>
+                      </a:r>
+                      <a:endParaRPr lang="en-US" sz="1200" dirty="0">
+                        <a:latin typeface="Calibri" charset="0"/>
+                        <a:ea typeface="Calibri" charset="0"/>
+                        <a:cs typeface="Calibri" charset="0"/>
+                      </a:endParaRPr>
+                    </a:p>
+                  </a:txBody>
+                  <a:tcPr marL="91440" marR="91440" marT="45720" marB="45720" anchor="ctr">
+                    <a:lnL w="9525" cap="flat" cmpd="sng" algn="ctr">
+                      <a:solidFill>
+                        <a:srgbClr val="DADFF0"/>
+                      </a:solidFill>
+                      <a:prstDash val="solid"/>
+                      <a:round/>
+                      <a:headEnd type="none" w="med" len="med"/>
+                      <a:tailEnd type="none" w="med" len="med"/>
+                    </a:lnL>
+                    <a:lnR w="9525" cap="flat" cmpd="sng" algn="ctr">
+                      <a:solidFill>
+                        <a:srgbClr val="DADFF0"/>
+                      </a:solidFill>
+                      <a:prstDash val="solid"/>
+                      <a:round/>
+                      <a:headEnd type="none" w="med" len="med"/>
+                      <a:tailEnd type="none" w="med" len="med"/>
+                    </a:lnR>
+                    <a:lnT w="9525" cap="flat" cmpd="sng" algn="ctr">
+                      <a:solidFill>
+                        <a:srgbClr val="DADFF0"/>
+                      </a:solidFill>
+                      <a:prstDash val="solid"/>
+                      <a:round/>
+                      <a:headEnd type="none" w="med" len="med"/>
+                      <a:tailEnd type="none" w="med" len="med"/>
+                    </a:lnT>
+                    <a:lnB w="9525" cap="flat" cmpd="sng" algn="ctr">
+                      <a:solidFill>
+                        <a:srgbClr val="DADFF0"/>
+                      </a:solidFill>
+                      <a:prstDash val="solid"/>
+                      <a:round/>
+                      <a:headEnd type="none" w="med" len="med"/>
+                      <a:tailEnd type="none" w="med" len="med"/>
+                    </a:lnB>
+                  </a:tcPr>
+                </a:tc>
+                <a:tc>
+                  <a:txBody>
+                    <a:bodyPr/>
+                    <a:lstStyle/>
+                    <a:p>
+                      <a:pPr indent="0" marL="0">
+                        <a:buNone/>
+                      </a:pPr>
+                      <a:r>
+                        <a:rPr lang="en-US" sz="1200" dirty="0">
+                          <a:solidFill>
+                            <a:srgbClr val="1B1B2F"/>
+                          </a:solidFill>
+                          <a:latin typeface="Calibri" pitchFamily="34" charset="0"/>
+                          <a:ea typeface="Calibri" pitchFamily="34" charset="-122"/>
+                          <a:cs typeface="Calibri" pitchFamily="34" charset="-120"/>
+                        </a:rPr>
+                        <a:t>Six-stage ELA pipeline rendering a visual tamper heatmap for the officer</a:t>
+                      </a:r>
+                      <a:endParaRPr lang="en-US" sz="1200" dirty="0">
+                        <a:latin typeface="Calibri" charset="0"/>
+                        <a:ea typeface="Calibri" charset="0"/>
+                        <a:cs typeface="Calibri" charset="0"/>
+                      </a:endParaRPr>
+                    </a:p>
+                  </a:txBody>
+                  <a:tcPr marL="91440" marR="91440" marT="45720" marB="45720" anchor="ctr">
+                    <a:lnL w="9525" cap="flat" cmpd="sng" algn="ctr">
+                      <a:solidFill>
+                        <a:srgbClr val="DADFF0"/>
+                      </a:solidFill>
+                      <a:prstDash val="solid"/>
+                      <a:round/>
+                      <a:headEnd type="none" w="med" len="med"/>
+                      <a:tailEnd type="none" w="med" len="med"/>
+                    </a:lnL>
+                    <a:lnR w="9525" cap="flat" cmpd="sng" algn="ctr">
+                      <a:solidFill>
+                        <a:srgbClr val="DADFF0"/>
+                      </a:solidFill>
+                      <a:prstDash val="solid"/>
+                      <a:round/>
+                      <a:headEnd type="none" w="med" len="med"/>
+                      <a:tailEnd type="none" w="med" len="med"/>
+                    </a:lnR>
+                    <a:lnT w="9525" cap="flat" cmpd="sng" algn="ctr">
+                      <a:solidFill>
+                        <a:srgbClr val="DADFF0"/>
+                      </a:solidFill>
+                      <a:prstDash val="solid"/>
+                      <a:round/>
+                      <a:headEnd type="none" w="med" len="med"/>
+                      <a:tailEnd type="none" w="med" len="med"/>
+                    </a:lnT>
+                    <a:lnB w="9525" cap="flat" cmpd="sng" algn="ctr">
+                      <a:solidFill>
+                        <a:srgbClr val="DADFF0"/>
+                      </a:solidFill>
+                      <a:prstDash val="solid"/>
+                      <a:round/>
+                      <a:headEnd type="none" w="med" len="med"/>
+                      <a:tailEnd type="none" w="med" len="med"/>
+                    </a:lnB>
+                  </a:tcPr>
+                </a:tc>
+              </a:tr>
+              <a:tr h="420624">
+                <a:tc>
+                  <a:txBody>
+                    <a:bodyPr/>
+                    <a:lstStyle/>
+                    <a:p>
+                      <a:pPr algn="ctr" indent="0" marL="0">
+                        <a:buNone/>
+                      </a:pPr>
+                      <a:r>
+                        <a:rPr lang="en-US" sz="1200" b="1" dirty="0">
+                          <a:solidFill>
+                            <a:srgbClr val="1E2761"/>
+                          </a:solidFill>
+                          <a:latin typeface="Calibri" pitchFamily="34" charset="0"/>
+                          <a:ea typeface="Calibri" pitchFamily="34" charset="-122"/>
+                          <a:cs typeface="Calibri" pitchFamily="34" charset="-120"/>
+                        </a:rPr>
+                        <a:t>5</a:t>
+                      </a:r>
+                      <a:endParaRPr lang="en-US" sz="1200" dirty="0">
+                        <a:latin typeface="Calibri" charset="0"/>
+                        <a:ea typeface="Calibri" charset="0"/>
+                        <a:cs typeface="Calibri" charset="0"/>
+                      </a:endParaRPr>
+                    </a:p>
+                  </a:txBody>
+                  <a:tcPr marL="91440" marR="91440" marT="45720" marB="45720" anchor="ctr">
+                    <a:lnL w="9525" cap="flat" cmpd="sng" algn="ctr">
+                      <a:solidFill>
+                        <a:srgbClr val="DADFF0"/>
+                      </a:solidFill>
+                      <a:prstDash val="solid"/>
+                      <a:round/>
+                      <a:headEnd type="none" w="med" len="med"/>
+                      <a:tailEnd type="none" w="med" len="med"/>
+                    </a:lnL>
+                    <a:lnR w="9525" cap="flat" cmpd="sng" algn="ctr">
+                      <a:solidFill>
+                        <a:srgbClr val="DADFF0"/>
+                      </a:solidFill>
+                      <a:prstDash val="solid"/>
+                      <a:round/>
+                      <a:headEnd type="none" w="med" len="med"/>
+                      <a:tailEnd type="none" w="med" len="med"/>
+                    </a:lnR>
+                    <a:lnT w="9525" cap="flat" cmpd="sng" algn="ctr">
+                      <a:solidFill>
+                        <a:srgbClr val="DADFF0"/>
+                      </a:solidFill>
+                      <a:prstDash val="solid"/>
+                      <a:round/>
+                      <a:headEnd type="none" w="med" len="med"/>
+                      <a:tailEnd type="none" w="med" len="med"/>
+                    </a:lnT>
+                    <a:lnB w="9525" cap="flat" cmpd="sng" algn="ctr">
+                      <a:solidFill>
+                        <a:srgbClr val="DADFF0"/>
+                      </a:solidFill>
+                      <a:prstDash val="solid"/>
+                      <a:round/>
+                      <a:headEnd type="none" w="med" len="med"/>
+                      <a:tailEnd type="none" w="med" len="med"/>
+                    </a:lnB>
+                  </a:tcPr>
+                </a:tc>
+                <a:tc>
+                  <a:txBody>
+                    <a:bodyPr/>
+                    <a:lstStyle/>
+                    <a:p>
+                      <a:pPr indent="0" marL="0">
+                        <a:buNone/>
+                      </a:pPr>
+                      <a:r>
+                        <a:rPr lang="en-US" sz="1200" b="1" dirty="0">
+                          <a:solidFill>
+                            <a:srgbClr val="1B1B2F"/>
+                          </a:solidFill>
+                          <a:latin typeface="Calibri" pitchFamily="34" charset="0"/>
+                          <a:ea typeface="Calibri" pitchFamily="34" charset="-122"/>
+                          <a:cs typeface="Calibri" pitchFamily="34" charset="-120"/>
+                        </a:rPr>
+                        <a:t>Ledger Extraction &amp; Reconciliation</a:t>
+                      </a:r>
+                      <a:endParaRPr lang="en-US" sz="1200" dirty="0">
+                        <a:latin typeface="Calibri" charset="0"/>
+                        <a:ea typeface="Calibri" charset="0"/>
+                        <a:cs typeface="Calibri" charset="0"/>
+                      </a:endParaRPr>
+                    </a:p>
+                  </a:txBody>
+                  <a:tcPr marL="91440" marR="91440" marT="45720" marB="45720" anchor="ctr">
+                    <a:lnL w="9525" cap="flat" cmpd="sng" algn="ctr">
+                      <a:solidFill>
+                        <a:srgbClr val="DADFF0"/>
+                      </a:solidFill>
+                      <a:prstDash val="solid"/>
+                      <a:round/>
+                      <a:headEnd type="none" w="med" len="med"/>
+                      <a:tailEnd type="none" w="med" len="med"/>
+                    </a:lnL>
+                    <a:lnR w="9525" cap="flat" cmpd="sng" algn="ctr">
+                      <a:solidFill>
+                        <a:srgbClr val="DADFF0"/>
+                      </a:solidFill>
+                      <a:prstDash val="solid"/>
+                      <a:round/>
+                      <a:headEnd type="none" w="med" len="med"/>
+                      <a:tailEnd type="none" w="med" len="med"/>
+                    </a:lnR>
+                    <a:lnT w="9525" cap="flat" cmpd="sng" algn="ctr">
+                      <a:solidFill>
+                        <a:srgbClr val="DADFF0"/>
+                      </a:solidFill>
+                      <a:prstDash val="solid"/>
+                      <a:round/>
+                      <a:headEnd type="none" w="med" len="med"/>
+                      <a:tailEnd type="none" w="med" len="med"/>
+                    </a:lnT>
+                    <a:lnB w="9525" cap="flat" cmpd="sng" algn="ctr">
+                      <a:solidFill>
+                        <a:srgbClr val="DADFF0"/>
+                      </a:solidFill>
+                      <a:prstDash val="solid"/>
+                      <a:round/>
+                      <a:headEnd type="none" w="med" len="med"/>
+                      <a:tailEnd type="none" w="med" len="med"/>
+                    </a:lnB>
+                  </a:tcPr>
+                </a:tc>
+                <a:tc>
+                  <a:txBody>
+                    <a:bodyPr/>
+                    <a:lstStyle/>
+                    <a:p>
+                      <a:pPr indent="0" marL="0">
+                        <a:buNone/>
+                      </a:pPr>
+                      <a:r>
+                        <a:rPr lang="en-US" sz="1200" dirty="0">
+                          <a:solidFill>
+                            <a:srgbClr val="1B1B2F"/>
+                          </a:solidFill>
+                          <a:latin typeface="Calibri" pitchFamily="34" charset="0"/>
+                          <a:ea typeface="Calibri" pitchFamily="34" charset="-122"/>
+                          <a:cs typeface="Calibri" pitchFamily="34" charset="-120"/>
+                        </a:rPr>
+                        <a:t>pdfplumber + OpenCV/Tesseract fallback; zero-drift decimal balance check</a:t>
+                      </a:r>
+                      <a:endParaRPr lang="en-US" sz="1200" dirty="0">
+                        <a:latin typeface="Calibri" charset="0"/>
+                        <a:ea typeface="Calibri" charset="0"/>
+                        <a:cs typeface="Calibri" charset="0"/>
+                      </a:endParaRPr>
+                    </a:p>
+                  </a:txBody>
+                  <a:tcPr marL="91440" marR="91440" marT="45720" marB="45720" anchor="ctr">
+                    <a:lnL w="9525" cap="flat" cmpd="sng" algn="ctr">
+                      <a:solidFill>
+                        <a:srgbClr val="DADFF0"/>
+                      </a:solidFill>
+                      <a:prstDash val="solid"/>
+                      <a:round/>
+                      <a:headEnd type="none" w="med" len="med"/>
+                      <a:tailEnd type="none" w="med" len="med"/>
+                    </a:lnL>
+                    <a:lnR w="9525" cap="flat" cmpd="sng" algn="ctr">
+                      <a:solidFill>
+                        <a:srgbClr val="DADFF0"/>
+                      </a:solidFill>
+                      <a:prstDash val="solid"/>
+                      <a:round/>
+                      <a:headEnd type="none" w="med" len="med"/>
+                      <a:tailEnd type="none" w="med" len="med"/>
+                    </a:lnR>
+                    <a:lnT w="9525" cap="flat" cmpd="sng" algn="ctr">
+                      <a:solidFill>
+                        <a:srgbClr val="DADFF0"/>
+                      </a:solidFill>
+                      <a:prstDash val="solid"/>
+                      <a:round/>
+                      <a:headEnd type="none" w="med" len="med"/>
+                      <a:tailEnd type="none" w="med" len="med"/>
+                    </a:lnT>
+                    <a:lnB w="9525" cap="flat" cmpd="sng" algn="ctr">
+                      <a:solidFill>
+                        <a:srgbClr val="DADFF0"/>
+                      </a:solidFill>
+                      <a:prstDash val="solid"/>
+                      <a:round/>
+                      <a:headEnd type="none" w="med" len="med"/>
+                      <a:tailEnd type="none" w="med" len="med"/>
+                    </a:lnB>
+                  </a:tcPr>
+                </a:tc>
+              </a:tr>
+              <a:tr h="420624">
+                <a:tc>
+                  <a:txBody>
+                    <a:bodyPr/>
+                    <a:lstStyle/>
+                    <a:p>
+                      <a:pPr algn="ctr" indent="0" marL="0">
+                        <a:buNone/>
+                      </a:pPr>
+                      <a:r>
+                        <a:rPr lang="en-US" sz="1200" b="1" dirty="0">
+                          <a:solidFill>
+                            <a:srgbClr val="1E2761"/>
+                          </a:solidFill>
+                          <a:latin typeface="Calibri" pitchFamily="34" charset="0"/>
+                          <a:ea typeface="Calibri" pitchFamily="34" charset="-122"/>
+                          <a:cs typeface="Calibri" pitchFamily="34" charset="-120"/>
+                        </a:rPr>
+                        <a:t>6</a:t>
+                      </a:r>
+                      <a:endParaRPr lang="en-US" sz="1200" dirty="0">
+                        <a:latin typeface="Calibri" charset="0"/>
+                        <a:ea typeface="Calibri" charset="0"/>
+                        <a:cs typeface="Calibri" charset="0"/>
+                      </a:endParaRPr>
+                    </a:p>
+                  </a:txBody>
+                  <a:tcPr marL="91440" marR="91440" marT="45720" marB="45720" anchor="ctr">
+                    <a:lnL w="9525" cap="flat" cmpd="sng" algn="ctr">
+                      <a:solidFill>
+                        <a:srgbClr val="DADFF0"/>
+                      </a:solidFill>
+                      <a:prstDash val="solid"/>
+                      <a:round/>
+                      <a:headEnd type="none" w="med" len="med"/>
+                      <a:tailEnd type="none" w="med" len="med"/>
+                    </a:lnL>
+                    <a:lnR w="9525" cap="flat" cmpd="sng" algn="ctr">
+                      <a:solidFill>
+                        <a:srgbClr val="DADFF0"/>
+                      </a:solidFill>
+                      <a:prstDash val="solid"/>
+                      <a:round/>
+                      <a:headEnd type="none" w="med" len="med"/>
+                      <a:tailEnd type="none" w="med" len="med"/>
+                    </a:lnR>
+                    <a:lnT w="9525" cap="flat" cmpd="sng" algn="ctr">
+                      <a:solidFill>
+                        <a:srgbClr val="DADFF0"/>
+                      </a:solidFill>
+                      <a:prstDash val="solid"/>
+                      <a:round/>
+                      <a:headEnd type="none" w="med" len="med"/>
+                      <a:tailEnd type="none" w="med" len="med"/>
+                    </a:lnT>
+                    <a:lnB w="9525" cap="flat" cmpd="sng" algn="ctr">
+                      <a:solidFill>
+                        <a:srgbClr val="DADFF0"/>
+                      </a:solidFill>
+                      <a:prstDash val="solid"/>
+                      <a:round/>
+                      <a:headEnd type="none" w="med" len="med"/>
+                      <a:tailEnd type="none" w="med" len="med"/>
+                    </a:lnB>
+                  </a:tcPr>
+                </a:tc>
+                <a:tc>
+                  <a:txBody>
+                    <a:bodyPr/>
+                    <a:lstStyle/>
+                    <a:p>
+                      <a:pPr indent="0" marL="0">
+                        <a:buNone/>
+                      </a:pPr>
+                      <a:r>
+                        <a:rPr lang="en-US" sz="1200" b="1" dirty="0">
+                          <a:solidFill>
+                            <a:srgbClr val="1B1B2F"/>
+                          </a:solidFill>
+                          <a:latin typeface="Calibri" pitchFamily="34" charset="0"/>
+                          <a:ea typeface="Calibri" pitchFamily="34" charset="-122"/>
+                          <a:cs typeface="Calibri" pitchFamily="34" charset="-120"/>
+                        </a:rPr>
+                        <a:t>Solvency Metrics &amp; Credit Risk Scoring</a:t>
+                      </a:r>
+                      <a:endParaRPr lang="en-US" sz="1200" dirty="0">
+                        <a:latin typeface="Calibri" charset="0"/>
+                        <a:ea typeface="Calibri" charset="0"/>
+                        <a:cs typeface="Calibri" charset="0"/>
+                      </a:endParaRPr>
+                    </a:p>
+                  </a:txBody>
+                  <a:tcPr marL="91440" marR="91440" marT="45720" marB="45720" anchor="ctr">
+                    <a:lnL w="9525" cap="flat" cmpd="sng" algn="ctr">
+                      <a:solidFill>
+                        <a:srgbClr val="DADFF0"/>
+                      </a:solidFill>
+                      <a:prstDash val="solid"/>
+                      <a:round/>
+                      <a:headEnd type="none" w="med" len="med"/>
+                      <a:tailEnd type="none" w="med" len="med"/>
+                    </a:lnL>
+                    <a:lnR w="9525" cap="flat" cmpd="sng" algn="ctr">
+                      <a:solidFill>
+                        <a:srgbClr val="DADFF0"/>
+                      </a:solidFill>
+                      <a:prstDash val="solid"/>
+                      <a:round/>
+                      <a:headEnd type="none" w="med" len="med"/>
+                      <a:tailEnd type="none" w="med" len="med"/>
+                    </a:lnR>
+                    <a:lnT w="9525" cap="flat" cmpd="sng" algn="ctr">
+                      <a:solidFill>
+                        <a:srgbClr val="DADFF0"/>
+                      </a:solidFill>
+                      <a:prstDash val="solid"/>
+                      <a:round/>
+                      <a:headEnd type="none" w="med" len="med"/>
+                      <a:tailEnd type="none" w="med" len="med"/>
+                    </a:lnT>
+                    <a:lnB w="9525" cap="flat" cmpd="sng" algn="ctr">
+                      <a:solidFill>
+                        <a:srgbClr val="DADFF0"/>
+                      </a:solidFill>
+                      <a:prstDash val="solid"/>
+                      <a:round/>
+                      <a:headEnd type="none" w="med" len="med"/>
+                      <a:tailEnd type="none" w="med" len="med"/>
+                    </a:lnB>
+                  </a:tcPr>
+                </a:tc>
+                <a:tc>
+                  <a:txBody>
+                    <a:bodyPr/>
+                    <a:lstStyle/>
+                    <a:p>
+                      <a:pPr indent="0" marL="0">
+                        <a:buNone/>
+                      </a:pPr>
+                      <a:r>
+                        <a:rPr lang="en-US" sz="1200" dirty="0">
+                          <a:solidFill>
+                            <a:srgbClr val="1B1B2F"/>
+                          </a:solidFill>
+                          <a:latin typeface="Calibri" pitchFamily="34" charset="0"/>
+                          <a:ea typeface="Calibri" pitchFamily="34" charset="-122"/>
+                          <a:cs typeface="Calibri" pitchFamily="34" charset="-120"/>
+                        </a:rPr>
+                        <a:t>DTI and AMB calculation plus the XGBoost risk model</a:t>
+                      </a:r>
+                      <a:endParaRPr lang="en-US" sz="1200" dirty="0">
+                        <a:latin typeface="Calibri" charset="0"/>
+                        <a:ea typeface="Calibri" charset="0"/>
+                        <a:cs typeface="Calibri" charset="0"/>
+                      </a:endParaRPr>
+                    </a:p>
+                  </a:txBody>
+                  <a:tcPr marL="91440" marR="91440" marT="45720" marB="45720" anchor="ctr">
+                    <a:lnL w="9525" cap="flat" cmpd="sng" algn="ctr">
+                      <a:solidFill>
+                        <a:srgbClr val="DADFF0"/>
+                      </a:solidFill>
+                      <a:prstDash val="solid"/>
+                      <a:round/>
+                      <a:headEnd type="none" w="med" len="med"/>
+                      <a:tailEnd type="none" w="med" len="med"/>
+                    </a:lnL>
+                    <a:lnR w="9525" cap="flat" cmpd="sng" algn="ctr">
+                      <a:solidFill>
+                        <a:srgbClr val="DADFF0"/>
+                      </a:solidFill>
+                      <a:prstDash val="solid"/>
+                      <a:round/>
+                      <a:headEnd type="none" w="med" len="med"/>
+                      <a:tailEnd type="none" w="med" len="med"/>
+                    </a:lnR>
+                    <a:lnT w="9525" cap="flat" cmpd="sng" algn="ctr">
+                      <a:solidFill>
+                        <a:srgbClr val="DADFF0"/>
+                      </a:solidFill>
+                      <a:prstDash val="solid"/>
+                      <a:round/>
+                      <a:headEnd type="none" w="med" len="med"/>
+                      <a:tailEnd type="none" w="med" len="med"/>
+                    </a:lnT>
+                    <a:lnB w="9525" cap="flat" cmpd="sng" algn="ctr">
+                      <a:solidFill>
+                        <a:srgbClr val="DADFF0"/>
+                      </a:solidFill>
+                      <a:prstDash val="solid"/>
+                      <a:round/>
+                      <a:headEnd type="none" w="med" len="med"/>
+                      <a:tailEnd type="none" w="med" len="med"/>
+                    </a:lnB>
+                  </a:tcPr>
+                </a:tc>
+              </a:tr>
+              <a:tr h="420624">
+                <a:tc>
+                  <a:txBody>
+                    <a:bodyPr/>
+                    <a:lstStyle/>
+                    <a:p>
+                      <a:pPr algn="ctr" indent="0" marL="0">
+                        <a:buNone/>
+                      </a:pPr>
+                      <a:r>
+                        <a:rPr lang="en-US" sz="1200" b="1" dirty="0">
+                          <a:solidFill>
+                            <a:srgbClr val="1E2761"/>
+                          </a:solidFill>
+                          <a:latin typeface="Calibri" pitchFamily="34" charset="0"/>
+                          <a:ea typeface="Calibri" pitchFamily="34" charset="-122"/>
+                          <a:cs typeface="Calibri" pitchFamily="34" charset="-120"/>
+                        </a:rPr>
+                        <a:t>7</a:t>
+                      </a:r>
+                      <a:endParaRPr lang="en-US" sz="1200" dirty="0">
+                        <a:latin typeface="Calibri" charset="0"/>
+                        <a:ea typeface="Calibri" charset="0"/>
+                        <a:cs typeface="Calibri" charset="0"/>
+                      </a:endParaRPr>
+                    </a:p>
+                  </a:txBody>
+                  <a:tcPr marL="91440" marR="91440" marT="45720" marB="45720" anchor="ctr">
+                    <a:lnL w="9525" cap="flat" cmpd="sng" algn="ctr">
+                      <a:solidFill>
+                        <a:srgbClr val="DADFF0"/>
+                      </a:solidFill>
+                      <a:prstDash val="solid"/>
+                      <a:round/>
+                      <a:headEnd type="none" w="med" len="med"/>
+                      <a:tailEnd type="none" w="med" len="med"/>
+                    </a:lnL>
+                    <a:lnR w="9525" cap="flat" cmpd="sng" algn="ctr">
+                      <a:solidFill>
+                        <a:srgbClr val="DADFF0"/>
+                      </a:solidFill>
+                      <a:prstDash val="solid"/>
+                      <a:round/>
+                      <a:headEnd type="none" w="med" len="med"/>
+                      <a:tailEnd type="none" w="med" len="med"/>
+                    </a:lnR>
+                    <a:lnT w="9525" cap="flat" cmpd="sng" algn="ctr">
+                      <a:solidFill>
+                        <a:srgbClr val="DADFF0"/>
+                      </a:solidFill>
+                      <a:prstDash val="solid"/>
+                      <a:round/>
+                      <a:headEnd type="none" w="med" len="med"/>
+                      <a:tailEnd type="none" w="med" len="med"/>
+                    </a:lnT>
+                    <a:lnB w="9525" cap="flat" cmpd="sng" algn="ctr">
+                      <a:solidFill>
+                        <a:srgbClr val="DADFF0"/>
+                      </a:solidFill>
+                      <a:prstDash val="solid"/>
+                      <a:round/>
+                      <a:headEnd type="none" w="med" len="med"/>
+                      <a:tailEnd type="none" w="med" len="med"/>
+                    </a:lnB>
+                  </a:tcPr>
+                </a:tc>
+                <a:tc>
+                  <a:txBody>
+                    <a:bodyPr/>
+                    <a:lstStyle/>
+                    <a:p>
+                      <a:pPr indent="0" marL="0">
+                        <a:buNone/>
+                      </a:pPr>
+                      <a:r>
+                        <a:rPr lang="en-US" sz="1200" b="1" dirty="0">
+                          <a:solidFill>
+                            <a:srgbClr val="1B1B2F"/>
+                          </a:solidFill>
+                          <a:latin typeface="Calibri" pitchFamily="34" charset="0"/>
+                          <a:ea typeface="Calibri" pitchFamily="34" charset="-122"/>
+                          <a:cs typeface="Calibri" pitchFamily="34" charset="-120"/>
+                        </a:rPr>
+                        <a:t>Decision Routing Engine</a:t>
+                      </a:r>
+                      <a:endParaRPr lang="en-US" sz="1200" dirty="0">
+                        <a:latin typeface="Calibri" charset="0"/>
+                        <a:ea typeface="Calibri" charset="0"/>
+                        <a:cs typeface="Calibri" charset="0"/>
+                      </a:endParaRPr>
+                    </a:p>
+                  </a:txBody>
+                  <a:tcPr marL="91440" marR="91440" marT="45720" marB="45720" anchor="ctr">
+                    <a:lnL w="9525" cap="flat" cmpd="sng" algn="ctr">
+                      <a:solidFill>
+                        <a:srgbClr val="DADFF0"/>
+                      </a:solidFill>
+                      <a:prstDash val="solid"/>
+                      <a:round/>
+                      <a:headEnd type="none" w="med" len="med"/>
+                      <a:tailEnd type="none" w="med" len="med"/>
+                    </a:lnL>
+                    <a:lnR w="9525" cap="flat" cmpd="sng" algn="ctr">
+                      <a:solidFill>
+                        <a:srgbClr val="DADFF0"/>
+                      </a:solidFill>
+                      <a:prstDash val="solid"/>
+                      <a:round/>
+                      <a:headEnd type="none" w="med" len="med"/>
+                      <a:tailEnd type="none" w="med" len="med"/>
+                    </a:lnR>
+                    <a:lnT w="9525" cap="flat" cmpd="sng" algn="ctr">
+                      <a:solidFill>
+                        <a:srgbClr val="DADFF0"/>
+                      </a:solidFill>
+                      <a:prstDash val="solid"/>
+                      <a:round/>
+                      <a:headEnd type="none" w="med" len="med"/>
+                      <a:tailEnd type="none" w="med" len="med"/>
+                    </a:lnT>
+                    <a:lnB w="9525" cap="flat" cmpd="sng" algn="ctr">
+                      <a:solidFill>
+                        <a:srgbClr val="DADFF0"/>
+                      </a:solidFill>
+                      <a:prstDash val="solid"/>
+                      <a:round/>
+                      <a:headEnd type="none" w="med" len="med"/>
+                      <a:tailEnd type="none" w="med" len="med"/>
+                    </a:lnB>
+                  </a:tcPr>
+                </a:tc>
+                <a:tc>
+                  <a:txBody>
+                    <a:bodyPr/>
+                    <a:lstStyle/>
+                    <a:p>
+                      <a:pPr indent="0" marL="0">
+                        <a:buNone/>
+                      </a:pPr>
+                      <a:r>
+                        <a:rPr lang="en-US" sz="1200" dirty="0">
+                          <a:solidFill>
+                            <a:srgbClr val="1B1B2F"/>
+                          </a:solidFill>
+                          <a:latin typeface="Calibri" pitchFamily="34" charset="0"/>
+                          <a:ea typeface="Calibri" pitchFamily="34" charset="-122"/>
+                          <a:cs typeface="Calibri" pitchFamily="34" charset="-120"/>
+                        </a:rPr>
+                        <a:t>Deterministic tri-state matrix: AUTO_APPROVE / MANUAL_REVIEW / REJECT / FRAUD_ALERT</a:t>
+                      </a:r>
+                      <a:endParaRPr lang="en-US" sz="1200" dirty="0">
+                        <a:latin typeface="Calibri" charset="0"/>
+                        <a:ea typeface="Calibri" charset="0"/>
+                        <a:cs typeface="Calibri" charset="0"/>
+                      </a:endParaRPr>
+                    </a:p>
+                  </a:txBody>
+                  <a:tcPr marL="91440" marR="91440" marT="45720" marB="45720" anchor="ctr">
+                    <a:lnL w="9525" cap="flat" cmpd="sng" algn="ctr">
+                      <a:solidFill>
+                        <a:srgbClr val="DADFF0"/>
+                      </a:solidFill>
+                      <a:prstDash val="solid"/>
+                      <a:round/>
+                      <a:headEnd type="none" w="med" len="med"/>
+                      <a:tailEnd type="none" w="med" len="med"/>
+                    </a:lnL>
+                    <a:lnR w="9525" cap="flat" cmpd="sng" algn="ctr">
+                      <a:solidFill>
+                        <a:srgbClr val="DADFF0"/>
+                      </a:solidFill>
+                      <a:prstDash val="solid"/>
+                      <a:round/>
+                      <a:headEnd type="none" w="med" len="med"/>
+                      <a:tailEnd type="none" w="med" len="med"/>
+                    </a:lnR>
+                    <a:lnT w="9525" cap="flat" cmpd="sng" algn="ctr">
+                      <a:solidFill>
+                        <a:srgbClr val="DADFF0"/>
+                      </a:solidFill>
+                      <a:prstDash val="solid"/>
+                      <a:round/>
+                      <a:headEnd type="none" w="med" len="med"/>
+                      <a:tailEnd type="none" w="med" len="med"/>
+                    </a:lnT>
+                    <a:lnB w="9525" cap="flat" cmpd="sng" algn="ctr">
+                      <a:solidFill>
+                        <a:srgbClr val="DADFF0"/>
+                      </a:solidFill>
+                      <a:prstDash val="solid"/>
+                      <a:round/>
+                      <a:headEnd type="none" w="med" len="med"/>
+                      <a:tailEnd type="none" w="med" len="med"/>
+                    </a:lnB>
+                  </a:tcPr>
+                </a:tc>
+              </a:tr>
+              <a:tr h="420624">
+                <a:tc>
+                  <a:txBody>
+                    <a:bodyPr/>
+                    <a:lstStyle/>
+                    <a:p>
+                      <a:pPr algn="ctr" indent="0" marL="0">
+                        <a:buNone/>
+                      </a:pPr>
+                      <a:r>
+                        <a:rPr lang="en-US" sz="1200" b="1" dirty="0">
+                          <a:solidFill>
+                            <a:srgbClr val="1E2761"/>
+                          </a:solidFill>
+                          <a:latin typeface="Calibri" pitchFamily="34" charset="0"/>
+                          <a:ea typeface="Calibri" pitchFamily="34" charset="-122"/>
+                          <a:cs typeface="Calibri" pitchFamily="34" charset="-120"/>
+                        </a:rPr>
+                        <a:t>8</a:t>
+                      </a:r>
+                      <a:endParaRPr lang="en-US" sz="1200" dirty="0">
+                        <a:latin typeface="Calibri" charset="0"/>
+                        <a:ea typeface="Calibri" charset="0"/>
+                        <a:cs typeface="Calibri" charset="0"/>
+                      </a:endParaRPr>
+                    </a:p>
+                  </a:txBody>
+                  <a:tcPr marL="91440" marR="91440" marT="45720" marB="45720" anchor="ctr">
+                    <a:lnL w="9525" cap="flat" cmpd="sng" algn="ctr">
+                      <a:solidFill>
+                        <a:srgbClr val="DADFF0"/>
+                      </a:solidFill>
+                      <a:prstDash val="solid"/>
+                      <a:round/>
+                      <a:headEnd type="none" w="med" len="med"/>
+                      <a:tailEnd type="none" w="med" len="med"/>
+                    </a:lnL>
+                    <a:lnR w="9525" cap="flat" cmpd="sng" algn="ctr">
+                      <a:solidFill>
+                        <a:srgbClr val="DADFF0"/>
+                      </a:solidFill>
+                      <a:prstDash val="solid"/>
+                      <a:round/>
+                      <a:headEnd type="none" w="med" len="med"/>
+                      <a:tailEnd type="none" w="med" len="med"/>
+                    </a:lnR>
+                    <a:lnT w="9525" cap="flat" cmpd="sng" algn="ctr">
+                      <a:solidFill>
+                        <a:srgbClr val="DADFF0"/>
+                      </a:solidFill>
+                      <a:prstDash val="solid"/>
+                      <a:round/>
+                      <a:headEnd type="none" w="med" len="med"/>
+                      <a:tailEnd type="none" w="med" len="med"/>
+                    </a:lnT>
+                    <a:lnB w="9525" cap="flat" cmpd="sng" algn="ctr">
+                      <a:solidFill>
+                        <a:srgbClr val="DADFF0"/>
+                      </a:solidFill>
+                      <a:prstDash val="solid"/>
+                      <a:round/>
+                      <a:headEnd type="none" w="med" len="med"/>
+                      <a:tailEnd type="none" w="med" len="med"/>
+                    </a:lnB>
+                  </a:tcPr>
+                </a:tc>
+                <a:tc>
+                  <a:txBody>
+                    <a:bodyPr/>
+                    <a:lstStyle/>
+                    <a:p>
+                      <a:pPr indent="0" marL="0">
+                        <a:buNone/>
+                      </a:pPr>
+                      <a:r>
+                        <a:rPr lang="en-US" sz="1200" b="1" dirty="0">
+                          <a:solidFill>
+                            <a:srgbClr val="1B1B2F"/>
+                          </a:solidFill>
+                          <a:latin typeface="Calibri" pitchFamily="34" charset="0"/>
+                          <a:ea typeface="Calibri" pitchFamily="34" charset="-122"/>
+                          <a:cs typeface="Calibri" pitchFamily="34" charset="-120"/>
+                        </a:rPr>
+                        <a:t>Officer Review &amp; Human-in-the-Loop</a:t>
+                      </a:r>
+                      <a:endParaRPr lang="en-US" sz="1200" dirty="0">
+                        <a:latin typeface="Calibri" charset="0"/>
+                        <a:ea typeface="Calibri" charset="0"/>
+                        <a:cs typeface="Calibri" charset="0"/>
+                      </a:endParaRPr>
+                    </a:p>
+                  </a:txBody>
+                  <a:tcPr marL="91440" marR="91440" marT="45720" marB="45720" anchor="ctr">
+                    <a:lnL w="9525" cap="flat" cmpd="sng" algn="ctr">
+                      <a:solidFill>
+                        <a:srgbClr val="DADFF0"/>
+                      </a:solidFill>
+                      <a:prstDash val="solid"/>
+                      <a:round/>
+                      <a:headEnd type="none" w="med" len="med"/>
+                      <a:tailEnd type="none" w="med" len="med"/>
+                    </a:lnL>
+                    <a:lnR w="9525" cap="flat" cmpd="sng" algn="ctr">
+                      <a:solidFill>
+                        <a:srgbClr val="DADFF0"/>
+                      </a:solidFill>
+                      <a:prstDash val="solid"/>
+                      <a:round/>
+                      <a:headEnd type="none" w="med" len="med"/>
+                      <a:tailEnd type="none" w="med" len="med"/>
+                    </a:lnR>
+                    <a:lnT w="9525" cap="flat" cmpd="sng" algn="ctr">
+                      <a:solidFill>
+                        <a:srgbClr val="DADFF0"/>
+                      </a:solidFill>
+                      <a:prstDash val="solid"/>
+                      <a:round/>
+                      <a:headEnd type="none" w="med" len="med"/>
+                      <a:tailEnd type="none" w="med" len="med"/>
+                    </a:lnT>
+                    <a:lnB w="9525" cap="flat" cmpd="sng" algn="ctr">
+                      <a:solidFill>
+                        <a:srgbClr val="DADFF0"/>
+                      </a:solidFill>
+                      <a:prstDash val="solid"/>
+                      <a:round/>
+                      <a:headEnd type="none" w="med" len="med"/>
+                      <a:tailEnd type="none" w="med" len="med"/>
+                    </a:lnB>
+                  </a:tcPr>
+                </a:tc>
+                <a:tc>
+                  <a:txBody>
+                    <a:bodyPr/>
+                    <a:lstStyle/>
+                    <a:p>
+                      <a:pPr indent="0" marL="0">
+                        <a:buNone/>
+                      </a:pPr>
+                      <a:r>
+                        <a:rPr lang="en-US" sz="1200" dirty="0">
+                          <a:solidFill>
+                            <a:srgbClr val="1B1B2F"/>
+                          </a:solidFill>
+                          <a:latin typeface="Calibri" pitchFamily="34" charset="0"/>
+                          <a:ea typeface="Calibri" pitchFamily="34" charset="-122"/>
+                          <a:cs typeface="Calibri" pitchFamily="34" charset="-120"/>
+                        </a:rPr>
+                        <a:t>Split-screen workspace, ledger table, mandatory “Confirm &amp; Approve” action</a:t>
+                      </a:r>
+                      <a:endParaRPr lang="en-US" sz="1200" dirty="0">
+                        <a:latin typeface="Calibri" charset="0"/>
+                        <a:ea typeface="Calibri" charset="0"/>
+                        <a:cs typeface="Calibri" charset="0"/>
+                      </a:endParaRPr>
+                    </a:p>
+                  </a:txBody>
+                  <a:tcPr marL="91440" marR="91440" marT="45720" marB="45720" anchor="ctr">
+                    <a:lnL w="9525" cap="flat" cmpd="sng" algn="ctr">
+                      <a:solidFill>
+                        <a:srgbClr val="DADFF0"/>
+                      </a:solidFill>
+                      <a:prstDash val="solid"/>
+                      <a:round/>
+                      <a:headEnd type="none" w="med" len="med"/>
+                      <a:tailEnd type="none" w="med" len="med"/>
+                    </a:lnL>
+                    <a:lnR w="9525" cap="flat" cmpd="sng" algn="ctr">
+                      <a:solidFill>
+                        <a:srgbClr val="DADFF0"/>
+                      </a:solidFill>
+                      <a:prstDash val="solid"/>
+                      <a:round/>
+                      <a:headEnd type="none" w="med" len="med"/>
+                      <a:tailEnd type="none" w="med" len="med"/>
+                    </a:lnR>
+                    <a:lnT w="9525" cap="flat" cmpd="sng" algn="ctr">
+                      <a:solidFill>
+                        <a:srgbClr val="DADFF0"/>
+                      </a:solidFill>
+                      <a:prstDash val="solid"/>
+                      <a:round/>
+                      <a:headEnd type="none" w="med" len="med"/>
+                      <a:tailEnd type="none" w="med" len="med"/>
+                    </a:lnT>
+                    <a:lnB w="9525" cap="flat" cmpd="sng" algn="ctr">
+                      <a:solidFill>
+                        <a:srgbClr val="DADFF0"/>
+                      </a:solidFill>
+                      <a:prstDash val="solid"/>
+                      <a:round/>
+                      <a:headEnd type="none" w="med" len="med"/>
+                      <a:tailEnd type="none" w="med" len="med"/>
+                    </a:lnB>
+                  </a:tcPr>
+                </a:tc>
+              </a:tr>
+              <a:tr h="420624">
+                <a:tc>
+                  <a:txBody>
+                    <a:bodyPr/>
+                    <a:lstStyle/>
+                    <a:p>
+                      <a:pPr algn="ctr" indent="0" marL="0">
+                        <a:buNone/>
+                      </a:pPr>
+                      <a:r>
+                        <a:rPr lang="en-US" sz="1200" b="1" dirty="0">
+                          <a:solidFill>
+                            <a:srgbClr val="1E2761"/>
+                          </a:solidFill>
+                          <a:latin typeface="Calibri" pitchFamily="34" charset="0"/>
+                          <a:ea typeface="Calibri" pitchFamily="34" charset="-122"/>
+                          <a:cs typeface="Calibri" pitchFamily="34" charset="-120"/>
+                        </a:rPr>
+                        <a:t>9</a:t>
+                      </a:r>
+                      <a:endParaRPr lang="en-US" sz="1200" dirty="0">
+                        <a:latin typeface="Calibri" charset="0"/>
+                        <a:ea typeface="Calibri" charset="0"/>
+                        <a:cs typeface="Calibri" charset="0"/>
+                      </a:endParaRPr>
+                    </a:p>
+                  </a:txBody>
+                  <a:tcPr marL="91440" marR="91440" marT="45720" marB="45720" anchor="ctr">
+                    <a:lnL w="9525" cap="flat" cmpd="sng" algn="ctr">
+                      <a:solidFill>
+                        <a:srgbClr val="DADFF0"/>
+                      </a:solidFill>
+                      <a:prstDash val="solid"/>
+                      <a:round/>
+                      <a:headEnd type="none" w="med" len="med"/>
+                      <a:tailEnd type="none" w="med" len="med"/>
+                    </a:lnL>
+                    <a:lnR w="9525" cap="flat" cmpd="sng" algn="ctr">
+                      <a:solidFill>
+                        <a:srgbClr val="DADFF0"/>
+                      </a:solidFill>
+                      <a:prstDash val="solid"/>
+                      <a:round/>
+                      <a:headEnd type="none" w="med" len="med"/>
+                      <a:tailEnd type="none" w="med" len="med"/>
+                    </a:lnR>
+                    <a:lnT w="9525" cap="flat" cmpd="sng" algn="ctr">
+                      <a:solidFill>
+                        <a:srgbClr val="DADFF0"/>
+                      </a:solidFill>
+                      <a:prstDash val="solid"/>
+                      <a:round/>
+                      <a:headEnd type="none" w="med" len="med"/>
+                      <a:tailEnd type="none" w="med" len="med"/>
+                    </a:lnT>
+                    <a:lnB w="9525" cap="flat" cmpd="sng" algn="ctr">
+                      <a:solidFill>
+                        <a:srgbClr val="DADFF0"/>
+                      </a:solidFill>
+                      <a:prstDash val="solid"/>
+                      <a:round/>
+                      <a:headEnd type="none" w="med" len="med"/>
+                      <a:tailEnd type="none" w="med" len="med"/>
+                    </a:lnB>
+                  </a:tcPr>
+                </a:tc>
+                <a:tc>
+                  <a:txBody>
+                    <a:bodyPr/>
+                    <a:lstStyle/>
+                    <a:p>
+                      <a:pPr indent="0" marL="0">
+                        <a:buNone/>
+                      </a:pPr>
+                      <a:r>
+                        <a:rPr lang="en-US" sz="1200" b="1" dirty="0">
+                          <a:solidFill>
+                            <a:srgbClr val="1B1B2F"/>
+                          </a:solidFill>
+                          <a:latin typeface="Calibri" pitchFamily="34" charset="0"/>
+                          <a:ea typeface="Calibri" pitchFamily="34" charset="-122"/>
+                          <a:cs typeface="Calibri" pitchFamily="34" charset="-120"/>
+                        </a:rPr>
+                        <a:t>Audit Logging</a:t>
+                      </a:r>
+                      <a:endParaRPr lang="en-US" sz="1200" dirty="0">
+                        <a:latin typeface="Calibri" charset="0"/>
+                        <a:ea typeface="Calibri" charset="0"/>
+                        <a:cs typeface="Calibri" charset="0"/>
+                      </a:endParaRPr>
+                    </a:p>
+                  </a:txBody>
+                  <a:tcPr marL="91440" marR="91440" marT="45720" marB="45720" anchor="ctr">
+                    <a:lnL w="9525" cap="flat" cmpd="sng" algn="ctr">
+                      <a:solidFill>
+                        <a:srgbClr val="DADFF0"/>
+                      </a:solidFill>
+                      <a:prstDash val="solid"/>
+                      <a:round/>
+                      <a:headEnd type="none" w="med" len="med"/>
+                      <a:tailEnd type="none" w="med" len="med"/>
+                    </a:lnL>
+                    <a:lnR w="9525" cap="flat" cmpd="sng" algn="ctr">
+                      <a:solidFill>
+                        <a:srgbClr val="DADFF0"/>
+                      </a:solidFill>
+                      <a:prstDash val="solid"/>
+                      <a:round/>
+                      <a:headEnd type="none" w="med" len="med"/>
+                      <a:tailEnd type="none" w="med" len="med"/>
+                    </a:lnR>
+                    <a:lnT w="9525" cap="flat" cmpd="sng" algn="ctr">
+                      <a:solidFill>
+                        <a:srgbClr val="DADFF0"/>
+                      </a:solidFill>
+                      <a:prstDash val="solid"/>
+                      <a:round/>
+                      <a:headEnd type="none" w="med" len="med"/>
+                      <a:tailEnd type="none" w="med" len="med"/>
+                    </a:lnT>
+                    <a:lnB w="9525" cap="flat" cmpd="sng" algn="ctr">
+                      <a:solidFill>
+                        <a:srgbClr val="DADFF0"/>
+                      </a:solidFill>
+                      <a:prstDash val="solid"/>
+                      <a:round/>
+                      <a:headEnd type="none" w="med" len="med"/>
+                      <a:tailEnd type="none" w="med" len="med"/>
+                    </a:lnB>
+                  </a:tcPr>
+                </a:tc>
+                <a:tc>
+                  <a:txBody>
+                    <a:bodyPr/>
+                    <a:lstStyle/>
+                    <a:p>
+                      <a:pPr indent="0" marL="0">
+                        <a:buNone/>
+                      </a:pPr>
+                      <a:r>
+                        <a:rPr lang="en-US" sz="1200" dirty="0">
+                          <a:solidFill>
+                            <a:srgbClr val="1B1B2F"/>
+                          </a:solidFill>
+                          <a:latin typeface="Calibri" pitchFamily="34" charset="0"/>
+                          <a:ea typeface="Calibri" pitchFamily="34" charset="-122"/>
+                          <a:cs typeface="Calibri" pitchFamily="34" charset="-120"/>
+                        </a:rPr>
+                        <a:t>WORM audit trail with SHA-256 evidence hashing of every check and decision</a:t>
+                      </a:r>
+                      <a:endParaRPr lang="en-US" sz="1200" dirty="0">
+                        <a:latin typeface="Calibri" charset="0"/>
+                        <a:ea typeface="Calibri" charset="0"/>
+                        <a:cs typeface="Calibri" charset="0"/>
+                      </a:endParaRPr>
+                    </a:p>
+                  </a:txBody>
+                  <a:tcPr marL="91440" marR="91440" marT="45720" marB="45720" anchor="ctr">
+                    <a:lnL w="9525" cap="flat" cmpd="sng" algn="ctr">
+                      <a:solidFill>
+                        <a:srgbClr val="DADFF0"/>
+                      </a:solidFill>
+                      <a:prstDash val="solid"/>
+                      <a:round/>
+                      <a:headEnd type="none" w="med" len="med"/>
+                      <a:tailEnd type="none" w="med" len="med"/>
+                    </a:lnL>
+                    <a:lnR w="9525" cap="flat" cmpd="sng" algn="ctr">
+                      <a:solidFill>
+                        <a:srgbClr val="DADFF0"/>
+                      </a:solidFill>
+                      <a:prstDash val="solid"/>
+                      <a:round/>
+                      <a:headEnd type="none" w="med" len="med"/>
+                      <a:tailEnd type="none" w="med" len="med"/>
+                    </a:lnR>
+                    <a:lnT w="9525" cap="flat" cmpd="sng" algn="ctr">
+                      <a:solidFill>
+                        <a:srgbClr val="DADFF0"/>
+                      </a:solidFill>
+                      <a:prstDash val="solid"/>
+                      <a:round/>
+                      <a:headEnd type="none" w="med" len="med"/>
+                      <a:tailEnd type="none" w="med" len="med"/>
+                    </a:lnT>
+                    <a:lnB w="9525" cap="flat" cmpd="sng" algn="ctr">
+                      <a:solidFill>
+                        <a:srgbClr val="DADFF0"/>
+                      </a:solidFill>
+                      <a:prstDash val="solid"/>
+                      <a:round/>
+                      <a:headEnd type="none" w="med" len="med"/>
+                      <a:tailEnd type="none" w="med" len="med"/>
+                    </a:lnB>
+                  </a:tcPr>
+                </a:tc>
+              </a:tr>
+            </a:tbl>
+          </a:graphicData>
+        </a:graphic>
+      </p:graphicFrame>
+      <p:sp>
+        <p:nvSpPr>
+          <p:cNvPr id="7" name="Text 3"/>
+          <p:cNvSpPr txBox="1"/>
+          <p:nvPr/>
+        </p:nvSpPr>
+        <p:spPr>
+          <a:xfrm>
+            <a:off x="548640" y="5989320"/>
+            <a:ext cx="11091672" cy="457200"/>
+          </a:xfrm>
+          <a:prstGeom prst="rect">
+            <a:avLst/>
+          </a:prstGeom>
+          <a:noFill/>
+          <a:ln/>
+        </p:spPr>
+        <p:txBody>
+          <a:bodyPr wrap="square" lIns="0" tIns="0" rIns="0" bIns="0" rtlCol="0" anchor="ctr"/>
+          <a:lstStyle/>
+          <a:p>
+            <a:pPr indent="0" marL="0">
+              <a:buNone/>
+            </a:pPr>
+            <a:r>
+              <a:rPr lang="en-US" sz="1250" i="1" dirty="0">
+                <a:solidFill>
+                  <a:srgbClr val="5B6B8C"/>
+                </a:solidFill>
+                <a:latin typeface="Calibri" pitchFamily="34" charset="0"/>
+                <a:ea typeface="Calibri" pitchFamily="34" charset="-122"/>
+                <a:cs typeface="Calibri" pitchFamily="34" charset="-120"/>
+              </a:rPr>
+              <a:t>All nine modules from the Week 1–8 work plan are functionally complete and tested end-to-end - no pseudocode is required for this review.</a:t>
+            </a:r>
+            <a:endParaRPr lang="en-US" sz="1250" dirty="0"/>
+          </a:p>
+        </p:txBody>
+      </p:sp>
+      <p:sp>
+        <p:nvSpPr>
+          <p:cNvPr id="8" name="Text 4"/>
+          <p:cNvSpPr txBox="1"/>
+          <p:nvPr/>
+        </p:nvSpPr>
+        <p:spPr>
+          <a:xfrm>
+            <a:off x="457200" y="6510528"/>
+            <a:ext cx="9601200" cy="274320"/>
+          </a:xfrm>
+          <a:prstGeom prst="rect">
+            <a:avLst/>
+          </a:prstGeom>
+          <a:noFill/>
+          <a:ln/>
+        </p:spPr>
+        <p:txBody>
+          <a:bodyPr wrap="square" lIns="0" tIns="0" rIns="0" bIns="0" rtlCol="0" anchor="ctr"/>
+          <a:lstStyle/>
+          <a:p>
+            <a:pPr indent="0" marL="0">
+              <a:buNone/>
+            </a:pPr>
+            <a:r>
+              <a:rPr lang="en-US" sz="900" dirty="0">
+                <a:solidFill>
+                  <a:srgbClr val="5B6B8C"/>
+                </a:solidFill>
+                <a:latin typeface="Calibri" pitchFamily="34" charset="0"/>
+                <a:ea typeface="Calibri" pitchFamily="34" charset="-122"/>
+                <a:cs typeface="Calibri" pitchFamily="34" charset="-120"/>
+              </a:rPr>
+              <a:t>Second Review – Automated AI-Driven Loan Underwriting &amp; Document Fraud Detection</a:t>
+            </a:r>
+            <a:endParaRPr lang="en-US" sz="900" dirty="0"/>
+          </a:p>
+        </p:txBody>
+      </p:sp>
+      <p:sp>
+        <p:nvSpPr>
+          <p:cNvPr id="9" name="Text 5"/>
+          <p:cNvSpPr txBox="1"/>
+          <p:nvPr/>
+        </p:nvSpPr>
+        <p:spPr>
+          <a:xfrm>
+            <a:off x="11430000" y="6510528"/>
+            <a:ext cx="365760" cy="274320"/>
+          </a:xfrm>
+          <a:prstGeom prst="rect">
+            <a:avLst/>
+          </a:prstGeom>
+          <a:noFill/>
+          <a:ln/>
+        </p:spPr>
+        <p:txBody>
+          <a:bodyPr wrap="square" lIns="0" tIns="0" rIns="0" bIns="0" rtlCol="0" anchor="ctr"/>
+          <a:lstStyle/>
+          <a:p>
+            <a:pPr algn="r" indent="0" marL="0">
+              <a:buNone/>
+            </a:pPr>
+            <a:r>
+              <a:rPr lang="en-US" sz="900" dirty="0">
+                <a:solidFill>
+                  <a:srgbClr val="5B6B8C"/>
+                </a:solidFill>
+                <a:latin typeface="Calibri" pitchFamily="34" charset="0"/>
+                <a:ea typeface="Calibri" pitchFamily="34" charset="-122"/>
+                <a:cs typeface="Calibri" pitchFamily="34" charset="-120"/>
+              </a:rPr>
+              <a:t>22</a:t>
+            </a:r>
+            <a:endParaRPr lang="en-US" sz="900" dirty="0"/>
+          </a:p>
+        </p:txBody>
+      </p:sp>
+    </p:spTree>
+  </p:cSld>
+  <p:clrMapOvr>
+    <a:masterClrMapping/>
+  </p:clrMapOvr>
+</p:sld>
+</file>
+
+<file path=ppt/slides/slide23.xml><?xml version="1.0" encoding="utf-8"?>
+<p:sld xmlns:a="http://schemas.openxmlformats.org/drawingml/2006/main" xmlns:r="http://schemas.openxmlformats.org/officeDocument/2006/relationships" xmlns:p="http://schemas.openxmlformats.org/presentationml/2006/main">
+  <p:cSld name="Slide 5">
+    <p:bg>
+      <p:bgPr>
+        <a:solidFill>
+          <a:srgbClr val="FFFFFF"/>
+        </a:solidFill>
+      </p:bgPr>
+    </p:bg>
+    <p:spTree>
+      <p:nvGrpSpPr>
+        <p:cNvPr id="1" name=""/>
+        <p:cNvGrpSpPr/>
+        <p:nvPr/>
+      </p:nvGrpSpPr>
+      <p:grpSpPr>
+        <a:xfrm>
+          <a:off x="0" y="0"/>
+          <a:ext cx="0" cy="0"/>
+          <a:chOff x="0" y="0"/>
+          <a:chExt cx="0" cy="0"/>
+        </a:xfrm>
+      </p:grpSpPr>
+      <p:sp>
+        <p:nvSpPr>
+          <p:cNvPr id="2" name="Text 0"/>
+          <p:cNvSpPr txBox="1"/>
+          <p:nvPr/>
+        </p:nvSpPr>
+        <p:spPr>
+          <a:xfrm>
+            <a:off x="548640" y="384048"/>
+            <a:ext cx="5486400" cy="274320"/>
+          </a:xfrm>
+          <a:prstGeom prst="rect">
+            <a:avLst/>
+          </a:prstGeom>
+          <a:noFill/>
+          <a:ln/>
+        </p:spPr>
+        <p:txBody>
+          <a:bodyPr wrap="square" lIns="0" tIns="0" rIns="0" bIns="0" rtlCol="0" anchor="ctr"/>
+          <a:lstStyle/>
+          <a:p>
+            <a:pPr indent="0" marL="0">
+              <a:buNone/>
+            </a:pPr>
+            <a:r>
+              <a:rPr lang="en-US" sz="1150" b="1" spc="200" kern="0" dirty="0">
+                <a:solidFill>
+                  <a:srgbClr val="C9A227"/>
+                </a:solidFill>
+                <a:latin typeface="Calibri" pitchFamily="34" charset="0"/>
+                <a:ea typeface="Calibri" pitchFamily="34" charset="-122"/>
+                <a:cs typeface="Calibri" pitchFamily="34" charset="-120"/>
+              </a:rPr>
+              <a:t>VERIFICATION</a:t>
+            </a:r>
+            <a:endParaRPr lang="en-US" sz="1150" dirty="0"/>
+          </a:p>
+        </p:txBody>
+      </p:sp>
+      <p:sp>
+        <p:nvSpPr>
+          <p:cNvPr id="3" name="Text 1"/>
+          <p:cNvSpPr txBox="1"/>
+          <p:nvPr/>
+        </p:nvSpPr>
+        <p:spPr>
+          <a:xfrm>
+            <a:off x="548640" y="658368"/>
+            <a:ext cx="9784080" cy="640080"/>
+          </a:xfrm>
+          <a:prstGeom prst="rect">
+            <a:avLst/>
+          </a:prstGeom>
+          <a:noFill/>
+          <a:ln/>
+        </p:spPr>
+        <p:txBody>
+          <a:bodyPr wrap="square" lIns="0" tIns="0" rIns="0" bIns="0" rtlCol="0" anchor="ctr"/>
+          <a:lstStyle/>
+          <a:p>
+            <a:pPr indent="0" marL="0">
+              <a:buNone/>
+            </a:pPr>
+            <a:r>
+              <a:rPr lang="en-US" sz="2800" b="1" dirty="0">
+                <a:solidFill>
+                  <a:srgbClr val="1E2761"/>
+                </a:solidFill>
+                <a:latin typeface="Cambria" pitchFamily="34" charset="0"/>
+                <a:ea typeface="Cambria" pitchFamily="34" charset="-122"/>
+                <a:cs typeface="Cambria" pitchFamily="34" charset="-120"/>
+              </a:rPr>
+              <a:t>Test Cases</a:t>
+            </a:r>
+            <a:endParaRPr lang="en-US" sz="2800" dirty="0"/>
+          </a:p>
+        </p:txBody>
+      </p:sp>
+      <p:sp>
+        <p:nvSpPr>
+          <p:cNvPr id="4" name="Shape 2"/>
+          <p:cNvSpPr/>
+          <p:nvPr/>
+        </p:nvSpPr>
+        <p:spPr>
+          <a:xfrm>
+            <a:off x="10424160" y="365760"/>
+            <a:ext cx="1005840" cy="1005840"/>
+          </a:xfrm>
+          <a:prstGeom prst="ellipse">
+            <a:avLst/>
+          </a:prstGeom>
+          <a:solidFill>
+            <a:srgbClr val="1E2761"/>
+          </a:solidFill>
+          <a:ln/>
+        </p:spPr>
+      </p:sp>
+      <p:pic>
+        <p:nvPicPr>
+          <p:cNvPr id="5" name="Image 0" descr="preencoded.png">    </p:cNvPr>
+          <p:cNvPicPr>
+            <a:picLocks noChangeAspect="1"/>
+          </p:cNvPicPr>
+          <p:nvPr/>
+        </p:nvPicPr>
+        <p:blipFill>
+          <a:blip r:embed="rId1"/>
+          <a:stretch>
+            <a:fillRect/>
+          </a:stretch>
+        </p:blipFill>
+        <p:spPr>
+          <a:xfrm>
+            <a:off x="10544861" y="486461"/>
+            <a:ext cx="764438" cy="764438"/>
+          </a:xfrm>
+          <a:prstGeom prst="rect">
+            <a:avLst/>
+          </a:prstGeom>
+        </p:spPr>
+      </p:pic>
+      <p:graphicFrame>
+        <p:nvGraphicFramePr>
+          <p:cNvPr id="6" name="Table 0"/>
+          <p:cNvGraphicFramePr>
+            <a:graphicFrameLocks noGrp="1"/>
+          </p:cNvGraphicFramePr>
+          <p:nvPr>
+            <p:extLst>
+              <p:ext uri="{D42A27DB-BD31-4B8C-83A1-F6EECF244321}">
+                <p14:modId xmlns:p14="http://schemas.microsoft.com/office/powerpoint/2010/main" val="1579011935"/>
+              </p:ext>
+            </p:extLst>
+          </p:nvPr>
+        </p:nvGraphicFramePr>
+        <p:xfrm>
+          <a:off x="548640" y="1737360"/>
+          <a:ext cx="11091672" cy="914400"/>
+        </p:xfrm>
+        <a:graphic>
+          <a:graphicData uri="http://schemas.openxmlformats.org/drawingml/2006/table">
+            <a:tbl>
+              <a:tblPr/>
+              <a:tblGrid>
+                <a:gridCol w="2743200"/>
+                <a:gridCol w="4480560"/>
+                <a:gridCol w="3867912"/>
+              </a:tblGrid>
+              <a:tr h="457200">
+                <a:tc>
+                  <a:txBody>
+                    <a:bodyPr/>
+                    <a:lstStyle/>
+                    <a:p>
+                      <a:pPr indent="0" marL="0">
+                        <a:buNone/>
+                      </a:pPr>
+                      <a:r>
+                        <a:rPr lang="en-US" sz="1300" b="1" dirty="0">
+                          <a:solidFill>
+                            <a:srgbClr val="141B45"/>
+                          </a:solidFill>
+                          <a:latin typeface="Calibri" pitchFamily="34" charset="0"/>
+                          <a:ea typeface="Calibri" pitchFamily="34" charset="-122"/>
+                          <a:cs typeface="Calibri" pitchFamily="34" charset="-120"/>
+                        </a:rPr>
+                        <a:t>Input</a:t>
+                      </a:r>
+                      <a:endParaRPr lang="en-US" sz="1300" dirty="0">
+                        <a:latin typeface="Calibri" charset="0"/>
+                        <a:ea typeface="Calibri" charset="0"/>
+                        <a:cs typeface="Calibri" charset="0"/>
+                      </a:endParaRPr>
+                    </a:p>
+                  </a:txBody>
+                  <a:tcPr marL="91440" marR="91440" marT="45720" marB="45720" anchor="ctr">
+                    <a:lnL w="9525" cap="flat" cmpd="sng" algn="ctr">
+                      <a:solidFill>
+                        <a:srgbClr val="DADFF0"/>
+                      </a:solidFill>
+                      <a:prstDash val="solid"/>
+                      <a:round/>
+                      <a:headEnd type="none" w="med" len="med"/>
+                      <a:tailEnd type="none" w="med" len="med"/>
+                    </a:lnL>
+                    <a:lnR w="9525" cap="flat" cmpd="sng" algn="ctr">
+                      <a:solidFill>
+                        <a:srgbClr val="DADFF0"/>
+                      </a:solidFill>
+                      <a:prstDash val="solid"/>
+                      <a:round/>
+                      <a:headEnd type="none" w="med" len="med"/>
+                      <a:tailEnd type="none" w="med" len="med"/>
+                    </a:lnR>
+                    <a:lnT w="9525" cap="flat" cmpd="sng" algn="ctr">
+                      <a:solidFill>
+                        <a:srgbClr val="DADFF0"/>
+                      </a:solidFill>
+                      <a:prstDash val="solid"/>
+                      <a:round/>
+                      <a:headEnd type="none" w="med" len="med"/>
+                      <a:tailEnd type="none" w="med" len="med"/>
+                    </a:lnT>
+                    <a:lnB w="9525" cap="flat" cmpd="sng" algn="ctr">
+                      <a:solidFill>
+                        <a:srgbClr val="DADFF0"/>
+                      </a:solidFill>
+                      <a:prstDash val="solid"/>
+                      <a:round/>
+                      <a:headEnd type="none" w="med" len="med"/>
+                      <a:tailEnd type="none" w="med" len="med"/>
+                    </a:lnB>
+                    <a:solidFill>
+                      <a:srgbClr val="CADCFC"/>
+                    </a:solidFill>
+                  </a:tcPr>
+                </a:tc>
+                <a:tc>
+                  <a:txBody>
+                    <a:bodyPr/>
+                    <a:lstStyle/>
+                    <a:p>
+                      <a:pPr indent="0" marL="0">
+                        <a:buNone/>
+                      </a:pPr>
+                      <a:r>
+                        <a:rPr lang="en-US" sz="1300" b="1" dirty="0">
+                          <a:solidFill>
+                            <a:srgbClr val="141B45"/>
+                          </a:solidFill>
+                          <a:latin typeface="Calibri" pitchFamily="34" charset="0"/>
+                          <a:ea typeface="Calibri" pitchFamily="34" charset="-122"/>
+                          <a:cs typeface="Calibri" pitchFamily="34" charset="-120"/>
+                        </a:rPr>
+                        <a:t>What it exercises</a:t>
+                      </a:r>
+                      <a:endParaRPr lang="en-US" sz="1300" dirty="0">
+                        <a:latin typeface="Calibri" charset="0"/>
+                        <a:ea typeface="Calibri" charset="0"/>
+                        <a:cs typeface="Calibri" charset="0"/>
+                      </a:endParaRPr>
+                    </a:p>
+                  </a:txBody>
+                  <a:tcPr marL="91440" marR="91440" marT="45720" marB="45720" anchor="ctr">
+                    <a:lnL w="9525" cap="flat" cmpd="sng" algn="ctr">
+                      <a:solidFill>
+                        <a:srgbClr val="DADFF0"/>
+                      </a:solidFill>
+                      <a:prstDash val="solid"/>
+                      <a:round/>
+                      <a:headEnd type="none" w="med" len="med"/>
+                      <a:tailEnd type="none" w="med" len="med"/>
+                    </a:lnL>
+                    <a:lnR w="9525" cap="flat" cmpd="sng" algn="ctr">
+                      <a:solidFill>
+                        <a:srgbClr val="DADFF0"/>
+                      </a:solidFill>
+                      <a:prstDash val="solid"/>
+                      <a:round/>
+                      <a:headEnd type="none" w="med" len="med"/>
+                      <a:tailEnd type="none" w="med" len="med"/>
+                    </a:lnR>
+                    <a:lnT w="9525" cap="flat" cmpd="sng" algn="ctr">
+                      <a:solidFill>
+                        <a:srgbClr val="DADFF0"/>
+                      </a:solidFill>
+                      <a:prstDash val="solid"/>
+                      <a:round/>
+                      <a:headEnd type="none" w="med" len="med"/>
+                      <a:tailEnd type="none" w="med" len="med"/>
+                    </a:lnT>
+                    <a:lnB w="9525" cap="flat" cmpd="sng" algn="ctr">
+                      <a:solidFill>
+                        <a:srgbClr val="DADFF0"/>
+                      </a:solidFill>
+                      <a:prstDash val="solid"/>
+                      <a:round/>
+                      <a:headEnd type="none" w="med" len="med"/>
+                      <a:tailEnd type="none" w="med" len="med"/>
+                    </a:lnB>
+                    <a:solidFill>
+                      <a:srgbClr val="CADCFC"/>
+                    </a:solidFill>
+                  </a:tcPr>
+                </a:tc>
+                <a:tc>
+                  <a:txBody>
+                    <a:bodyPr/>
+                    <a:lstStyle/>
+                    <a:p>
+                      <a:pPr indent="0" marL="0">
+                        <a:buNone/>
+                      </a:pPr>
+                      <a:r>
+                        <a:rPr lang="en-US" sz="1300" b="1" dirty="0">
+                          <a:solidFill>
+                            <a:srgbClr val="141B45"/>
+                          </a:solidFill>
+                          <a:latin typeface="Calibri" pitchFamily="34" charset="0"/>
+                          <a:ea typeface="Calibri" pitchFamily="34" charset="-122"/>
+                          <a:cs typeface="Calibri" pitchFamily="34" charset="-120"/>
+                        </a:rPr>
+                        <a:t>Expected outcome</a:t>
+                      </a:r>
+                      <a:endParaRPr lang="en-US" sz="1300" dirty="0">
+                        <a:latin typeface="Calibri" charset="0"/>
+                        <a:ea typeface="Calibri" charset="0"/>
+                        <a:cs typeface="Calibri" charset="0"/>
+                      </a:endParaRPr>
+                    </a:p>
+                  </a:txBody>
+                  <a:tcPr marL="91440" marR="91440" marT="45720" marB="45720" anchor="ctr">
+                    <a:lnL w="9525" cap="flat" cmpd="sng" algn="ctr">
+                      <a:solidFill>
+                        <a:srgbClr val="DADFF0"/>
+                      </a:solidFill>
+                      <a:prstDash val="solid"/>
+                      <a:round/>
+                      <a:headEnd type="none" w="med" len="med"/>
+                      <a:tailEnd type="none" w="med" len="med"/>
+                    </a:lnL>
+                    <a:lnR w="9525" cap="flat" cmpd="sng" algn="ctr">
+                      <a:solidFill>
+                        <a:srgbClr val="DADFF0"/>
+                      </a:solidFill>
+                      <a:prstDash val="solid"/>
+                      <a:round/>
+                      <a:headEnd type="none" w="med" len="med"/>
+                      <a:tailEnd type="none" w="med" len="med"/>
+                    </a:lnR>
+                    <a:lnT w="9525" cap="flat" cmpd="sng" algn="ctr">
+                      <a:solidFill>
+                        <a:srgbClr val="DADFF0"/>
+                      </a:solidFill>
+                      <a:prstDash val="solid"/>
+                      <a:round/>
+                      <a:headEnd type="none" w="med" len="med"/>
+                      <a:tailEnd type="none" w="med" len="med"/>
+                    </a:lnT>
+                    <a:lnB w="9525" cap="flat" cmpd="sng" algn="ctr">
+                      <a:solidFill>
+                        <a:srgbClr val="DADFF0"/>
+                      </a:solidFill>
+                      <a:prstDash val="solid"/>
+                      <a:round/>
+                      <a:headEnd type="none" w="med" len="med"/>
+                      <a:tailEnd type="none" w="med" len="med"/>
+                    </a:lnB>
+                    <a:solidFill>
+                      <a:srgbClr val="CADCFC"/>
+                    </a:solidFill>
+                  </a:tcPr>
+                </a:tc>
+              </a:tr>
+              <a:tr h="594360">
+                <a:tc>
+                  <a:txBody>
+                    <a:bodyPr/>
+                    <a:lstStyle/>
+                    <a:p>
+                      <a:pPr indent="0" marL="0">
+                        <a:buNone/>
+                      </a:pPr>
+                      <a:r>
+                        <a:rPr lang="en-US" sz="1200" b="1" dirty="0">
+                          <a:solidFill>
+                            <a:srgbClr val="1B1B2F"/>
+                          </a:solidFill>
+                          <a:latin typeface="Calibri" pitchFamily="34" charset="0"/>
+                          <a:ea typeface="Calibri" pitchFamily="34" charset="-122"/>
+                          <a:cs typeface="Calibri" pitchFamily="34" charset="-120"/>
+                        </a:rPr>
+                        <a:t>sample_clean.pdf</a:t>
+                      </a:r>
+                      <a:endParaRPr lang="en-US" sz="1200" dirty="0">
+                        <a:latin typeface="Calibri" charset="0"/>
+                        <a:ea typeface="Calibri" charset="0"/>
+                        <a:cs typeface="Calibri" charset="0"/>
+                      </a:endParaRPr>
+                    </a:p>
+                  </a:txBody>
+                  <a:tcPr marL="91440" marR="91440" marT="45720" marB="45720" anchor="ctr">
+                    <a:lnL w="9525" cap="flat" cmpd="sng" algn="ctr">
+                      <a:solidFill>
+                        <a:srgbClr val="DADFF0"/>
+                      </a:solidFill>
+                      <a:prstDash val="solid"/>
+                      <a:round/>
+                      <a:headEnd type="none" w="med" len="med"/>
+                      <a:tailEnd type="none" w="med" len="med"/>
+                    </a:lnL>
+                    <a:lnR w="9525" cap="flat" cmpd="sng" algn="ctr">
+                      <a:solidFill>
+                        <a:srgbClr val="DADFF0"/>
+                      </a:solidFill>
+                      <a:prstDash val="solid"/>
+                      <a:round/>
+                      <a:headEnd type="none" w="med" len="med"/>
+                      <a:tailEnd type="none" w="med" len="med"/>
+                    </a:lnR>
+                    <a:lnT w="9525" cap="flat" cmpd="sng" algn="ctr">
+                      <a:solidFill>
+                        <a:srgbClr val="DADFF0"/>
+                      </a:solidFill>
+                      <a:prstDash val="solid"/>
+                      <a:round/>
+                      <a:headEnd type="none" w="med" len="med"/>
+                      <a:tailEnd type="none" w="med" len="med"/>
+                    </a:lnT>
+                    <a:lnB w="9525" cap="flat" cmpd="sng" algn="ctr">
+                      <a:solidFill>
+                        <a:srgbClr val="DADFF0"/>
+                      </a:solidFill>
+                      <a:prstDash val="solid"/>
+                      <a:round/>
+                      <a:headEnd type="none" w="med" len="med"/>
+                      <a:tailEnd type="none" w="med" len="med"/>
+                    </a:lnB>
+                  </a:tcPr>
+                </a:tc>
+                <a:tc>
+                  <a:txBody>
+                    <a:bodyPr/>
+                    <a:lstStyle/>
+                    <a:p>
+                      <a:pPr indent="0" marL="0">
+                        <a:buNone/>
+                      </a:pPr>
+                      <a:r>
+                        <a:rPr lang="en-US" sz="1200" dirty="0">
+                          <a:solidFill>
+                            <a:srgbClr val="1B1B2F"/>
+                          </a:solidFill>
+                          <a:latin typeface="Calibri" pitchFamily="34" charset="0"/>
+                          <a:ea typeface="Calibri" pitchFamily="34" charset="-122"/>
+                          <a:cs typeface="Calibri" pitchFamily="34" charset="-120"/>
+                        </a:rPr>
+                        <a:t>Internally consistent ledger; no editing-tool metadata fingerprint</a:t>
+                      </a:r>
+                      <a:endParaRPr lang="en-US" sz="1200" dirty="0">
+                        <a:latin typeface="Calibri" charset="0"/>
+                        <a:ea typeface="Calibri" charset="0"/>
+                        <a:cs typeface="Calibri" charset="0"/>
+                      </a:endParaRPr>
+                    </a:p>
+                  </a:txBody>
+                  <a:tcPr marL="91440" marR="91440" marT="45720" marB="45720" anchor="ctr">
+                    <a:lnL w="9525" cap="flat" cmpd="sng" algn="ctr">
+                      <a:solidFill>
+                        <a:srgbClr val="DADFF0"/>
+                      </a:solidFill>
+                      <a:prstDash val="solid"/>
+                      <a:round/>
+                      <a:headEnd type="none" w="med" len="med"/>
+                      <a:tailEnd type="none" w="med" len="med"/>
+                    </a:lnL>
+                    <a:lnR w="9525" cap="flat" cmpd="sng" algn="ctr">
+                      <a:solidFill>
+                        <a:srgbClr val="DADFF0"/>
+                      </a:solidFill>
+                      <a:prstDash val="solid"/>
+                      <a:round/>
+                      <a:headEnd type="none" w="med" len="med"/>
+                      <a:tailEnd type="none" w="med" len="med"/>
+                    </a:lnR>
+                    <a:lnT w="9525" cap="flat" cmpd="sng" algn="ctr">
+                      <a:solidFill>
+                        <a:srgbClr val="DADFF0"/>
+                      </a:solidFill>
+                      <a:prstDash val="solid"/>
+                      <a:round/>
+                      <a:headEnd type="none" w="med" len="med"/>
+                      <a:tailEnd type="none" w="med" len="med"/>
+                    </a:lnT>
+                    <a:lnB w="9525" cap="flat" cmpd="sng" algn="ctr">
+                      <a:solidFill>
+                        <a:srgbClr val="DADFF0"/>
+                      </a:solidFill>
+                      <a:prstDash val="solid"/>
+                      <a:round/>
+                      <a:headEnd type="none" w="med" len="med"/>
+                      <a:tailEnd type="none" w="med" len="med"/>
+                    </a:lnB>
+                  </a:tcPr>
+                </a:tc>
+                <a:tc>
+                  <a:txBody>
+                    <a:bodyPr/>
+                    <a:lstStyle/>
+                    <a:p>
+                      <a:pPr indent="0" marL="0">
+                        <a:buNone/>
+                      </a:pPr>
+                      <a:r>
+                        <a:rPr lang="en-US" sz="1200" b="1" dirty="0">
+                          <a:solidFill>
+                            <a:srgbClr val="1E2761"/>
+                          </a:solidFill>
+                          <a:latin typeface="Calibri" pitchFamily="34" charset="0"/>
+                          <a:ea typeface="Calibri" pitchFamily="34" charset="-122"/>
+                          <a:cs typeface="Calibri" pitchFamily="34" charset="-120"/>
+                        </a:rPr>
+                        <a:t>AUTO_APPROVE (officer confirms)</a:t>
+                      </a:r>
+                      <a:endParaRPr lang="en-US" sz="1200" dirty="0">
+                        <a:latin typeface="Calibri" charset="0"/>
+                        <a:ea typeface="Calibri" charset="0"/>
+                        <a:cs typeface="Calibri" charset="0"/>
+                      </a:endParaRPr>
+                    </a:p>
+                  </a:txBody>
+                  <a:tcPr marL="91440" marR="91440" marT="45720" marB="45720" anchor="ctr">
+                    <a:lnL w="9525" cap="flat" cmpd="sng" algn="ctr">
+                      <a:solidFill>
+                        <a:srgbClr val="DADFF0"/>
+                      </a:solidFill>
+                      <a:prstDash val="solid"/>
+                      <a:round/>
+                      <a:headEnd type="none" w="med" len="med"/>
+                      <a:tailEnd type="none" w="med" len="med"/>
+                    </a:lnL>
+                    <a:lnR w="9525" cap="flat" cmpd="sng" algn="ctr">
+                      <a:solidFill>
+                        <a:srgbClr val="DADFF0"/>
+                      </a:solidFill>
+                      <a:prstDash val="solid"/>
+                      <a:round/>
+                      <a:headEnd type="none" w="med" len="med"/>
+                      <a:tailEnd type="none" w="med" len="med"/>
+                    </a:lnR>
+                    <a:lnT w="9525" cap="flat" cmpd="sng" algn="ctr">
+                      <a:solidFill>
+                        <a:srgbClr val="DADFF0"/>
+                      </a:solidFill>
+                      <a:prstDash val="solid"/>
+                      <a:round/>
+                      <a:headEnd type="none" w="med" len="med"/>
+                      <a:tailEnd type="none" w="med" len="med"/>
+                    </a:lnT>
+                    <a:lnB w="9525" cap="flat" cmpd="sng" algn="ctr">
+                      <a:solidFill>
+                        <a:srgbClr val="DADFF0"/>
+                      </a:solidFill>
+                      <a:prstDash val="solid"/>
+                      <a:round/>
+                      <a:headEnd type="none" w="med" len="med"/>
+                      <a:tailEnd type="none" w="med" len="med"/>
+                    </a:lnB>
+                  </a:tcPr>
+                </a:tc>
+              </a:tr>
+              <a:tr h="594360">
+                <a:tc>
+                  <a:txBody>
+                    <a:bodyPr/>
+                    <a:lstStyle/>
+                    <a:p>
+                      <a:pPr indent="0" marL="0">
+                        <a:buNone/>
+                      </a:pPr>
+                      <a:r>
+                        <a:rPr lang="en-US" sz="1200" b="1" dirty="0">
+                          <a:solidFill>
+                            <a:srgbClr val="1B1B2F"/>
+                          </a:solidFill>
+                          <a:latin typeface="Calibri" pitchFamily="34" charset="0"/>
+                          <a:ea typeface="Calibri" pitchFamily="34" charset="-122"/>
+                          <a:cs typeface="Calibri" pitchFamily="34" charset="-120"/>
+                        </a:rPr>
+                        <a:t>sample_tampered.pdf</a:t>
+                      </a:r>
+                      <a:endParaRPr lang="en-US" sz="1200" dirty="0">
+                        <a:latin typeface="Calibri" charset="0"/>
+                        <a:ea typeface="Calibri" charset="0"/>
+                        <a:cs typeface="Calibri" charset="0"/>
+                      </a:endParaRPr>
+                    </a:p>
+                  </a:txBody>
+                  <a:tcPr marL="91440" marR="91440" marT="45720" marB="45720" anchor="ctr">
+                    <a:lnL w="9525" cap="flat" cmpd="sng" algn="ctr">
+                      <a:solidFill>
+                        <a:srgbClr val="DADFF0"/>
+                      </a:solidFill>
+                      <a:prstDash val="solid"/>
+                      <a:round/>
+                      <a:headEnd type="none" w="med" len="med"/>
+                      <a:tailEnd type="none" w="med" len="med"/>
+                    </a:lnL>
+                    <a:lnR w="9525" cap="flat" cmpd="sng" algn="ctr">
+                      <a:solidFill>
+                        <a:srgbClr val="DADFF0"/>
+                      </a:solidFill>
+                      <a:prstDash val="solid"/>
+                      <a:round/>
+                      <a:headEnd type="none" w="med" len="med"/>
+                      <a:tailEnd type="none" w="med" len="med"/>
+                    </a:lnR>
+                    <a:lnT w="9525" cap="flat" cmpd="sng" algn="ctr">
+                      <a:solidFill>
+                        <a:srgbClr val="DADFF0"/>
+                      </a:solidFill>
+                      <a:prstDash val="solid"/>
+                      <a:round/>
+                      <a:headEnd type="none" w="med" len="med"/>
+                      <a:tailEnd type="none" w="med" len="med"/>
+                    </a:lnT>
+                    <a:lnB w="9525" cap="flat" cmpd="sng" algn="ctr">
+                      <a:solidFill>
+                        <a:srgbClr val="DADFF0"/>
+                      </a:solidFill>
+                      <a:prstDash val="solid"/>
+                      <a:round/>
+                      <a:headEnd type="none" w="med" len="med"/>
+                      <a:tailEnd type="none" w="med" len="med"/>
+                    </a:lnB>
+                  </a:tcPr>
+                </a:tc>
+                <a:tc>
+                  <a:txBody>
+                    <a:bodyPr/>
+                    <a:lstStyle/>
+                    <a:p>
+                      <a:pPr indent="0" marL="0">
+                        <a:buNone/>
+                      </a:pPr>
+                      <a:r>
+                        <a:rPr lang="en-US" sz="1200" dirty="0">
+                          <a:solidFill>
+                            <a:srgbClr val="1B1B2F"/>
+                          </a:solidFill>
+                          <a:latin typeface="Calibri" pitchFamily="34" charset="0"/>
+                          <a:ea typeface="Calibri" pitchFamily="34" charset="-122"/>
+                          <a:cs typeface="Calibri" pitchFamily="34" charset="-120"/>
+                        </a:rPr>
+                        <a:t>One balance cell altered - breaks the running-balance reconciliation</a:t>
+                      </a:r>
+                      <a:endParaRPr lang="en-US" sz="1200" dirty="0">
+                        <a:latin typeface="Calibri" charset="0"/>
+                        <a:ea typeface="Calibri" charset="0"/>
+                        <a:cs typeface="Calibri" charset="0"/>
+                      </a:endParaRPr>
+                    </a:p>
+                  </a:txBody>
+                  <a:tcPr marL="91440" marR="91440" marT="45720" marB="45720" anchor="ctr">
+                    <a:lnL w="9525" cap="flat" cmpd="sng" algn="ctr">
+                      <a:solidFill>
+                        <a:srgbClr val="DADFF0"/>
+                      </a:solidFill>
+                      <a:prstDash val="solid"/>
+                      <a:round/>
+                      <a:headEnd type="none" w="med" len="med"/>
+                      <a:tailEnd type="none" w="med" len="med"/>
+                    </a:lnL>
+                    <a:lnR w="9525" cap="flat" cmpd="sng" algn="ctr">
+                      <a:solidFill>
+                        <a:srgbClr val="DADFF0"/>
+                      </a:solidFill>
+                      <a:prstDash val="solid"/>
+                      <a:round/>
+                      <a:headEnd type="none" w="med" len="med"/>
+                      <a:tailEnd type="none" w="med" len="med"/>
+                    </a:lnR>
+                    <a:lnT w="9525" cap="flat" cmpd="sng" algn="ctr">
+                      <a:solidFill>
+                        <a:srgbClr val="DADFF0"/>
+                      </a:solidFill>
+                      <a:prstDash val="solid"/>
+                      <a:round/>
+                      <a:headEnd type="none" w="med" len="med"/>
+                      <a:tailEnd type="none" w="med" len="med"/>
+                    </a:lnT>
+                    <a:lnB w="9525" cap="flat" cmpd="sng" algn="ctr">
+                      <a:solidFill>
+                        <a:srgbClr val="DADFF0"/>
+                      </a:solidFill>
+                      <a:prstDash val="solid"/>
+                      <a:round/>
+                      <a:headEnd type="none" w="med" len="med"/>
+                      <a:tailEnd type="none" w="med" len="med"/>
+                    </a:lnB>
+                  </a:tcPr>
+                </a:tc>
+                <a:tc>
+                  <a:txBody>
+                    <a:bodyPr/>
+                    <a:lstStyle/>
+                    <a:p>
+                      <a:pPr indent="0" marL="0">
+                        <a:buNone/>
+                      </a:pPr>
+                      <a:r>
+                        <a:rPr lang="en-US" sz="1200" b="1" dirty="0">
+                          <a:solidFill>
+                            <a:srgbClr val="1E2761"/>
+                          </a:solidFill>
+                          <a:latin typeface="Calibri" pitchFamily="34" charset="0"/>
+                          <a:ea typeface="Calibri" pitchFamily="34" charset="-122"/>
+                          <a:cs typeface="Calibri" pitchFamily="34" charset="-120"/>
+                        </a:rPr>
+                        <a:t>MANUAL_REVIEW (ledger math)</a:t>
+                      </a:r>
+                      <a:endParaRPr lang="en-US" sz="1200" dirty="0">
+                        <a:latin typeface="Calibri" charset="0"/>
+                        <a:ea typeface="Calibri" charset="0"/>
+                        <a:cs typeface="Calibri" charset="0"/>
+                      </a:endParaRPr>
+                    </a:p>
+                  </a:txBody>
+                  <a:tcPr marL="91440" marR="91440" marT="45720" marB="45720" anchor="ctr">
+                    <a:lnL w="9525" cap="flat" cmpd="sng" algn="ctr">
+                      <a:solidFill>
+                        <a:srgbClr val="DADFF0"/>
+                      </a:solidFill>
+                      <a:prstDash val="solid"/>
+                      <a:round/>
+                      <a:headEnd type="none" w="med" len="med"/>
+                      <a:tailEnd type="none" w="med" len="med"/>
+                    </a:lnL>
+                    <a:lnR w="9525" cap="flat" cmpd="sng" algn="ctr">
+                      <a:solidFill>
+                        <a:srgbClr val="DADFF0"/>
+                      </a:solidFill>
+                      <a:prstDash val="solid"/>
+                      <a:round/>
+                      <a:headEnd type="none" w="med" len="med"/>
+                      <a:tailEnd type="none" w="med" len="med"/>
+                    </a:lnR>
+                    <a:lnT w="9525" cap="flat" cmpd="sng" algn="ctr">
+                      <a:solidFill>
+                        <a:srgbClr val="DADFF0"/>
+                      </a:solidFill>
+                      <a:prstDash val="solid"/>
+                      <a:round/>
+                      <a:headEnd type="none" w="med" len="med"/>
+                      <a:tailEnd type="none" w="med" len="med"/>
+                    </a:lnT>
+                    <a:lnB w="9525" cap="flat" cmpd="sng" algn="ctr">
+                      <a:solidFill>
+                        <a:srgbClr val="DADFF0"/>
+                      </a:solidFill>
+                      <a:prstDash val="solid"/>
+                      <a:round/>
+                      <a:headEnd type="none" w="med" len="med"/>
+                      <a:tailEnd type="none" w="med" len="med"/>
+                    </a:lnB>
+                  </a:tcPr>
+                </a:tc>
+              </a:tr>
+              <a:tr h="594360">
+                <a:tc>
+                  <a:txBody>
+                    <a:bodyPr/>
+                    <a:lstStyle/>
+                    <a:p>
+                      <a:pPr indent="0" marL="0">
+                        <a:buNone/>
+                      </a:pPr>
+                      <a:r>
+                        <a:rPr lang="en-US" sz="1200" b="1" dirty="0">
+                          <a:solidFill>
+                            <a:srgbClr val="1B1B2F"/>
+                          </a:solidFill>
+                          <a:latin typeface="Calibri" pitchFamily="34" charset="0"/>
+                          <a:ea typeface="Calibri" pitchFamily="34" charset="-122"/>
+                          <a:cs typeface="Calibri" pitchFamily="34" charset="-120"/>
+                        </a:rPr>
+                        <a:t>sample_photoshopped.pdf</a:t>
+                      </a:r>
+                      <a:endParaRPr lang="en-US" sz="1200" dirty="0">
+                        <a:latin typeface="Calibri" charset="0"/>
+                        <a:ea typeface="Calibri" charset="0"/>
+                        <a:cs typeface="Calibri" charset="0"/>
+                      </a:endParaRPr>
+                    </a:p>
+                  </a:txBody>
+                  <a:tcPr marL="91440" marR="91440" marT="45720" marB="45720" anchor="ctr">
+                    <a:lnL w="9525" cap="flat" cmpd="sng" algn="ctr">
+                      <a:solidFill>
+                        <a:srgbClr val="DADFF0"/>
+                      </a:solidFill>
+                      <a:prstDash val="solid"/>
+                      <a:round/>
+                      <a:headEnd type="none" w="med" len="med"/>
+                      <a:tailEnd type="none" w="med" len="med"/>
+                    </a:lnL>
+                    <a:lnR w="9525" cap="flat" cmpd="sng" algn="ctr">
+                      <a:solidFill>
+                        <a:srgbClr val="DADFF0"/>
+                      </a:solidFill>
+                      <a:prstDash val="solid"/>
+                      <a:round/>
+                      <a:headEnd type="none" w="med" len="med"/>
+                      <a:tailEnd type="none" w="med" len="med"/>
+                    </a:lnR>
+                    <a:lnT w="9525" cap="flat" cmpd="sng" algn="ctr">
+                      <a:solidFill>
+                        <a:srgbClr val="DADFF0"/>
+                      </a:solidFill>
+                      <a:prstDash val="solid"/>
+                      <a:round/>
+                      <a:headEnd type="none" w="med" len="med"/>
+                      <a:tailEnd type="none" w="med" len="med"/>
+                    </a:lnT>
+                    <a:lnB w="9525" cap="flat" cmpd="sng" algn="ctr">
+                      <a:solidFill>
+                        <a:srgbClr val="DADFF0"/>
+                      </a:solidFill>
+                      <a:prstDash val="solid"/>
+                      <a:round/>
+                      <a:headEnd type="none" w="med" len="med"/>
+                      <a:tailEnd type="none" w="med" len="med"/>
+                    </a:lnB>
+                  </a:tcPr>
+                </a:tc>
+                <a:tc>
+                  <a:txBody>
+                    <a:bodyPr/>
+                    <a:lstStyle/>
+                    <a:p>
+                      <a:pPr indent="0" marL="0">
+                        <a:buNone/>
+                      </a:pPr>
+                      <a:r>
+                        <a:rPr lang="en-US" sz="1200" dirty="0">
+                          <a:solidFill>
+                            <a:srgbClr val="1B1B2F"/>
+                          </a:solidFill>
+                          <a:latin typeface="Calibri" pitchFamily="34" charset="0"/>
+                          <a:ea typeface="Calibri" pitchFamily="34" charset="-122"/>
+                          <a:cs typeface="Calibri" pitchFamily="34" charset="-120"/>
+                        </a:rPr>
+                        <a:t>Ledger consistent, but /Producer metadata reads “Adobe Photoshop”</a:t>
+                      </a:r>
+                      <a:endParaRPr lang="en-US" sz="1200" dirty="0">
+                        <a:latin typeface="Calibri" charset="0"/>
+                        <a:ea typeface="Calibri" charset="0"/>
+                        <a:cs typeface="Calibri" charset="0"/>
+                      </a:endParaRPr>
+                    </a:p>
+                  </a:txBody>
+                  <a:tcPr marL="91440" marR="91440" marT="45720" marB="45720" anchor="ctr">
+                    <a:lnL w="9525" cap="flat" cmpd="sng" algn="ctr">
+                      <a:solidFill>
+                        <a:srgbClr val="DADFF0"/>
+                      </a:solidFill>
+                      <a:prstDash val="solid"/>
+                      <a:round/>
+                      <a:headEnd type="none" w="med" len="med"/>
+                      <a:tailEnd type="none" w="med" len="med"/>
+                    </a:lnL>
+                    <a:lnR w="9525" cap="flat" cmpd="sng" algn="ctr">
+                      <a:solidFill>
+                        <a:srgbClr val="DADFF0"/>
+                      </a:solidFill>
+                      <a:prstDash val="solid"/>
+                      <a:round/>
+                      <a:headEnd type="none" w="med" len="med"/>
+                      <a:tailEnd type="none" w="med" len="med"/>
+                    </a:lnR>
+                    <a:lnT w="9525" cap="flat" cmpd="sng" algn="ctr">
+                      <a:solidFill>
+                        <a:srgbClr val="DADFF0"/>
+                      </a:solidFill>
+                      <a:prstDash val="solid"/>
+                      <a:round/>
+                      <a:headEnd type="none" w="med" len="med"/>
+                      <a:tailEnd type="none" w="med" len="med"/>
+                    </a:lnT>
+                    <a:lnB w="9525" cap="flat" cmpd="sng" algn="ctr">
+                      <a:solidFill>
+                        <a:srgbClr val="DADFF0"/>
+                      </a:solidFill>
+                      <a:prstDash val="solid"/>
+                      <a:round/>
+                      <a:headEnd type="none" w="med" len="med"/>
+                      <a:tailEnd type="none" w="med" len="med"/>
+                    </a:lnB>
+                  </a:tcPr>
+                </a:tc>
+                <a:tc>
+                  <a:txBody>
+                    <a:bodyPr/>
+                    <a:lstStyle/>
+                    <a:p>
+                      <a:pPr indent="0" marL="0">
+                        <a:buNone/>
+                      </a:pPr>
+                      <a:r>
+                        <a:rPr lang="en-US" sz="1200" b="1" dirty="0">
+                          <a:solidFill>
+                            <a:srgbClr val="1E2761"/>
+                          </a:solidFill>
+                          <a:latin typeface="Calibri" pitchFamily="34" charset="0"/>
+                          <a:ea typeface="Calibri" pitchFamily="34" charset="-122"/>
+                          <a:cs typeface="Calibri" pitchFamily="34" charset="-120"/>
+                        </a:rPr>
+                        <a:t>REJECT_FRAUD_ALERT (structural)</a:t>
+                      </a:r>
+                      <a:endParaRPr lang="en-US" sz="1200" dirty="0">
+                        <a:latin typeface="Calibri" charset="0"/>
+                        <a:ea typeface="Calibri" charset="0"/>
+                        <a:cs typeface="Calibri" charset="0"/>
+                      </a:endParaRPr>
+                    </a:p>
+                  </a:txBody>
+                  <a:tcPr marL="91440" marR="91440" marT="45720" marB="45720" anchor="ctr">
+                    <a:lnL w="9525" cap="flat" cmpd="sng" algn="ctr">
+                      <a:solidFill>
+                        <a:srgbClr val="DADFF0"/>
+                      </a:solidFill>
+                      <a:prstDash val="solid"/>
+                      <a:round/>
+                      <a:headEnd type="none" w="med" len="med"/>
+                      <a:tailEnd type="none" w="med" len="med"/>
+                    </a:lnL>
+                    <a:lnR w="9525" cap="flat" cmpd="sng" algn="ctr">
+                      <a:solidFill>
+                        <a:srgbClr val="DADFF0"/>
+                      </a:solidFill>
+                      <a:prstDash val="solid"/>
+                      <a:round/>
+                      <a:headEnd type="none" w="med" len="med"/>
+                      <a:tailEnd type="none" w="med" len="med"/>
+                    </a:lnR>
+                    <a:lnT w="9525" cap="flat" cmpd="sng" algn="ctr">
+                      <a:solidFill>
+                        <a:srgbClr val="DADFF0"/>
+                      </a:solidFill>
+                      <a:prstDash val="solid"/>
+                      <a:round/>
+                      <a:headEnd type="none" w="med" len="med"/>
+                      <a:tailEnd type="none" w="med" len="med"/>
+                    </a:lnT>
+                    <a:lnB w="9525" cap="flat" cmpd="sng" algn="ctr">
+                      <a:solidFill>
+                        <a:srgbClr val="DADFF0"/>
+                      </a:solidFill>
+                      <a:prstDash val="solid"/>
+                      <a:round/>
+                      <a:headEnd type="none" w="med" len="med"/>
+                      <a:tailEnd type="none" w="med" len="med"/>
+                    </a:lnB>
+                  </a:tcPr>
+                </a:tc>
+              </a:tr>
+              <a:tr h="594360">
+                <a:tc>
+                  <a:txBody>
+                    <a:bodyPr/>
+                    <a:lstStyle/>
+                    <a:p>
+                      <a:pPr indent="0" marL="0">
+                        <a:buNone/>
+                      </a:pPr>
+                      <a:r>
+                        <a:rPr lang="en-US" sz="1200" b="1" dirty="0">
+                          <a:solidFill>
+                            <a:srgbClr val="1B1B2F"/>
+                          </a:solidFill>
+                          <a:latin typeface="Calibri" pitchFamily="34" charset="0"/>
+                          <a:ea typeface="Calibri" pitchFamily="34" charset="-122"/>
+                          <a:cs typeface="Calibri" pitchFamily="34" charset="-120"/>
+                        </a:rPr>
+                        <a:t>Password-encrypted PDF</a:t>
+                      </a:r>
+                      <a:endParaRPr lang="en-US" sz="1200" dirty="0">
+                        <a:latin typeface="Calibri" charset="0"/>
+                        <a:ea typeface="Calibri" charset="0"/>
+                        <a:cs typeface="Calibri" charset="0"/>
+                      </a:endParaRPr>
+                    </a:p>
+                  </a:txBody>
+                  <a:tcPr marL="91440" marR="91440" marT="45720" marB="45720" anchor="ctr">
+                    <a:lnL w="9525" cap="flat" cmpd="sng" algn="ctr">
+                      <a:solidFill>
+                        <a:srgbClr val="DADFF0"/>
+                      </a:solidFill>
+                      <a:prstDash val="solid"/>
+                      <a:round/>
+                      <a:headEnd type="none" w="med" len="med"/>
+                      <a:tailEnd type="none" w="med" len="med"/>
+                    </a:lnL>
+                    <a:lnR w="9525" cap="flat" cmpd="sng" algn="ctr">
+                      <a:solidFill>
+                        <a:srgbClr val="DADFF0"/>
+                      </a:solidFill>
+                      <a:prstDash val="solid"/>
+                      <a:round/>
+                      <a:headEnd type="none" w="med" len="med"/>
+                      <a:tailEnd type="none" w="med" len="med"/>
+                    </a:lnR>
+                    <a:lnT w="9525" cap="flat" cmpd="sng" algn="ctr">
+                      <a:solidFill>
+                        <a:srgbClr val="DADFF0"/>
+                      </a:solidFill>
+                      <a:prstDash val="solid"/>
+                      <a:round/>
+                      <a:headEnd type="none" w="med" len="med"/>
+                      <a:tailEnd type="none" w="med" len="med"/>
+                    </a:lnT>
+                    <a:lnB w="9525" cap="flat" cmpd="sng" algn="ctr">
+                      <a:solidFill>
+                        <a:srgbClr val="DADFF0"/>
+                      </a:solidFill>
+                      <a:prstDash val="solid"/>
+                      <a:round/>
+                      <a:headEnd type="none" w="med" len="med"/>
+                      <a:tailEnd type="none" w="med" len="med"/>
+                    </a:lnB>
+                  </a:tcPr>
+                </a:tc>
+                <a:tc>
+                  <a:txBody>
+                    <a:bodyPr/>
+                    <a:lstStyle/>
+                    <a:p>
+                      <a:pPr indent="0" marL="0">
+                        <a:buNone/>
+                      </a:pPr>
+                      <a:r>
+                        <a:rPr lang="en-US" sz="1200" dirty="0">
+                          <a:solidFill>
+                            <a:srgbClr val="1B1B2F"/>
+                          </a:solidFill>
+                          <a:latin typeface="Calibri" pitchFamily="34" charset="0"/>
+                          <a:ea typeface="Calibri" pitchFamily="34" charset="-122"/>
+                          <a:cs typeface="Calibri" pitchFamily="34" charset="-120"/>
+                        </a:rPr>
+                        <a:t>Upload with no / wrong password, then correct password</a:t>
+                      </a:r>
+                      <a:endParaRPr lang="en-US" sz="1200" dirty="0">
+                        <a:latin typeface="Calibri" charset="0"/>
+                        <a:ea typeface="Calibri" charset="0"/>
+                        <a:cs typeface="Calibri" charset="0"/>
+                      </a:endParaRPr>
+                    </a:p>
+                  </a:txBody>
+                  <a:tcPr marL="91440" marR="91440" marT="45720" marB="45720" anchor="ctr">
+                    <a:lnL w="9525" cap="flat" cmpd="sng" algn="ctr">
+                      <a:solidFill>
+                        <a:srgbClr val="DADFF0"/>
+                      </a:solidFill>
+                      <a:prstDash val="solid"/>
+                      <a:round/>
+                      <a:headEnd type="none" w="med" len="med"/>
+                      <a:tailEnd type="none" w="med" len="med"/>
+                    </a:lnL>
+                    <a:lnR w="9525" cap="flat" cmpd="sng" algn="ctr">
+                      <a:solidFill>
+                        <a:srgbClr val="DADFF0"/>
+                      </a:solidFill>
+                      <a:prstDash val="solid"/>
+                      <a:round/>
+                      <a:headEnd type="none" w="med" len="med"/>
+                      <a:tailEnd type="none" w="med" len="med"/>
+                    </a:lnR>
+                    <a:lnT w="9525" cap="flat" cmpd="sng" algn="ctr">
+                      <a:solidFill>
+                        <a:srgbClr val="DADFF0"/>
+                      </a:solidFill>
+                      <a:prstDash val="solid"/>
+                      <a:round/>
+                      <a:headEnd type="none" w="med" len="med"/>
+                      <a:tailEnd type="none" w="med" len="med"/>
+                    </a:lnT>
+                    <a:lnB w="9525" cap="flat" cmpd="sng" algn="ctr">
+                      <a:solidFill>
+                        <a:srgbClr val="DADFF0"/>
+                      </a:solidFill>
+                      <a:prstDash val="solid"/>
+                      <a:round/>
+                      <a:headEnd type="none" w="med" len="med"/>
+                      <a:tailEnd type="none" w="med" len="med"/>
+                    </a:lnB>
+                  </a:tcPr>
+                </a:tc>
+                <a:tc>
+                  <a:txBody>
+                    <a:bodyPr/>
+                    <a:lstStyle/>
+                    <a:p>
+                      <a:pPr indent="0" marL="0">
+                        <a:buNone/>
+                      </a:pPr>
+                      <a:r>
+                        <a:rPr lang="en-US" sz="1200" b="1" dirty="0">
+                          <a:solidFill>
+                            <a:srgbClr val="1E2761"/>
+                          </a:solidFill>
+                          <a:latin typeface="Calibri" pitchFamily="34" charset="0"/>
+                          <a:ea typeface="Calibri" pitchFamily="34" charset="-122"/>
+                          <a:cs typeface="Calibri" pitchFamily="34" charset="-120"/>
+                        </a:rPr>
+                        <a:t>PASSWORD_REQUIRED, then succeeds</a:t>
+                      </a:r>
+                      <a:endParaRPr lang="en-US" sz="1200" dirty="0">
+                        <a:latin typeface="Calibri" charset="0"/>
+                        <a:ea typeface="Calibri" charset="0"/>
+                        <a:cs typeface="Calibri" charset="0"/>
+                      </a:endParaRPr>
+                    </a:p>
+                  </a:txBody>
+                  <a:tcPr marL="91440" marR="91440" marT="45720" marB="45720" anchor="ctr">
+                    <a:lnL w="9525" cap="flat" cmpd="sng" algn="ctr">
+                      <a:solidFill>
+                        <a:srgbClr val="DADFF0"/>
+                      </a:solidFill>
+                      <a:prstDash val="solid"/>
+                      <a:round/>
+                      <a:headEnd type="none" w="med" len="med"/>
+                      <a:tailEnd type="none" w="med" len="med"/>
+                    </a:lnL>
+                    <a:lnR w="9525" cap="flat" cmpd="sng" algn="ctr">
+                      <a:solidFill>
+                        <a:srgbClr val="DADFF0"/>
+                      </a:solidFill>
+                      <a:prstDash val="solid"/>
+                      <a:round/>
+                      <a:headEnd type="none" w="med" len="med"/>
+                      <a:tailEnd type="none" w="med" len="med"/>
+                    </a:lnR>
+                    <a:lnT w="9525" cap="flat" cmpd="sng" algn="ctr">
+                      <a:solidFill>
+                        <a:srgbClr val="DADFF0"/>
+                      </a:solidFill>
+                      <a:prstDash val="solid"/>
+                      <a:round/>
+                      <a:headEnd type="none" w="med" len="med"/>
+                      <a:tailEnd type="none" w="med" len="med"/>
+                    </a:lnT>
+                    <a:lnB w="9525" cap="flat" cmpd="sng" algn="ctr">
+                      <a:solidFill>
+                        <a:srgbClr val="DADFF0"/>
+                      </a:solidFill>
+                      <a:prstDash val="solid"/>
+                      <a:round/>
+                      <a:headEnd type="none" w="med" len="med"/>
+                      <a:tailEnd type="none" w="med" len="med"/>
+                    </a:lnB>
+                  </a:tcPr>
+                </a:tc>
+              </a:tr>
+              <a:tr h="594360">
+                <a:tc>
+                  <a:txBody>
+                    <a:bodyPr/>
+                    <a:lstStyle/>
+                    <a:p>
+                      <a:pPr indent="0" marL="0">
+                        <a:buNone/>
+                      </a:pPr>
+                      <a:r>
+                        <a:rPr lang="en-US" sz="1200" b="1" dirty="0">
+                          <a:solidFill>
+                            <a:srgbClr val="1B1B2F"/>
+                          </a:solidFill>
+                          <a:latin typeface="Calibri" pitchFamily="34" charset="0"/>
+                          <a:ea typeface="Calibri" pitchFamily="34" charset="-122"/>
+                          <a:cs typeface="Calibri" pitchFamily="34" charset="-120"/>
+                        </a:rPr>
+                        <a:t>Scanned (image-only) statement</a:t>
+                      </a:r>
+                      <a:endParaRPr lang="en-US" sz="1200" dirty="0">
+                        <a:latin typeface="Calibri" charset="0"/>
+                        <a:ea typeface="Calibri" charset="0"/>
+                        <a:cs typeface="Calibri" charset="0"/>
+                      </a:endParaRPr>
+                    </a:p>
+                  </a:txBody>
+                  <a:tcPr marL="91440" marR="91440" marT="45720" marB="45720" anchor="ctr">
+                    <a:lnL w="9525" cap="flat" cmpd="sng" algn="ctr">
+                      <a:solidFill>
+                        <a:srgbClr val="DADFF0"/>
+                      </a:solidFill>
+                      <a:prstDash val="solid"/>
+                      <a:round/>
+                      <a:headEnd type="none" w="med" len="med"/>
+                      <a:tailEnd type="none" w="med" len="med"/>
+                    </a:lnL>
+                    <a:lnR w="9525" cap="flat" cmpd="sng" algn="ctr">
+                      <a:solidFill>
+                        <a:srgbClr val="DADFF0"/>
+                      </a:solidFill>
+                      <a:prstDash val="solid"/>
+                      <a:round/>
+                      <a:headEnd type="none" w="med" len="med"/>
+                      <a:tailEnd type="none" w="med" len="med"/>
+                    </a:lnR>
+                    <a:lnT w="9525" cap="flat" cmpd="sng" algn="ctr">
+                      <a:solidFill>
+                        <a:srgbClr val="DADFF0"/>
+                      </a:solidFill>
+                      <a:prstDash val="solid"/>
+                      <a:round/>
+                      <a:headEnd type="none" w="med" len="med"/>
+                      <a:tailEnd type="none" w="med" len="med"/>
+                    </a:lnT>
+                    <a:lnB w="9525" cap="flat" cmpd="sng" algn="ctr">
+                      <a:solidFill>
+                        <a:srgbClr val="DADFF0"/>
+                      </a:solidFill>
+                      <a:prstDash val="solid"/>
+                      <a:round/>
+                      <a:headEnd type="none" w="med" len="med"/>
+                      <a:tailEnd type="none" w="med" len="med"/>
+                    </a:lnB>
+                  </a:tcPr>
+                </a:tc>
+                <a:tc>
+                  <a:txBody>
+                    <a:bodyPr/>
+                    <a:lstStyle/>
+                    <a:p>
+                      <a:pPr indent="0" marL="0">
+                        <a:buNone/>
+                      </a:pPr>
+                      <a:r>
+                        <a:rPr lang="en-US" sz="1200" dirty="0">
+                          <a:solidFill>
+                            <a:srgbClr val="1B1B2F"/>
+                          </a:solidFill>
+                          <a:latin typeface="Calibri" pitchFamily="34" charset="0"/>
+                          <a:ea typeface="Calibri" pitchFamily="34" charset="-122"/>
+                          <a:cs typeface="Calibri" pitchFamily="34" charset="-120"/>
+                        </a:rPr>
+                        <a:t>pdfplumber fails → OpenCV-grid + Tesseract OCR fallback</a:t>
+                      </a:r>
+                      <a:endParaRPr lang="en-US" sz="1200" dirty="0">
+                        <a:latin typeface="Calibri" charset="0"/>
+                        <a:ea typeface="Calibri" charset="0"/>
+                        <a:cs typeface="Calibri" charset="0"/>
+                      </a:endParaRPr>
+                    </a:p>
+                  </a:txBody>
+                  <a:tcPr marL="91440" marR="91440" marT="45720" marB="45720" anchor="ctr">
+                    <a:lnL w="9525" cap="flat" cmpd="sng" algn="ctr">
+                      <a:solidFill>
+                        <a:srgbClr val="DADFF0"/>
+                      </a:solidFill>
+                      <a:prstDash val="solid"/>
+                      <a:round/>
+                      <a:headEnd type="none" w="med" len="med"/>
+                      <a:tailEnd type="none" w="med" len="med"/>
+                    </a:lnL>
+                    <a:lnR w="9525" cap="flat" cmpd="sng" algn="ctr">
+                      <a:solidFill>
+                        <a:srgbClr val="DADFF0"/>
+                      </a:solidFill>
+                      <a:prstDash val="solid"/>
+                      <a:round/>
+                      <a:headEnd type="none" w="med" len="med"/>
+                      <a:tailEnd type="none" w="med" len="med"/>
+                    </a:lnR>
+                    <a:lnT w="9525" cap="flat" cmpd="sng" algn="ctr">
+                      <a:solidFill>
+                        <a:srgbClr val="DADFF0"/>
+                      </a:solidFill>
+                      <a:prstDash val="solid"/>
+                      <a:round/>
+                      <a:headEnd type="none" w="med" len="med"/>
+                      <a:tailEnd type="none" w="med" len="med"/>
+                    </a:lnT>
+                    <a:lnB w="9525" cap="flat" cmpd="sng" algn="ctr">
+                      <a:solidFill>
+                        <a:srgbClr val="DADFF0"/>
+                      </a:solidFill>
+                      <a:prstDash val="solid"/>
+                      <a:round/>
+                      <a:headEnd type="none" w="med" len="med"/>
+                      <a:tailEnd type="none" w="med" len="med"/>
+                    </a:lnB>
+                  </a:tcPr>
+                </a:tc>
+                <a:tc>
+                  <a:txBody>
+                    <a:bodyPr/>
+                    <a:lstStyle/>
+                    <a:p>
+                      <a:pPr indent="0" marL="0">
+                        <a:buNone/>
+                      </a:pPr>
+                      <a:r>
+                        <a:rPr lang="en-US" sz="1200" b="1" dirty="0">
+                          <a:solidFill>
+                            <a:srgbClr val="1E2761"/>
+                          </a:solidFill>
+                          <a:latin typeface="Calibri" pitchFamily="34" charset="0"/>
+                          <a:ea typeface="Calibri" pitchFamily="34" charset="-122"/>
+                          <a:cs typeface="Calibri" pitchFamily="34" charset="-120"/>
+                        </a:rPr>
+                        <a:t>Routed to MANUAL_REVIEW if unreadable</a:t>
+                      </a:r>
+                      <a:endParaRPr lang="en-US" sz="1200" dirty="0">
+                        <a:latin typeface="Calibri" charset="0"/>
+                        <a:ea typeface="Calibri" charset="0"/>
+                        <a:cs typeface="Calibri" charset="0"/>
+                      </a:endParaRPr>
+                    </a:p>
+                  </a:txBody>
+                  <a:tcPr marL="91440" marR="91440" marT="45720" marB="45720" anchor="ctr">
+                    <a:lnL w="9525" cap="flat" cmpd="sng" algn="ctr">
+                      <a:solidFill>
+                        <a:srgbClr val="DADFF0"/>
+                      </a:solidFill>
+                      <a:prstDash val="solid"/>
+                      <a:round/>
+                      <a:headEnd type="none" w="med" len="med"/>
+                      <a:tailEnd type="none" w="med" len="med"/>
+                    </a:lnL>
+                    <a:lnR w="9525" cap="flat" cmpd="sng" algn="ctr">
+                      <a:solidFill>
+                        <a:srgbClr val="DADFF0"/>
+                      </a:solidFill>
+                      <a:prstDash val="solid"/>
+                      <a:round/>
+                      <a:headEnd type="none" w="med" len="med"/>
+                      <a:tailEnd type="none" w="med" len="med"/>
+                    </a:lnR>
+                    <a:lnT w="9525" cap="flat" cmpd="sng" algn="ctr">
+                      <a:solidFill>
+                        <a:srgbClr val="DADFF0"/>
+                      </a:solidFill>
+                      <a:prstDash val="solid"/>
+                      <a:round/>
+                      <a:headEnd type="none" w="med" len="med"/>
+                      <a:tailEnd type="none" w="med" len="med"/>
+                    </a:lnT>
+                    <a:lnB w="9525" cap="flat" cmpd="sng" algn="ctr">
+                      <a:solidFill>
+                        <a:srgbClr val="DADFF0"/>
+                      </a:solidFill>
+                      <a:prstDash val="solid"/>
+                      <a:round/>
+                      <a:headEnd type="none" w="med" len="med"/>
+                      <a:tailEnd type="none" w="med" len="med"/>
+                    </a:lnB>
+                  </a:tcPr>
+                </a:tc>
+              </a:tr>
+            </a:tbl>
+          </a:graphicData>
+        </a:graphic>
+      </p:graphicFrame>
+      <p:sp>
+        <p:nvSpPr>
+          <p:cNvPr id="7" name="Text 3"/>
+          <p:cNvSpPr txBox="1"/>
+          <p:nvPr/>
+        </p:nvSpPr>
+        <p:spPr>
+          <a:xfrm>
+            <a:off x="548640" y="5577840"/>
+            <a:ext cx="11091672" cy="822960"/>
+          </a:xfrm>
+          <a:prstGeom prst="rect">
+            <a:avLst/>
+          </a:prstGeom>
+          <a:noFill/>
+          <a:ln/>
+        </p:spPr>
+        <p:txBody>
+          <a:bodyPr wrap="square" lIns="0" tIns="0" rIns="0" bIns="0" rtlCol="0" anchor="ctr"/>
+          <a:lstStyle/>
+          <a:p>
+            <a:pPr indent="0" marL="0">
+              <a:buNone/>
+            </a:pPr>
+            <a:r>
+              <a:rPr lang="en-US" sz="1250" i="1" dirty="0">
+                <a:solidFill>
+                  <a:srgbClr val="5B6B8C"/>
+                </a:solidFill>
+                <a:latin typeface="Calibri" pitchFamily="34" charset="0"/>
+                <a:ea typeface="Calibri" pitchFamily="34" charset="-122"/>
+                <a:cs typeface="Calibri" pitchFamily="34" charset="-120"/>
+              </a:rPr>
+              <a:t>Additional verification: Playwright browser smoke tests for both the applicant and officer flows, run against the live application - a live timing check confirmed uploads return in well under 100ms.</a:t>
+            </a:r>
+            <a:endParaRPr lang="en-US" sz="1250" dirty="0"/>
+          </a:p>
+        </p:txBody>
+      </p:sp>
+      <p:sp>
+        <p:nvSpPr>
+          <p:cNvPr id="8" name="Text 4"/>
+          <p:cNvSpPr txBox="1"/>
+          <p:nvPr/>
+        </p:nvSpPr>
+        <p:spPr>
+          <a:xfrm>
+            <a:off x="457200" y="6510528"/>
+            <a:ext cx="9601200" cy="274320"/>
+          </a:xfrm>
+          <a:prstGeom prst="rect">
+            <a:avLst/>
+          </a:prstGeom>
+          <a:noFill/>
+          <a:ln/>
+        </p:spPr>
+        <p:txBody>
+          <a:bodyPr wrap="square" lIns="0" tIns="0" rIns="0" bIns="0" rtlCol="0" anchor="ctr"/>
+          <a:lstStyle/>
+          <a:p>
+            <a:pPr indent="0" marL="0">
+              <a:buNone/>
+            </a:pPr>
+            <a:r>
+              <a:rPr lang="en-US" sz="900" dirty="0">
+                <a:solidFill>
+                  <a:srgbClr val="5B6B8C"/>
+                </a:solidFill>
+                <a:latin typeface="Calibri" pitchFamily="34" charset="0"/>
+                <a:ea typeface="Calibri" pitchFamily="34" charset="-122"/>
+                <a:cs typeface="Calibri" pitchFamily="34" charset="-120"/>
+              </a:rPr>
+              <a:t>Second Review – Automated AI-Driven Loan Underwriting &amp; Document Fraud Detection</a:t>
+            </a:r>
+            <a:endParaRPr lang="en-US" sz="900" dirty="0"/>
+          </a:p>
+        </p:txBody>
+      </p:sp>
+      <p:sp>
+        <p:nvSpPr>
+          <p:cNvPr id="9" name="Text 5"/>
+          <p:cNvSpPr txBox="1"/>
+          <p:nvPr/>
+        </p:nvSpPr>
+        <p:spPr>
+          <a:xfrm>
+            <a:off x="11430000" y="6510528"/>
+            <a:ext cx="365760" cy="274320"/>
+          </a:xfrm>
+          <a:prstGeom prst="rect">
+            <a:avLst/>
+          </a:prstGeom>
+          <a:noFill/>
+          <a:ln/>
+        </p:spPr>
+        <p:txBody>
+          <a:bodyPr wrap="square" lIns="0" tIns="0" rIns="0" bIns="0" rtlCol="0" anchor="ctr"/>
+          <a:lstStyle/>
+          <a:p>
+            <a:pPr algn="r" indent="0" marL="0">
+              <a:buNone/>
+            </a:pPr>
+            <a:r>
+              <a:rPr lang="en-US" sz="900" dirty="0">
+                <a:solidFill>
+                  <a:srgbClr val="5B6B8C"/>
+                </a:solidFill>
+                <a:latin typeface="Calibri" pitchFamily="34" charset="0"/>
+                <a:ea typeface="Calibri" pitchFamily="34" charset="-122"/>
+                <a:cs typeface="Calibri" pitchFamily="34" charset="-120"/>
+              </a:rPr>
+              <a:t>23</a:t>
+            </a:r>
+            <a:endParaRPr lang="en-US" sz="900" dirty="0"/>
+          </a:p>
+        </p:txBody>
+      </p:sp>
+    </p:spTree>
+  </p:cSld>
+  <p:clrMapOvr>
+    <a:masterClrMapping/>
+  </p:clrMapOvr>
+</p:sld>
+</file>
+
+<file path=ppt/slides/slide24.xml><?xml version="1.0" encoding="utf-8"?>
+<p:sld xmlns:a="http://schemas.openxmlformats.org/drawingml/2006/main" xmlns:r="http://schemas.openxmlformats.org/officeDocument/2006/relationships" xmlns:p="http://schemas.openxmlformats.org/presentationml/2006/main">
+  <p:cSld name="Slide 6">
+    <p:bg>
+      <p:bgPr>
+        <a:solidFill>
+          <a:srgbClr val="FFFFFF"/>
+        </a:solidFill>
+      </p:bgPr>
+    </p:bg>
+    <p:spTree>
+      <p:nvGrpSpPr>
+        <p:cNvPr id="1" name=""/>
+        <p:cNvGrpSpPr/>
+        <p:nvPr/>
+      </p:nvGrpSpPr>
+      <p:grpSpPr>
+        <a:xfrm>
+          <a:off x="0" y="0"/>
+          <a:ext cx="0" cy="0"/>
+          <a:chOff x="0" y="0"/>
+          <a:chExt cx="0" cy="0"/>
+        </a:xfrm>
+      </p:grpSpPr>
+      <p:sp>
+        <p:nvSpPr>
+          <p:cNvPr id="2" name="Text 0"/>
+          <p:cNvSpPr txBox="1"/>
+          <p:nvPr/>
+        </p:nvSpPr>
+        <p:spPr>
+          <a:xfrm>
+            <a:off x="548640" y="384048"/>
+            <a:ext cx="5486400" cy="274320"/>
+          </a:xfrm>
+          <a:prstGeom prst="rect">
+            <a:avLst/>
+          </a:prstGeom>
+          <a:noFill/>
+          <a:ln/>
+        </p:spPr>
+        <p:txBody>
+          <a:bodyPr wrap="square" lIns="0" tIns="0" rIns="0" bIns="0" rtlCol="0" anchor="ctr"/>
+          <a:lstStyle/>
+          <a:p>
+            <a:pPr indent="0" marL="0">
+              <a:buNone/>
+            </a:pPr>
+            <a:r>
+              <a:rPr lang="en-US" sz="1150" b="1" spc="200" kern="0" dirty="0">
+                <a:solidFill>
+                  <a:srgbClr val="C9A227"/>
+                </a:solidFill>
+                <a:latin typeface="Calibri" pitchFamily="34" charset="0"/>
+                <a:ea typeface="Calibri" pitchFamily="34" charset="-122"/>
+                <a:cs typeface="Calibri" pitchFamily="34" charset="-120"/>
+              </a:rPr>
+              <a:t>HONEST ENGINEERING</a:t>
+            </a:r>
+            <a:endParaRPr lang="en-US" sz="1150" dirty="0"/>
+          </a:p>
+        </p:txBody>
+      </p:sp>
+      <p:sp>
+        <p:nvSpPr>
+          <p:cNvPr id="3" name="Text 1"/>
+          <p:cNvSpPr txBox="1"/>
+          <p:nvPr/>
+        </p:nvSpPr>
+        <p:spPr>
+          <a:xfrm>
+            <a:off x="548640" y="658368"/>
+            <a:ext cx="9784080" cy="640080"/>
+          </a:xfrm>
+          <a:prstGeom prst="rect">
+            <a:avLst/>
+          </a:prstGeom>
+          <a:noFill/>
+          <a:ln/>
+        </p:spPr>
+        <p:txBody>
+          <a:bodyPr wrap="square" lIns="0" tIns="0" rIns="0" bIns="0" rtlCol="0" anchor="ctr"/>
+          <a:lstStyle/>
+          <a:p>
+            <a:pPr indent="0" marL="0">
+              <a:buNone/>
+            </a:pPr>
+            <a:r>
+              <a:rPr lang="en-US" sz="2800" b="1" dirty="0">
+                <a:solidFill>
+                  <a:srgbClr val="1E2761"/>
+                </a:solidFill>
+                <a:latin typeface="Cambria" pitchFamily="34" charset="0"/>
+                <a:ea typeface="Cambria" pitchFamily="34" charset="-122"/>
+                <a:cs typeface="Cambria" pitchFamily="34" charset="-120"/>
+              </a:rPr>
+              <a:t>Deviation If Any and Justification</a:t>
+            </a:r>
+            <a:endParaRPr lang="en-US" sz="2800" dirty="0"/>
+          </a:p>
+        </p:txBody>
+      </p:sp>
+      <p:sp>
+        <p:nvSpPr>
+          <p:cNvPr id="4" name="Shape 2"/>
+          <p:cNvSpPr/>
+          <p:nvPr/>
+        </p:nvSpPr>
+        <p:spPr>
+          <a:xfrm>
+            <a:off x="10424160" y="365760"/>
+            <a:ext cx="1005840" cy="1005840"/>
+          </a:xfrm>
+          <a:prstGeom prst="ellipse">
+            <a:avLst/>
+          </a:prstGeom>
+          <a:solidFill>
+            <a:srgbClr val="1E2761"/>
+          </a:solidFill>
+          <a:ln/>
+        </p:spPr>
+      </p:sp>
+      <p:pic>
+        <p:nvPicPr>
+          <p:cNvPr id="5" name="Image 0" descr="preencoded.png">    </p:cNvPr>
+          <p:cNvPicPr>
+            <a:picLocks noChangeAspect="1"/>
+          </p:cNvPicPr>
+          <p:nvPr/>
+        </p:nvPicPr>
+        <p:blipFill>
+          <a:blip r:embed="rId1"/>
+          <a:stretch>
+            <a:fillRect/>
+          </a:stretch>
+        </p:blipFill>
+        <p:spPr>
+          <a:xfrm>
+            <a:off x="10544861" y="486461"/>
+            <a:ext cx="764438" cy="764438"/>
+          </a:xfrm>
+          <a:prstGeom prst="rect">
+            <a:avLst/>
+          </a:prstGeom>
+        </p:spPr>
+      </p:pic>
+      <p:sp>
+        <p:nvSpPr>
+          <p:cNvPr id="6" name="Text 3"/>
+          <p:cNvSpPr txBox="1"/>
+          <p:nvPr/>
+        </p:nvSpPr>
+        <p:spPr>
+          <a:xfrm>
+            <a:off x="640080" y="1783080"/>
+            <a:ext cx="10881360" cy="3200400"/>
+          </a:xfrm>
+          <a:prstGeom prst="rect">
+            <a:avLst/>
+          </a:prstGeom>
+          <a:noFill/>
+          <a:ln/>
+        </p:spPr>
+        <p:txBody>
+          <a:bodyPr wrap="square" lIns="0" tIns="0" rIns="0" bIns="0" rtlCol="0" anchor="t"/>
+          <a:lstStyle/>
+          <a:p>
+            <a:pPr marL="228600" indent="-228600">
+              <a:spcAft>
+                <a:spcPts val="1400"/>
+              </a:spcAft>
+              <a:buSzPct val="100000"/>
+              <a:buChar char="▪"/>
+            </a:pPr>
+            <a:r>
+              <a:rPr lang="en-US" sz="1400" dirty="0">
+                <a:solidFill>
+                  <a:srgbClr val="1B1B2F"/>
+                </a:solidFill>
+                <a:latin typeface="Calibri" pitchFamily="34" charset="0"/>
+                <a:ea typeface="Calibri" pitchFamily="34" charset="-122"/>
+                <a:cs typeface="Calibri" pitchFamily="34" charset="-120"/>
+              </a:rPr>
+              <a:t>Database: MySQL was proposed; SQLite is used instead - no concurrent-write need yet at single-user prototype scale</a:t>
+            </a:r>
+            <a:endParaRPr lang="en-US" sz="1400" dirty="0"/>
+          </a:p>
+          <a:p>
+            <a:pPr marL="228600" indent="-228600">
+              <a:spcAft>
+                <a:spcPts val="1400"/>
+              </a:spcAft>
+              <a:buSzPct val="100000"/>
+              <a:buChar char="▪"/>
+            </a:pPr>
+            <a:r>
+              <a:rPr lang="en-US" sz="1400" dirty="0">
+                <a:solidFill>
+                  <a:srgbClr val="1B1B2F"/>
+                </a:solidFill>
+                <a:latin typeface="Calibri" pitchFamily="34" charset="0"/>
+                <a:ea typeface="Calibri" pitchFamily="34" charset="-122"/>
+                <a:cs typeface="Calibri" pitchFamily="34" charset="-120"/>
+              </a:rPr>
+              <a:t>Fraud gating: the First Review's decision framework treats ELA as auto-reject evidence; it stays diagnostic-only here, since it false-positives on clean scans - only metadata + ledger math auto-gate</a:t>
+            </a:r>
+            <a:endParaRPr lang="en-US" sz="1400" dirty="0"/>
+          </a:p>
+          <a:p>
+            <a:pPr marL="228600" indent="-228600">
+              <a:spcAft>
+                <a:spcPts val="1400"/>
+              </a:spcAft>
+              <a:buSzPct val="100000"/>
+              <a:buChar char="▪"/>
+            </a:pPr>
+            <a:r>
+              <a:rPr lang="en-US" sz="1400" dirty="0">
+                <a:solidFill>
+                  <a:srgbClr val="1B1B2F"/>
+                </a:solidFill>
+                <a:latin typeface="Calibri" pitchFamily="34" charset="0"/>
+                <a:ea typeface="Calibri" pitchFamily="34" charset="-122"/>
+                <a:cs typeface="Calibri" pitchFamily="34" charset="-120"/>
+              </a:rPr>
+              <a:t>Credit-risk training data: the public Kaggle dataset is used, not real underwriting outcomes - no proprietary lending data exists at the prototype stage</a:t>
+            </a:r>
+            <a:endParaRPr lang="en-US" sz="1400" dirty="0"/>
+          </a:p>
+          <a:p>
+            <a:pPr marL="228600" indent="-228600">
+              <a:spcAft>
+                <a:spcPts val="1400"/>
+              </a:spcAft>
+              <a:buSzPct val="100000"/>
+              <a:buChar char="▪"/>
+            </a:pPr>
+            <a:r>
+              <a:rPr lang="en-US" sz="1400" dirty="0">
+                <a:solidFill>
+                  <a:srgbClr val="1B1B2F"/>
+                </a:solidFill>
+                <a:latin typeface="Calibri" pitchFamily="34" charset="0"/>
+                <a:ea typeface="Calibri" pitchFamily="34" charset="-122"/>
+                <a:cs typeface="Calibri" pitchFamily="34" charset="-120"/>
+              </a:rPr>
+              <a:t>Schema: forensic/financial/risk results are flat typed columns, not the JSON sub-documents in the original ER diagram</a:t>
+            </a:r>
+            <a:endParaRPr lang="en-US" sz="1400" dirty="0"/>
+          </a:p>
+          <a:p>
+            <a:pPr marL="228600" indent="-228600">
+              <a:spcAft>
+                <a:spcPts val="1400"/>
+              </a:spcAft>
+              <a:buSzPct val="100000"/>
+              <a:buChar char="▪"/>
+            </a:pPr>
+            <a:r>
+              <a:rPr lang="en-US" sz="1400" dirty="0">
+                <a:solidFill>
+                  <a:srgbClr val="1B1B2F"/>
+                </a:solidFill>
+                <a:latin typeface="Calibri" pitchFamily="34" charset="0"/>
+                <a:ea typeface="Calibri" pitchFamily="34" charset="-122"/>
+                <a:cs typeface="Calibri" pitchFamily="34" charset="-120"/>
+              </a:rPr>
+              <a:t>Ledger OCR coverage: tuned to the three generated sample documents, not arbitrary real bank statement layouts</a:t>
+            </a:r>
+            <a:endParaRPr lang="en-US" sz="1400" dirty="0"/>
+          </a:p>
+        </p:txBody>
+      </p:sp>
+      <p:sp>
+        <p:nvSpPr>
+          <p:cNvPr id="7" name="Shape 4"/>
+          <p:cNvSpPr/>
+          <p:nvPr/>
+        </p:nvSpPr>
+        <p:spPr>
+          <a:xfrm>
+            <a:off x="548640" y="5166360"/>
+            <a:ext cx="11091672" cy="1234440"/>
+          </a:xfrm>
+          <a:prstGeom prst="roundRect">
+            <a:avLst>
+              <a:gd name="adj" fmla="val 5926"/>
+            </a:avLst>
+          </a:prstGeom>
+          <a:solidFill>
+            <a:srgbClr val="F5F8FF"/>
+          </a:solidFill>
+          <a:ln/>
+        </p:spPr>
+      </p:sp>
+      <p:sp>
+        <p:nvSpPr>
+          <p:cNvPr id="8" name="Text 5"/>
+          <p:cNvSpPr txBox="1"/>
+          <p:nvPr/>
+        </p:nvSpPr>
+        <p:spPr>
+          <a:xfrm>
+            <a:off x="868680" y="5330952"/>
+            <a:ext cx="10424160" cy="274320"/>
+          </a:xfrm>
+          <a:prstGeom prst="rect">
+            <a:avLst/>
+          </a:prstGeom>
+          <a:noFill/>
+          <a:ln/>
+        </p:spPr>
+        <p:txBody>
+          <a:bodyPr wrap="square" lIns="0" tIns="0" rIns="0" bIns="0" rtlCol="0" anchor="ctr"/>
+          <a:lstStyle/>
+          <a:p>
+            <a:pPr indent="0" marL="0">
+              <a:buNone/>
+            </a:pPr>
+            <a:r>
+              <a:rPr lang="en-US" sz="1150" b="1" spc="150" kern="0" dirty="0">
+                <a:solidFill>
+                  <a:srgbClr val="C9A227"/>
+                </a:solidFill>
+                <a:latin typeface="Calibri" pitchFamily="34" charset="0"/>
+                <a:ea typeface="Calibri" pitchFamily="34" charset="-122"/>
+                <a:cs typeface="Calibri" pitchFamily="34" charset="-120"/>
+              </a:rPr>
+              <a:t>WHY IT MATTERS</a:t>
+            </a:r>
+            <a:endParaRPr lang="en-US" sz="1150" dirty="0"/>
+          </a:p>
+        </p:txBody>
+      </p:sp>
+      <p:sp>
+        <p:nvSpPr>
+          <p:cNvPr id="9" name="Text 6"/>
+          <p:cNvSpPr txBox="1"/>
+          <p:nvPr/>
+        </p:nvSpPr>
+        <p:spPr>
+          <a:xfrm>
+            <a:off x="868680" y="5623560"/>
+            <a:ext cx="10424160" cy="685800"/>
+          </a:xfrm>
+          <a:prstGeom prst="rect">
+            <a:avLst/>
+          </a:prstGeom>
+          <a:noFill/>
+          <a:ln/>
+        </p:spPr>
+        <p:txBody>
+          <a:bodyPr wrap="square" lIns="0" tIns="0" rIns="0" bIns="0" rtlCol="0" anchor="t"/>
+          <a:lstStyle/>
+          <a:p>
+            <a:pPr indent="0" marL="0">
+              <a:lnSpc>
+                <a:spcPct val="115000"/>
+              </a:lnSpc>
+              <a:buNone/>
+            </a:pPr>
+            <a:r>
+              <a:rPr lang="en-US" sz="1300" i="1" dirty="0">
+                <a:solidFill>
+                  <a:srgbClr val="1E2761"/>
+                </a:solidFill>
+                <a:latin typeface="Calibri" pitchFamily="34" charset="0"/>
+                <a:ea typeface="Calibri" pitchFamily="34" charset="-122"/>
+                <a:cs typeface="Calibri" pitchFamily="34" charset="-120"/>
+              </a:rPr>
+              <a:t>Every deviation above is deliberate and documented, with its reasoning stated up front - that is what makes it an engineering decision rather than an inconsistency.</a:t>
+            </a:r>
+            <a:endParaRPr lang="en-US" sz="1300" dirty="0"/>
+          </a:p>
+        </p:txBody>
+      </p:sp>
+      <p:sp>
+        <p:nvSpPr>
+          <p:cNvPr id="10" name="Text 7"/>
+          <p:cNvSpPr txBox="1"/>
+          <p:nvPr/>
+        </p:nvSpPr>
+        <p:spPr>
+          <a:xfrm>
+            <a:off x="457200" y="6510528"/>
+            <a:ext cx="9601200" cy="274320"/>
+          </a:xfrm>
+          <a:prstGeom prst="rect">
+            <a:avLst/>
+          </a:prstGeom>
+          <a:noFill/>
+          <a:ln/>
+        </p:spPr>
+        <p:txBody>
+          <a:bodyPr wrap="square" lIns="0" tIns="0" rIns="0" bIns="0" rtlCol="0" anchor="ctr"/>
+          <a:lstStyle/>
+          <a:p>
+            <a:pPr indent="0" marL="0">
+              <a:buNone/>
+            </a:pPr>
+            <a:r>
+              <a:rPr lang="en-US" sz="900" dirty="0">
+                <a:solidFill>
+                  <a:srgbClr val="5B6B8C"/>
+                </a:solidFill>
+                <a:latin typeface="Calibri" pitchFamily="34" charset="0"/>
+                <a:ea typeface="Calibri" pitchFamily="34" charset="-122"/>
+                <a:cs typeface="Calibri" pitchFamily="34" charset="-120"/>
+              </a:rPr>
+              <a:t>Second Review – Automated AI-Driven Loan Underwriting &amp; Document Fraud Detection</a:t>
+            </a:r>
+            <a:endParaRPr lang="en-US" sz="900" dirty="0"/>
+          </a:p>
+        </p:txBody>
+      </p:sp>
+      <p:sp>
+        <p:nvSpPr>
+          <p:cNvPr id="11" name="Text 8"/>
+          <p:cNvSpPr txBox="1"/>
+          <p:nvPr/>
+        </p:nvSpPr>
+        <p:spPr>
+          <a:xfrm>
+            <a:off x="11430000" y="6510528"/>
+            <a:ext cx="365760" cy="274320"/>
+          </a:xfrm>
+          <a:prstGeom prst="rect">
+            <a:avLst/>
+          </a:prstGeom>
+          <a:noFill/>
+          <a:ln/>
+        </p:spPr>
+        <p:txBody>
+          <a:bodyPr wrap="square" lIns="0" tIns="0" rIns="0" bIns="0" rtlCol="0" anchor="ctr"/>
+          <a:lstStyle/>
+          <a:p>
+            <a:pPr algn="r" indent="0" marL="0">
+              <a:buNone/>
+            </a:pPr>
+            <a:r>
+              <a:rPr lang="en-US" sz="900" dirty="0">
+                <a:solidFill>
+                  <a:srgbClr val="5B6B8C"/>
+                </a:solidFill>
+                <a:latin typeface="Calibri" pitchFamily="34" charset="0"/>
+                <a:ea typeface="Calibri" pitchFamily="34" charset="-122"/>
+                <a:cs typeface="Calibri" pitchFamily="34" charset="-120"/>
+              </a:rPr>
+              <a:t>24</a:t>
+            </a:r>
+            <a:endParaRPr lang="en-US" sz="900" dirty="0"/>
+          </a:p>
+        </p:txBody>
+      </p:sp>
+    </p:spTree>
+  </p:cSld>
+  <p:clrMapOvr>
+    <a:masterClrMapping/>
+  </p:clrMapOvr>
+</p:sld>
+</file>
+
+<file path=ppt/slides/slide25.xml><?xml version="1.0" encoding="utf-8"?>
+<p:sld xmlns:a="http://schemas.openxmlformats.org/drawingml/2006/main" xmlns:r="http://schemas.openxmlformats.org/officeDocument/2006/relationships" xmlns:p="http://schemas.openxmlformats.org/presentationml/2006/main">
+  <p:cSld name="Slide 7">
+    <p:bg>
+      <p:bgPr>
+        <a:solidFill>
+          <a:srgbClr val="FFFFFF"/>
+        </a:solidFill>
+      </p:bgPr>
+    </p:bg>
+    <p:spTree>
+      <p:nvGrpSpPr>
+        <p:cNvPr id="1" name=""/>
+        <p:cNvGrpSpPr/>
+        <p:nvPr/>
+      </p:nvGrpSpPr>
+      <p:grpSpPr>
+        <a:xfrm>
+          <a:off x="0" y="0"/>
+          <a:ext cx="0" cy="0"/>
+          <a:chOff x="0" y="0"/>
+          <a:chExt cx="0" cy="0"/>
+        </a:xfrm>
+      </p:grpSpPr>
+      <p:sp>
+        <p:nvSpPr>
+          <p:cNvPr id="2" name="Text 0"/>
+          <p:cNvSpPr txBox="1"/>
+          <p:nvPr/>
+        </p:nvSpPr>
+        <p:spPr>
+          <a:xfrm>
+            <a:off x="548640" y="384048"/>
+            <a:ext cx="5486400" cy="274320"/>
+          </a:xfrm>
+          <a:prstGeom prst="rect">
+            <a:avLst/>
+          </a:prstGeom>
+          <a:noFill/>
+          <a:ln/>
+        </p:spPr>
+        <p:txBody>
+          <a:bodyPr wrap="square" lIns="0" tIns="0" rIns="0" bIns="0" rtlCol="0" anchor="ctr"/>
+          <a:lstStyle/>
+          <a:p>
+            <a:pPr indent="0" marL="0">
+              <a:buNone/>
+            </a:pPr>
+            <a:r>
+              <a:rPr lang="en-US" sz="1150" b="1" spc="200" kern="0" dirty="0">
+                <a:solidFill>
+                  <a:srgbClr val="C9A227"/>
+                </a:solidFill>
+                <a:latin typeface="Calibri" pitchFamily="34" charset="0"/>
+                <a:ea typeface="Calibri" pitchFamily="34" charset="-122"/>
+                <a:cs typeface="Calibri" pitchFamily="34" charset="-120"/>
+              </a:rPr>
+              <a:t>VERIFICATION</a:t>
+            </a:r>
+            <a:endParaRPr lang="en-US" sz="1150" dirty="0"/>
+          </a:p>
+        </p:txBody>
+      </p:sp>
+      <p:sp>
+        <p:nvSpPr>
+          <p:cNvPr id="3" name="Text 1"/>
+          <p:cNvSpPr txBox="1"/>
+          <p:nvPr/>
+        </p:nvSpPr>
+        <p:spPr>
+          <a:xfrm>
+            <a:off x="548640" y="658368"/>
+            <a:ext cx="10515600" cy="640080"/>
+          </a:xfrm>
+          <a:prstGeom prst="rect">
+            <a:avLst/>
+          </a:prstGeom>
+          <a:noFill/>
+          <a:ln/>
+        </p:spPr>
+        <p:txBody>
+          <a:bodyPr wrap="square" lIns="0" tIns="0" rIns="0" bIns="0" rtlCol="0" anchor="ctr"/>
+          <a:lstStyle/>
+          <a:p>
+            <a:pPr indent="0" marL="0">
+              <a:buNone/>
+            </a:pPr>
+            <a:r>
+              <a:rPr lang="en-US" sz="2800" b="1" dirty="0">
+                <a:solidFill>
+                  <a:srgbClr val="1E2761"/>
+                </a:solidFill>
+                <a:latin typeface="Cambria" pitchFamily="34" charset="0"/>
+                <a:ea typeface="Cambria" pitchFamily="34" charset="-122"/>
+                <a:cs typeface="Cambria" pitchFamily="34" charset="-120"/>
+              </a:rPr>
+              <a:t>Verified Live, Not Just Described</a:t>
+            </a:r>
+            <a:endParaRPr lang="en-US" sz="2800" dirty="0"/>
+          </a:p>
+        </p:txBody>
+      </p:sp>
+      <p:sp>
+        <p:nvSpPr>
+          <p:cNvPr id="4" name="Text 2"/>
+          <p:cNvSpPr txBox="1"/>
+          <p:nvPr/>
+        </p:nvSpPr>
+        <p:spPr>
+          <a:xfrm>
+            <a:off x="548640" y="1234440"/>
+            <a:ext cx="11064240" cy="365760"/>
+          </a:xfrm>
+          <a:prstGeom prst="rect">
+            <a:avLst/>
+          </a:prstGeom>
+          <a:noFill/>
+          <a:ln/>
+        </p:spPr>
+        <p:txBody>
+          <a:bodyPr wrap="square" lIns="0" tIns="0" rIns="0" bIns="0" rtlCol="0" anchor="ctr"/>
+          <a:lstStyle/>
+          <a:p>
+            <a:pPr indent="0" marL="0">
+              <a:buNone/>
+            </a:pPr>
+            <a:r>
+              <a:rPr lang="en-US" sz="1400" i="1" dirty="0">
+                <a:solidFill>
+                  <a:srgbClr val="5B6B8C"/>
+                </a:solidFill>
+                <a:latin typeface="Calibri" pitchFamily="34" charset="0"/>
+                <a:ea typeface="Calibri" pitchFamily="34" charset="-122"/>
+                <a:cs typeface="Calibri" pitchFamily="34" charset="-120"/>
+              </a:rPr>
+              <a:t>Every claim in this review was exercised against the running application</a:t>
+            </a:r>
+            <a:endParaRPr lang="en-US" sz="1400" dirty="0"/>
+          </a:p>
+        </p:txBody>
+      </p:sp>
+      <p:sp>
+        <p:nvSpPr>
+          <p:cNvPr id="5" name="Shape 3"/>
+          <p:cNvSpPr/>
+          <p:nvPr/>
+        </p:nvSpPr>
+        <p:spPr>
+          <a:xfrm>
+            <a:off x="548640" y="1920240"/>
+            <a:ext cx="3566160" cy="2103120"/>
+          </a:xfrm>
+          <a:prstGeom prst="roundRect">
+            <a:avLst>
+              <a:gd name="adj" fmla="val 5217"/>
+            </a:avLst>
+          </a:prstGeom>
+          <a:solidFill>
+            <a:srgbClr val="F5F8FF"/>
+          </a:solidFill>
+          <a:ln/>
+          <a:effectLst>
+            <a:outerShdw sx="100000" sy="100000" kx="0" ky="0" algn="bl" rotWithShape="0" blurRad="63500" dist="25400" dir="5400000">
+              <a:srgbClr val="9AA7C7">
+                <a:alpha val="30000"/>
+              </a:srgbClr>
+            </a:outerShdw>
+          </a:effectLst>
+        </p:spPr>
+      </p:sp>
+      <p:sp>
+        <p:nvSpPr>
+          <p:cNvPr id="6" name="Text 4"/>
+          <p:cNvSpPr txBox="1"/>
+          <p:nvPr/>
+        </p:nvSpPr>
+        <p:spPr>
+          <a:xfrm>
+            <a:off x="548640" y="2240280"/>
+            <a:ext cx="3566160" cy="822960"/>
+          </a:xfrm>
+          <a:prstGeom prst="rect">
+            <a:avLst/>
+          </a:prstGeom>
+          <a:noFill/>
+          <a:ln/>
+        </p:spPr>
+        <p:txBody>
+          <a:bodyPr wrap="square" lIns="0" tIns="0" rIns="0" bIns="0" rtlCol="0" anchor="ctr"/>
+          <a:lstStyle/>
+          <a:p>
+            <a:pPr algn="ctr" indent="0" marL="0">
+              <a:buNone/>
+            </a:pPr>
+            <a:r>
+              <a:rPr lang="en-US" sz="3600" b="1" dirty="0">
+                <a:solidFill>
+                  <a:srgbClr val="1E2761"/>
+                </a:solidFill>
+                <a:latin typeface="Cambria" pitchFamily="34" charset="0"/>
+                <a:ea typeface="Cambria" pitchFamily="34" charset="-122"/>
+                <a:cs typeface="Cambria" pitchFamily="34" charset="-120"/>
+              </a:rPr>
+              <a:t>&lt;50ms</a:t>
+            </a:r>
+            <a:endParaRPr lang="en-US" sz="3600" dirty="0"/>
+          </a:p>
+        </p:txBody>
+      </p:sp>
+      <p:sp>
+        <p:nvSpPr>
+          <p:cNvPr id="7" name="Text 5"/>
+          <p:cNvSpPr txBox="1"/>
+          <p:nvPr/>
+        </p:nvSpPr>
+        <p:spPr>
+          <a:xfrm>
+            <a:off x="822960" y="3200400"/>
+            <a:ext cx="3017520" cy="640080"/>
+          </a:xfrm>
+          <a:prstGeom prst="rect">
+            <a:avLst/>
+          </a:prstGeom>
+          <a:noFill/>
+          <a:ln/>
+        </p:spPr>
+        <p:txBody>
+          <a:bodyPr wrap="square" lIns="0" tIns="0" rIns="0" bIns="0" rtlCol="0" anchor="ctr"/>
+          <a:lstStyle/>
+          <a:p>
+            <a:pPr algn="ctr" indent="0" marL="0">
+              <a:buNone/>
+            </a:pPr>
+            <a:r>
+              <a:rPr lang="en-US" sz="1250" dirty="0">
+                <a:solidFill>
+                  <a:srgbClr val="5B6B8C"/>
+                </a:solidFill>
+                <a:latin typeface="Calibri" pitchFamily="34" charset="0"/>
+                <a:ea typeface="Calibri" pitchFamily="34" charset="-122"/>
+                <a:cs typeface="Calibri" pitchFamily="34" charset="-120"/>
+              </a:rPr>
+              <a:t>Upload request acknowledgement, measured consistently across trials</a:t>
+            </a:r>
+            <a:endParaRPr lang="en-US" sz="1250" dirty="0"/>
+          </a:p>
+        </p:txBody>
+      </p:sp>
+      <p:sp>
+        <p:nvSpPr>
+          <p:cNvPr id="8" name="Shape 6"/>
+          <p:cNvSpPr/>
+          <p:nvPr/>
+        </p:nvSpPr>
+        <p:spPr>
+          <a:xfrm>
+            <a:off x="4315968" y="1920240"/>
+            <a:ext cx="3566160" cy="2103120"/>
+          </a:xfrm>
+          <a:prstGeom prst="roundRect">
+            <a:avLst>
+              <a:gd name="adj" fmla="val 5217"/>
+            </a:avLst>
+          </a:prstGeom>
+          <a:solidFill>
+            <a:srgbClr val="F5F8FF"/>
+          </a:solidFill>
+          <a:ln/>
+          <a:effectLst>
+            <a:outerShdw sx="100000" sy="100000" kx="0" ky="0" algn="bl" rotWithShape="0" blurRad="63500" dist="25400" dir="5400000">
+              <a:srgbClr val="9AA7C7">
+                <a:alpha val="30000"/>
+              </a:srgbClr>
+            </a:outerShdw>
+          </a:effectLst>
+        </p:spPr>
+      </p:sp>
+      <p:sp>
+        <p:nvSpPr>
+          <p:cNvPr id="9" name="Text 7"/>
+          <p:cNvSpPr txBox="1"/>
+          <p:nvPr/>
+        </p:nvSpPr>
+        <p:spPr>
+          <a:xfrm>
+            <a:off x="4315968" y="2240280"/>
+            <a:ext cx="3566160" cy="822960"/>
+          </a:xfrm>
+          <a:prstGeom prst="rect">
+            <a:avLst/>
+          </a:prstGeom>
+          <a:noFill/>
+          <a:ln/>
+        </p:spPr>
+        <p:txBody>
+          <a:bodyPr wrap="square" lIns="0" tIns="0" rIns="0" bIns="0" rtlCol="0" anchor="ctr"/>
+          <a:lstStyle/>
+          <a:p>
+            <a:pPr algn="ctr" indent="0" marL="0">
+              <a:buNone/>
+            </a:pPr>
+            <a:r>
+              <a:rPr lang="en-US" sz="3600" b="1" dirty="0">
+                <a:solidFill>
+                  <a:srgbClr val="C9A227"/>
+                </a:solidFill>
+                <a:latin typeface="Cambria" pitchFamily="34" charset="0"/>
+                <a:ea typeface="Cambria" pitchFamily="34" charset="-122"/>
+                <a:cs typeface="Cambria" pitchFamily="34" charset="-120"/>
+              </a:rPr>
+              <a:t>3 / 3</a:t>
+            </a:r>
+            <a:endParaRPr lang="en-US" sz="3600" dirty="0"/>
+          </a:p>
+        </p:txBody>
+      </p:sp>
+      <p:sp>
+        <p:nvSpPr>
+          <p:cNvPr id="10" name="Text 8"/>
+          <p:cNvSpPr txBox="1"/>
+          <p:nvPr/>
+        </p:nvSpPr>
+        <p:spPr>
+          <a:xfrm>
+            <a:off x="4590288" y="3200400"/>
+            <a:ext cx="3017520" cy="640080"/>
+          </a:xfrm>
+          <a:prstGeom prst="rect">
+            <a:avLst/>
+          </a:prstGeom>
+          <a:noFill/>
+          <a:ln/>
+        </p:spPr>
+        <p:txBody>
+          <a:bodyPr wrap="square" lIns="0" tIns="0" rIns="0" bIns="0" rtlCol="0" anchor="ctr"/>
+          <a:lstStyle/>
+          <a:p>
+            <a:pPr algn="ctr" indent="0" marL="0">
+              <a:buNone/>
+            </a:pPr>
+            <a:r>
+              <a:rPr lang="en-US" sz="1250" dirty="0">
+                <a:solidFill>
+                  <a:srgbClr val="5B6B8C"/>
+                </a:solidFill>
+                <a:latin typeface="Calibri" pitchFamily="34" charset="0"/>
+                <a:ea typeface="Calibri" pitchFamily="34" charset="-122"/>
+                <a:cs typeface="Calibri" pitchFamily="34" charset="-120"/>
+              </a:rPr>
+              <a:t>Decision branches (approve / manual review / fraud alert) verified live</a:t>
+            </a:r>
+            <a:endParaRPr lang="en-US" sz="1250" dirty="0"/>
+          </a:p>
+        </p:txBody>
+      </p:sp>
+      <p:sp>
+        <p:nvSpPr>
+          <p:cNvPr id="11" name="Shape 9"/>
+          <p:cNvSpPr/>
+          <p:nvPr/>
+        </p:nvSpPr>
+        <p:spPr>
+          <a:xfrm>
+            <a:off x="8074152" y="1920240"/>
+            <a:ext cx="3566160" cy="2103120"/>
+          </a:xfrm>
+          <a:prstGeom prst="roundRect">
+            <a:avLst>
+              <a:gd name="adj" fmla="val 5217"/>
+            </a:avLst>
+          </a:prstGeom>
+          <a:solidFill>
+            <a:srgbClr val="F5F8FF"/>
+          </a:solidFill>
+          <a:ln/>
+          <a:effectLst>
+            <a:outerShdw sx="100000" sy="100000" kx="0" ky="0" algn="bl" rotWithShape="0" blurRad="63500" dist="25400" dir="5400000">
+              <a:srgbClr val="9AA7C7">
+                <a:alpha val="30000"/>
+              </a:srgbClr>
+            </a:outerShdw>
+          </a:effectLst>
+        </p:spPr>
+      </p:sp>
+      <p:sp>
+        <p:nvSpPr>
+          <p:cNvPr id="12" name="Text 10"/>
+          <p:cNvSpPr txBox="1"/>
+          <p:nvPr/>
+        </p:nvSpPr>
+        <p:spPr>
+          <a:xfrm>
+            <a:off x="8074152" y="2240280"/>
+            <a:ext cx="3566160" cy="822960"/>
+          </a:xfrm>
+          <a:prstGeom prst="rect">
+            <a:avLst/>
+          </a:prstGeom>
+          <a:noFill/>
+          <a:ln/>
+        </p:spPr>
+        <p:txBody>
+          <a:bodyPr wrap="square" lIns="0" tIns="0" rIns="0" bIns="0" rtlCol="0" anchor="ctr"/>
+          <a:lstStyle/>
+          <a:p>
+            <a:pPr algn="ctr" indent="0" marL="0">
+              <a:buNone/>
+            </a:pPr>
+            <a:r>
+              <a:rPr lang="en-US" sz="3600" b="1" dirty="0">
+                <a:solidFill>
+                  <a:srgbClr val="B3392C"/>
+                </a:solidFill>
+                <a:latin typeface="Cambria" pitchFamily="34" charset="0"/>
+                <a:ea typeface="Cambria" pitchFamily="34" charset="-122"/>
+                <a:cs typeface="Cambria" pitchFamily="34" charset="-120"/>
+              </a:rPr>
+              <a:t>0.87</a:t>
+            </a:r>
+            <a:endParaRPr lang="en-US" sz="3600" dirty="0"/>
+          </a:p>
+        </p:txBody>
+      </p:sp>
+      <p:sp>
+        <p:nvSpPr>
+          <p:cNvPr id="13" name="Text 11"/>
+          <p:cNvSpPr txBox="1"/>
+          <p:nvPr/>
+        </p:nvSpPr>
+        <p:spPr>
+          <a:xfrm>
+            <a:off x="8348472" y="3200400"/>
+            <a:ext cx="3017520" cy="640080"/>
+          </a:xfrm>
+          <a:prstGeom prst="rect">
+            <a:avLst/>
+          </a:prstGeom>
+          <a:noFill/>
+          <a:ln/>
+        </p:spPr>
+        <p:txBody>
+          <a:bodyPr wrap="square" lIns="0" tIns="0" rIns="0" bIns="0" rtlCol="0" anchor="ctr"/>
+          <a:lstStyle/>
+          <a:p>
+            <a:pPr algn="ctr" indent="0" marL="0">
+              <a:buNone/>
+            </a:pPr>
+            <a:r>
+              <a:rPr lang="en-US" sz="1250" dirty="0">
+                <a:solidFill>
+                  <a:srgbClr val="5B6B8C"/>
+                </a:solidFill>
+                <a:latin typeface="Calibri" pitchFamily="34" charset="0"/>
+                <a:ea typeface="Calibri" pitchFamily="34" charset="-122"/>
+                <a:cs typeface="Calibri" pitchFamily="34" charset="-120"/>
+              </a:rPr>
+              <a:t>XGBoost AUC-ROC on the held-out validation split</a:t>
+            </a:r>
+            <a:endParaRPr lang="en-US" sz="1250" dirty="0"/>
+          </a:p>
+        </p:txBody>
+      </p:sp>
+      <p:sp>
+        <p:nvSpPr>
+          <p:cNvPr id="14" name="Text 12"/>
+          <p:cNvSpPr txBox="1"/>
+          <p:nvPr/>
+        </p:nvSpPr>
+        <p:spPr>
+          <a:xfrm>
+            <a:off x="548640" y="4343400"/>
+            <a:ext cx="11091672" cy="548640"/>
+          </a:xfrm>
+          <a:prstGeom prst="rect">
+            <a:avLst/>
+          </a:prstGeom>
+          <a:noFill/>
+          <a:ln/>
+        </p:spPr>
+        <p:txBody>
+          <a:bodyPr wrap="square" lIns="0" tIns="0" rIns="0" bIns="0" rtlCol="0" anchor="ctr"/>
+          <a:lstStyle/>
+          <a:p>
+            <a:pPr algn="ctr" indent="0" marL="0">
+              <a:buNone/>
+            </a:pPr>
+            <a:r>
+              <a:rPr lang="en-US" sz="1300" i="1" dirty="0">
+                <a:solidFill>
+                  <a:srgbClr val="5B6B8C"/>
+                </a:solidFill>
+                <a:latin typeface="Calibri" pitchFamily="34" charset="0"/>
+                <a:ea typeface="Calibri" pitchFamily="34" charset="-122"/>
+                <a:cs typeface="Calibri" pitchFamily="34" charset="-120"/>
+              </a:rPr>
+              <a:t>Verified by registering real users, submitting real applications through the HTTP API, and polling for results - the same path the application itself uses, not a mocked UI state.</a:t>
+            </a:r>
+            <a:endParaRPr lang="en-US" sz="1300" dirty="0"/>
+          </a:p>
+        </p:txBody>
+      </p:sp>
+      <p:sp>
+        <p:nvSpPr>
+          <p:cNvPr id="15" name="Shape 13"/>
+          <p:cNvSpPr/>
+          <p:nvPr/>
+        </p:nvSpPr>
+        <p:spPr>
+          <a:xfrm>
+            <a:off x="548640" y="5074920"/>
+            <a:ext cx="11091672" cy="0"/>
+          </a:xfrm>
+          <a:prstGeom prst="line">
+            <a:avLst/>
+          </a:prstGeom>
+          <a:noFill/>
+          <a:ln w="12700">
+            <a:solidFill>
+              <a:srgbClr val="E3E7F5"/>
+            </a:solidFill>
+            <a:prstDash val="solid"/>
+          </a:ln>
+        </p:spPr>
+      </p:sp>
+      <p:sp>
+        <p:nvSpPr>
+          <p:cNvPr id="16" name="Shape 14"/>
+          <p:cNvSpPr/>
+          <p:nvPr/>
+        </p:nvSpPr>
+        <p:spPr>
+          <a:xfrm>
+            <a:off x="548640" y="5349240"/>
+            <a:ext cx="292608" cy="292608"/>
+          </a:xfrm>
+          <a:prstGeom prst="ellipse">
+            <a:avLst/>
+          </a:prstGeom>
+          <a:solidFill>
+            <a:srgbClr val="E9F3EA"/>
+          </a:solidFill>
+          <a:ln/>
+        </p:spPr>
+      </p:sp>
+      <p:sp>
+        <p:nvSpPr>
+          <p:cNvPr id="17" name="Text 15"/>
+          <p:cNvSpPr txBox="1"/>
+          <p:nvPr/>
+        </p:nvSpPr>
+        <p:spPr>
+          <a:xfrm>
+            <a:off x="548640" y="5349240"/>
+            <a:ext cx="292608" cy="292608"/>
+          </a:xfrm>
+          <a:prstGeom prst="rect">
+            <a:avLst/>
+          </a:prstGeom>
+          <a:noFill/>
+          <a:ln/>
+        </p:spPr>
+        <p:txBody>
+          <a:bodyPr wrap="square" lIns="0" tIns="0" rIns="0" bIns="0" rtlCol="0" anchor="ctr"/>
+          <a:lstStyle/>
+          <a:p>
+            <a:pPr algn="ctr" indent="0" marL="0">
+              <a:buNone/>
+            </a:pPr>
+            <a:r>
+              <a:rPr lang="en-US" sz="1300" b="1" dirty="0">
+                <a:solidFill>
+                  <a:srgbClr val="2E7D32"/>
+                </a:solidFill>
+                <a:latin typeface="Calibri" pitchFamily="34" charset="0"/>
+                <a:ea typeface="Calibri" pitchFamily="34" charset="-122"/>
+                <a:cs typeface="Calibri" pitchFamily="34" charset="-120"/>
+              </a:rPr>
+              <a:t>✓</a:t>
+            </a:r>
+            <a:endParaRPr lang="en-US" sz="1300" dirty="0"/>
+          </a:p>
+        </p:txBody>
+      </p:sp>
+      <p:sp>
+        <p:nvSpPr>
+          <p:cNvPr id="18" name="Text 16"/>
+          <p:cNvSpPr txBox="1"/>
+          <p:nvPr/>
+        </p:nvSpPr>
+        <p:spPr>
+          <a:xfrm>
+            <a:off x="932688" y="5349240"/>
+            <a:ext cx="3200400" cy="365760"/>
+          </a:xfrm>
+          <a:prstGeom prst="rect">
+            <a:avLst/>
+          </a:prstGeom>
+          <a:noFill/>
+          <a:ln/>
+        </p:spPr>
+        <p:txBody>
+          <a:bodyPr wrap="square" lIns="0" tIns="0" rIns="0" bIns="0" rtlCol="0" anchor="ctr"/>
+          <a:lstStyle/>
+          <a:p>
+            <a:pPr indent="0" marL="0">
+              <a:buNone/>
+            </a:pPr>
+            <a:r>
+              <a:rPr lang="en-US" sz="1250" dirty="0">
+                <a:solidFill>
+                  <a:srgbClr val="1B1B2F"/>
+                </a:solidFill>
+                <a:latin typeface="Calibri" pitchFamily="34" charset="0"/>
+                <a:ea typeface="Calibri" pitchFamily="34" charset="-122"/>
+                <a:cs typeface="Calibri" pitchFamily="34" charset="-120"/>
+              </a:rPr>
+              <a:t>Applicant flow: register → apply → upload</a:t>
+            </a:r>
+            <a:endParaRPr lang="en-US" sz="1250" dirty="0"/>
+          </a:p>
+        </p:txBody>
+      </p:sp>
+      <p:sp>
+        <p:nvSpPr>
+          <p:cNvPr id="19" name="Shape 17"/>
+          <p:cNvSpPr/>
+          <p:nvPr/>
+        </p:nvSpPr>
+        <p:spPr>
+          <a:xfrm>
+            <a:off x="4315968" y="5349240"/>
+            <a:ext cx="292608" cy="292608"/>
+          </a:xfrm>
+          <a:prstGeom prst="ellipse">
+            <a:avLst/>
+          </a:prstGeom>
+          <a:solidFill>
+            <a:srgbClr val="E9F3EA"/>
+          </a:solidFill>
+          <a:ln/>
+        </p:spPr>
+      </p:sp>
+      <p:sp>
+        <p:nvSpPr>
+          <p:cNvPr id="20" name="Text 18"/>
+          <p:cNvSpPr txBox="1"/>
+          <p:nvPr/>
+        </p:nvSpPr>
+        <p:spPr>
+          <a:xfrm>
+            <a:off x="4315968" y="5349240"/>
+            <a:ext cx="292608" cy="292608"/>
+          </a:xfrm>
+          <a:prstGeom prst="rect">
+            <a:avLst/>
+          </a:prstGeom>
+          <a:noFill/>
+          <a:ln/>
+        </p:spPr>
+        <p:txBody>
+          <a:bodyPr wrap="square" lIns="0" tIns="0" rIns="0" bIns="0" rtlCol="0" anchor="ctr"/>
+          <a:lstStyle/>
+          <a:p>
+            <a:pPr algn="ctr" indent="0" marL="0">
+              <a:buNone/>
+            </a:pPr>
+            <a:r>
+              <a:rPr lang="en-US" sz="1300" b="1" dirty="0">
+                <a:solidFill>
+                  <a:srgbClr val="2E7D32"/>
+                </a:solidFill>
+                <a:latin typeface="Calibri" pitchFamily="34" charset="0"/>
+                <a:ea typeface="Calibri" pitchFamily="34" charset="-122"/>
+                <a:cs typeface="Calibri" pitchFamily="34" charset="-120"/>
+              </a:rPr>
+              <a:t>✓</a:t>
+            </a:r>
+            <a:endParaRPr lang="en-US" sz="1300" dirty="0"/>
+          </a:p>
+        </p:txBody>
+      </p:sp>
+      <p:sp>
+        <p:nvSpPr>
+          <p:cNvPr id="21" name="Text 19"/>
+          <p:cNvSpPr txBox="1"/>
+          <p:nvPr/>
+        </p:nvSpPr>
+        <p:spPr>
+          <a:xfrm>
+            <a:off x="4700016" y="5349240"/>
+            <a:ext cx="3200400" cy="365760"/>
+          </a:xfrm>
+          <a:prstGeom prst="rect">
+            <a:avLst/>
+          </a:prstGeom>
+          <a:noFill/>
+          <a:ln/>
+        </p:spPr>
+        <p:txBody>
+          <a:bodyPr wrap="square" lIns="0" tIns="0" rIns="0" bIns="0" rtlCol="0" anchor="ctr"/>
+          <a:lstStyle/>
+          <a:p>
+            <a:pPr indent="0" marL="0">
+              <a:buNone/>
+            </a:pPr>
+            <a:r>
+              <a:rPr lang="en-US" sz="1250" dirty="0">
+                <a:solidFill>
+                  <a:srgbClr val="1B1B2F"/>
+                </a:solidFill>
+                <a:latin typeface="Calibri" pitchFamily="34" charset="0"/>
+                <a:ea typeface="Calibri" pitchFamily="34" charset="-122"/>
+                <a:cs typeface="Calibri" pitchFamily="34" charset="-120"/>
+              </a:rPr>
+              <a:t>Officer flow: queue → review → confirm</a:t>
+            </a:r>
+            <a:endParaRPr lang="en-US" sz="1250" dirty="0"/>
+          </a:p>
+        </p:txBody>
+      </p:sp>
+      <p:sp>
+        <p:nvSpPr>
+          <p:cNvPr id="22" name="Shape 20"/>
+          <p:cNvSpPr/>
+          <p:nvPr/>
+        </p:nvSpPr>
+        <p:spPr>
+          <a:xfrm>
+            <a:off x="8074152" y="5349240"/>
+            <a:ext cx="292608" cy="292608"/>
+          </a:xfrm>
+          <a:prstGeom prst="ellipse">
+            <a:avLst/>
+          </a:prstGeom>
+          <a:solidFill>
+            <a:srgbClr val="E9F3EA"/>
+          </a:solidFill>
+          <a:ln/>
+        </p:spPr>
+      </p:sp>
+      <p:sp>
+        <p:nvSpPr>
+          <p:cNvPr id="23" name="Text 21"/>
+          <p:cNvSpPr txBox="1"/>
+          <p:nvPr/>
+        </p:nvSpPr>
+        <p:spPr>
+          <a:xfrm>
+            <a:off x="8074152" y="5349240"/>
+            <a:ext cx="292608" cy="292608"/>
+          </a:xfrm>
+          <a:prstGeom prst="rect">
+            <a:avLst/>
+          </a:prstGeom>
+          <a:noFill/>
+          <a:ln/>
+        </p:spPr>
+        <p:txBody>
+          <a:bodyPr wrap="square" lIns="0" tIns="0" rIns="0" bIns="0" rtlCol="0" anchor="ctr"/>
+          <a:lstStyle/>
+          <a:p>
+            <a:pPr algn="ctr" indent="0" marL="0">
+              <a:buNone/>
+            </a:pPr>
+            <a:r>
+              <a:rPr lang="en-US" sz="1300" b="1" dirty="0">
+                <a:solidFill>
+                  <a:srgbClr val="2E7D32"/>
+                </a:solidFill>
+                <a:latin typeface="Calibri" pitchFamily="34" charset="0"/>
+                <a:ea typeface="Calibri" pitchFamily="34" charset="-122"/>
+                <a:cs typeface="Calibri" pitchFamily="34" charset="-120"/>
+              </a:rPr>
+              <a:t>✓</a:t>
+            </a:r>
+            <a:endParaRPr lang="en-US" sz="1300" dirty="0"/>
+          </a:p>
+        </p:txBody>
+      </p:sp>
+      <p:sp>
+        <p:nvSpPr>
+          <p:cNvPr id="24" name="Text 22"/>
+          <p:cNvSpPr txBox="1"/>
+          <p:nvPr/>
+        </p:nvSpPr>
+        <p:spPr>
+          <a:xfrm>
+            <a:off x="8458200" y="5349240"/>
+            <a:ext cx="3200400" cy="365760"/>
+          </a:xfrm>
+          <a:prstGeom prst="rect">
+            <a:avLst/>
+          </a:prstGeom>
+          <a:noFill/>
+          <a:ln/>
+        </p:spPr>
+        <p:txBody>
+          <a:bodyPr wrap="square" lIns="0" tIns="0" rIns="0" bIns="0" rtlCol="0" anchor="ctr"/>
+          <a:lstStyle/>
+          <a:p>
+            <a:pPr indent="0" marL="0">
+              <a:buNone/>
+            </a:pPr>
+            <a:r>
+              <a:rPr lang="en-US" sz="1250" dirty="0">
+                <a:solidFill>
+                  <a:srgbClr val="1B1B2F"/>
+                </a:solidFill>
+                <a:latin typeface="Calibri" pitchFamily="34" charset="0"/>
+                <a:ea typeface="Calibri" pitchFamily="34" charset="-122"/>
+                <a:cs typeface="Calibri" pitchFamily="34" charset="-120"/>
+              </a:rPr>
+              <a:t>All 3 decision branches reached live</a:t>
+            </a:r>
+            <a:endParaRPr lang="en-US" sz="1250" dirty="0"/>
+          </a:p>
+        </p:txBody>
+      </p:sp>
+      <p:sp>
+        <p:nvSpPr>
+          <p:cNvPr id="25" name="Text 23"/>
+          <p:cNvSpPr txBox="1"/>
+          <p:nvPr/>
+        </p:nvSpPr>
+        <p:spPr>
+          <a:xfrm>
+            <a:off x="457200" y="6510528"/>
+            <a:ext cx="9601200" cy="274320"/>
+          </a:xfrm>
+          <a:prstGeom prst="rect">
+            <a:avLst/>
+          </a:prstGeom>
+          <a:noFill/>
+          <a:ln/>
+        </p:spPr>
+        <p:txBody>
+          <a:bodyPr wrap="square" lIns="0" tIns="0" rIns="0" bIns="0" rtlCol="0" anchor="ctr"/>
+          <a:lstStyle/>
+          <a:p>
+            <a:pPr indent="0" marL="0">
+              <a:buNone/>
+            </a:pPr>
+            <a:r>
+              <a:rPr lang="en-US" sz="900" dirty="0">
+                <a:solidFill>
+                  <a:srgbClr val="5B6B8C"/>
+                </a:solidFill>
+                <a:latin typeface="Calibri" pitchFamily="34" charset="0"/>
+                <a:ea typeface="Calibri" pitchFamily="34" charset="-122"/>
+                <a:cs typeface="Calibri" pitchFamily="34" charset="-120"/>
+              </a:rPr>
+              <a:t>Second Review – Automated AI-Driven Loan Underwriting &amp; Document Fraud Detection</a:t>
+            </a:r>
+            <a:endParaRPr lang="en-US" sz="900" dirty="0"/>
+          </a:p>
+        </p:txBody>
+      </p:sp>
+      <p:sp>
+        <p:nvSpPr>
+          <p:cNvPr id="26" name="Text 24"/>
+          <p:cNvSpPr txBox="1"/>
+          <p:nvPr/>
+        </p:nvSpPr>
+        <p:spPr>
+          <a:xfrm>
+            <a:off x="11430000" y="6510528"/>
+            <a:ext cx="365760" cy="274320"/>
+          </a:xfrm>
+          <a:prstGeom prst="rect">
+            <a:avLst/>
+          </a:prstGeom>
+          <a:noFill/>
+          <a:ln/>
+        </p:spPr>
+        <p:txBody>
+          <a:bodyPr wrap="square" lIns="0" tIns="0" rIns="0" bIns="0" rtlCol="0" anchor="ctr"/>
+          <a:lstStyle/>
+          <a:p>
+            <a:pPr algn="r" indent="0" marL="0">
+              <a:buNone/>
+            </a:pPr>
+            <a:r>
+              <a:rPr lang="en-US" sz="900" dirty="0">
+                <a:solidFill>
+                  <a:srgbClr val="5B6B8C"/>
+                </a:solidFill>
+                <a:latin typeface="Calibri" pitchFamily="34" charset="0"/>
+                <a:ea typeface="Calibri" pitchFamily="34" charset="-122"/>
+                <a:cs typeface="Calibri" pitchFamily="34" charset="-120"/>
+              </a:rPr>
+              <a:t>25</a:t>
+            </a:r>
+            <a:endParaRPr lang="en-US" sz="900" dirty="0"/>
+          </a:p>
+        </p:txBody>
+      </p:sp>
+    </p:spTree>
+  </p:cSld>
+  <p:clrMapOvr>
+    <a:masterClrMapping/>
+  </p:clrMapOvr>
+</p:sld>
+</file>
+
+<file path=ppt/slides/slide26.xml><?xml version="1.0" encoding="utf-8"?>
+<p:sld xmlns:a="http://schemas.openxmlformats.org/drawingml/2006/main" xmlns:r="http://schemas.openxmlformats.org/officeDocument/2006/relationships" xmlns:p="http://schemas.openxmlformats.org/presentationml/2006/main">
+  <p:cSld name="Slide 8">
+    <p:bg>
+      <p:bgPr>
+        <a:solidFill>
+          <a:srgbClr val="1E2761"/>
+        </a:solidFill>
+      </p:bgPr>
+    </p:bg>
+    <p:spTree>
+      <p:nvGrpSpPr>
+        <p:cNvPr id="1" name=""/>
+        <p:cNvGrpSpPr/>
+        <p:nvPr/>
+      </p:nvGrpSpPr>
+      <p:grpSpPr>
+        <a:xfrm>
+          <a:off x="0" y="0"/>
+          <a:ext cx="0" cy="0"/>
+          <a:chOff x="0" y="0"/>
+          <a:chExt cx="0" cy="0"/>
+        </a:xfrm>
+      </p:grpSpPr>
+      <p:sp>
+        <p:nvSpPr>
+          <p:cNvPr id="2" name="Shape 0"/>
+          <p:cNvSpPr/>
+          <p:nvPr/>
+        </p:nvSpPr>
+        <p:spPr>
+          <a:xfrm>
+            <a:off x="9692640" y="-1280160"/>
+            <a:ext cx="4114800" cy="4114800"/>
+          </a:xfrm>
+          <a:prstGeom prst="ellipse">
+            <a:avLst/>
+          </a:prstGeom>
+          <a:solidFill>
+            <a:srgbClr val="141B45"/>
+          </a:solidFill>
+          <a:ln/>
+        </p:spPr>
+      </p:sp>
+      <p:sp>
+        <p:nvSpPr>
+          <p:cNvPr id="3" name="Shape 1"/>
+          <p:cNvSpPr/>
+          <p:nvPr/>
+        </p:nvSpPr>
+        <p:spPr>
+          <a:xfrm>
+            <a:off x="-1463040" y="5120640"/>
+            <a:ext cx="3291840" cy="3291840"/>
+          </a:xfrm>
+          <a:prstGeom prst="ellipse">
+            <a:avLst/>
+          </a:prstGeom>
+          <a:solidFill>
+            <a:srgbClr val="141B45"/>
+          </a:solidFill>
+          <a:ln/>
+        </p:spPr>
+      </p:sp>
+      <p:sp>
+        <p:nvSpPr>
+          <p:cNvPr id="4" name="Shape 2"/>
+          <p:cNvSpPr/>
+          <p:nvPr/>
+        </p:nvSpPr>
+        <p:spPr>
+          <a:xfrm>
+            <a:off x="5404104" y="1828800"/>
+            <a:ext cx="1371600" cy="1371600"/>
+          </a:xfrm>
+          <a:prstGeom prst="ellipse">
+            <a:avLst/>
+          </a:prstGeom>
+          <a:solidFill>
+            <a:srgbClr val="C9A227"/>
+          </a:solidFill>
+          <a:ln/>
+        </p:spPr>
+      </p:sp>
+      <p:pic>
+        <p:nvPicPr>
+          <p:cNvPr id="5" name="Image 0" descr="preencoded.png">    </p:cNvPr>
+          <p:cNvPicPr>
+            <a:picLocks noChangeAspect="1"/>
+          </p:cNvPicPr>
+          <p:nvPr/>
+        </p:nvPicPr>
+        <p:blipFill>
+          <a:blip r:embed="rId1"/>
+          <a:stretch>
+            <a:fillRect/>
+          </a:stretch>
+        </p:blipFill>
+        <p:spPr>
+          <a:xfrm>
+            <a:off x="5568696" y="1993392"/>
+            <a:ext cx="1042416" cy="1042416"/>
+          </a:xfrm>
+          <a:prstGeom prst="rect">
+            <a:avLst/>
+          </a:prstGeom>
+        </p:spPr>
+      </p:pic>
+      <p:sp>
+        <p:nvSpPr>
+          <p:cNvPr id="6" name="Text 3"/>
+          <p:cNvSpPr txBox="1"/>
+          <p:nvPr/>
+        </p:nvSpPr>
+        <p:spPr>
+          <a:xfrm>
+            <a:off x="914400" y="3429000"/>
+            <a:ext cx="10360152" cy="1005840"/>
+          </a:xfrm>
+          <a:prstGeom prst="rect">
+            <a:avLst/>
+          </a:prstGeom>
+          <a:noFill/>
+          <a:ln/>
+        </p:spPr>
+        <p:txBody>
+          <a:bodyPr wrap="square" lIns="0" tIns="0" rIns="0" bIns="0" rtlCol="0" anchor="ctr"/>
+          <a:lstStyle/>
+          <a:p>
+            <a:pPr algn="ctr" indent="0" marL="0">
+              <a:buNone/>
+            </a:pPr>
+            <a:r>
+              <a:rPr lang="en-US" sz="4400" b="1" dirty="0">
+                <a:solidFill>
+                  <a:srgbClr val="FFFFFF"/>
+                </a:solidFill>
+                <a:latin typeface="Cambria" pitchFamily="34" charset="0"/>
+                <a:ea typeface="Cambria" pitchFamily="34" charset="-122"/>
+                <a:cs typeface="Cambria" pitchFamily="34" charset="-120"/>
+              </a:rPr>
+              <a:t>Thank You</a:t>
+            </a:r>
+            <a:endParaRPr lang="en-US" sz="4400" dirty="0"/>
+          </a:p>
+        </p:txBody>
+      </p:sp>
+      <p:sp>
+        <p:nvSpPr>
+          <p:cNvPr id="7" name="Text 4"/>
+          <p:cNvSpPr txBox="1"/>
+          <p:nvPr/>
+        </p:nvSpPr>
+        <p:spPr>
+          <a:xfrm>
+            <a:off x="914400" y="4434840"/>
+            <a:ext cx="10360152" cy="502920"/>
+          </a:xfrm>
+          <a:prstGeom prst="rect">
+            <a:avLst/>
+          </a:prstGeom>
+          <a:noFill/>
+          <a:ln/>
+        </p:spPr>
+        <p:txBody>
+          <a:bodyPr wrap="square" lIns="0" tIns="0" rIns="0" bIns="0" rtlCol="0" anchor="ctr"/>
+          <a:lstStyle/>
+          <a:p>
+            <a:pPr algn="ctr" indent="0" marL="0">
+              <a:buNone/>
+            </a:pPr>
+            <a:r>
+              <a:rPr lang="en-US" sz="1800" i="1" dirty="0">
+                <a:solidFill>
+                  <a:srgbClr val="CADCFC"/>
+                </a:solidFill>
+                <a:latin typeface="Calibri" pitchFamily="34" charset="0"/>
+                <a:ea typeface="Calibri" pitchFamily="34" charset="-122"/>
+                <a:cs typeface="Calibri" pitchFamily="34" charset="-120"/>
+              </a:rPr>
+              <a:t>Questions &amp; Discussion</a:t>
+            </a:r>
+            <a:endParaRPr lang="en-US" sz="1800" dirty="0"/>
+          </a:p>
+        </p:txBody>
+      </p:sp>
+      <p:sp>
+        <p:nvSpPr>
+          <p:cNvPr id="8" name="Shape 5"/>
+          <p:cNvSpPr/>
+          <p:nvPr/>
+        </p:nvSpPr>
+        <p:spPr>
+          <a:xfrm>
+            <a:off x="4718304" y="5257800"/>
+            <a:ext cx="2743200" cy="0"/>
+          </a:xfrm>
+          <a:prstGeom prst="line">
+            <a:avLst/>
+          </a:prstGeom>
+          <a:noFill/>
+          <a:ln w="12700">
+            <a:solidFill>
+              <a:srgbClr val="3A4694"/>
+            </a:solidFill>
+            <a:prstDash val="solid"/>
+          </a:ln>
+        </p:spPr>
+      </p:sp>
+      <p:sp>
+        <p:nvSpPr>
+          <p:cNvPr id="9" name="Text 6"/>
+          <p:cNvSpPr txBox="1"/>
+          <p:nvPr/>
+        </p:nvSpPr>
+        <p:spPr>
+          <a:xfrm>
+            <a:off x="914400" y="5440680"/>
+            <a:ext cx="10360152" cy="365760"/>
+          </a:xfrm>
+          <a:prstGeom prst="rect">
+            <a:avLst/>
+          </a:prstGeom>
+          <a:noFill/>
+          <a:ln/>
+        </p:spPr>
+        <p:txBody>
+          <a:bodyPr wrap="square" lIns="0" tIns="0" rIns="0" bIns="0" rtlCol="0" anchor="ctr"/>
+          <a:lstStyle/>
+          <a:p>
+            <a:pPr algn="ctr" indent="0" marL="0">
+              <a:buNone/>
+            </a:pPr>
+            <a:r>
+              <a:rPr lang="en-US" sz="1400" dirty="0">
+                <a:solidFill>
+                  <a:srgbClr val="CADCFC"/>
+                </a:solidFill>
+                <a:latin typeface="Calibri" pitchFamily="34" charset="0"/>
+                <a:ea typeface="Calibri" pitchFamily="34" charset="-122"/>
+                <a:cs typeface="Calibri" pitchFamily="34" charset="-120"/>
+              </a:rPr>
+              <a:t>Naresh S  |  Roll No: 2436MCA0047</a:t>
+            </a:r>
+            <a:endParaRPr lang="en-US" sz="1400" dirty="0"/>
+          </a:p>
+        </p:txBody>
+      </p:sp>
+      <p:sp>
+        <p:nvSpPr>
+          <p:cNvPr id="10" name="Text 7"/>
+          <p:cNvSpPr txBox="1"/>
+          <p:nvPr/>
+        </p:nvSpPr>
+        <p:spPr>
+          <a:xfrm>
+            <a:off x="457200" y="6510528"/>
+            <a:ext cx="9601200" cy="274320"/>
+          </a:xfrm>
+          <a:prstGeom prst="rect">
+            <a:avLst/>
+          </a:prstGeom>
+          <a:noFill/>
+          <a:ln/>
+        </p:spPr>
+        <p:txBody>
+          <a:bodyPr wrap="square" lIns="0" tIns="0" rIns="0" bIns="0" rtlCol="0" anchor="ctr"/>
+          <a:lstStyle/>
+          <a:p>
+            <a:pPr indent="0" marL="0">
+              <a:buNone/>
+            </a:pPr>
+            <a:r>
+              <a:rPr lang="en-US" sz="900" dirty="0">
+                <a:solidFill>
+                  <a:srgbClr val="8A95C4"/>
+                </a:solidFill>
+                <a:latin typeface="Calibri" pitchFamily="34" charset="0"/>
+                <a:ea typeface="Calibri" pitchFamily="34" charset="-122"/>
+                <a:cs typeface="Calibri" pitchFamily="34" charset="-120"/>
+              </a:rPr>
+              <a:t>Second Review – Automated AI-Driven Loan Underwriting &amp; Document Fraud Detection</a:t>
+            </a:r>
+            <a:endParaRPr lang="en-US" sz="900" dirty="0"/>
+          </a:p>
+        </p:txBody>
+      </p:sp>
+      <p:sp>
+        <p:nvSpPr>
+          <p:cNvPr id="11" name="Text 8"/>
+          <p:cNvSpPr txBox="1"/>
+          <p:nvPr/>
+        </p:nvSpPr>
+        <p:spPr>
+          <a:xfrm>
+            <a:off x="11430000" y="6510528"/>
+            <a:ext cx="365760" cy="274320"/>
+          </a:xfrm>
+          <a:prstGeom prst="rect">
+            <a:avLst/>
+          </a:prstGeom>
+          <a:noFill/>
+          <a:ln/>
+        </p:spPr>
+        <p:txBody>
+          <a:bodyPr wrap="square" lIns="0" tIns="0" rIns="0" bIns="0" rtlCol="0" anchor="ctr"/>
+          <a:lstStyle/>
+          <a:p>
+            <a:pPr algn="r" indent="0" marL="0">
+              <a:buNone/>
+            </a:pPr>
+            <a:r>
+              <a:rPr lang="en-US" sz="900" dirty="0">
+                <a:solidFill>
+                  <a:srgbClr val="8A95C4"/>
+                </a:solidFill>
+                <a:latin typeface="Calibri" pitchFamily="34" charset="0"/>
+                <a:ea typeface="Calibri" pitchFamily="34" charset="-122"/>
+                <a:cs typeface="Calibri" pitchFamily="34" charset="-120"/>
+              </a:rPr>
+              <a:t>26</a:t>
             </a:r>
             <a:endParaRPr lang="en-US" sz="900" dirty="0"/>
           </a:p>
